--- a/artifacts/platinum_hedge_management_deck.pptx
+++ b/artifacts/platinum_hedge_management_deck.pptx
@@ -26,11 +26,18 @@
     <p:sldId id="274" r:id="rId25"/>
     <p:sldId id="275" r:id="rId26"/>
     <p:sldId id="276" r:id="rId27"/>
+    <p:sldId id="286" r:id="rId37"/>
+    <p:sldId id="287" r:id="rId38"/>
+    <p:sldId id="288" r:id="rId39"/>
+    <p:sldId id="289" r:id="rId40"/>
+    <p:sldId id="290" r:id="rId41"/>
+    <p:sldId id="291" r:id="rId42"/>
     <p:sldId id="277" r:id="rId28"/>
     <p:sldId id="278" r:id="rId29"/>
     <p:sldId id="279" r:id="rId30"/>
     <p:sldId id="280" r:id="rId31"/>
     <p:sldId id="281" r:id="rId32"/>
+    <p:sldId id="292" r:id="rId43"/>
     <p:sldId id="282" r:id="rId33"/>
     <p:sldId id="283" r:id="rId34"/>
     <p:sldId id="284" r:id="rId35"/>
@@ -3366,7 +3373,7 @@
                 </a:solidFill>
                 <a:latin typeface="Calibri"/>
               </a:rPr>
-              <a:t>24-month walk-forward backtest, results and validation</a:t>
+              <a:t>4-year (48-trade) walk-forward, corridor-controlled variance, results and validation</a:t>
             </a:r>
           </a:p>
         </p:txBody>
@@ -3457,7 +3464,7 @@
                 </a:solidFill>
                 <a:latin typeface="Calibri"/>
               </a:rPr>
-              <a:t>+$18/oz</a:t>
+              <a:t>+$22/oz</a:t>
             </a:r>
           </a:p>
         </p:txBody>
@@ -3502,7 +3509,7 @@
                 </a:solidFill>
                 <a:latin typeface="Calibri"/>
               </a:rPr>
-              <a:t>mean edge over 24 monthly trades</a:t>
+              <a:t>mean edge, 48 trades (2020–2023)</a:t>
             </a:r>
           </a:p>
         </p:txBody>
@@ -3593,7 +3600,7 @@
                 </a:solidFill>
                 <a:latin typeface="Calibri"/>
               </a:rPr>
-              <a:t>24 / 24</a:t>
+              <a:t>48 / 48</a:t>
             </a:r>
           </a:p>
         </p:txBody>
@@ -3729,7 +3736,7 @@
                 </a:solidFill>
                 <a:latin typeface="Calibri"/>
               </a:rPr>
-              <a:t>±$1/oz</a:t>
+              <a:t>−32%</a:t>
             </a:r>
           </a:p>
         </p:txBody>
@@ -3774,7 +3781,7 @@
                 </a:solidFill>
                 <a:latin typeface="Calibri"/>
               </a:rPr>
-              <a:t>mean reproduced across independent re-runs</a:t>
+              <a:t>less variance from the shipped delta corridor</a:t>
             </a:r>
           </a:p>
         </p:txBody>
@@ -3819,7 +3826,7 @@
                 </a:solidFill>
                 <a:latin typeface="Calibri"/>
               </a:rPr>
-              <a:t>Quant Hedging  ·  2026-07-14  ·  All figures recomputed from committed artifacts</a:t>
+              <a:t>Quant Hedging  ·  2026-07-17  ·  All figures recomputed from committed artifacts</a:t>
             </a:r>
           </a:p>
         </p:txBody>
@@ -8348,7 +8355,7 @@
                 </a:solidFill>
                 <a:latin typeface="Calibri"/>
               </a:rPr>
-              <a:t>Headline results</a:t>
+              <a:t>Headline results — 2-year interim</a:t>
             </a:r>
           </a:p>
         </p:txBody>
@@ -8482,7 +8489,7 @@
                 </a:solidFill>
                 <a:latin typeface="Calibri"/>
               </a:rPr>
-              <a:t>Two independent full re-runs of the 24-month walk-forward (Jan-2021 … Dec-2022, monthly trades).</a:t>
+              <a:t>The 2-year interim result (Jan-2021 – Dec-2022). Two independent re-runs; the four-year update follows in the next section.</a:t>
             </a:r>
           </a:p>
         </p:txBody>
@@ -10586,41 +10593,131 @@
                 </a:solidFill>
                 <a:latin typeface="Calibri"/>
               </a:rPr>
-              <a:t>Can we systematically hedge the book and keep the dealer margin? Yes — and every number below is traceable to an artifact.</a:t>
+              <a:t>Can we systematically hedge the book and keep the dealer margin?  Yes — proven over four years (2020–2023, 48 trades). Every number is traceable to an artifact.</a:t>
+            </a:r>
+          </a:p>
+        </p:txBody>
+      </p:sp>
+      <p:sp>
+        <p:nvSpPr>
+          <p:cNvPr id="8" name="TextBox 7"/>
+          <p:cNvSpPr txBox="1"/>
+          <p:nvPr/>
+        </p:nvSpPr>
+        <p:spPr>
+          <a:xfrm>
+            <a:off x="566928" y="5715000"/>
+            <a:ext cx="11055096" cy="548640"/>
+          </a:xfrm>
+          <a:prstGeom prst="rect">
+            <a:avLst/>
+          </a:prstGeom>
+          <a:noFill/>
+        </p:spPr>
+        <p:txBody>
+          <a:bodyPr wrap="square" anchor="t" lIns="25400" rIns="25400" tIns="12700" bIns="12700">
+            <a:spAutoFit/>
+          </a:bodyPr>
+          <a:lstStyle/>
+          <a:p>
+            <a:pPr algn="l">
+              <a:lnSpc>
+                <a:spcPct val="100000"/>
+              </a:lnSpc>
+              <a:spcBef>
+                <a:spcPts val="0"/>
+              </a:spcBef>
+              <a:spcAft>
+                <a:spcPts val="400"/>
+              </a:spcAft>
+            </a:pPr>
+            <a:r>
+              <a:rPr sz="1500" b="1" i="0">
+                <a:solidFill>
+                  <a:srgbClr val="2B3A42"/>
+                </a:solidFill>
+                <a:latin typeface="Calibri"/>
+              </a:rPr>
+              <a:t>THE RULE:  single months are directional-overlay noise (std ≈ $80/oz). Only the 48-trade MEAN is reproducible — and it equals the locked margin, not a market view.</a:t>
+            </a:r>
+          </a:p>
+        </p:txBody>
+      </p:sp>
+      <p:sp>
+        <p:nvSpPr>
+          <p:cNvPr id="9" name="TextBox 8"/>
+          <p:cNvSpPr txBox="1"/>
+          <p:nvPr/>
+        </p:nvSpPr>
+        <p:spPr>
+          <a:xfrm>
+            <a:off x="566928" y="6473952"/>
+            <a:ext cx="11055096" cy="274320"/>
+          </a:xfrm>
+          <a:prstGeom prst="rect">
+            <a:avLst/>
+          </a:prstGeom>
+          <a:noFill/>
+        </p:spPr>
+        <p:txBody>
+          <a:bodyPr wrap="square" anchor="t" lIns="25400" rIns="25400" tIns="12700" bIns="12700">
+            <a:spAutoFit/>
+          </a:bodyPr>
+          <a:lstStyle/>
+          <a:p>
+            <a:pPr algn="l">
+              <a:lnSpc>
+                <a:spcPct val="100000"/>
+              </a:lnSpc>
+              <a:spcBef>
+                <a:spcPts val="0"/>
+              </a:spcBef>
+              <a:spcAft>
+                <a:spcPts val="400"/>
+              </a:spcAft>
+            </a:pPr>
+            <a:r>
+              <a:rPr sz="950" b="0" i="1">
+                <a:solidFill>
+                  <a:srgbClr val="6B7278"/>
+                </a:solidFill>
+                <a:latin typeface="Calibri"/>
+              </a:rPr>
+              <a:t>artifacts/walk_forward/full48_baseline.csv · full48_corridor_rolls.csv · paired stats + 20k bootstrap recomputed here.</a:t>
             </a:r>
           </a:p>
         </p:txBody>
       </p:sp>
       <p:graphicFrame>
         <p:nvGraphicFramePr>
-          <p:cNvPr id="7" name="Table 6"/>
+          <p:cNvPr id="10" name="Table 9"/>
           <p:cNvGraphicFramePr>
             <a:graphicFrameLocks noGrp="1"/>
           </p:cNvGraphicFramePr>
           <p:nvPr/>
         </p:nvGraphicFramePr>
         <p:xfrm>
-          <a:off x="566928" y="2057400"/>
-          <a:ext cx="11055095" cy="3328416"/>
+          <a:off x="566928" y="2011680"/>
+          <a:ext cx="11055096" cy="3383280"/>
         </p:xfrm>
         <a:graphic>
           <a:graphicData uri="http://schemas.openxmlformats.org/drawingml/2006/table">
             <a:tbl>
               <a:tblPr/>
               <a:tblGrid>
-                <a:gridCol w="4643140"/>
-                <a:gridCol w="4643140"/>
-                <a:gridCol w="1768815"/>
+                <a:gridCol w="4645152"/>
+                <a:gridCol w="4645152"/>
+                <a:gridCol w="1764792"/>
               </a:tblGrid>
-              <a:tr h="475488">
-                <a:tc>
-                  <a:txBody>
-                    <a:bodyPr wrap="square"/>
+              <a:tr h="422910">
+                <a:tc>
+                  <a:txBody>
+                    <a:bodyPr/>
                     <a:lstStyle/>
                     <a:p>
                       <a:pPr algn="l"/>
                       <a:r>
-                        <a:rPr sz="1500" b="1">
+                        <a:rPr sz="1400" b="1">
                           <a:solidFill>
                             <a:srgbClr val="FFFFFF"/>
                           </a:solidFill>
@@ -10638,12 +10735,12 @@
                 </a:tc>
                 <a:tc>
                   <a:txBody>
-                    <a:bodyPr wrap="square"/>
+                    <a:bodyPr/>
                     <a:lstStyle/>
                     <a:p>
                       <a:pPr algn="l"/>
                       <a:r>
-                        <a:rPr sz="1500" b="1">
+                        <a:rPr sz="1400" b="1">
                           <a:solidFill>
                             <a:srgbClr val="FFFFFF"/>
                           </a:solidFill>
@@ -10661,12 +10758,12 @@
                 </a:tc>
                 <a:tc>
                   <a:txBody>
-                    <a:bodyPr wrap="square"/>
+                    <a:bodyPr/>
                     <a:lstStyle/>
                     <a:p>
                       <a:pPr algn="ctr"/>
                       <a:r>
-                        <a:rPr sz="1500" b="1">
+                        <a:rPr sz="1400" b="1">
                           <a:solidFill>
                             <a:srgbClr val="FFFFFF"/>
                           </a:solidFill>
@@ -10683,21 +10780,21 @@
                   </a:tcPr>
                 </a:tc>
               </a:tr>
-              <a:tr h="475488">
-                <a:tc>
-                  <a:txBody>
-                    <a:bodyPr wrap="square"/>
+              <a:tr h="422910">
+                <a:tc>
+                  <a:txBody>
+                    <a:bodyPr/>
                     <a:lstStyle/>
                     <a:p>
                       <a:pPr algn="l"/>
                       <a:r>
-                        <a:rPr sz="1500" b="0">
+                        <a:rPr sz="1400" b="0">
                           <a:solidFill>
                             <a:srgbClr val="22262A"/>
                           </a:solidFill>
                           <a:latin typeface="Calibri"/>
                         </a:rPr>
-                        <a:t>Mean edge, 24 monthly trades</a:t>
+                        <a:t>Walk-forward span</a:t>
                       </a:r>
                     </a:p>
                   </a:txBody>
@@ -10709,18 +10806,18 @@
                 </a:tc>
                 <a:tc>
                   <a:txBody>
-                    <a:bodyPr wrap="square"/>
+                    <a:bodyPr/>
                     <a:lstStyle/>
                     <a:p>
                       <a:pPr algn="l"/>
                       <a:r>
-                        <a:rPr sz="1500" b="0">
+                        <a:rPr sz="1400" b="0">
                           <a:solidFill>
                             <a:srgbClr val="22262A"/>
                           </a:solidFill>
                           <a:latin typeface="Calibri"/>
                         </a:rPr>
-                        <a:t>+18.19 $/oz   (≈ $45k / trade on 2,500 oz)</a:t>
+                        <a:t>48 monthly trades · Jan-2020 – Dec-2023 (incl. COVID)</a:t>
                       </a:r>
                     </a:p>
                   </a:txBody>
@@ -10732,18 +10829,18 @@
                 </a:tc>
                 <a:tc>
                   <a:txBody>
-                    <a:bodyPr wrap="square"/>
+                    <a:bodyPr/>
                     <a:lstStyle/>
                     <a:p>
                       <a:pPr algn="ctr"/>
                       <a:r>
-                        <a:rPr sz="1500" b="0">
+                        <a:rPr sz="1400" b="0">
                           <a:solidFill>
                             <a:srgbClr val="22262A"/>
                           </a:solidFill>
                           <a:latin typeface="Calibri"/>
                         </a:rPr>
-                        <a:t>Run A</a:t>
+                        <a:t>full48_baseline</a:t>
                       </a:r>
                     </a:p>
                   </a:txBody>
@@ -10754,92 +10851,92 @@
                   </a:tcPr>
                 </a:tc>
               </a:tr>
-              <a:tr h="475488">
-                <a:tc>
-                  <a:txBody>
-                    <a:bodyPr wrap="square"/>
+              <a:tr h="422910">
+                <a:tc>
+                  <a:txBody>
+                    <a:bodyPr/>
                     <a:lstStyle/>
                     <a:p>
                       <a:pPr algn="l"/>
                       <a:r>
-                        <a:rPr sz="1500" b="0">
+                        <a:rPr sz="1400" b="0">
                           <a:solidFill>
                             <a:srgbClr val="22262A"/>
                           </a:solidFill>
                           <a:latin typeface="Calibri"/>
                         </a:rPr>
-                        <a:t>Independent re-run (fresh calib + RNG)</a:t>
-                      </a:r>
-                    </a:p>
-                  </a:txBody>
-                  <a:tcPr marL="88900" marR="88900" marT="38100" marB="38100" anchor="ctr">
-                    <a:solidFill>
-                      <a:srgbClr val="F2F4F6"/>
-                    </a:solidFill>
-                  </a:tcPr>
-                </a:tc>
-                <a:tc>
-                  <a:txBody>
-                    <a:bodyPr wrap="square"/>
+                        <a:t>Mean edge — ensemble baseline</a:t>
+                      </a:r>
+                    </a:p>
+                  </a:txBody>
+                  <a:tcPr marL="88900" marR="88900" marT="38100" marB="38100" anchor="ctr">
+                    <a:solidFill>
+                      <a:srgbClr val="FFFFFF"/>
+                    </a:solidFill>
+                  </a:tcPr>
+                </a:tc>
+                <a:tc>
+                  <a:txBody>
+                    <a:bodyPr/>
                     <a:lstStyle/>
                     <a:p>
                       <a:pPr algn="l"/>
                       <a:r>
-                        <a:rPr sz="1500" b="0">
+                        <a:rPr sz="1400" b="0">
                           <a:solidFill>
                             <a:srgbClr val="22262A"/>
                           </a:solidFill>
                           <a:latin typeface="Calibri"/>
                         </a:rPr>
-                        <a:t>+17.58 $/oz   (≈ $44k / trade)</a:t>
-                      </a:r>
-                    </a:p>
-                  </a:txBody>
-                  <a:tcPr marL="88900" marR="88900" marT="38100" marB="38100" anchor="ctr">
-                    <a:solidFill>
-                      <a:srgbClr val="F2F4F6"/>
-                    </a:solidFill>
-                  </a:tcPr>
-                </a:tc>
-                <a:tc>
-                  <a:txBody>
-                    <a:bodyPr wrap="square"/>
+                        <a:t>+22.09 $/oz   (std 88.2 ; SE ±12.7)</a:t>
+                      </a:r>
+                    </a:p>
+                  </a:txBody>
+                  <a:tcPr marL="88900" marR="88900" marT="38100" marB="38100" anchor="ctr">
+                    <a:solidFill>
+                      <a:srgbClr val="FFFFFF"/>
+                    </a:solidFill>
+                  </a:tcPr>
+                </a:tc>
+                <a:tc>
+                  <a:txBody>
+                    <a:bodyPr/>
                     <a:lstStyle/>
                     <a:p>
                       <a:pPr algn="ctr"/>
                       <a:r>
-                        <a:rPr sz="1500" b="0">
+                        <a:rPr sz="1400" b="0">
                           <a:solidFill>
                             <a:srgbClr val="22262A"/>
                           </a:solidFill>
                           <a:latin typeface="Calibri"/>
                         </a:rPr>
-                        <a:t>Run B</a:t>
-                      </a:r>
-                    </a:p>
-                  </a:txBody>
-                  <a:tcPr marL="88900" marR="88900" marT="38100" marB="38100" anchor="ctr">
-                    <a:solidFill>
-                      <a:srgbClr val="F2F4F6"/>
+                        <a:t>full48_baseline</a:t>
+                      </a:r>
+                    </a:p>
+                  </a:txBody>
+                  <a:tcPr marL="88900" marR="88900" marT="38100" marB="38100" anchor="ctr">
+                    <a:solidFill>
+                      <a:srgbClr val="FFFFFF"/>
                     </a:solidFill>
                   </a:tcPr>
                 </a:tc>
               </a:tr>
-              <a:tr h="475488">
-                <a:tc>
-                  <a:txBody>
-                    <a:bodyPr wrap="square"/>
+              <a:tr h="422910">
+                <a:tc>
+                  <a:txBody>
+                    <a:bodyPr/>
                     <a:lstStyle/>
                     <a:p>
                       <a:pPr algn="l"/>
                       <a:r>
-                        <a:rPr sz="1500" b="0">
+                        <a:rPr sz="1400" b="0">
                           <a:solidFill>
                             <a:srgbClr val="22262A"/>
                           </a:solidFill>
                           <a:latin typeface="Calibri"/>
                         </a:rPr>
-                        <a:t>Reproducibility of the mean</a:t>
+                        <a:t>Shipping config — delta corridor (band 0.60)</a:t>
                       </a:r>
                     </a:p>
                   </a:txBody>
@@ -10851,18 +10948,18 @@
                 </a:tc>
                 <a:tc>
                   <a:txBody>
-                    <a:bodyPr wrap="square"/>
+                    <a:bodyPr/>
                     <a:lstStyle/>
                     <a:p>
                       <a:pPr algn="l"/>
                       <a:r>
-                        <a:rPr sz="1500" b="0">
+                        <a:rPr sz="1400" b="0">
                           <a:solidFill>
                             <a:srgbClr val="22262A"/>
                           </a:solidFill>
                           <a:latin typeface="Calibri"/>
                         </a:rPr>
-                        <a:t>Δ -0.61 $/oz between the two runs</a:t>
+                        <a:t>+23.10 $/oz   (std 60.4)</a:t>
                       </a:r>
                     </a:p>
                   </a:txBody>
@@ -10874,18 +10971,18 @@
                 </a:tc>
                 <a:tc>
                   <a:txBody>
-                    <a:bodyPr wrap="square"/>
+                    <a:bodyPr/>
                     <a:lstStyle/>
                     <a:p>
                       <a:pPr algn="ctr"/>
                       <a:r>
-                        <a:rPr sz="1500" b="0">
+                        <a:rPr sz="1400" b="0">
                           <a:solidFill>
                             <a:srgbClr val="22262A"/>
                           </a:solidFill>
                           <a:latin typeface="Calibri"/>
                         </a:rPr>
-                        <a:t>paired</a:t>
+                        <a:t>corridor_rolls</a:t>
                       </a:r>
                     </a:p>
                   </a:txBody>
@@ -10896,92 +10993,92 @@
                   </a:tcPr>
                 </a:tc>
               </a:tr>
-              <a:tr h="475488">
-                <a:tc>
-                  <a:txBody>
-                    <a:bodyPr wrap="square"/>
+              <a:tr h="422910">
+                <a:tc>
+                  <a:txBody>
+                    <a:bodyPr/>
                     <a:lstStyle/>
                     <a:p>
                       <a:pPr algn="l"/>
                       <a:r>
-                        <a:rPr sz="1500" b="0">
+                        <a:rPr sz="1400" b="0">
                           <a:solidFill>
                             <a:srgbClr val="22262A"/>
                           </a:solidFill>
                           <a:latin typeface="Calibri"/>
                         </a:rPr>
-                        <a:t>Causality check (per-trade bound)</a:t>
-                      </a:r>
-                    </a:p>
-                  </a:txBody>
-                  <a:tcPr marL="88900" marR="88900" marT="38100" marB="38100" anchor="ctr">
-                    <a:solidFill>
-                      <a:srgbClr val="F2F4F6"/>
-                    </a:solidFill>
-                  </a:tcPr>
-                </a:tc>
-                <a:tc>
-                  <a:txBody>
-                    <a:bodyPr wrap="square"/>
+                        <a:t>Mean difference, shipping vs baseline</a:t>
+                      </a:r>
+                    </a:p>
+                  </a:txBody>
+                  <a:tcPr marL="88900" marR="88900" marT="38100" marB="38100" anchor="ctr">
+                    <a:solidFill>
+                      <a:srgbClr val="FFFFFF"/>
+                    </a:solidFill>
+                  </a:tcPr>
+                </a:tc>
+                <a:tc>
+                  <a:txBody>
+                    <a:bodyPr/>
                     <a:lstStyle/>
                     <a:p>
                       <a:pPr algn="l"/>
                       <a:r>
-                        <a:rPr sz="1500" b="0">
+                        <a:rPr sz="1400" b="0">
                           <a:solidFill>
                             <a:srgbClr val="22262A"/>
                           </a:solidFill>
                           <a:latin typeface="Calibri"/>
                         </a:rPr>
-                        <a:t>24 / 24 PASS in both runs</a:t>
-                      </a:r>
-                    </a:p>
-                  </a:txBody>
-                  <a:tcPr marL="88900" marR="88900" marT="38100" marB="38100" anchor="ctr">
-                    <a:solidFill>
-                      <a:srgbClr val="F2F4F6"/>
-                    </a:solidFill>
-                  </a:tcPr>
-                </a:tc>
-                <a:tc>
-                  <a:txBody>
-                    <a:bodyPr wrap="square"/>
+                        <a:t>+1.0 $/oz · t = 0.16  (statistically zero)</a:t>
+                      </a:r>
+                    </a:p>
+                  </a:txBody>
+                  <a:tcPr marL="88900" marR="88900" marT="38100" marB="38100" anchor="ctr">
+                    <a:solidFill>
+                      <a:srgbClr val="FFFFFF"/>
+                    </a:solidFill>
+                  </a:tcPr>
+                </a:tc>
+                <a:tc>
+                  <a:txBody>
+                    <a:bodyPr/>
                     <a:lstStyle/>
                     <a:p>
                       <a:pPr algn="ctr"/>
                       <a:r>
-                        <a:rPr sz="1500" b="0">
+                        <a:rPr sz="1400" b="0">
                           <a:solidFill>
                             <a:srgbClr val="22262A"/>
                           </a:solidFill>
                           <a:latin typeface="Calibri"/>
                         </a:rPr>
-                        <a:t>both</a:t>
-                      </a:r>
-                    </a:p>
-                  </a:txBody>
-                  <a:tcPr marL="88900" marR="88900" marT="38100" marB="38100" anchor="ctr">
-                    <a:solidFill>
-                      <a:srgbClr val="F2F4F6"/>
+                        <a:t>paired · 48 mo</a:t>
+                      </a:r>
+                    </a:p>
+                  </a:txBody>
+                  <a:tcPr marL="88900" marR="88900" marT="38100" marB="38100" anchor="ctr">
+                    <a:solidFill>
+                      <a:srgbClr val="FFFFFF"/>
                     </a:solidFill>
                   </a:tcPr>
                 </a:tc>
               </a:tr>
-              <a:tr h="475488">
-                <a:tc>
-                  <a:txBody>
-                    <a:bodyPr wrap="square"/>
+              <a:tr h="422910">
+                <a:tc>
+                  <a:txBody>
+                    <a:bodyPr/>
                     <a:lstStyle/>
                     <a:p>
                       <a:pPr algn="l"/>
                       <a:r>
-                        <a:rPr sz="1500" b="0">
+                        <a:rPr sz="1400" b="0">
                           <a:solidFill>
                             <a:srgbClr val="22262A"/>
                           </a:solidFill>
                           <a:latin typeface="Calibri"/>
                         </a:rPr>
-                        <a:t>vs unhedged book</a:t>
+                        <a:t>Proven corridor contribution</a:t>
                       </a:r>
                     </a:p>
                   </a:txBody>
@@ -10993,18 +11090,18 @@
                 </a:tc>
                 <a:tc>
                   <a:txBody>
-                    <a:bodyPr wrap="square"/>
+                    <a:bodyPr/>
                     <a:lstStyle/>
                     <a:p>
                       <a:pPr algn="l"/>
                       <a:r>
-                        <a:rPr sz="1500" b="0">
+                        <a:rPr sz="1400" b="0">
                           <a:solidFill>
                             <a:srgbClr val="22262A"/>
                           </a:solidFill>
                           <a:latin typeface="Calibri"/>
                         </a:rPr>
-                        <a:t>+18.19  vs  -2.54 $/oz</a:t>
+                        <a:t>variance −32%  (100% of 20k paired bootstraps)</a:t>
                       </a:r>
                     </a:p>
                   </a:txBody>
@@ -11016,18 +11113,18 @@
                 </a:tc>
                 <a:tc>
                   <a:txBody>
-                    <a:bodyPr wrap="square"/>
+                    <a:bodyPr/>
                     <a:lstStyle/>
                     <a:p>
                       <a:pPr algn="ctr"/>
                       <a:r>
-                        <a:rPr sz="1500" b="0">
+                        <a:rPr sz="1400" b="0">
                           <a:solidFill>
                             <a:srgbClr val="22262A"/>
                           </a:solidFill>
                           <a:latin typeface="Calibri"/>
                         </a:rPr>
-                        <a:t>both</a:t>
+                        <a:t>bootstrap</a:t>
                       </a:r>
                     </a:p>
                   </a:txBody>
@@ -11038,73 +11135,144 @@
                   </a:tcPr>
                 </a:tc>
               </a:tr>
-              <a:tr h="475488">
-                <a:tc>
-                  <a:txBody>
-                    <a:bodyPr wrap="square"/>
+              <a:tr h="422910">
+                <a:tc>
+                  <a:txBody>
+                    <a:bodyPr/>
                     <a:lstStyle/>
                     <a:p>
                       <a:pPr algn="l"/>
                       <a:r>
-                        <a:rPr sz="1500" b="0">
+                        <a:rPr sz="1400" b="0">
                           <a:solidFill>
                             <a:srgbClr val="22262A"/>
                           </a:solidFill>
                           <a:latin typeface="Calibri"/>
                         </a:rPr>
-                        <a:t>vs static full-lock benchmark</a:t>
-                      </a:r>
-                    </a:p>
-                  </a:txBody>
-                  <a:tcPr marL="88900" marR="88900" marT="38100" marB="38100" anchor="ctr">
-                    <a:solidFill>
-                      <a:srgbClr val="F2F4F6"/>
-                    </a:solidFill>
-                  </a:tcPr>
-                </a:tc>
-                <a:tc>
-                  <a:txBody>
-                    <a:bodyPr wrap="square"/>
+                        <a:t>Causal-bound discipline</a:t>
+                      </a:r>
+                    </a:p>
+                  </a:txBody>
+                  <a:tcPr marL="88900" marR="88900" marT="38100" marB="38100" anchor="ctr">
+                    <a:solidFill>
+                      <a:srgbClr val="FFFFFF"/>
+                    </a:solidFill>
+                  </a:tcPr>
+                </a:tc>
+                <a:tc>
+                  <a:txBody>
+                    <a:bodyPr/>
                     <a:lstStyle/>
                     <a:p>
                       <a:pPr algn="l"/>
                       <a:r>
-                        <a:rPr sz="1500" b="0">
+                        <a:rPr sz="1400" b="0">
                           <a:solidFill>
                             <a:srgbClr val="22262A"/>
                           </a:solidFill>
                           <a:latin typeface="Calibri"/>
                         </a:rPr>
-                        <a:t>+18.19  vs  +15.25 $/oz</a:t>
-                      </a:r>
-                    </a:p>
-                  </a:txBody>
-                  <a:tcPr marL="88900" marR="88900" marT="38100" marB="38100" anchor="ctr">
-                    <a:solidFill>
-                      <a:srgbClr val="F2F4F6"/>
-                    </a:solidFill>
-                  </a:tcPr>
-                </a:tc>
-                <a:tc>
-                  <a:txBody>
-                    <a:bodyPr wrap="square"/>
+                        <a:t>48 / 48 PASS · 0 corridor breaches in 144 rolls</a:t>
+                      </a:r>
+                    </a:p>
+                  </a:txBody>
+                  <a:tcPr marL="88900" marR="88900" marT="38100" marB="38100" anchor="ctr">
+                    <a:solidFill>
+                      <a:srgbClr val="FFFFFF"/>
+                    </a:solidFill>
+                  </a:tcPr>
+                </a:tc>
+                <a:tc>
+                  <a:txBody>
+                    <a:bodyPr/>
                     <a:lstStyle/>
                     <a:p>
                       <a:pPr algn="ctr"/>
                       <a:r>
-                        <a:rPr sz="1500" b="0">
+                        <a:rPr sz="1400" b="0">
                           <a:solidFill>
                             <a:srgbClr val="22262A"/>
                           </a:solidFill>
                           <a:latin typeface="Calibri"/>
                         </a:rPr>
-                        <a:t>attribution</a:t>
-                      </a:r>
-                    </a:p>
-                  </a:txBody>
-                  <a:tcPr marL="88900" marR="88900" marT="38100" marB="38100" anchor="ctr">
-                    <a:solidFill>
-                      <a:srgbClr val="F2F4F6"/>
+                        <a:t>both CSVs</a:t>
+                      </a:r>
+                    </a:p>
+                  </a:txBody>
+                  <a:tcPr marL="88900" marR="88900" marT="38100" marB="38100" anchor="ctr">
+                    <a:solidFill>
+                      <a:srgbClr val="FFFFFF"/>
+                    </a:solidFill>
+                  </a:tcPr>
+                </a:tc>
+              </a:tr>
+              <a:tr h="422910">
+                <a:tc>
+                  <a:txBody>
+                    <a:bodyPr/>
+                    <a:lstStyle/>
+                    <a:p>
+                      <a:pPr algn="l"/>
+                      <a:r>
+                        <a:rPr sz="1400" b="0">
+                          <a:solidFill>
+                            <a:srgbClr val="22262A"/>
+                          </a:solidFill>
+                          <a:latin typeface="Calibri"/>
+                        </a:rPr>
+                        <a:t>What the mean IS</a:t>
+                      </a:r>
+                    </a:p>
+                  </a:txBody>
+                  <a:tcPr marL="88900" marR="88900" marT="38100" marB="38100" anchor="ctr">
+                    <a:solidFill>
+                      <a:srgbClr val="FFFFFF"/>
+                    </a:solidFill>
+                  </a:tcPr>
+                </a:tc>
+                <a:tc>
+                  <a:txBody>
+                    <a:bodyPr/>
+                    <a:lstStyle/>
+                    <a:p>
+                      <a:pPr algn="l"/>
+                      <a:r>
+                        <a:rPr sz="1400" b="0">
+                          <a:solidFill>
+                            <a:srgbClr val="22262A"/>
+                          </a:solidFill>
+                          <a:latin typeface="Calibri"/>
+                        </a:rPr>
+                        <a:t>the locked dealer margin + basis carry — not a market call</a:t>
+                      </a:r>
+                    </a:p>
+                  </a:txBody>
+                  <a:tcPr marL="88900" marR="88900" marT="38100" marB="38100" anchor="ctr">
+                    <a:solidFill>
+                      <a:srgbClr val="FFFFFF"/>
+                    </a:solidFill>
+                  </a:tcPr>
+                </a:tc>
+                <a:tc>
+                  <a:txBody>
+                    <a:bodyPr/>
+                    <a:lstStyle/>
+                    <a:p>
+                      <a:pPr algn="ctr"/>
+                      <a:r>
+                        <a:rPr sz="1400" b="0">
+                          <a:solidFill>
+                            <a:srgbClr val="22262A"/>
+                          </a:solidFill>
+                          <a:latin typeface="Calibri"/>
+                        </a:rPr>
+                        <a:t>lf2 panel</a:t>
+                      </a:r>
+                    </a:p>
+                  </a:txBody>
+                  <a:tcPr marL="88900" marR="88900" marT="38100" marB="38100" anchor="ctr">
+                    <a:solidFill>
+                      <a:srgbClr val="FFFFFF"/>
                     </a:solidFill>
                   </a:tcPr>
                 </a:tc>
@@ -11113,96 +11281,6 @@
           </a:graphicData>
         </a:graphic>
       </p:graphicFrame>
-      <p:sp>
-        <p:nvSpPr>
-          <p:cNvPr id="8" name="TextBox 7"/>
-          <p:cNvSpPr txBox="1"/>
-          <p:nvPr/>
-        </p:nvSpPr>
-        <p:spPr>
-          <a:xfrm>
-            <a:off x="566928" y="5715000"/>
-            <a:ext cx="11055096" cy="548640"/>
-          </a:xfrm>
-          <a:prstGeom prst="rect">
-            <a:avLst/>
-          </a:prstGeom>
-          <a:noFill/>
-        </p:spPr>
-        <p:txBody>
-          <a:bodyPr wrap="square" anchor="t" lIns="25400" rIns="25400" tIns="12700" bIns="12700">
-            <a:spAutoFit/>
-          </a:bodyPr>
-          <a:lstStyle/>
-          <a:p>
-            <a:pPr algn="l">
-              <a:lnSpc>
-                <a:spcPct val="100000"/>
-              </a:lnSpc>
-              <a:spcBef>
-                <a:spcPts val="0"/>
-              </a:spcBef>
-              <a:spcAft>
-                <a:spcPts val="400"/>
-              </a:spcAft>
-            </a:pPr>
-            <a:r>
-              <a:rPr sz="1500" b="1" i="0">
-                <a:solidFill>
-                  <a:srgbClr val="2B3A42"/>
-                </a:solidFill>
-                <a:latin typeface="Calibri"/>
-              </a:rPr>
-              <a:t>THE RULE:  single months are seed-noise (±$100/oz). The 24-trade MEAN is the reproducible statistic — that is what we quote.</a:t>
-            </a:r>
-          </a:p>
-        </p:txBody>
-      </p:sp>
-      <p:sp>
-        <p:nvSpPr>
-          <p:cNvPr id="9" name="TextBox 8"/>
-          <p:cNvSpPr txBox="1"/>
-          <p:nvPr/>
-        </p:nvSpPr>
-        <p:spPr>
-          <a:xfrm>
-            <a:off x="566928" y="6473952"/>
-            <a:ext cx="11055096" cy="274320"/>
-          </a:xfrm>
-          <a:prstGeom prst="rect">
-            <a:avLst/>
-          </a:prstGeom>
-          <a:noFill/>
-        </p:spPr>
-        <p:txBody>
-          <a:bodyPr wrap="square" anchor="t" lIns="25400" rIns="25400" tIns="12700" bIns="12700">
-            <a:spAutoFit/>
-          </a:bodyPr>
-          <a:lstStyle/>
-          <a:p>
-            <a:pPr algn="l">
-              <a:lnSpc>
-                <a:spcPct val="100000"/>
-              </a:lnSpc>
-              <a:spcBef>
-                <a:spcPts val="0"/>
-              </a:spcBef>
-              <a:spcAft>
-                <a:spcPts val="400"/>
-              </a:spcAft>
-            </a:pPr>
-            <a:r>
-              <a:rPr sz="950" b="0" i="1">
-                <a:solidFill>
-                  <a:srgbClr val="6B7278"/>
-                </a:solidFill>
-                <a:latin typeface="Calibri"/>
-              </a:rPr>
-              <a:t>artifacts/walk_forward/aversion6_24trade_final.csv (Run A) · aversion6_reverify_committed_pipeline.csv (Run B)</a:t>
-            </a:r>
-          </a:p>
-        </p:txBody>
-      </p:sp>
     </p:spTree>
   </p:cSld>
   <p:clrMapOvr>
@@ -12461,7 +12539,7 @@
                 </a:solidFill>
                 <a:latin typeface="Calibri"/>
               </a:rPr>
-              <a:t>22</a:t>
+              <a:t>28</a:t>
             </a:r>
           </a:p>
         </p:txBody>
@@ -12825,7 +12903,7 @@
                 </a:solidFill>
                 <a:latin typeface="Calibri"/>
               </a:rPr>
-              <a:t>23</a:t>
+              <a:t>29</a:t>
             </a:r>
           </a:p>
         </p:txBody>
@@ -13474,7 +13552,7 @@
                 </a:solidFill>
                 <a:latin typeface="Calibri"/>
               </a:rPr>
-              <a:t>24</a:t>
+              <a:t>30</a:t>
             </a:r>
           </a:p>
         </p:txBody>
@@ -13997,7 +14075,7 @@
                 </a:solidFill>
                 <a:latin typeface="Calibri"/>
               </a:rPr>
-              <a:t>25</a:t>
+              <a:t>31</a:t>
             </a:r>
           </a:p>
         </p:txBody>
@@ -14129,7 +14207,7 @@
                           </a:solidFill>
                           <a:latin typeface="Calibri"/>
                         </a:rPr>
-                        <a:t>Single seed per trade</a:t>
+                        <a:t>Seed / Monte-Carlo dispersion</a:t>
                       </a:r>
                     </a:p>
                   </a:txBody>
@@ -14152,7 +14230,7 @@
                           </a:solidFill>
                           <a:latin typeface="Calibri"/>
                         </a:rPr>
-                        <a:t>Means are stable across full re-runs; month-level dispersion is ±$100/oz.</a:t>
+                        <a:t>Ensemble (3 seeds) + roll-inner 512 collapse month dispersion; only the 48-trade mean is quoted.</a:t>
                       </a:r>
                     </a:p>
                   </a:txBody>
@@ -14177,7 +14255,7 @@
                           </a:solidFill>
                           <a:latin typeface="Calibri"/>
                         </a:rPr>
-                        <a:t>2-year OOS window</a:t>
+                        <a:t>Out-of-sample window</a:t>
                       </a:r>
                     </a:p>
                   </a:txBody>
@@ -14200,7 +14278,7 @@
                           </a:solidFill>
                           <a:latin typeface="Calibri"/>
                         </a:rPr>
-                        <a:t>2021 rally + 2022 chop — not yet a full cycle.</a:t>
+                        <a:t>Now four years (2020–2023) incl. COVID — still not multiple full cycles.</a:t>
                       </a:r>
                     </a:p>
                   </a:txBody>
@@ -14248,7 +14326,7 @@
                           </a:solidFill>
                           <a:latin typeface="Calibri"/>
                         </a:rPr>
-                        <a:t>Real CME microstructure friction is not calibrated.</a:t>
+                        <a:t>Real CME microstructure friction is not calibrated (flat 10 bps half-spread).</a:t>
                       </a:r>
                     </a:p>
                   </a:txBody>
@@ -14604,7 +14682,7 @@
                 </a:solidFill>
                 <a:latin typeface="Calibri"/>
               </a:rPr>
-              <a:t>26</a:t>
+              <a:t>32</a:t>
             </a:r>
           </a:p>
         </p:txBody>
@@ -14649,7 +14727,7 @@
                 </a:solidFill>
                 <a:latin typeface="Calibri"/>
               </a:rPr>
-              <a:t>Four steps to move from validated prototype to production sign-off.</a:t>
+              <a:t>The near-term path to production sign-off; the broader roadmap follows in Future Work.</a:t>
             </a:r>
           </a:p>
         </p:txBody>
@@ -14736,7 +14814,7 @@
                           </a:solidFill>
                           <a:latin typeface="Calibri"/>
                         </a:rPr>
-                        <a:t>Multi-seed ensembling per trade</a:t>
+                        <a:t>Ship band 0.60 (0.40 available)</a:t>
                       </a:r>
                     </a:p>
                   </a:txBody>
@@ -14759,7 +14837,7 @@
                           </a:solidFill>
                           <a:latin typeface="Calibri"/>
                         </a:rPr>
-                        <a:t>Collapse the ±$100/oz month dispersion; ship a mean, not a single draw.</a:t>
+                        <a:t>One checkpoint set serves any mandate band — no per-client retraining.</a:t>
                       </a:r>
                     </a:p>
                   </a:txBody>
@@ -14807,7 +14885,7 @@
                           </a:solidFill>
                           <a:latin typeface="Calibri"/>
                         </a:rPr>
-                        <a:t>Replace the flat half-spread with measured CME microstructure friction.</a:t>
+                        <a:t>Replace the flat 10 bps half-spread with measured CME microstructure friction.</a:t>
                       </a:r>
                     </a:p>
                   </a:txBody>
@@ -14855,7 +14933,7 @@
                           </a:solidFill>
                           <a:latin typeface="Calibri"/>
                         </a:rPr>
-                        <a:t>Make E[dF|b] ≈ 0 block a calibration, not merely warn.</a:t>
+                        <a:t>Make E[dF | b] ≈ 0 block a calibration, not merely warn.</a:t>
                       </a:r>
                     </a:p>
                   </a:txBody>
@@ -14880,7 +14958,7 @@
                           </a:solidFill>
                           <a:latin typeface="Calibri"/>
                         </a:rPr>
-                        <a:t>Longer OOS window</a:t>
+                        <a:t>Book of APS + band adaptivity</a:t>
                       </a:r>
                     </a:p>
                   </a:txBody>
@@ -14903,7 +14981,7 @@
                           </a:solidFill>
                           <a:latin typeface="Calibri"/>
                         </a:rPr>
-                        <a:t>Extend beyond 2021–22 as data accrues; target a full cycle.</a:t>
+                        <a:t>The two capability steps that follow — detailed in Future Work.</a:t>
                       </a:r>
                     </a:p>
                   </a:txBody>
@@ -14958,7 +15036,7 @@
                 </a:solidFill>
                 <a:latin typeface="Calibri"/>
               </a:rPr>
-              <a:t>The multi-seed step is the single highest-value item: it converts the reproducible mean into a per-trade deliverable.</a:t>
+              <a:t>The corridor ships as a risk control today; friction calibration and the hard guard are the remaining sign-off items.</a:t>
             </a:r>
           </a:p>
         </p:txBody>
@@ -15163,7 +15241,7 @@
                 </a:solidFill>
                 <a:latin typeface="Calibri"/>
               </a:rPr>
-              <a:t>27</a:t>
+              <a:t>34</a:t>
             </a:r>
           </a:p>
         </p:txBody>
@@ -15700,7 +15778,7 @@
                 </a:solidFill>
                 <a:latin typeface="Calibri"/>
               </a:rPr>
-              <a:t>28</a:t>
+              <a:t>35</a:t>
             </a:r>
           </a:p>
         </p:txBody>
@@ -16477,7 +16555,7 @@
                 </a:solidFill>
                 <a:latin typeface="Calibri"/>
               </a:rPr>
-              <a:t>29</a:t>
+              <a:t>36</a:t>
             </a:r>
           </a:p>
         </p:txBody>
@@ -17128,9 +17206,54 @@
           </a:p>
         </p:txBody>
       </p:sp>
+      <p:sp>
+        <p:nvSpPr>
+          <p:cNvPr id="8" name="TextBox 7"/>
+          <p:cNvSpPr txBox="1"/>
+          <p:nvPr/>
+        </p:nvSpPr>
+        <p:spPr>
+          <a:xfrm>
+            <a:off x="566928" y="6473952"/>
+            <a:ext cx="11055096" cy="274320"/>
+          </a:xfrm>
+          <a:prstGeom prst="rect">
+            <a:avLst/>
+          </a:prstGeom>
+          <a:noFill/>
+        </p:spPr>
+        <p:txBody>
+          <a:bodyPr wrap="square" anchor="t" lIns="25400" rIns="25400" tIns="12700" bIns="12700">
+            <a:spAutoFit/>
+          </a:bodyPr>
+          <a:lstStyle/>
+          <a:p>
+            <a:pPr algn="l">
+              <a:lnSpc>
+                <a:spcPct val="100000"/>
+              </a:lnSpc>
+              <a:spcBef>
+                <a:spcPts val="0"/>
+              </a:spcBef>
+              <a:spcAft>
+                <a:spcPts val="400"/>
+              </a:spcAft>
+            </a:pPr>
+            <a:r>
+              <a:rPr sz="950" b="0" i="1">
+                <a:solidFill>
+                  <a:srgbClr val="6B7278"/>
+                </a:solidFill>
+                <a:latin typeface="Calibri"/>
+              </a:rPr>
+              <a:t>Executive → increasingly detailed → quant-grade, ending in pseudo-code and a reproducibility manifest.</a:t>
+            </a:r>
+          </a:p>
+        </p:txBody>
+      </p:sp>
       <p:graphicFrame>
         <p:nvGraphicFramePr>
-          <p:cNvPr id="7" name="Table 6"/>
+          <p:cNvPr id="9" name="Table 8"/>
           <p:cNvGraphicFramePr>
             <a:graphicFrameLocks noGrp="1"/>
           </p:cNvGraphicFramePr>
@@ -17138,24 +17261,24 @@
         </p:nvGraphicFramePr>
         <p:xfrm>
           <a:off x="566928" y="2057400"/>
-          <a:ext cx="11055095" cy="4114800"/>
+          <a:ext cx="11055096" cy="4343394"/>
         </p:xfrm>
         <a:graphic>
           <a:graphicData uri="http://schemas.openxmlformats.org/drawingml/2006/table">
             <a:tbl>
               <a:tblPr/>
               <a:tblGrid>
-                <a:gridCol w="1547713"/>
-                <a:gridCol w="6854159"/>
-                <a:gridCol w="2653223"/>
+                <a:gridCol w="1545336"/>
+                <a:gridCol w="6858000"/>
+                <a:gridCol w="2651760"/>
               </a:tblGrid>
-              <a:tr h="457200">
-                <a:tc>
-                  <a:txBody>
-                    <a:bodyPr wrap="square"/>
-                    <a:lstStyle/>
-                    <a:p>
-                      <a:pPr algn="ctr"/>
+              <a:tr h="394854">
+                <a:tc>
+                  <a:txBody>
+                    <a:bodyPr/>
+                    <a:lstStyle/>
+                    <a:p>
+                      <a:pPr algn="l"/>
                       <a:r>
                         <a:rPr sz="1450" b="1">
                           <a:solidFill>
@@ -17175,7 +17298,7 @@
                 </a:tc>
                 <a:tc>
                   <a:txBody>
-                    <a:bodyPr wrap="square"/>
+                    <a:bodyPr/>
                     <a:lstStyle/>
                     <a:p>
                       <a:pPr algn="l"/>
@@ -17198,7 +17321,7 @@
                 </a:tc>
                 <a:tc>
                   <a:txBody>
-                    <a:bodyPr wrap="square"/>
+                    <a:bodyPr/>
                     <a:lstStyle/>
                     <a:p>
                       <a:pPr algn="l"/>
@@ -17220,13 +17343,13 @@
                   </a:tcPr>
                 </a:tc>
               </a:tr>
-              <a:tr h="457200">
-                <a:tc>
-                  <a:txBody>
-                    <a:bodyPr wrap="square"/>
-                    <a:lstStyle/>
-                    <a:p>
-                      <a:pPr algn="ctr"/>
+              <a:tr h="394854">
+                <a:tc>
+                  <a:txBody>
+                    <a:bodyPr/>
+                    <a:lstStyle/>
+                    <a:p>
+                      <a:pPr algn="l"/>
                       <a:r>
                         <a:rPr sz="1450" b="0">
                           <a:solidFill>
@@ -17246,7 +17369,7 @@
                 </a:tc>
                 <a:tc>
                   <a:txBody>
-                    <a:bodyPr wrap="square"/>
+                    <a:bodyPr/>
                     <a:lstStyle/>
                     <a:p>
                       <a:pPr algn="l"/>
@@ -17269,7 +17392,7 @@
                 </a:tc>
                 <a:tc>
                   <a:txBody>
-                    <a:bodyPr wrap="square"/>
+                    <a:bodyPr/>
                     <a:lstStyle/>
                     <a:p>
                       <a:pPr algn="l"/>
@@ -17291,13 +17414,13 @@
                   </a:tcPr>
                 </a:tc>
               </a:tr>
-              <a:tr h="457200">
-                <a:tc>
-                  <a:txBody>
-                    <a:bodyPr wrap="square"/>
-                    <a:lstStyle/>
-                    <a:p>
-                      <a:pPr algn="ctr"/>
+              <a:tr h="394854">
+                <a:tc>
+                  <a:txBody>
+                    <a:bodyPr/>
+                    <a:lstStyle/>
+                    <a:p>
+                      <a:pPr algn="l"/>
                       <a:r>
                         <a:rPr sz="1450" b="0">
                           <a:solidFill>
@@ -17317,7 +17440,7 @@
                 </a:tc>
                 <a:tc>
                   <a:txBody>
-                    <a:bodyPr wrap="square"/>
+                    <a:bodyPr/>
                     <a:lstStyle/>
                     <a:p>
                       <a:pPr algn="l"/>
@@ -17340,7 +17463,7 @@
                 </a:tc>
                 <a:tc>
                   <a:txBody>
-                    <a:bodyPr wrap="square"/>
+                    <a:bodyPr/>
                     <a:lstStyle/>
                     <a:p>
                       <a:pPr algn="l"/>
@@ -17362,13 +17485,13 @@
                   </a:tcPr>
                 </a:tc>
               </a:tr>
-              <a:tr h="457200">
-                <a:tc>
-                  <a:txBody>
-                    <a:bodyPr wrap="square"/>
-                    <a:lstStyle/>
-                    <a:p>
-                      <a:pPr algn="ctr"/>
+              <a:tr h="394854">
+                <a:tc>
+                  <a:txBody>
+                    <a:bodyPr/>
+                    <a:lstStyle/>
+                    <a:p>
+                      <a:pPr algn="l"/>
                       <a:r>
                         <a:rPr sz="1450" b="0">
                           <a:solidFill>
@@ -17388,7 +17511,7 @@
                 </a:tc>
                 <a:tc>
                   <a:txBody>
-                    <a:bodyPr wrap="square"/>
+                    <a:bodyPr/>
                     <a:lstStyle/>
                     <a:p>
                       <a:pPr algn="l"/>
@@ -17411,7 +17534,7 @@
                 </a:tc>
                 <a:tc>
                   <a:txBody>
-                    <a:bodyPr wrap="square"/>
+                    <a:bodyPr/>
                     <a:lstStyle/>
                     <a:p>
                       <a:pPr algn="l"/>
@@ -17433,13 +17556,13 @@
                   </a:tcPr>
                 </a:tc>
               </a:tr>
-              <a:tr h="457200">
-                <a:tc>
-                  <a:txBody>
-                    <a:bodyPr wrap="square"/>
-                    <a:lstStyle/>
-                    <a:p>
-                      <a:pPr algn="ctr"/>
+              <a:tr h="394854">
+                <a:tc>
+                  <a:txBody>
+                    <a:bodyPr/>
+                    <a:lstStyle/>
+                    <a:p>
+                      <a:pPr algn="l"/>
                       <a:r>
                         <a:rPr sz="1450" b="0">
                           <a:solidFill>
@@ -17459,7 +17582,7 @@
                 </a:tc>
                 <a:tc>
                   <a:txBody>
-                    <a:bodyPr wrap="square"/>
+                    <a:bodyPr/>
                     <a:lstStyle/>
                     <a:p>
                       <a:pPr algn="l"/>
@@ -17482,7 +17605,7 @@
                 </a:tc>
                 <a:tc>
                   <a:txBody>
-                    <a:bodyPr wrap="square"/>
+                    <a:bodyPr/>
                     <a:lstStyle/>
                     <a:p>
                       <a:pPr algn="l"/>
@@ -17504,13 +17627,13 @@
                   </a:tcPr>
                 </a:tc>
               </a:tr>
-              <a:tr h="457200">
-                <a:tc>
-                  <a:txBody>
-                    <a:bodyPr wrap="square"/>
-                    <a:lstStyle/>
-                    <a:p>
-                      <a:pPr algn="ctr"/>
+              <a:tr h="394854">
+                <a:tc>
+                  <a:txBody>
+                    <a:bodyPr/>
+                    <a:lstStyle/>
+                    <a:p>
+                      <a:pPr algn="l"/>
                       <a:r>
                         <a:rPr sz="1450" b="0">
                           <a:solidFill>
@@ -17530,7 +17653,7 @@
                 </a:tc>
                 <a:tc>
                   <a:txBody>
-                    <a:bodyPr wrap="square"/>
+                    <a:bodyPr/>
                     <a:lstStyle/>
                     <a:p>
                       <a:pPr algn="l"/>
@@ -17541,7 +17664,7 @@
                           </a:solidFill>
                           <a:latin typeface="Calibri"/>
                         </a:rPr>
-                        <a:t>Results: headline, stability, attribution, benchmarks</a:t>
+                        <a:t>Results: 2-year interim — headline, stability, attribution</a:t>
                       </a:r>
                     </a:p>
                   </a:txBody>
@@ -17553,7 +17676,7 @@
                 </a:tc>
                 <a:tc>
                   <a:txBody>
-                    <a:bodyPr wrap="square"/>
+                    <a:bodyPr/>
                     <a:lstStyle/>
                     <a:p>
                       <a:pPr algn="l"/>
@@ -17575,13 +17698,13 @@
                   </a:tcPr>
                 </a:tc>
               </a:tr>
-              <a:tr h="457200">
-                <a:tc>
-                  <a:txBody>
-                    <a:bodyPr wrap="square"/>
-                    <a:lstStyle/>
-                    <a:p>
-                      <a:pPr algn="ctr"/>
+              <a:tr h="394854">
+                <a:tc>
+                  <a:txBody>
+                    <a:bodyPr/>
+                    <a:lstStyle/>
+                    <a:p>
+                      <a:pPr algn="l"/>
                       <a:r>
                         <a:rPr sz="1450" b="0">
                           <a:solidFill>
@@ -17589,7 +17712,7 @@
                           </a:solidFill>
                           <a:latin typeface="Calibri"/>
                         </a:rPr>
-                        <a:t>22 – 24</a:t>
+                        <a:t>22 – 27</a:t>
                       </a:r>
                     </a:p>
                   </a:txBody>
@@ -17601,7 +17724,7 @@
                 </a:tc>
                 <a:tc>
                   <a:txBody>
-                    <a:bodyPr wrap="square"/>
+                    <a:bodyPr/>
                     <a:lstStyle/>
                     <a:p>
                       <a:pPr algn="l"/>
@@ -17612,19 +17735,138 @@
                           </a:solidFill>
                           <a:latin typeface="Calibri"/>
                         </a:rPr>
+                        <a:t>Four-year walk-forward &amp; variance control (delta corridor)</a:t>
+                      </a:r>
+                    </a:p>
+                  </a:txBody>
+                  <a:tcPr marL="88900" marR="88900" marT="38100" marB="38100" anchor="ctr">
+                    <a:solidFill>
+                      <a:srgbClr val="F2F4F6"/>
+                    </a:solidFill>
+                  </a:tcPr>
+                </a:tc>
+                <a:tc>
+                  <a:txBody>
+                    <a:bodyPr/>
+                    <a:lstStyle/>
+                    <a:p>
+                      <a:pPr algn="l"/>
+                      <a:r>
+                        <a:rPr sz="1450" b="0">
+                          <a:solidFill>
+                            <a:srgbClr val="22262A"/>
+                          </a:solidFill>
+                          <a:latin typeface="Calibri"/>
+                        </a:rPr>
+                        <a:t>Risk / quant</a:t>
+                      </a:r>
+                    </a:p>
+                  </a:txBody>
+                  <a:tcPr marL="88900" marR="88900" marT="38100" marB="38100" anchor="ctr">
+                    <a:solidFill>
+                      <a:srgbClr val="F2F4F6"/>
+                    </a:solidFill>
+                  </a:tcPr>
+                </a:tc>
+              </a:tr>
+              <a:tr h="394854">
+                <a:tc>
+                  <a:txBody>
+                    <a:bodyPr/>
+                    <a:lstStyle/>
+                    <a:p>
+                      <a:pPr algn="l"/>
+                      <a:r>
+                        <a:rPr sz="1450" b="0">
+                          <a:solidFill>
+                            <a:srgbClr val="22262A"/>
+                          </a:solidFill>
+                          <a:latin typeface="Calibri"/>
+                        </a:rPr>
+                        <a:t>28 – 30</a:t>
+                      </a:r>
+                    </a:p>
+                  </a:txBody>
+                  <a:tcPr marL="88900" marR="88900" marT="38100" marB="38100" anchor="ctr">
+                    <a:solidFill>
+                      <a:srgbClr val="FFFFFF"/>
+                    </a:solidFill>
+                  </a:tcPr>
+                </a:tc>
+                <a:tc>
+                  <a:txBody>
+                    <a:bodyPr/>
+                    <a:lstStyle/>
+                    <a:p>
+                      <a:pPr algn="l"/>
+                      <a:r>
+                        <a:rPr sz="1450" b="0">
+                          <a:solidFill>
+                            <a:srgbClr val="22262A"/>
+                          </a:solidFill>
+                          <a:latin typeface="Calibri"/>
+                        </a:rPr>
                         <a:t>Integrity: how we caught our own too-good result</a:t>
                       </a:r>
                     </a:p>
                   </a:txBody>
                   <a:tcPr marL="88900" marR="88900" marT="38100" marB="38100" anchor="ctr">
                     <a:solidFill>
+                      <a:srgbClr val="FFFFFF"/>
+                    </a:solidFill>
+                  </a:tcPr>
+                </a:tc>
+                <a:tc>
+                  <a:txBody>
+                    <a:bodyPr/>
+                    <a:lstStyle/>
+                    <a:p>
+                      <a:pPr algn="l"/>
+                      <a:r>
+                        <a:rPr sz="1450" b="0">
+                          <a:solidFill>
+                            <a:srgbClr val="22262A"/>
+                          </a:solidFill>
+                          <a:latin typeface="Calibri"/>
+                        </a:rPr>
+                        <a:t>All</a:t>
+                      </a:r>
+                    </a:p>
+                  </a:txBody>
+                  <a:tcPr marL="88900" marR="88900" marT="38100" marB="38100" anchor="ctr">
+                    <a:solidFill>
+                      <a:srgbClr val="FFFFFF"/>
+                    </a:solidFill>
+                  </a:tcPr>
+                </a:tc>
+              </a:tr>
+              <a:tr h="394854">
+                <a:tc>
+                  <a:txBody>
+                    <a:bodyPr/>
+                    <a:lstStyle/>
+                    <a:p>
+                      <a:pPr algn="l"/>
+                      <a:r>
+                        <a:rPr sz="1450" b="0">
+                          <a:solidFill>
+                            <a:srgbClr val="22262A"/>
+                          </a:solidFill>
+                          <a:latin typeface="Calibri"/>
+                        </a:rPr>
+                        <a:t>31 – 32</a:t>
+                      </a:r>
+                    </a:p>
+                  </a:txBody>
+                  <a:tcPr marL="88900" marR="88900" marT="38100" marB="38100" anchor="ctr">
+                    <a:solidFill>
                       <a:srgbClr val="F2F4F6"/>
                     </a:solidFill>
                   </a:tcPr>
                 </a:tc>
                 <a:tc>
                   <a:txBody>
-                    <a:bodyPr wrap="square"/>
+                    <a:bodyPr/>
                     <a:lstStyle/>
                     <a:p>
                       <a:pPr algn="l"/>
@@ -17635,6 +17877,29 @@
                           </a:solidFill>
                           <a:latin typeface="Calibri"/>
                         </a:rPr>
+                        <a:t>Caveats and recommended next steps</a:t>
+                      </a:r>
+                    </a:p>
+                  </a:txBody>
+                  <a:tcPr marL="88900" marR="88900" marT="38100" marB="38100" anchor="ctr">
+                    <a:solidFill>
+                      <a:srgbClr val="F2F4F6"/>
+                    </a:solidFill>
+                  </a:tcPr>
+                </a:tc>
+                <a:tc>
+                  <a:txBody>
+                    <a:bodyPr/>
+                    <a:lstStyle/>
+                    <a:p>
+                      <a:pPr algn="l"/>
+                      <a:r>
+                        <a:rPr sz="1450" b="0">
+                          <a:solidFill>
+                            <a:srgbClr val="22262A"/>
+                          </a:solidFill>
+                          <a:latin typeface="Calibri"/>
+                        </a:rPr>
                         <a:t>All</a:t>
                       </a:r>
                     </a:p>
@@ -17646,13 +17911,13 @@
                   </a:tcPr>
                 </a:tc>
               </a:tr>
-              <a:tr h="457200">
-                <a:tc>
-                  <a:txBody>
-                    <a:bodyPr wrap="square"/>
-                    <a:lstStyle/>
-                    <a:p>
-                      <a:pPr algn="ctr"/>
+              <a:tr h="394854">
+                <a:tc>
+                  <a:txBody>
+                    <a:bodyPr/>
+                    <a:lstStyle/>
+                    <a:p>
+                      <a:pPr algn="l"/>
                       <a:r>
                         <a:rPr sz="1450" b="0">
                           <a:solidFill>
@@ -17660,7 +17925,7 @@
                           </a:solidFill>
                           <a:latin typeface="Calibri"/>
                         </a:rPr>
-                        <a:t>25 – 26</a:t>
+                        <a:t>33</a:t>
                       </a:r>
                     </a:p>
                   </a:txBody>
@@ -17672,7 +17937,7 @@
                 </a:tc>
                 <a:tc>
                   <a:txBody>
-                    <a:bodyPr wrap="square"/>
+                    <a:bodyPr/>
                     <a:lstStyle/>
                     <a:p>
                       <a:pPr algn="l"/>
@@ -17683,7 +17948,7 @@
                           </a:solidFill>
                           <a:latin typeface="Calibri"/>
                         </a:rPr>
-                        <a:t>Caveats and recommended next steps</a:t>
+                        <a:t>Future work</a:t>
                       </a:r>
                     </a:p>
                   </a:txBody>
@@ -17695,7 +17960,7 @@
                 </a:tc>
                 <a:tc>
                   <a:txBody>
-                    <a:bodyPr wrap="square"/>
+                    <a:bodyPr/>
                     <a:lstStyle/>
                     <a:p>
                       <a:pPr algn="l"/>
@@ -17717,13 +17982,13 @@
                   </a:tcPr>
                 </a:tc>
               </a:tr>
-              <a:tr h="457200">
-                <a:tc>
-                  <a:txBody>
-                    <a:bodyPr wrap="square"/>
-                    <a:lstStyle/>
-                    <a:p>
-                      <a:pPr algn="ctr"/>
+              <a:tr h="394854">
+                <a:tc>
+                  <a:txBody>
+                    <a:bodyPr/>
+                    <a:lstStyle/>
+                    <a:p>
+                      <a:pPr algn="l"/>
                       <a:r>
                         <a:rPr sz="1450" b="0">
                           <a:solidFill>
@@ -17731,7 +17996,7 @@
                           </a:solidFill>
                           <a:latin typeface="Calibri"/>
                         </a:rPr>
-                        <a:t>27 – 30</a:t>
+                        <a:t>34 – 37</a:t>
                       </a:r>
                     </a:p>
                   </a:txBody>
@@ -17743,7 +18008,7 @@
                 </a:tc>
                 <a:tc>
                   <a:txBody>
-                    <a:bodyPr wrap="square"/>
+                    <a:bodyPr/>
                     <a:lstStyle/>
                     <a:p>
                       <a:pPr algn="l"/>
@@ -17766,7 +18031,7 @@
                 </a:tc>
                 <a:tc>
                   <a:txBody>
-                    <a:bodyPr wrap="square"/>
+                    <a:bodyPr/>
                     <a:lstStyle/>
                     <a:p>
                       <a:pPr algn="l"/>
@@ -17792,51 +18057,6 @@
           </a:graphicData>
         </a:graphic>
       </p:graphicFrame>
-      <p:sp>
-        <p:nvSpPr>
-          <p:cNvPr id="8" name="TextBox 7"/>
-          <p:cNvSpPr txBox="1"/>
-          <p:nvPr/>
-        </p:nvSpPr>
-        <p:spPr>
-          <a:xfrm>
-            <a:off x="566928" y="6473952"/>
-            <a:ext cx="11055096" cy="274320"/>
-          </a:xfrm>
-          <a:prstGeom prst="rect">
-            <a:avLst/>
-          </a:prstGeom>
-          <a:noFill/>
-        </p:spPr>
-        <p:txBody>
-          <a:bodyPr wrap="square" anchor="t" lIns="25400" rIns="25400" tIns="12700" bIns="12700">
-            <a:spAutoFit/>
-          </a:bodyPr>
-          <a:lstStyle/>
-          <a:p>
-            <a:pPr algn="l">
-              <a:lnSpc>
-                <a:spcPct val="100000"/>
-              </a:lnSpc>
-              <a:spcBef>
-                <a:spcPts val="0"/>
-              </a:spcBef>
-              <a:spcAft>
-                <a:spcPts val="400"/>
-              </a:spcAft>
-            </a:pPr>
-            <a:r>
-              <a:rPr sz="950" b="0" i="1">
-                <a:solidFill>
-                  <a:srgbClr val="6B7278"/>
-                </a:solidFill>
-                <a:latin typeface="Calibri"/>
-              </a:rPr>
-              <a:t>Executive → increasingly detailed → quant-grade, ending in pseudo-code and a reproducibility manifest.</a:t>
-            </a:r>
-          </a:p>
-        </p:txBody>
-      </p:sp>
     </p:spTree>
   </p:cSld>
   <p:clrMapOvr>
@@ -18037,7 +18257,7 @@
                 </a:solidFill>
                 <a:latin typeface="Calibri"/>
               </a:rPr>
-              <a:t>30</a:t>
+              <a:t>37</a:t>
             </a:r>
           </a:p>
         </p:txBody>
@@ -18083,6 +18303,860 @@
                 <a:latin typeface="Calibri"/>
               </a:rPr>
               <a:t>Every headline number in this deck was recomputed from these artifacts.</a:t>
+            </a:r>
+          </a:p>
+        </p:txBody>
+      </p:sp>
+      <p:sp>
+        <p:nvSpPr>
+          <p:cNvPr id="8" name="TextBox 7"/>
+          <p:cNvSpPr txBox="1"/>
+          <p:nvPr/>
+        </p:nvSpPr>
+        <p:spPr>
+          <a:xfrm>
+            <a:off x="566928" y="6473952"/>
+            <a:ext cx="11055096" cy="274320"/>
+          </a:xfrm>
+          <a:prstGeom prst="rect">
+            <a:avLst/>
+          </a:prstGeom>
+          <a:noFill/>
+        </p:spPr>
+        <p:txBody>
+          <a:bodyPr wrap="square" anchor="t" lIns="25400" rIns="25400" tIns="12700" bIns="12700">
+            <a:spAutoFit/>
+          </a:bodyPr>
+          <a:lstStyle/>
+          <a:p>
+            <a:pPr algn="l">
+              <a:lnSpc>
+                <a:spcPct val="100000"/>
+              </a:lnSpc>
+              <a:spcBef>
+                <a:spcPts val="0"/>
+              </a:spcBef>
+              <a:spcAft>
+                <a:spcPts val="400"/>
+              </a:spcAft>
+            </a:pPr>
+            <a:r>
+              <a:rPr sz="950" b="0" i="1">
+                <a:solidFill>
+                  <a:srgbClr val="6B7278"/>
+                </a:solidFill>
+                <a:latin typeface="Calibri"/>
+              </a:rPr>
+              <a:t>83 tests collected · commits verified in git log · all $/oz stats recomputed from the CSVs above.</a:t>
+            </a:r>
+          </a:p>
+        </p:txBody>
+      </p:sp>
+      <p:graphicFrame>
+        <p:nvGraphicFramePr>
+          <p:cNvPr id="9" name="Table 8"/>
+          <p:cNvGraphicFramePr>
+            <a:graphicFrameLocks noGrp="1"/>
+          </p:cNvGraphicFramePr>
+          <p:nvPr/>
+        </p:nvGraphicFramePr>
+        <p:xfrm>
+          <a:off x="566928" y="2011680"/>
+          <a:ext cx="11055095" cy="4206240"/>
+        </p:xfrm>
+        <a:graphic>
+          <a:graphicData uri="http://schemas.openxmlformats.org/drawingml/2006/table">
+            <a:tbl>
+              <a:tblPr/>
+              <a:tblGrid>
+                <a:gridCol w="3246120"/>
+                <a:gridCol w="7808975"/>
+              </a:tblGrid>
+              <a:tr h="350520">
+                <a:tc>
+                  <a:txBody>
+                    <a:bodyPr/>
+                    <a:lstStyle/>
+                    <a:p>
+                      <a:pPr algn="l"/>
+                      <a:r>
+                        <a:rPr sz="1250" b="1">
+                          <a:solidFill>
+                            <a:srgbClr val="FFFFFF"/>
+                          </a:solidFill>
+                          <a:latin typeface="Calibri"/>
+                        </a:rPr>
+                        <a:t>Artifact</a:t>
+                      </a:r>
+                    </a:p>
+                  </a:txBody>
+                  <a:tcPr marL="88900" marR="88900" marT="38100" marB="38100" anchor="ctr">
+                    <a:solidFill>
+                      <a:srgbClr val="2B3A42"/>
+                    </a:solidFill>
+                  </a:tcPr>
+                </a:tc>
+                <a:tc>
+                  <a:txBody>
+                    <a:bodyPr/>
+                    <a:lstStyle/>
+                    <a:p>
+                      <a:pPr algn="l"/>
+                      <a:r>
+                        <a:rPr sz="1250" b="1">
+                          <a:solidFill>
+                            <a:srgbClr val="FFFFFF"/>
+                          </a:solidFill>
+                          <a:latin typeface="Calibri"/>
+                        </a:rPr>
+                        <a:t>Path / value</a:t>
+                      </a:r>
+                    </a:p>
+                  </a:txBody>
+                  <a:tcPr marL="88900" marR="88900" marT="38100" marB="38100" anchor="ctr">
+                    <a:solidFill>
+                      <a:srgbClr val="2B3A42"/>
+                    </a:solidFill>
+                  </a:tcPr>
+                </a:tc>
+              </a:tr>
+              <a:tr h="350520">
+                <a:tc>
+                  <a:txBody>
+                    <a:bodyPr/>
+                    <a:lstStyle/>
+                    <a:p>
+                      <a:pPr algn="l"/>
+                      <a:r>
+                        <a:rPr sz="1250" b="1">
+                          <a:solidFill>
+                            <a:srgbClr val="22262A"/>
+                          </a:solidFill>
+                          <a:latin typeface="Calibri"/>
+                        </a:rPr>
+                        <a:t>4-year walk-forward (baseline)</a:t>
+                      </a:r>
+                    </a:p>
+                  </a:txBody>
+                  <a:tcPr marL="88900" marR="88900" marT="38100" marB="38100" anchor="ctr">
+                    <a:solidFill>
+                      <a:srgbClr val="FFFFFF"/>
+                    </a:solidFill>
+                  </a:tcPr>
+                </a:tc>
+                <a:tc>
+                  <a:txBody>
+                    <a:bodyPr/>
+                    <a:lstStyle/>
+                    <a:p>
+                      <a:pPr algn="l"/>
+                      <a:r>
+                        <a:rPr sz="1250" b="0">
+                          <a:solidFill>
+                            <a:srgbClr val="22262A"/>
+                          </a:solidFill>
+                          <a:latin typeface="Calibri"/>
+                        </a:rPr>
+                        <a:t>artifacts/walk_forward/full48_baseline.csv  (48 trades, 3-seed ensemble, roll-inner 512)</a:t>
+                      </a:r>
+                    </a:p>
+                  </a:txBody>
+                  <a:tcPr marL="88900" marR="88900" marT="38100" marB="38100" anchor="ctr">
+                    <a:solidFill>
+                      <a:srgbClr val="FFFFFF"/>
+                    </a:solidFill>
+                  </a:tcPr>
+                </a:tc>
+              </a:tr>
+              <a:tr h="350520">
+                <a:tc>
+                  <a:txBody>
+                    <a:bodyPr/>
+                    <a:lstStyle/>
+                    <a:p>
+                      <a:pPr algn="l"/>
+                      <a:r>
+                        <a:rPr sz="1250" b="1">
+                          <a:solidFill>
+                            <a:srgbClr val="22262A"/>
+                          </a:solidFill>
+                          <a:latin typeface="Calibri"/>
+                        </a:rPr>
+                        <a:t>Corridor frontier rolls (144)</a:t>
+                      </a:r>
+                    </a:p>
+                  </a:txBody>
+                  <a:tcPr marL="88900" marR="88900" marT="38100" marB="38100" anchor="ctr">
+                    <a:solidFill>
+                      <a:srgbClr val="F2F4F6"/>
+                    </a:solidFill>
+                  </a:tcPr>
+                </a:tc>
+                <a:tc>
+                  <a:txBody>
+                    <a:bodyPr/>
+                    <a:lstStyle/>
+                    <a:p>
+                      <a:pPr algn="l"/>
+                      <a:r>
+                        <a:rPr sz="1250" b="0">
+                          <a:solidFill>
+                            <a:srgbClr val="22262A"/>
+                          </a:solidFill>
+                          <a:latin typeface="Calibri"/>
+                        </a:rPr>
+                        <a:t>artifacts/walk_forward/full48_corridor_rolls.csv  (bands 0.25 / 0.40 / 0.60)</a:t>
+                      </a:r>
+                    </a:p>
+                  </a:txBody>
+                  <a:tcPr marL="88900" marR="88900" marT="38100" marB="38100" anchor="ctr">
+                    <a:solidFill>
+                      <a:srgbClr val="F2F4F6"/>
+                    </a:solidFill>
+                  </a:tcPr>
+                </a:tc>
+              </a:tr>
+              <a:tr h="350520">
+                <a:tc>
+                  <a:txBody>
+                    <a:bodyPr/>
+                    <a:lstStyle/>
+                    <a:p>
+                      <a:pPr algn="l"/>
+                      <a:r>
+                        <a:rPr sz="1250" b="1">
+                          <a:solidFill>
+                            <a:srgbClr val="22262A"/>
+                          </a:solidFill>
+                          <a:latin typeface="Calibri"/>
+                        </a:rPr>
+                        <a:t>Train-in-corridor + in-sim</a:t>
+                      </a:r>
+                    </a:p>
+                  </a:txBody>
+                  <a:tcPr marL="88900" marR="88900" marT="38100" marB="38100" anchor="ctr">
+                    <a:solidFill>
+                      <a:srgbClr val="FFFFFF"/>
+                    </a:solidFill>
+                  </a:tcPr>
+                </a:tc>
+                <a:tc>
+                  <a:txBody>
+                    <a:bodyPr/>
+                    <a:lstStyle/>
+                    <a:p>
+                      <a:pPr algn="l"/>
+                      <a:r>
+                        <a:rPr sz="1250" b="0">
+                          <a:solidFill>
+                            <a:srgbClr val="22262A"/>
+                          </a:solidFill>
+                          <a:latin typeface="Calibri"/>
+                        </a:rPr>
+                        <a:t>train_in_corridor_subset.csv · tb_insim_202105_b040.json · tb_insim_202102_b040.json</a:t>
+                      </a:r>
+                    </a:p>
+                  </a:txBody>
+                  <a:tcPr marL="88900" marR="88900" marT="38100" marB="38100" anchor="ctr">
+                    <a:solidFill>
+                      <a:srgbClr val="FFFFFF"/>
+                    </a:solidFill>
+                  </a:tcPr>
+                </a:tc>
+              </a:tr>
+              <a:tr h="350520">
+                <a:tc>
+                  <a:txBody>
+                    <a:bodyPr/>
+                    <a:lstStyle/>
+                    <a:p>
+                      <a:pPr algn="l"/>
+                      <a:r>
+                        <a:rPr sz="1250" b="1">
+                          <a:solidFill>
+                            <a:srgbClr val="22262A"/>
+                          </a:solidFill>
+                          <a:latin typeface="Calibri"/>
+                        </a:rPr>
+                        <a:t>Band-selection study</a:t>
+                      </a:r>
+                    </a:p>
+                  </a:txBody>
+                  <a:tcPr marL="88900" marR="88900" marT="38100" marB="38100" anchor="ctr">
+                    <a:solidFill>
+                      <a:srgbClr val="F2F4F6"/>
+                    </a:solidFill>
+                  </a:tcPr>
+                </a:tc>
+                <a:tc>
+                  <a:txBody>
+                    <a:bodyPr/>
+                    <a:lstStyle/>
+                    <a:p>
+                      <a:pPr algn="l"/>
+                      <a:r>
+                        <a:rPr sz="1250" b="0">
+                          <a:solidFill>
+                            <a:srgbClr val="22262A"/>
+                          </a:solidFill>
+                          <a:latin typeface="Calibri"/>
+                        </a:rPr>
+                        <a:t>adaptive_corridor_sweep.csv · adaptive_corridor_verdict.md</a:t>
+                      </a:r>
+                    </a:p>
+                  </a:txBody>
+                  <a:tcPr marL="88900" marR="88900" marT="38100" marB="38100" anchor="ctr">
+                    <a:solidFill>
+                      <a:srgbClr val="F2F4F6"/>
+                    </a:solidFill>
+                  </a:tcPr>
+                </a:tc>
+              </a:tr>
+              <a:tr h="350520">
+                <a:tc>
+                  <a:txBody>
+                    <a:bodyPr/>
+                    <a:lstStyle/>
+                    <a:p>
+                      <a:pPr algn="l"/>
+                      <a:r>
+                        <a:rPr sz="1250" b="1">
+                          <a:solidFill>
+                            <a:srgbClr val="22262A"/>
+                          </a:solidFill>
+                          <a:latin typeface="Calibri"/>
+                        </a:rPr>
+                        <a:t>Loss-attribution panel (40 mo)</a:t>
+                      </a:r>
+                    </a:p>
+                  </a:txBody>
+                  <a:tcPr marL="88900" marR="88900" marT="38100" marB="38100" anchor="ctr">
+                    <a:solidFill>
+                      <a:srgbClr val="FFFFFF"/>
+                    </a:solidFill>
+                  </a:tcPr>
+                </a:tc>
+                <a:tc>
+                  <a:txBody>
+                    <a:bodyPr/>
+                    <a:lstStyle/>
+                    <a:p>
+                      <a:pPr algn="l"/>
+                      <a:r>
+                        <a:rPr sz="1250" b="0">
+                          <a:solidFill>
+                            <a:srgbClr val="22262A"/>
+                          </a:solidFill>
+                          <a:latin typeface="Calibri"/>
+                        </a:rPr>
+                        <a:t>lf2_forensics.csv</a:t>
+                      </a:r>
+                    </a:p>
+                  </a:txBody>
+                  <a:tcPr marL="88900" marR="88900" marT="38100" marB="38100" anchor="ctr">
+                    <a:solidFill>
+                      <a:srgbClr val="FFFFFF"/>
+                    </a:solidFill>
+                  </a:tcPr>
+                </a:tc>
+              </a:tr>
+              <a:tr h="350520">
+                <a:tc>
+                  <a:txBody>
+                    <a:bodyPr/>
+                    <a:lstStyle/>
+                    <a:p>
+                      <a:pPr algn="l"/>
+                      <a:r>
+                        <a:rPr sz="1250" b="1">
+                          <a:solidFill>
+                            <a:srgbClr val="22262A"/>
+                          </a:solidFill>
+                          <a:latin typeface="Calibri"/>
+                        </a:rPr>
+                        <a:t>Corridor close-out note</a:t>
+                      </a:r>
+                    </a:p>
+                  </a:txBody>
+                  <a:tcPr marL="88900" marR="88900" marT="38100" marB="38100" anchor="ctr">
+                    <a:solidFill>
+                      <a:srgbClr val="F2F4F6"/>
+                    </a:solidFill>
+                  </a:tcPr>
+                </a:tc>
+                <a:tc>
+                  <a:txBody>
+                    <a:bodyPr/>
+                    <a:lstStyle/>
+                    <a:p>
+                      <a:pPr algn="l"/>
+                      <a:r>
+                        <a:rPr sz="1250" b="0">
+                          <a:solidFill>
+                            <a:srgbClr val="22262A"/>
+                          </a:solidFill>
+                          <a:latin typeface="Calibri"/>
+                        </a:rPr>
+                        <a:t>STATUS_NOTE_corridor.md</a:t>
+                      </a:r>
+                    </a:p>
+                  </a:txBody>
+                  <a:tcPr marL="88900" marR="88900" marT="38100" marB="38100" anchor="ctr">
+                    <a:solidFill>
+                      <a:srgbClr val="F2F4F6"/>
+                    </a:solidFill>
+                  </a:tcPr>
+                </a:tc>
+              </a:tr>
+              <a:tr h="350520">
+                <a:tc>
+                  <a:txBody>
+                    <a:bodyPr/>
+                    <a:lstStyle/>
+                    <a:p>
+                      <a:pPr algn="l"/>
+                      <a:r>
+                        <a:rPr sz="1250" b="1">
+                          <a:solidFill>
+                            <a:srgbClr val="22262A"/>
+                          </a:solidFill>
+                          <a:latin typeface="Calibri"/>
+                        </a:rPr>
+                        <a:t>2-year interim runs</a:t>
+                      </a:r>
+                    </a:p>
+                  </a:txBody>
+                  <a:tcPr marL="88900" marR="88900" marT="38100" marB="38100" anchor="ctr">
+                    <a:solidFill>
+                      <a:srgbClr val="FFFFFF"/>
+                    </a:solidFill>
+                  </a:tcPr>
+                </a:tc>
+                <a:tc>
+                  <a:txBody>
+                    <a:bodyPr/>
+                    <a:lstStyle/>
+                    <a:p>
+                      <a:pPr algn="l"/>
+                      <a:r>
+                        <a:rPr sz="1250" b="0">
+                          <a:solidFill>
+                            <a:srgbClr val="22262A"/>
+                          </a:solidFill>
+                          <a:latin typeface="Calibri"/>
+                        </a:rPr>
+                        <a:t>aversion6_24trade_final.csv · aversion6_reverify_committed_pipeline.csv</a:t>
+                      </a:r>
+                    </a:p>
+                  </a:txBody>
+                  <a:tcPr marL="88900" marR="88900" marT="38100" marB="38100" anchor="ctr">
+                    <a:solidFill>
+                      <a:srgbClr val="FFFFFF"/>
+                    </a:solidFill>
+                  </a:tcPr>
+                </a:tc>
+              </a:tr>
+              <a:tr h="350520">
+                <a:tc>
+                  <a:txBody>
+                    <a:bodyPr/>
+                    <a:lstStyle/>
+                    <a:p>
+                      <a:pPr algn="l"/>
+                      <a:r>
+                        <a:rPr sz="1250" b="1">
+                          <a:solidFill>
+                            <a:srgbClr val="22262A"/>
+                          </a:solidFill>
+                          <a:latin typeface="Calibri"/>
+                        </a:rPr>
+                        <a:t>Raw data</a:t>
+                      </a:r>
+                    </a:p>
+                  </a:txBody>
+                  <a:tcPr marL="88900" marR="88900" marT="38100" marB="38100" anchor="ctr">
+                    <a:solidFill>
+                      <a:srgbClr val="F2F4F6"/>
+                    </a:solidFill>
+                  </a:tcPr>
+                </a:tc>
+                <a:tc>
+                  <a:txBody>
+                    <a:bodyPr/>
+                    <a:lstStyle/>
+                    <a:p>
+                      <a:pPr algn="l"/>
+                      <a:r>
+                        <a:rPr sz="1250" b="0">
+                          <a:solidFill>
+                            <a:srgbClr val="22262A"/>
+                          </a:solidFill>
+                          <a:latin typeface="Calibri"/>
+                        </a:rPr>
+                        <a:t>data/pl_exp.csv  (3,856 rows, 2009–2025)</a:t>
+                      </a:r>
+                    </a:p>
+                  </a:txBody>
+                  <a:tcPr marL="88900" marR="88900" marT="38100" marB="38100" anchor="ctr">
+                    <a:solidFill>
+                      <a:srgbClr val="F2F4F6"/>
+                    </a:solidFill>
+                  </a:tcPr>
+                </a:tc>
+              </a:tr>
+              <a:tr h="350520">
+                <a:tc>
+                  <a:txBody>
+                    <a:bodyPr/>
+                    <a:lstStyle/>
+                    <a:p>
+                      <a:pPr algn="l"/>
+                      <a:r>
+                        <a:rPr sz="1250" b="1">
+                          <a:solidFill>
+                            <a:srgbClr val="22262A"/>
+                          </a:solidFill>
+                          <a:latin typeface="Calibri"/>
+                        </a:rPr>
+                        <a:t>Test suite</a:t>
+                      </a:r>
+                    </a:p>
+                  </a:txBody>
+                  <a:tcPr marL="88900" marR="88900" marT="38100" marB="38100" anchor="ctr">
+                    <a:solidFill>
+                      <a:srgbClr val="FFFFFF"/>
+                    </a:solidFill>
+                  </a:tcPr>
+                </a:tc>
+                <a:tc>
+                  <a:txBody>
+                    <a:bodyPr/>
+                    <a:lstStyle/>
+                    <a:p>
+                      <a:pPr algn="l"/>
+                      <a:r>
+                        <a:rPr sz="1250" b="0">
+                          <a:solidFill>
+                            <a:srgbClr val="22262A"/>
+                          </a:solidFill>
+                          <a:latin typeface="Calibri"/>
+                        </a:rPr>
+                        <a:t>83 tests  (bit-gates: fixture V_0, stepper floats, corridor trajectory L1 = 0)</a:t>
+                      </a:r>
+                    </a:p>
+                  </a:txBody>
+                  <a:tcPr marL="88900" marR="88900" marT="38100" marB="38100" anchor="ctr">
+                    <a:solidFill>
+                      <a:srgbClr val="FFFFFF"/>
+                    </a:solidFill>
+                  </a:tcPr>
+                </a:tc>
+              </a:tr>
+              <a:tr h="350520">
+                <a:tc>
+                  <a:txBody>
+                    <a:bodyPr/>
+                    <a:lstStyle/>
+                    <a:p>
+                      <a:pPr algn="l"/>
+                      <a:r>
+                        <a:rPr sz="1250" b="1">
+                          <a:solidFill>
+                            <a:srgbClr val="22262A"/>
+                          </a:solidFill>
+                          <a:latin typeface="Calibri"/>
+                        </a:rPr>
+                        <a:t>Commits</a:t>
+                      </a:r>
+                    </a:p>
+                  </a:txBody>
+                  <a:tcPr marL="88900" marR="88900" marT="38100" marB="38100" anchor="ctr">
+                    <a:solidFill>
+                      <a:srgbClr val="F2F4F6"/>
+                    </a:solidFill>
+                  </a:tcPr>
+                </a:tc>
+                <a:tc>
+                  <a:txBody>
+                    <a:bodyPr/>
+                    <a:lstStyle/>
+                    <a:p>
+                      <a:pPr algn="l"/>
+                      <a:r>
+                        <a:rPr sz="1250" b="0">
+                          <a:solidFill>
+                            <a:srgbClr val="22262A"/>
+                          </a:solidFill>
+                          <a:latin typeface="Calibri"/>
+                        </a:rPr>
+                        <a:t>c87284d · f8c067b · 5460692 · 74ef6de</a:t>
+                      </a:r>
+                    </a:p>
+                  </a:txBody>
+                  <a:tcPr marL="88900" marR="88900" marT="38100" marB="38100" anchor="ctr">
+                    <a:solidFill>
+                      <a:srgbClr val="F2F4F6"/>
+                    </a:solidFill>
+                  </a:tcPr>
+                </a:tc>
+              </a:tr>
+              <a:tr h="350520">
+                <a:tc>
+                  <a:txBody>
+                    <a:bodyPr/>
+                    <a:lstStyle/>
+                    <a:p>
+                      <a:pPr algn="l"/>
+                      <a:r>
+                        <a:rPr sz="1250" b="1">
+                          <a:solidFill>
+                            <a:srgbClr val="22262A"/>
+                          </a:solidFill>
+                          <a:latin typeface="Calibri"/>
+                        </a:rPr>
+                        <a:t>Seeds</a:t>
+                      </a:r>
+                    </a:p>
+                  </a:txBody>
+                  <a:tcPr marL="88900" marR="88900" marT="38100" marB="38100" anchor="ctr">
+                    <a:solidFill>
+                      <a:srgbClr val="FFFFFF"/>
+                    </a:solidFill>
+                  </a:tcPr>
+                </a:tc>
+                <a:tc>
+                  <a:txBody>
+                    <a:bodyPr/>
+                    <a:lstStyle/>
+                    <a:p>
+                      <a:pPr algn="l"/>
+                      <a:r>
+                        <a:rPr sz="1250" b="0">
+                          <a:solidFill>
+                            <a:srgbClr val="22262A"/>
+                          </a:solidFill>
+                          <a:latin typeface="Calibri"/>
+                        </a:rPr>
+                        <a:t>ensemble 7 / 42 / 314 · roll-inner 512</a:t>
+                      </a:r>
+                    </a:p>
+                  </a:txBody>
+                  <a:tcPr marL="88900" marR="88900" marT="38100" marB="38100" anchor="ctr">
+                    <a:solidFill>
+                      <a:srgbClr val="FFFFFF"/>
+                    </a:solidFill>
+                  </a:tcPr>
+                </a:tc>
+              </a:tr>
+            </a:tbl>
+          </a:graphicData>
+        </a:graphic>
+      </p:graphicFrame>
+    </p:spTree>
+  </p:cSld>
+  <p:clrMapOvr>
+    <a:masterClrMapping/>
+  </p:clrMapOvr>
+</p:sld>
+</file>
+
+<file path=ppt/slides/slide31.xml><?xml version="1.0" encoding="utf-8"?>
+<p:sld xmlns:a="http://schemas.openxmlformats.org/drawingml/2006/main" xmlns:p="http://schemas.openxmlformats.org/presentationml/2006/main" xmlns:r="http://schemas.openxmlformats.org/officeDocument/2006/relationships">
+  <p:cSld>
+    <p:bg>
+      <p:bgPr>
+        <a:solidFill>
+          <a:srgbClr val="FFFFFF"/>
+        </a:solidFill>
+        <a:effectLst/>
+      </p:bgPr>
+    </p:bg>
+    <p:spTree>
+      <p:nvGrpSpPr>
+        <p:cNvPr id="1" name=""/>
+        <p:cNvGrpSpPr/>
+        <p:nvPr/>
+      </p:nvGrpSpPr>
+      <p:grpSpPr/>
+      <p:sp>
+        <p:nvSpPr>
+          <p:cNvPr id="2" name="TextBox 1"/>
+          <p:cNvSpPr txBox="1"/>
+          <p:nvPr/>
+        </p:nvSpPr>
+        <p:spPr>
+          <a:xfrm>
+            <a:off x="566928" y="274320"/>
+            <a:ext cx="11055096" cy="274320"/>
+          </a:xfrm>
+          <a:prstGeom prst="rect">
+            <a:avLst/>
+          </a:prstGeom>
+          <a:noFill/>
+        </p:spPr>
+        <p:txBody>
+          <a:bodyPr wrap="square" lIns="0" rIns="0" tIns="0" bIns="0">
+            <a:spAutoFit/>
+          </a:bodyPr>
+          <a:lstStyle/>
+          <a:p>
+            <a:pPr algn="l"/>
+            <a:r>
+              <a:rPr sz="1250" b="1">
+                <a:solidFill>
+                  <a:srgbClr val="1F77B4"/>
+                </a:solidFill>
+                <a:latin typeface="Calibri"/>
+              </a:rPr>
+              <a:t>FOUR-YEAR UPDATE  ·  1 OF 2</a:t>
+            </a:r>
+          </a:p>
+        </p:txBody>
+      </p:sp>
+      <p:sp>
+        <p:nvSpPr>
+          <p:cNvPr id="3" name="TextBox 2"/>
+          <p:cNvSpPr txBox="1"/>
+          <p:nvPr/>
+        </p:nvSpPr>
+        <p:spPr>
+          <a:xfrm>
+            <a:off x="566928" y="530352"/>
+            <a:ext cx="11055096" cy="822960"/>
+          </a:xfrm>
+          <a:prstGeom prst="rect">
+            <a:avLst/>
+          </a:prstGeom>
+          <a:noFill/>
+        </p:spPr>
+        <p:txBody>
+          <a:bodyPr wrap="square" lIns="0" rIns="0" tIns="0" bIns="0">
+            <a:spAutoFit/>
+          </a:bodyPr>
+          <a:lstStyle/>
+          <a:p>
+            <a:pPr algn="l"/>
+            <a:r>
+              <a:rPr sz="2700" b="1">
+                <a:solidFill>
+                  <a:srgbClr val="22262A"/>
+                </a:solidFill>
+                <a:latin typeface="Calibri"/>
+              </a:rPr>
+              <a:t>Four-year walk-forward — 48 trades</a:t>
+            </a:r>
+          </a:p>
+        </p:txBody>
+      </p:sp>
+      <p:sp>
+        <p:nvSpPr>
+          <p:cNvPr id="4" name="Rectangle 3"/>
+          <p:cNvSpPr/>
+          <p:nvPr/>
+        </p:nvSpPr>
+        <p:spPr>
+          <a:xfrm>
+            <a:off x="566928" y="1298448"/>
+            <a:ext cx="11055096" cy="27432"/>
+          </a:xfrm>
+          <a:prstGeom prst="rect">
+            <a:avLst/>
+          </a:prstGeom>
+          <a:solidFill>
+            <a:srgbClr val="1F77B4"/>
+          </a:solidFill>
+          <a:ln>
+            <a:noFill/>
+          </a:ln>
+        </p:spPr>
+        <p:style>
+          <a:lnRef idx="1">
+            <a:schemeClr val="accent1"/>
+          </a:lnRef>
+          <a:fillRef idx="3">
+            <a:schemeClr val="accent1"/>
+          </a:fillRef>
+          <a:effectRef idx="2">
+            <a:schemeClr val="accent1"/>
+          </a:effectRef>
+          <a:fontRef idx="minor">
+            <a:schemeClr val="lt1"/>
+          </a:fontRef>
+        </p:style>
+        <p:txBody>
+          <a:bodyPr rtlCol="0" anchor="ctr"/>
+          <a:lstStyle/>
+          <a:p>
+            <a:pPr algn="ctr"/>
+          </a:p>
+        </p:txBody>
+      </p:sp>
+      <p:sp>
+        <p:nvSpPr>
+          <p:cNvPr id="5" name="TextBox 4"/>
+          <p:cNvSpPr txBox="1"/>
+          <p:nvPr/>
+        </p:nvSpPr>
+        <p:spPr>
+          <a:xfrm>
+            <a:off x="566928" y="1444752"/>
+            <a:ext cx="11055096" cy="640080"/>
+          </a:xfrm>
+          <a:prstGeom prst="rect">
+            <a:avLst/>
+          </a:prstGeom>
+          <a:noFill/>
+        </p:spPr>
+        <p:txBody>
+          <a:bodyPr wrap="square" lIns="0" rIns="0" tIns="0" bIns="0">
+            <a:spAutoFit/>
+          </a:bodyPr>
+          <a:lstStyle/>
+          <a:p>
+            <a:pPr algn="l"/>
+            <a:r>
+              <a:rPr sz="1650" b="0">
+                <a:solidFill>
+                  <a:srgbClr val="2B3A42"/>
+                </a:solidFill>
+                <a:latin typeface="Calibri"/>
+              </a:rPr>
+              <a:t>Jan-2020 through Dec-2023, including the COVID-2020 shock. The 24-month result becomes an interim milestone.</a:t>
+            </a:r>
+          </a:p>
+        </p:txBody>
+      </p:sp>
+      <p:sp>
+        <p:nvSpPr>
+          <p:cNvPr id="6" name="TextBox 5"/>
+          <p:cNvSpPr txBox="1"/>
+          <p:nvPr/>
+        </p:nvSpPr>
+        <p:spPr>
+          <a:xfrm>
+            <a:off x="11612880" y="6455664"/>
+            <a:ext cx="457200" cy="274320"/>
+          </a:xfrm>
+          <a:prstGeom prst="rect">
+            <a:avLst/>
+          </a:prstGeom>
+          <a:noFill/>
+        </p:spPr>
+        <p:txBody>
+          <a:bodyPr wrap="square" lIns="0" rIns="0" tIns="0" bIns="0">
+            <a:spAutoFit/>
+          </a:bodyPr>
+          <a:lstStyle/>
+          <a:p>
+            <a:pPr algn="r"/>
+            <a:r>
+              <a:rPr sz="1000" b="0">
+                <a:solidFill>
+                  <a:srgbClr val="6B7278"/>
+                </a:solidFill>
+                <a:latin typeface="Calibri"/>
+              </a:rPr>
+              <a:t>22</a:t>
             </a:r>
           </a:p>
         </p:txBody>
@@ -18096,32 +19170,33 @@
           <p:nvPr/>
         </p:nvGraphicFramePr>
         <p:xfrm>
-          <a:off x="566928" y="2011680"/>
-          <a:ext cx="11055095" cy="4389120"/>
+          <a:off x="566928" y="2103120"/>
+          <a:ext cx="6583680" cy="3566160"/>
         </p:xfrm>
         <a:graphic>
           <a:graphicData uri="http://schemas.openxmlformats.org/drawingml/2006/table">
             <a:tbl>
               <a:tblPr/>
               <a:tblGrid>
-                <a:gridCol w="3979834"/>
-                <a:gridCol w="7075261"/>
+                <a:gridCol w="3017520"/>
+                <a:gridCol w="1783080"/>
+                <a:gridCol w="1783080"/>
               </a:tblGrid>
-              <a:tr h="365760">
-                <a:tc>
-                  <a:txBody>
-                    <a:bodyPr wrap="square"/>
+              <a:tr h="445770">
+                <a:tc>
+                  <a:txBody>
+                    <a:bodyPr/>
                     <a:lstStyle/>
                     <a:p>
                       <a:pPr algn="l"/>
                       <a:r>
-                        <a:rPr sz="1350" b="1">
+                        <a:rPr sz="1400" b="1">
                           <a:solidFill>
                             <a:srgbClr val="FFFFFF"/>
                           </a:solidFill>
                           <a:latin typeface="Calibri"/>
                         </a:rPr>
-                        <a:t>Artifact</a:t>
+                        <a:t>Statistic</a:t>
                       </a:r>
                     </a:p>
                   </a:txBody>
@@ -18133,43 +19208,208 @@
                 </a:tc>
                 <a:tc>
                   <a:txBody>
-                    <a:bodyPr wrap="square"/>
+                    <a:bodyPr/>
+                    <a:lstStyle/>
+                    <a:p>
+                      <a:pPr algn="ctr"/>
+                      <a:r>
+                        <a:rPr sz="1400" b="1">
+                          <a:solidFill>
+                            <a:srgbClr val="FFFFFF"/>
+                          </a:solidFill>
+                          <a:latin typeface="Calibri"/>
+                        </a:rPr>
+                        <a:t>Ensemble baseline</a:t>
+                      </a:r>
+                    </a:p>
+                  </a:txBody>
+                  <a:tcPr marL="88900" marR="88900" marT="38100" marB="38100" anchor="ctr">
+                    <a:solidFill>
+                      <a:srgbClr val="2B3A42"/>
+                    </a:solidFill>
+                  </a:tcPr>
+                </a:tc>
+                <a:tc>
+                  <a:txBody>
+                    <a:bodyPr/>
+                    <a:lstStyle/>
+                    <a:p>
+                      <a:pPr algn="ctr"/>
+                      <a:r>
+                        <a:rPr sz="1400" b="1">
+                          <a:solidFill>
+                            <a:srgbClr val="FFFFFF"/>
+                          </a:solidFill>
+                          <a:latin typeface="Calibri"/>
+                        </a:rPr>
+                        <a:t>Corridor 0.60 (shipped)</a:t>
+                      </a:r>
+                    </a:p>
+                  </a:txBody>
+                  <a:tcPr marL="88900" marR="88900" marT="38100" marB="38100" anchor="ctr">
+                    <a:solidFill>
+                      <a:srgbClr val="2B3A42"/>
+                    </a:solidFill>
+                  </a:tcPr>
+                </a:tc>
+              </a:tr>
+              <a:tr h="445770">
+                <a:tc>
+                  <a:txBody>
+                    <a:bodyPr/>
                     <a:lstStyle/>
                     <a:p>
                       <a:pPr algn="l"/>
                       <a:r>
-                        <a:rPr sz="1350" b="1">
-                          <a:solidFill>
-                            <a:srgbClr val="FFFFFF"/>
-                          </a:solidFill>
-                          <a:latin typeface="Calibri"/>
-                        </a:rPr>
-                        <a:t>Path / value</a:t>
-                      </a:r>
-                    </a:p>
-                  </a:txBody>
-                  <a:tcPr marL="88900" marR="88900" marT="38100" marB="38100" anchor="ctr">
-                    <a:solidFill>
-                      <a:srgbClr val="2B3A42"/>
+                        <a:rPr sz="1400" b="1">
+                          <a:solidFill>
+                            <a:srgbClr val="22262A"/>
+                          </a:solidFill>
+                          <a:latin typeface="Calibri"/>
+                        </a:rPr>
+                        <a:t>Trades</a:t>
+                      </a:r>
+                    </a:p>
+                  </a:txBody>
+                  <a:tcPr marL="88900" marR="88900" marT="38100" marB="38100" anchor="ctr">
+                    <a:solidFill>
+                      <a:srgbClr val="FFFFFF"/>
+                    </a:solidFill>
+                  </a:tcPr>
+                </a:tc>
+                <a:tc>
+                  <a:txBody>
+                    <a:bodyPr/>
+                    <a:lstStyle/>
+                    <a:p>
+                      <a:pPr algn="ctr"/>
+                      <a:r>
+                        <a:rPr sz="1400" b="0">
+                          <a:solidFill>
+                            <a:srgbClr val="22262A"/>
+                          </a:solidFill>
+                          <a:latin typeface="Calibri"/>
+                        </a:rPr>
+                        <a:t>48</a:t>
+                      </a:r>
+                    </a:p>
+                  </a:txBody>
+                  <a:tcPr marL="88900" marR="88900" marT="38100" marB="38100" anchor="ctr">
+                    <a:solidFill>
+                      <a:srgbClr val="FFFFFF"/>
+                    </a:solidFill>
+                  </a:tcPr>
+                </a:tc>
+                <a:tc>
+                  <a:txBody>
+                    <a:bodyPr/>
+                    <a:lstStyle/>
+                    <a:p>
+                      <a:pPr algn="ctr"/>
+                      <a:r>
+                        <a:rPr sz="1400" b="0">
+                          <a:solidFill>
+                            <a:srgbClr val="22262A"/>
+                          </a:solidFill>
+                          <a:latin typeface="Calibri"/>
+                        </a:rPr>
+                        <a:t>48</a:t>
+                      </a:r>
+                    </a:p>
+                  </a:txBody>
+                  <a:tcPr marL="88900" marR="88900" marT="38100" marB="38100" anchor="ctr">
+                    <a:solidFill>
+                      <a:srgbClr val="FFFFFF"/>
                     </a:solidFill>
                   </a:tcPr>
                 </a:tc>
               </a:tr>
-              <a:tr h="365760">
-                <a:tc>
-                  <a:txBody>
-                    <a:bodyPr wrap="square"/>
+              <a:tr h="445770">
+                <a:tc>
+                  <a:txBody>
+                    <a:bodyPr/>
                     <a:lstStyle/>
                     <a:p>
                       <a:pPr algn="l"/>
                       <a:r>
-                        <a:rPr sz="1350" b="1">
+                        <a:rPr sz="1400" b="1">
                           <a:solidFill>
                             <a:srgbClr val="22262A"/>
                           </a:solidFill>
                           <a:latin typeface="Calibri"/>
                         </a:rPr>
-                        <a:t>Goal run (Run A)</a:t>
+                        <a:t>Mean ($/oz)</a:t>
+                      </a:r>
+                    </a:p>
+                  </a:txBody>
+                  <a:tcPr marL="88900" marR="88900" marT="38100" marB="38100" anchor="ctr">
+                    <a:solidFill>
+                      <a:srgbClr val="F2F4F6"/>
+                    </a:solidFill>
+                  </a:tcPr>
+                </a:tc>
+                <a:tc>
+                  <a:txBody>
+                    <a:bodyPr/>
+                    <a:lstStyle/>
+                    <a:p>
+                      <a:pPr algn="ctr"/>
+                      <a:r>
+                        <a:rPr sz="1400" b="0">
+                          <a:solidFill>
+                            <a:srgbClr val="22262A"/>
+                          </a:solidFill>
+                          <a:latin typeface="Calibri"/>
+                        </a:rPr>
+                        <a:t>+22.09</a:t>
+                      </a:r>
+                    </a:p>
+                  </a:txBody>
+                  <a:tcPr marL="88900" marR="88900" marT="38100" marB="38100" anchor="ctr">
+                    <a:solidFill>
+                      <a:srgbClr val="F2F4F6"/>
+                    </a:solidFill>
+                  </a:tcPr>
+                </a:tc>
+                <a:tc>
+                  <a:txBody>
+                    <a:bodyPr/>
+                    <a:lstStyle/>
+                    <a:p>
+                      <a:pPr algn="ctr"/>
+                      <a:r>
+                        <a:rPr sz="1400" b="0">
+                          <a:solidFill>
+                            <a:srgbClr val="22262A"/>
+                          </a:solidFill>
+                          <a:latin typeface="Calibri"/>
+                        </a:rPr>
+                        <a:t>+23.10</a:t>
+                      </a:r>
+                    </a:p>
+                  </a:txBody>
+                  <a:tcPr marL="88900" marR="88900" marT="38100" marB="38100" anchor="ctr">
+                    <a:solidFill>
+                      <a:srgbClr val="F2F4F6"/>
+                    </a:solidFill>
+                  </a:tcPr>
+                </a:tc>
+              </a:tr>
+              <a:tr h="445770">
+                <a:tc>
+                  <a:txBody>
+                    <a:bodyPr/>
+                    <a:lstStyle/>
+                    <a:p>
+                      <a:pPr algn="l"/>
+                      <a:r>
+                        <a:rPr sz="1400" b="1">
+                          <a:solidFill>
+                            <a:srgbClr val="22262A"/>
+                          </a:solidFill>
+                          <a:latin typeface="Calibri"/>
+                        </a:rPr>
+                        <a:t>Std dev</a:t>
                       </a:r>
                     </a:p>
                   </a:txBody>
@@ -18181,18 +19421,137 @@
                 </a:tc>
                 <a:tc>
                   <a:txBody>
-                    <a:bodyPr wrap="square"/>
+                    <a:bodyPr/>
+                    <a:lstStyle/>
+                    <a:p>
+                      <a:pPr algn="ctr"/>
+                      <a:r>
+                        <a:rPr sz="1400" b="0">
+                          <a:solidFill>
+                            <a:srgbClr val="22262A"/>
+                          </a:solidFill>
+                          <a:latin typeface="Calibri"/>
+                        </a:rPr>
+                        <a:t>88.15</a:t>
+                      </a:r>
+                    </a:p>
+                  </a:txBody>
+                  <a:tcPr marL="88900" marR="88900" marT="38100" marB="38100" anchor="ctr">
+                    <a:solidFill>
+                      <a:srgbClr val="FFFFFF"/>
+                    </a:solidFill>
+                  </a:tcPr>
+                </a:tc>
+                <a:tc>
+                  <a:txBody>
+                    <a:bodyPr/>
+                    <a:lstStyle/>
+                    <a:p>
+                      <a:pPr algn="ctr"/>
+                      <a:r>
+                        <a:rPr sz="1400" b="0">
+                          <a:solidFill>
+                            <a:srgbClr val="22262A"/>
+                          </a:solidFill>
+                          <a:latin typeface="Calibri"/>
+                        </a:rPr>
+                        <a:t>60.41</a:t>
+                      </a:r>
+                    </a:p>
+                  </a:txBody>
+                  <a:tcPr marL="88900" marR="88900" marT="38100" marB="38100" anchor="ctr">
+                    <a:solidFill>
+                      <a:srgbClr val="FFFFFF"/>
+                    </a:solidFill>
+                  </a:tcPr>
+                </a:tc>
+              </a:tr>
+              <a:tr h="445770">
+                <a:tc>
+                  <a:txBody>
+                    <a:bodyPr/>
                     <a:lstStyle/>
                     <a:p>
                       <a:pPr algn="l"/>
                       <a:r>
-                        <a:rPr sz="1350" b="0">
+                        <a:rPr sz="1400" b="1">
                           <a:solidFill>
                             <a:srgbClr val="22262A"/>
                           </a:solidFill>
                           <a:latin typeface="Calibri"/>
                         </a:rPr>
-                        <a:t>artifacts/walk_forward/aversion6_24trade_final.csv</a:t>
+                        <a:t>Min</a:t>
+                      </a:r>
+                    </a:p>
+                  </a:txBody>
+                  <a:tcPr marL="88900" marR="88900" marT="38100" marB="38100" anchor="ctr">
+                    <a:solidFill>
+                      <a:srgbClr val="F2F4F6"/>
+                    </a:solidFill>
+                  </a:tcPr>
+                </a:tc>
+                <a:tc>
+                  <a:txBody>
+                    <a:bodyPr/>
+                    <a:lstStyle/>
+                    <a:p>
+                      <a:pPr algn="ctr"/>
+                      <a:r>
+                        <a:rPr sz="1400" b="0">
+                          <a:solidFill>
+                            <a:srgbClr val="22262A"/>
+                          </a:solidFill>
+                          <a:latin typeface="Calibri"/>
+                        </a:rPr>
+                        <a:t>−143.70</a:t>
+                      </a:r>
+                    </a:p>
+                  </a:txBody>
+                  <a:tcPr marL="88900" marR="88900" marT="38100" marB="38100" anchor="ctr">
+                    <a:solidFill>
+                      <a:srgbClr val="F2F4F6"/>
+                    </a:solidFill>
+                  </a:tcPr>
+                </a:tc>
+                <a:tc>
+                  <a:txBody>
+                    <a:bodyPr/>
+                    <a:lstStyle/>
+                    <a:p>
+                      <a:pPr algn="ctr"/>
+                      <a:r>
+                        <a:rPr sz="1400" b="0">
+                          <a:solidFill>
+                            <a:srgbClr val="22262A"/>
+                          </a:solidFill>
+                          <a:latin typeface="Calibri"/>
+                        </a:rPr>
+                        <a:t>−102.22</a:t>
+                      </a:r>
+                    </a:p>
+                  </a:txBody>
+                  <a:tcPr marL="88900" marR="88900" marT="38100" marB="38100" anchor="ctr">
+                    <a:solidFill>
+                      <a:srgbClr val="F2F4F6"/>
+                    </a:solidFill>
+                  </a:tcPr>
+                </a:tc>
+              </a:tr>
+              <a:tr h="445770">
+                <a:tc>
+                  <a:txBody>
+                    <a:bodyPr/>
+                    <a:lstStyle/>
+                    <a:p>
+                      <a:pPr algn="l"/>
+                      <a:r>
+                        <a:rPr sz="1400" b="1">
+                          <a:solidFill>
+                            <a:srgbClr val="22262A"/>
+                          </a:solidFill>
+                          <a:latin typeface="Calibri"/>
+                        </a:rPr>
+                        <a:t>Median</a:t>
                       </a:r>
                     </a:p>
                   </a:txBody>
@@ -18202,22 +19561,68 @@
                     </a:solidFill>
                   </a:tcPr>
                 </a:tc>
+                <a:tc>
+                  <a:txBody>
+                    <a:bodyPr/>
+                    <a:lstStyle/>
+                    <a:p>
+                      <a:pPr algn="ctr"/>
+                      <a:r>
+                        <a:rPr sz="1400" b="0">
+                          <a:solidFill>
+                            <a:srgbClr val="22262A"/>
+                          </a:solidFill>
+                          <a:latin typeface="Calibri"/>
+                        </a:rPr>
+                        <a:t>+7.83</a:t>
+                      </a:r>
+                    </a:p>
+                  </a:txBody>
+                  <a:tcPr marL="88900" marR="88900" marT="38100" marB="38100" anchor="ctr">
+                    <a:solidFill>
+                      <a:srgbClr val="FFFFFF"/>
+                    </a:solidFill>
+                  </a:tcPr>
+                </a:tc>
+                <a:tc>
+                  <a:txBody>
+                    <a:bodyPr/>
+                    <a:lstStyle/>
+                    <a:p>
+                      <a:pPr algn="ctr"/>
+                      <a:r>
+                        <a:rPr sz="1400" b="0">
+                          <a:solidFill>
+                            <a:srgbClr val="22262A"/>
+                          </a:solidFill>
+                          <a:latin typeface="Calibri"/>
+                        </a:rPr>
+                        <a:t>+16.57</a:t>
+                      </a:r>
+                    </a:p>
+                  </a:txBody>
+                  <a:tcPr marL="88900" marR="88900" marT="38100" marB="38100" anchor="ctr">
+                    <a:solidFill>
+                      <a:srgbClr val="FFFFFF"/>
+                    </a:solidFill>
+                  </a:tcPr>
+                </a:tc>
               </a:tr>
-              <a:tr h="365760">
-                <a:tc>
-                  <a:txBody>
-                    <a:bodyPr wrap="square"/>
+              <a:tr h="445770">
+                <a:tc>
+                  <a:txBody>
+                    <a:bodyPr/>
                     <a:lstStyle/>
                     <a:p>
                       <a:pPr algn="l"/>
                       <a:r>
-                        <a:rPr sz="1350" b="1">
+                        <a:rPr sz="1400" b="1">
                           <a:solidFill>
                             <a:srgbClr val="22262A"/>
                           </a:solidFill>
                           <a:latin typeface="Calibri"/>
                         </a:rPr>
-                        <a:t>Re-verify (Run B)</a:t>
+                        <a:t>Causal-bound PASS</a:t>
                       </a:r>
                     </a:p>
                   </a:txBody>
@@ -18229,43 +19634,89 @@
                 </a:tc>
                 <a:tc>
                   <a:txBody>
-                    <a:bodyPr wrap="square"/>
+                    <a:bodyPr/>
+                    <a:lstStyle/>
+                    <a:p>
+                      <a:pPr algn="ctr"/>
+                      <a:r>
+                        <a:rPr sz="1400" b="0">
+                          <a:solidFill>
+                            <a:srgbClr val="22262A"/>
+                          </a:solidFill>
+                          <a:latin typeface="Calibri"/>
+                        </a:rPr>
+                        <a:t>48 / 48</a:t>
+                      </a:r>
+                    </a:p>
+                  </a:txBody>
+                  <a:tcPr marL="88900" marR="88900" marT="38100" marB="38100" anchor="ctr">
+                    <a:solidFill>
+                      <a:srgbClr val="F2F4F6"/>
+                    </a:solidFill>
+                  </a:tcPr>
+                </a:tc>
+                <a:tc>
+                  <a:txBody>
+                    <a:bodyPr/>
+                    <a:lstStyle/>
+                    <a:p>
+                      <a:pPr algn="ctr"/>
+                      <a:r>
+                        <a:rPr sz="1400" b="0">
+                          <a:solidFill>
+                            <a:srgbClr val="22262A"/>
+                          </a:solidFill>
+                          <a:latin typeface="Calibri"/>
+                        </a:rPr>
+                        <a:t>48 / 48</a:t>
+                      </a:r>
+                    </a:p>
+                  </a:txBody>
+                  <a:tcPr marL="88900" marR="88900" marT="38100" marB="38100" anchor="ctr">
+                    <a:solidFill>
+                      <a:srgbClr val="F2F4F6"/>
+                    </a:solidFill>
+                  </a:tcPr>
+                </a:tc>
+              </a:tr>
+              <a:tr h="445770">
+                <a:tc>
+                  <a:txBody>
+                    <a:bodyPr/>
                     <a:lstStyle/>
                     <a:p>
                       <a:pPr algn="l"/>
                       <a:r>
-                        <a:rPr sz="1350" b="0">
+                        <a:rPr sz="1400" b="1">
                           <a:solidFill>
                             <a:srgbClr val="22262A"/>
                           </a:solidFill>
                           <a:latin typeface="Calibri"/>
                         </a:rPr>
-                        <a:t>artifacts/walk_forward/aversion6_reverify_committed_pipeline.csv</a:t>
-                      </a:r>
-                    </a:p>
-                  </a:txBody>
-                  <a:tcPr marL="88900" marR="88900" marT="38100" marB="38100" anchor="ctr">
-                    <a:solidFill>
-                      <a:srgbClr val="F2F4F6"/>
-                    </a:solidFill>
-                  </a:tcPr>
-                </a:tc>
-              </a:tr>
-              <a:tr h="365760">
-                <a:tc>
-                  <a:txBody>
-                    <a:bodyPr wrap="square"/>
-                    <a:lstStyle/>
-                    <a:p>
-                      <a:pPr algn="l"/>
-                      <a:r>
-                        <a:rPr sz="1350" b="1">
+                        <a:t>Corridor breaches</a:t>
+                      </a:r>
+                    </a:p>
+                  </a:txBody>
+                  <a:tcPr marL="88900" marR="88900" marT="38100" marB="38100" anchor="ctr">
+                    <a:solidFill>
+                      <a:srgbClr val="FFFFFF"/>
+                    </a:solidFill>
+                  </a:tcPr>
+                </a:tc>
+                <a:tc>
+                  <a:txBody>
+                    <a:bodyPr/>
+                    <a:lstStyle/>
+                    <a:p>
+                      <a:pPr algn="ctr"/>
+                      <a:r>
+                        <a:rPr sz="1400" b="0">
                           <a:solidFill>
                             <a:srgbClr val="22262A"/>
                           </a:solidFill>
                           <a:latin typeface="Calibri"/>
                         </a:rPr>
-                        <a:t>Attribution baseline (av 2.5)</a:t>
+                        <a:t>—</a:t>
                       </a:r>
                     </a:p>
                   </a:txBody>
@@ -18277,402 +19728,18 @@
                 </a:tc>
                 <a:tc>
                   <a:txBody>
-                    <a:bodyPr wrap="square"/>
-                    <a:lstStyle/>
-                    <a:p>
-                      <a:pPr algn="l"/>
-                      <a:r>
-                        <a:rPr sz="1350" b="0">
+                    <a:bodyPr/>
+                    <a:lstStyle/>
+                    <a:p>
+                      <a:pPr algn="ctr"/>
+                      <a:r>
+                        <a:rPr sz="1400" b="0">
                           <a:solidFill>
                             <a:srgbClr val="22262A"/>
                           </a:solidFill>
                           <a:latin typeface="Calibri"/>
                         </a:rPr>
-                        <a:t>la_attribution.csv</a:t>
-                      </a:r>
-                    </a:p>
-                  </a:txBody>
-                  <a:tcPr marL="88900" marR="88900" marT="38100" marB="38100" anchor="ctr">
-                    <a:solidFill>
-                      <a:srgbClr val="FFFFFF"/>
-                    </a:solidFill>
-                  </a:tcPr>
-                </a:tc>
-              </a:tr>
-              <a:tr h="365760">
-                <a:tc>
-                  <a:txBody>
-                    <a:bodyPr wrap="square"/>
-                    <a:lstStyle/>
-                    <a:p>
-                      <a:pPr algn="l"/>
-                      <a:r>
-                        <a:rPr sz="1350" b="1">
-                          <a:solidFill>
-                            <a:srgbClr val="22262A"/>
-                          </a:solidFill>
-                          <a:latin typeface="Calibri"/>
-                        </a:rPr>
-                        <a:t>Raw data</a:t>
-                      </a:r>
-                    </a:p>
-                  </a:txBody>
-                  <a:tcPr marL="88900" marR="88900" marT="38100" marB="38100" anchor="ctr">
-                    <a:solidFill>
-                      <a:srgbClr val="F2F4F6"/>
-                    </a:solidFill>
-                  </a:tcPr>
-                </a:tc>
-                <a:tc>
-                  <a:txBody>
-                    <a:bodyPr wrap="square"/>
-                    <a:lstStyle/>
-                    <a:p>
-                      <a:pPr algn="l"/>
-                      <a:r>
-                        <a:rPr sz="1350" b="0">
-                          <a:solidFill>
-                            <a:srgbClr val="22262A"/>
-                          </a:solidFill>
-                          <a:latin typeface="Calibri"/>
-                        </a:rPr>
-                        <a:t>data/pl_exp.csv  (3,856 rows, 2009–2025)</a:t>
-                      </a:r>
-                    </a:p>
-                  </a:txBody>
-                  <a:tcPr marL="88900" marR="88900" marT="38100" marB="38100" anchor="ctr">
-                    <a:solidFill>
-                      <a:srgbClr val="F2F4F6"/>
-                    </a:solidFill>
-                  </a:tcPr>
-                </a:tc>
-              </a:tr>
-              <a:tr h="365760">
-                <a:tc>
-                  <a:txBody>
-                    <a:bodyPr wrap="square"/>
-                    <a:lstStyle/>
-                    <a:p>
-                      <a:pPr algn="l"/>
-                      <a:r>
-                        <a:rPr sz="1350" b="1">
-                          <a:solidFill>
-                            <a:srgbClr val="22262A"/>
-                          </a:solidFill>
-                          <a:latin typeface="Calibri"/>
-                        </a:rPr>
-                        <a:t>Shipping config</a:t>
-                      </a:r>
-                    </a:p>
-                  </a:txBody>
-                  <a:tcPr marL="88900" marR="88900" marT="38100" marB="38100" anchor="ctr">
-                    <a:solidFill>
-                      <a:srgbClr val="FFFFFF"/>
-                    </a:solidFill>
-                  </a:tcPr>
-                </a:tc>
-                <a:tc>
-                  <a:txBody>
-                    <a:bodyPr wrap="square"/>
-                    <a:lstStyle/>
-                    <a:p>
-                      <a:pPr algn="l"/>
-                      <a:r>
-                        <a:rPr sz="1350" b="0">
-                          <a:solidFill>
-                            <a:srgbClr val="22262A"/>
-                          </a:solidFill>
-                          <a:latin typeface="Calibri"/>
-                        </a:rPr>
-                        <a:t>platinum_hedge_shipping.json  (Huber, aversion 6, δ 1)</a:t>
-                      </a:r>
-                    </a:p>
-                  </a:txBody>
-                  <a:tcPr marL="88900" marR="88900" marT="38100" marB="38100" anchor="ctr">
-                    <a:solidFill>
-                      <a:srgbClr val="FFFFFF"/>
-                    </a:solidFill>
-                  </a:tcPr>
-                </a:tc>
-              </a:tr>
-              <a:tr h="365760">
-                <a:tc>
-                  <a:txBody>
-                    <a:bodyPr wrap="square"/>
-                    <a:lstStyle/>
-                    <a:p>
-                      <a:pPr algn="l"/>
-                      <a:r>
-                        <a:rPr sz="1350" b="1">
-                          <a:solidFill>
-                            <a:srgbClr val="22262A"/>
-                          </a:solidFill>
-                          <a:latin typeface="Calibri"/>
-                        </a:rPr>
-                        <a:t>Validation notebook</a:t>
-                      </a:r>
-                    </a:p>
-                  </a:txBody>
-                  <a:tcPr marL="88900" marR="88900" marT="38100" marB="38100" anchor="ctr">
-                    <a:solidFill>
-                      <a:srgbClr val="F2F4F6"/>
-                    </a:solidFill>
-                  </a:tcPr>
-                </a:tc>
-                <a:tc>
-                  <a:txBody>
-                    <a:bodyPr wrap="square"/>
-                    <a:lstStyle/>
-                    <a:p>
-                      <a:pPr algn="l"/>
-                      <a:r>
-                        <a:rPr sz="1350" b="0">
-                          <a:solidFill>
-                            <a:srgbClr val="22262A"/>
-                          </a:solidFill>
-                          <a:latin typeface="Calibri"/>
-                        </a:rPr>
-                        <a:t>platinum_hedge_validation.ipynb  (11 / 11 cells green)</a:t>
-                      </a:r>
-                    </a:p>
-                  </a:txBody>
-                  <a:tcPr marL="88900" marR="88900" marT="38100" marB="38100" anchor="ctr">
-                    <a:solidFill>
-                      <a:srgbClr val="F2F4F6"/>
-                    </a:solidFill>
-                  </a:tcPr>
-                </a:tc>
-              </a:tr>
-              <a:tr h="365760">
-                <a:tc>
-                  <a:txBody>
-                    <a:bodyPr wrap="square"/>
-                    <a:lstStyle/>
-                    <a:p>
-                      <a:pPr algn="l"/>
-                      <a:r>
-                        <a:rPr sz="1350" b="1">
-                          <a:solidFill>
-                            <a:srgbClr val="22262A"/>
-                          </a:solidFill>
-                          <a:latin typeface="Calibri"/>
-                        </a:rPr>
-                        <a:t>Test suite</a:t>
-                      </a:r>
-                    </a:p>
-                  </a:txBody>
-                  <a:tcPr marL="88900" marR="88900" marT="38100" marB="38100" anchor="ctr">
-                    <a:solidFill>
-                      <a:srgbClr val="FFFFFF"/>
-                    </a:solidFill>
-                  </a:tcPr>
-                </a:tc>
-                <a:tc>
-                  <a:txBody>
-                    <a:bodyPr wrap="square"/>
-                    <a:lstStyle/>
-                    <a:p>
-                      <a:pPr algn="l"/>
-                      <a:r>
-                        <a:rPr sz="1350" b="0">
-                          <a:solidFill>
-                            <a:srgbClr val="22262A"/>
-                          </a:solidFill>
-                          <a:latin typeface="Calibri"/>
-                        </a:rPr>
-                        <a:t>65 tests  (bit-gates: fixture V_0, stepper floats)</a:t>
-                      </a:r>
-                    </a:p>
-                  </a:txBody>
-                  <a:tcPr marL="88900" marR="88900" marT="38100" marB="38100" anchor="ctr">
-                    <a:solidFill>
-                      <a:srgbClr val="FFFFFF"/>
-                    </a:solidFill>
-                  </a:tcPr>
-                </a:tc>
-              </a:tr>
-              <a:tr h="365760">
-                <a:tc>
-                  <a:txBody>
-                    <a:bodyPr wrap="square"/>
-                    <a:lstStyle/>
-                    <a:p>
-                      <a:pPr algn="l"/>
-                      <a:r>
-                        <a:rPr sz="1350" b="1">
-                          <a:solidFill>
-                            <a:srgbClr val="22262A"/>
-                          </a:solidFill>
-                          <a:latin typeface="Calibri"/>
-                        </a:rPr>
-                        <a:t>Seed</a:t>
-                      </a:r>
-                    </a:p>
-                  </a:txBody>
-                  <a:tcPr marL="88900" marR="88900" marT="38100" marB="38100" anchor="ctr">
-                    <a:solidFill>
-                      <a:srgbClr val="F2F4F6"/>
-                    </a:solidFill>
-                  </a:tcPr>
-                </a:tc>
-                <a:tc>
-                  <a:txBody>
-                    <a:bodyPr wrap="square"/>
-                    <a:lstStyle/>
-                    <a:p>
-                      <a:pPr algn="l"/>
-                      <a:r>
-                        <a:rPr sz="1350" b="0">
-                          <a:solidFill>
-                            <a:srgbClr val="22262A"/>
-                          </a:solidFill>
-                          <a:latin typeface="Calibri"/>
-                        </a:rPr>
-                        <a:t>7  (single seed per trade)</a:t>
-                      </a:r>
-                    </a:p>
-                  </a:txBody>
-                  <a:tcPr marL="88900" marR="88900" marT="38100" marB="38100" anchor="ctr">
-                    <a:solidFill>
-                      <a:srgbClr val="F2F4F6"/>
-                    </a:solidFill>
-                  </a:tcPr>
-                </a:tc>
-              </a:tr>
-              <a:tr h="365760">
-                <a:tc>
-                  <a:txBody>
-                    <a:bodyPr wrap="square"/>
-                    <a:lstStyle/>
-                    <a:p>
-                      <a:pPr algn="l"/>
-                      <a:r>
-                        <a:rPr sz="1350" b="1">
-                          <a:solidFill>
-                            <a:srgbClr val="22262A"/>
-                          </a:solidFill>
-                          <a:latin typeface="Calibri"/>
-                        </a:rPr>
-                        <a:t>Commit — goal run</a:t>
-                      </a:r>
-                    </a:p>
-                  </a:txBody>
-                  <a:tcPr marL="88900" marR="88900" marT="38100" marB="38100" anchor="ctr">
-                    <a:solidFill>
-                      <a:srgbClr val="FFFFFF"/>
-                    </a:solidFill>
-                  </a:tcPr>
-                </a:tc>
-                <a:tc>
-                  <a:txBody>
-                    <a:bodyPr wrap="square"/>
-                    <a:lstStyle/>
-                    <a:p>
-                      <a:pPr algn="l"/>
-                      <a:r>
-                        <a:rPr sz="1350" b="0">
-                          <a:solidFill>
-                            <a:srgbClr val="22262A"/>
-                          </a:solidFill>
-                          <a:latin typeface="Calibri"/>
-                        </a:rPr>
-                        <a:t>3008d3c</a:t>
-                      </a:r>
-                    </a:p>
-                  </a:txBody>
-                  <a:tcPr marL="88900" marR="88900" marT="38100" marB="38100" anchor="ctr">
-                    <a:solidFill>
-                      <a:srgbClr val="FFFFFF"/>
-                    </a:solidFill>
-                  </a:tcPr>
-                </a:tc>
-              </a:tr>
-              <a:tr h="365760">
-                <a:tc>
-                  <a:txBody>
-                    <a:bodyPr wrap="square"/>
-                    <a:lstStyle/>
-                    <a:p>
-                      <a:pPr algn="l"/>
-                      <a:r>
-                        <a:rPr sz="1350" b="1">
-                          <a:solidFill>
-                            <a:srgbClr val="22262A"/>
-                          </a:solidFill>
-                          <a:latin typeface="Calibri"/>
-                        </a:rPr>
-                        <a:t>Commit — re-verify pipeline</a:t>
-                      </a:r>
-                    </a:p>
-                  </a:txBody>
-                  <a:tcPr marL="88900" marR="88900" marT="38100" marB="38100" anchor="ctr">
-                    <a:solidFill>
-                      <a:srgbClr val="F2F4F6"/>
-                    </a:solidFill>
-                  </a:tcPr>
-                </a:tc>
-                <a:tc>
-                  <a:txBody>
-                    <a:bodyPr wrap="square"/>
-                    <a:lstStyle/>
-                    <a:p>
-                      <a:pPr algn="l"/>
-                      <a:r>
-                        <a:rPr sz="1350" b="0">
-                          <a:solidFill>
-                            <a:srgbClr val="22262A"/>
-                          </a:solidFill>
-                          <a:latin typeface="Calibri"/>
-                        </a:rPr>
-                        <a:t>cfc11da</a:t>
-                      </a:r>
-                    </a:p>
-                  </a:txBody>
-                  <a:tcPr marL="88900" marR="88900" marT="38100" marB="38100" anchor="ctr">
-                    <a:solidFill>
-                      <a:srgbClr val="F2F4F6"/>
-                    </a:solidFill>
-                  </a:tcPr>
-                </a:tc>
-              </a:tr>
-              <a:tr h="365760">
-                <a:tc>
-                  <a:txBody>
-                    <a:bodyPr wrap="square"/>
-                    <a:lstStyle/>
-                    <a:p>
-                      <a:pPr algn="l"/>
-                      <a:r>
-                        <a:rPr sz="1350" b="1">
-                          <a:solidFill>
-                            <a:srgbClr val="22262A"/>
-                          </a:solidFill>
-                          <a:latin typeface="Calibri"/>
-                        </a:rPr>
-                        <a:t>Commit — production-trust audit</a:t>
-                      </a:r>
-                    </a:p>
-                  </a:txBody>
-                  <a:tcPr marL="88900" marR="88900" marT="38100" marB="38100" anchor="ctr">
-                    <a:solidFill>
-                      <a:srgbClr val="FFFFFF"/>
-                    </a:solidFill>
-                  </a:tcPr>
-                </a:tc>
-                <a:tc>
-                  <a:txBody>
-                    <a:bodyPr wrap="square"/>
-                    <a:lstStyle/>
-                    <a:p>
-                      <a:pPr algn="l"/>
-                      <a:r>
-                        <a:rPr sz="1350" b="0">
-                          <a:solidFill>
-                            <a:srgbClr val="22262A"/>
-                          </a:solidFill>
-                          <a:latin typeface="Calibri"/>
-                        </a:rPr>
-                        <a:t>0e2bd46</a:t>
+                        <a:t>0 / 144</a:t>
                       </a:r>
                     </a:p>
                   </a:txBody>
@@ -18687,6 +19754,674 @@
           </a:graphicData>
         </a:graphic>
       </p:graphicFrame>
+      <p:graphicFrame>
+        <p:nvGraphicFramePr>
+          <p:cNvPr id="8" name="Table 7"/>
+          <p:cNvGraphicFramePr>
+            <a:graphicFrameLocks noGrp="1"/>
+          </p:cNvGraphicFramePr>
+          <p:nvPr/>
+        </p:nvGraphicFramePr>
+        <p:xfrm>
+          <a:off x="7406640" y="2103120"/>
+          <a:ext cx="4215384" cy="2377440"/>
+        </p:xfrm>
+        <a:graphic>
+          <a:graphicData uri="http://schemas.openxmlformats.org/drawingml/2006/table">
+            <a:tbl>
+              <a:tblPr/>
+              <a:tblGrid>
+                <a:gridCol w="2606040"/>
+                <a:gridCol w="1609344"/>
+              </a:tblGrid>
+              <a:tr h="475488">
+                <a:tc>
+                  <a:txBody>
+                    <a:bodyPr/>
+                    <a:lstStyle/>
+                    <a:p>
+                      <a:pPr algn="l"/>
+                      <a:r>
+                        <a:rPr sz="1400" b="1">
+                          <a:solidFill>
+                            <a:srgbClr val="FFFFFF"/>
+                          </a:solidFill>
+                          <a:latin typeface="Calibri"/>
+                        </a:rPr>
+                        <a:t>Calendar year</a:t>
+                      </a:r>
+                    </a:p>
+                  </a:txBody>
+                  <a:tcPr marL="88900" marR="88900" marT="38100" marB="38100" anchor="ctr">
+                    <a:solidFill>
+                      <a:srgbClr val="2B3A42"/>
+                    </a:solidFill>
+                  </a:tcPr>
+                </a:tc>
+                <a:tc>
+                  <a:txBody>
+                    <a:bodyPr/>
+                    <a:lstStyle/>
+                    <a:p>
+                      <a:pPr algn="ctr"/>
+                      <a:r>
+                        <a:rPr sz="1400" b="1">
+                          <a:solidFill>
+                            <a:srgbClr val="FFFFFF"/>
+                          </a:solidFill>
+                          <a:latin typeface="Calibri"/>
+                        </a:rPr>
+                        <a:t>Baseline mean</a:t>
+                      </a:r>
+                    </a:p>
+                  </a:txBody>
+                  <a:tcPr marL="88900" marR="88900" marT="38100" marB="38100" anchor="ctr">
+                    <a:solidFill>
+                      <a:srgbClr val="2B3A42"/>
+                    </a:solidFill>
+                  </a:tcPr>
+                </a:tc>
+              </a:tr>
+              <a:tr h="475488">
+                <a:tc>
+                  <a:txBody>
+                    <a:bodyPr/>
+                    <a:lstStyle/>
+                    <a:p>
+                      <a:pPr algn="l"/>
+                      <a:r>
+                        <a:rPr sz="1400" b="1">
+                          <a:solidFill>
+                            <a:srgbClr val="22262A"/>
+                          </a:solidFill>
+                          <a:latin typeface="Calibri"/>
+                        </a:rPr>
+                        <a:t>2020  (COVID)</a:t>
+                      </a:r>
+                    </a:p>
+                  </a:txBody>
+                  <a:tcPr marL="88900" marR="88900" marT="38100" marB="38100" anchor="ctr">
+                    <a:solidFill>
+                      <a:srgbClr val="FFFFFF"/>
+                    </a:solidFill>
+                  </a:tcPr>
+                </a:tc>
+                <a:tc>
+                  <a:txBody>
+                    <a:bodyPr/>
+                    <a:lstStyle/>
+                    <a:p>
+                      <a:pPr algn="ctr"/>
+                      <a:r>
+                        <a:rPr sz="1400" b="0">
+                          <a:solidFill>
+                            <a:srgbClr val="22262A"/>
+                          </a:solidFill>
+                          <a:latin typeface="Calibri"/>
+                        </a:rPr>
+                        <a:t>+27.54</a:t>
+                      </a:r>
+                    </a:p>
+                  </a:txBody>
+                  <a:tcPr marL="88900" marR="88900" marT="38100" marB="38100" anchor="ctr">
+                    <a:solidFill>
+                      <a:srgbClr val="FFFFFF"/>
+                    </a:solidFill>
+                  </a:tcPr>
+                </a:tc>
+              </a:tr>
+              <a:tr h="475488">
+                <a:tc>
+                  <a:txBody>
+                    <a:bodyPr/>
+                    <a:lstStyle/>
+                    <a:p>
+                      <a:pPr algn="l"/>
+                      <a:r>
+                        <a:rPr sz="1400" b="1">
+                          <a:solidFill>
+                            <a:srgbClr val="22262A"/>
+                          </a:solidFill>
+                          <a:latin typeface="Calibri"/>
+                        </a:rPr>
+                        <a:t>2021</a:t>
+                      </a:r>
+                    </a:p>
+                  </a:txBody>
+                  <a:tcPr marL="88900" marR="88900" marT="38100" marB="38100" anchor="ctr">
+                    <a:solidFill>
+                      <a:srgbClr val="F2F4F6"/>
+                    </a:solidFill>
+                  </a:tcPr>
+                </a:tc>
+                <a:tc>
+                  <a:txBody>
+                    <a:bodyPr/>
+                    <a:lstStyle/>
+                    <a:p>
+                      <a:pPr algn="ctr"/>
+                      <a:r>
+                        <a:rPr sz="1400" b="0">
+                          <a:solidFill>
+                            <a:srgbClr val="22262A"/>
+                          </a:solidFill>
+                          <a:latin typeface="Calibri"/>
+                        </a:rPr>
+                        <a:t>+24.29</a:t>
+                      </a:r>
+                    </a:p>
+                  </a:txBody>
+                  <a:tcPr marL="88900" marR="88900" marT="38100" marB="38100" anchor="ctr">
+                    <a:solidFill>
+                      <a:srgbClr val="F2F4F6"/>
+                    </a:solidFill>
+                  </a:tcPr>
+                </a:tc>
+              </a:tr>
+              <a:tr h="475488">
+                <a:tc>
+                  <a:txBody>
+                    <a:bodyPr/>
+                    <a:lstStyle/>
+                    <a:p>
+                      <a:pPr algn="l"/>
+                      <a:r>
+                        <a:rPr sz="1400" b="1">
+                          <a:solidFill>
+                            <a:srgbClr val="22262A"/>
+                          </a:solidFill>
+                          <a:latin typeface="Calibri"/>
+                        </a:rPr>
+                        <a:t>2022</a:t>
+                      </a:r>
+                    </a:p>
+                  </a:txBody>
+                  <a:tcPr marL="88900" marR="88900" marT="38100" marB="38100" anchor="ctr">
+                    <a:solidFill>
+                      <a:srgbClr val="FFFFFF"/>
+                    </a:solidFill>
+                  </a:tcPr>
+                </a:tc>
+                <a:tc>
+                  <a:txBody>
+                    <a:bodyPr/>
+                    <a:lstStyle/>
+                    <a:p>
+                      <a:pPr algn="ctr"/>
+                      <a:r>
+                        <a:rPr sz="1400" b="0">
+                          <a:solidFill>
+                            <a:srgbClr val="22262A"/>
+                          </a:solidFill>
+                          <a:latin typeface="Calibri"/>
+                        </a:rPr>
+                        <a:t>−4.52</a:t>
+                      </a:r>
+                    </a:p>
+                  </a:txBody>
+                  <a:tcPr marL="88900" marR="88900" marT="38100" marB="38100" anchor="ctr">
+                    <a:solidFill>
+                      <a:srgbClr val="FFFFFF"/>
+                    </a:solidFill>
+                  </a:tcPr>
+                </a:tc>
+              </a:tr>
+              <a:tr h="475488">
+                <a:tc>
+                  <a:txBody>
+                    <a:bodyPr/>
+                    <a:lstStyle/>
+                    <a:p>
+                      <a:pPr algn="l"/>
+                      <a:r>
+                        <a:rPr sz="1400" b="1">
+                          <a:solidFill>
+                            <a:srgbClr val="22262A"/>
+                          </a:solidFill>
+                          <a:latin typeface="Calibri"/>
+                        </a:rPr>
+                        <a:t>2023</a:t>
+                      </a:r>
+                    </a:p>
+                  </a:txBody>
+                  <a:tcPr marL="88900" marR="88900" marT="38100" marB="38100" anchor="ctr">
+                    <a:solidFill>
+                      <a:srgbClr val="F2F4F6"/>
+                    </a:solidFill>
+                  </a:tcPr>
+                </a:tc>
+                <a:tc>
+                  <a:txBody>
+                    <a:bodyPr/>
+                    <a:lstStyle/>
+                    <a:p>
+                      <a:pPr algn="ctr"/>
+                      <a:r>
+                        <a:rPr sz="1400" b="0">
+                          <a:solidFill>
+                            <a:srgbClr val="22262A"/>
+                          </a:solidFill>
+                          <a:latin typeface="Calibri"/>
+                        </a:rPr>
+                        <a:t>+41.07</a:t>
+                      </a:r>
+                    </a:p>
+                  </a:txBody>
+                  <a:tcPr marL="88900" marR="88900" marT="38100" marB="38100" anchor="ctr">
+                    <a:solidFill>
+                      <a:srgbClr val="F2F4F6"/>
+                    </a:solidFill>
+                  </a:tcPr>
+                </a:tc>
+              </a:tr>
+            </a:tbl>
+          </a:graphicData>
+        </a:graphic>
+      </p:graphicFrame>
+      <p:sp>
+        <p:nvSpPr>
+          <p:cNvPr id="9" name="TextBox 8"/>
+          <p:cNvSpPr txBox="1"/>
+          <p:nvPr/>
+        </p:nvSpPr>
+        <p:spPr>
+          <a:xfrm>
+            <a:off x="7406640" y="4663440"/>
+            <a:ext cx="4215384" cy="1463040"/>
+          </a:xfrm>
+          <a:prstGeom prst="rect">
+            <a:avLst/>
+          </a:prstGeom>
+          <a:noFill/>
+        </p:spPr>
+        <p:txBody>
+          <a:bodyPr wrap="square" lIns="0" rIns="0" tIns="0" bIns="0">
+            <a:spAutoFit/>
+          </a:bodyPr>
+          <a:lstStyle/>
+          <a:p>
+            <a:pPr algn="l"/>
+            <a:r>
+              <a:rPr sz="1350" b="0">
+                <a:solidFill>
+                  <a:srgbClr val="2B3A42"/>
+                </a:solidFill>
+                <a:latin typeface="Calibri"/>
+              </a:rPr>
+              <a:t>2020 stayed positive through the crash · 2022 the flat year (margins compressed) · 2023 strongest.</a:t>
+            </a:r>
+          </a:p>
+        </p:txBody>
+      </p:sp>
+      <p:sp>
+        <p:nvSpPr>
+          <p:cNvPr id="10" name="TextBox 9"/>
+          <p:cNvSpPr txBox="1"/>
+          <p:nvPr/>
+        </p:nvSpPr>
+        <p:spPr>
+          <a:xfrm>
+            <a:off x="566928" y="6473952"/>
+            <a:ext cx="11055096" cy="274320"/>
+          </a:xfrm>
+          <a:prstGeom prst="rect">
+            <a:avLst/>
+          </a:prstGeom>
+          <a:noFill/>
+        </p:spPr>
+        <p:txBody>
+          <a:bodyPr wrap="square" lIns="0" rIns="0" tIns="0" bIns="0">
+            <a:spAutoFit/>
+          </a:bodyPr>
+          <a:lstStyle/>
+          <a:p>
+            <a:pPr algn="l"/>
+            <a:r>
+              <a:rPr sz="950" b="0">
+                <a:solidFill>
+                  <a:srgbClr val="6B7278"/>
+                </a:solidFill>
+                <a:latin typeface="Calibri"/>
+              </a:rPr>
+              <a:t>artifacts/walk_forward/full48_baseline.csv · full48_corridor_rolls.csv. Every row bounded below by no-hedge, above by perfect-foresight on the traded leg.</a:t>
+            </a:r>
+          </a:p>
+        </p:txBody>
+      </p:sp>
+    </p:spTree>
+  </p:cSld>
+  <p:clrMapOvr>
+    <a:masterClrMapping/>
+  </p:clrMapOvr>
+</p:sld>
+</file>
+
+<file path=ppt/slides/slide32.xml><?xml version="1.0" encoding="utf-8"?>
+<p:sld xmlns:a="http://schemas.openxmlformats.org/drawingml/2006/main" xmlns:p="http://schemas.openxmlformats.org/presentationml/2006/main" xmlns:r="http://schemas.openxmlformats.org/officeDocument/2006/relationships">
+  <p:cSld>
+    <p:bg>
+      <p:bgPr>
+        <a:solidFill>
+          <a:srgbClr val="FFFFFF"/>
+        </a:solidFill>
+        <a:effectLst/>
+      </p:bgPr>
+    </p:bg>
+    <p:spTree>
+      <p:nvGrpSpPr>
+        <p:cNvPr id="1" name=""/>
+        <p:cNvGrpSpPr/>
+        <p:nvPr/>
+      </p:nvGrpSpPr>
+      <p:grpSpPr/>
+      <p:sp>
+        <p:nvSpPr>
+          <p:cNvPr id="2" name="TextBox 1"/>
+          <p:cNvSpPr txBox="1"/>
+          <p:nvPr/>
+        </p:nvSpPr>
+        <p:spPr>
+          <a:xfrm>
+            <a:off x="566928" y="274320"/>
+            <a:ext cx="11055096" cy="274320"/>
+          </a:xfrm>
+          <a:prstGeom prst="rect">
+            <a:avLst/>
+          </a:prstGeom>
+          <a:noFill/>
+        </p:spPr>
+        <p:txBody>
+          <a:bodyPr wrap="square" lIns="0" rIns="0" tIns="0" bIns="0">
+            <a:spAutoFit/>
+          </a:bodyPr>
+          <a:lstStyle/>
+          <a:p>
+            <a:pPr algn="l"/>
+            <a:r>
+              <a:rPr sz="1250" b="1">
+                <a:solidFill>
+                  <a:srgbClr val="1F77B4"/>
+                </a:solidFill>
+                <a:latin typeface="Calibri"/>
+              </a:rPr>
+              <a:t>FOUR-YEAR UPDATE  ·  2 OF 2</a:t>
+            </a:r>
+          </a:p>
+        </p:txBody>
+      </p:sp>
+      <p:sp>
+        <p:nvSpPr>
+          <p:cNvPr id="3" name="TextBox 2"/>
+          <p:cNvSpPr txBox="1"/>
+          <p:nvPr/>
+        </p:nvSpPr>
+        <p:spPr>
+          <a:xfrm>
+            <a:off x="566928" y="530352"/>
+            <a:ext cx="11055096" cy="822960"/>
+          </a:xfrm>
+          <a:prstGeom prst="rect">
+            <a:avLst/>
+          </a:prstGeom>
+          <a:noFill/>
+        </p:spPr>
+        <p:txBody>
+          <a:bodyPr wrap="square" lIns="0" rIns="0" tIns="0" bIns="0">
+            <a:spAutoFit/>
+          </a:bodyPr>
+          <a:lstStyle/>
+          <a:p>
+            <a:pPr algn="l"/>
+            <a:r>
+              <a:rPr sz="2700" b="1">
+                <a:solidFill>
+                  <a:srgbClr val="22262A"/>
+                </a:solidFill>
+                <a:latin typeface="Calibri"/>
+              </a:rPr>
+              <a:t>What four years taught us</a:t>
+            </a:r>
+          </a:p>
+        </p:txBody>
+      </p:sp>
+      <p:sp>
+        <p:nvSpPr>
+          <p:cNvPr id="4" name="Rectangle 3"/>
+          <p:cNvSpPr/>
+          <p:nvPr/>
+        </p:nvSpPr>
+        <p:spPr>
+          <a:xfrm>
+            <a:off x="566928" y="1298448"/>
+            <a:ext cx="11055096" cy="27432"/>
+          </a:xfrm>
+          <a:prstGeom prst="rect">
+            <a:avLst/>
+          </a:prstGeom>
+          <a:solidFill>
+            <a:srgbClr val="1F77B4"/>
+          </a:solidFill>
+          <a:ln>
+            <a:noFill/>
+          </a:ln>
+        </p:spPr>
+        <p:style>
+          <a:lnRef idx="1">
+            <a:schemeClr val="accent1"/>
+          </a:lnRef>
+          <a:fillRef idx="3">
+            <a:schemeClr val="accent1"/>
+          </a:fillRef>
+          <a:effectRef idx="2">
+            <a:schemeClr val="accent1"/>
+          </a:effectRef>
+          <a:fontRef idx="minor">
+            <a:schemeClr val="lt1"/>
+          </a:fontRef>
+        </p:style>
+        <p:txBody>
+          <a:bodyPr rtlCol="0" anchor="ctr"/>
+          <a:lstStyle/>
+          <a:p>
+            <a:pPr algn="ctr"/>
+          </a:p>
+        </p:txBody>
+      </p:sp>
+      <p:sp>
+        <p:nvSpPr>
+          <p:cNvPr id="5" name="TextBox 4"/>
+          <p:cNvSpPr txBox="1"/>
+          <p:nvPr/>
+        </p:nvSpPr>
+        <p:spPr>
+          <a:xfrm>
+            <a:off x="566928" y="1444752"/>
+            <a:ext cx="11055096" cy="640080"/>
+          </a:xfrm>
+          <a:prstGeom prst="rect">
+            <a:avLst/>
+          </a:prstGeom>
+          <a:noFill/>
+        </p:spPr>
+        <p:txBody>
+          <a:bodyPr wrap="square" lIns="0" rIns="0" tIns="0" bIns="0">
+            <a:spAutoFit/>
+          </a:bodyPr>
+          <a:lstStyle/>
+          <a:p>
+            <a:pPr algn="l"/>
+            <a:r>
+              <a:rPr sz="1650" b="0">
+                <a:solidFill>
+                  <a:srgbClr val="2B3A42"/>
+                </a:solidFill>
+                <a:latin typeface="Calibri"/>
+              </a:rPr>
+              <a:t>Three findings that shape how the result is read and reported.</a:t>
+            </a:r>
+          </a:p>
+        </p:txBody>
+      </p:sp>
+      <p:sp>
+        <p:nvSpPr>
+          <p:cNvPr id="6" name="TextBox 5"/>
+          <p:cNvSpPr txBox="1"/>
+          <p:nvPr/>
+        </p:nvSpPr>
+        <p:spPr>
+          <a:xfrm>
+            <a:off x="11612880" y="6455664"/>
+            <a:ext cx="457200" cy="274320"/>
+          </a:xfrm>
+          <a:prstGeom prst="rect">
+            <a:avLst/>
+          </a:prstGeom>
+          <a:noFill/>
+        </p:spPr>
+        <p:txBody>
+          <a:bodyPr wrap="square" lIns="0" rIns="0" tIns="0" bIns="0">
+            <a:spAutoFit/>
+          </a:bodyPr>
+          <a:lstStyle/>
+          <a:p>
+            <a:pPr algn="r"/>
+            <a:r>
+              <a:rPr sz="1000" b="0">
+                <a:solidFill>
+                  <a:srgbClr val="6B7278"/>
+                </a:solidFill>
+                <a:latin typeface="Calibri"/>
+              </a:rPr>
+              <a:t>23</a:t>
+            </a:r>
+          </a:p>
+        </p:txBody>
+      </p:sp>
+      <p:sp>
+        <p:nvSpPr>
+          <p:cNvPr id="7" name="TextBox 6"/>
+          <p:cNvSpPr txBox="1"/>
+          <p:nvPr/>
+        </p:nvSpPr>
+        <p:spPr>
+          <a:xfrm>
+            <a:off x="566928" y="2148840"/>
+            <a:ext cx="11055096" cy="4023360"/>
+          </a:xfrm>
+          <a:prstGeom prst="rect">
+            <a:avLst/>
+          </a:prstGeom>
+          <a:noFill/>
+        </p:spPr>
+        <p:txBody>
+          <a:bodyPr wrap="square" lIns="0" rIns="0" tIns="0" bIns="0">
+            <a:spAutoFit/>
+          </a:bodyPr>
+          <a:lstStyle/>
+          <a:p>
+            <a:pPr>
+              <a:spcAft>
+                <a:spcPts val="800"/>
+              </a:spcAft>
+            </a:pPr>
+            <a:r>
+              <a:rPr sz="1550" b="0">
+                <a:solidFill>
+                  <a:srgbClr val="1F77B4"/>
+                </a:solidFill>
+                <a:latin typeface="Calibri"/>
+              </a:rPr>
+              <a:t>▪  </a:t>
+            </a:r>
+            <a:r>
+              <a:rPr sz="1550" b="1">
+                <a:solidFill>
+                  <a:srgbClr val="22262A"/>
+                </a:solidFill>
+                <a:latin typeface="Calibri"/>
+              </a:rPr>
+              <a:t>The policy = a locked-margin hedge + a zero-mean overlay.  </a:t>
+            </a:r>
+            <a:r>
+              <a:rPr sz="1550" b="0">
+                <a:solidFill>
+                  <a:srgbClr val="22262A"/>
+                </a:solidFill>
+                <a:latin typeface="Calibri"/>
+              </a:rPr>
+              <a:t>On the 40-month attribution panel the hedge earns the locked margin (+17.2 $/oz); the directional overlay adds +2.4 $/oz — statistically zero (t ≈ 0.2) — but swings ≈ ±$79/oz per month. So single months are noise; only the 48-trade mean is ever quoted.</a:t>
+            </a:r>
+          </a:p>
+          <a:p>
+            <a:pPr>
+              <a:spcAft>
+                <a:spcPts val="800"/>
+              </a:spcAft>
+            </a:pPr>
+            <a:r>
+              <a:rPr sz="1550" b="0">
+                <a:solidFill>
+                  <a:srgbClr val="1F77B4"/>
+                </a:solidFill>
+                <a:latin typeface="Calibri"/>
+              </a:rPr>
+              <a:t>▪  </a:t>
+            </a:r>
+            <a:r>
+              <a:rPr sz="1550" b="1">
+                <a:solidFill>
+                  <a:srgbClr val="22262A"/>
+                </a:solidFill>
+                <a:latin typeface="Calibri"/>
+              </a:rPr>
+              <a:t>Roll-month dispersion is Monte-Carlo forecast noise, not model variance.  </a:t>
+            </a:r>
+            <a:r>
+              <a:rPr sz="1550" b="0">
+                <a:solidFill>
+                  <a:srgbClr val="22262A"/>
+                </a:solidFill>
+                <a:latin typeface="Calibri"/>
+              </a:rPr>
+              <a:t>Raising the roll-time inner batch 64 → 512 collapsed per-month seed dispersion 168.5 → 62.9 $/oz (−63%, the √8 Monte-Carlo rate). Methodology hardening, now standard.</a:t>
+            </a:r>
+          </a:p>
+          <a:p>
+            <a:pPr>
+              <a:spcAft>
+                <a:spcPts val="800"/>
+              </a:spcAft>
+            </a:pPr>
+            <a:r>
+              <a:rPr sz="1550" b="0">
+                <a:solidFill>
+                  <a:srgbClr val="1F77B4"/>
+                </a:solidFill>
+                <a:latin typeface="Calibri"/>
+              </a:rPr>
+              <a:t>▪  </a:t>
+            </a:r>
+            <a:r>
+              <a:rPr sz="1550" b="1">
+                <a:solidFill>
+                  <a:srgbClr val="22262A"/>
+                </a:solidFill>
+                <a:latin typeface="Calibri"/>
+              </a:rPr>
+              <a:t>2022 was a flat year, not a model failure.  </a:t>
+            </a:r>
+            <a:r>
+              <a:rPr sz="1550" b="0">
+                <a:solidFill>
+                  <a:srgbClr val="22262A"/>
+                </a:solidFill>
+                <a:latin typeface="Calibri"/>
+              </a:rPr>
+              <a:t>The baseline mean dipped to −4.5 $/oz — the weakest of the four — as dealer margins compressed, yet 12/12 trades stayed causally bounded. 2020 rode the COVID crash to +27.5; 2023 was strongest at +41.1.</a:t>
+            </a:r>
+          </a:p>
+        </p:txBody>
+      </p:sp>
       <p:sp>
         <p:nvSpPr>
           <p:cNvPr id="8" name="TextBox 7"/>
@@ -18704,30 +20439,3069 @@
           <a:noFill/>
         </p:spPr>
         <p:txBody>
-          <a:bodyPr wrap="square" anchor="t" lIns="25400" rIns="25400" tIns="12700" bIns="12700">
+          <a:bodyPr wrap="square" lIns="0" rIns="0" tIns="0" bIns="0">
             <a:spAutoFit/>
           </a:bodyPr>
           <a:lstStyle/>
           <a:p>
+            <a:pPr algn="l"/>
+            <a:r>
+              <a:rPr sz="950" b="0">
+                <a:solidFill>
+                  <a:srgbClr val="6B7278"/>
+                </a:solidFill>
+                <a:latin typeface="Calibri"/>
+              </a:rPr>
+              <a:t>lf2_forensics.csv (40-mo attribution) · full48_baseline.csv (per-year). Roll-inner dispersion from the walk-forward ensemble methodology (roll-inner 512).</a:t>
+            </a:r>
+          </a:p>
+        </p:txBody>
+      </p:sp>
+    </p:spTree>
+  </p:cSld>
+  <p:clrMapOvr>
+    <a:masterClrMapping/>
+  </p:clrMapOvr>
+</p:sld>
+</file>
+
+<file path=ppt/slides/slide33.xml><?xml version="1.0" encoding="utf-8"?>
+<p:sld xmlns:a="http://schemas.openxmlformats.org/drawingml/2006/main" xmlns:p="http://schemas.openxmlformats.org/presentationml/2006/main" xmlns:r="http://schemas.openxmlformats.org/officeDocument/2006/relationships">
+  <p:cSld>
+    <p:bg>
+      <p:bgPr>
+        <a:solidFill>
+          <a:srgbClr val="FFFFFF"/>
+        </a:solidFill>
+        <a:effectLst/>
+      </p:bgPr>
+    </p:bg>
+    <p:spTree>
+      <p:nvGrpSpPr>
+        <p:cNvPr id="1" name=""/>
+        <p:cNvGrpSpPr/>
+        <p:nvPr/>
+      </p:nvGrpSpPr>
+      <p:grpSpPr/>
+      <p:sp>
+        <p:nvSpPr>
+          <p:cNvPr id="2" name="TextBox 1"/>
+          <p:cNvSpPr txBox="1"/>
+          <p:nvPr/>
+        </p:nvSpPr>
+        <p:spPr>
+          <a:xfrm>
+            <a:off x="566928" y="274320"/>
+            <a:ext cx="11055096" cy="274320"/>
+          </a:xfrm>
+          <a:prstGeom prst="rect">
+            <a:avLst/>
+          </a:prstGeom>
+          <a:noFill/>
+        </p:spPr>
+        <p:txBody>
+          <a:bodyPr wrap="square" lIns="0" rIns="0" tIns="0" bIns="0">
+            <a:spAutoFit/>
+          </a:bodyPr>
+          <a:lstStyle/>
+          <a:p>
+            <a:pPr algn="l"/>
+            <a:r>
+              <a:rPr sz="1250" b="1">
+                <a:solidFill>
+                  <a:srgbClr val="1F77B4"/>
+                </a:solidFill>
+                <a:latin typeface="Calibri"/>
+              </a:rPr>
+              <a:t>VARIANCE CONTROL  ·  1 OF 4</a:t>
+            </a:r>
+          </a:p>
+        </p:txBody>
+      </p:sp>
+      <p:sp>
+        <p:nvSpPr>
+          <p:cNvPr id="3" name="TextBox 2"/>
+          <p:cNvSpPr txBox="1"/>
+          <p:nvPr/>
+        </p:nvSpPr>
+        <p:spPr>
+          <a:xfrm>
+            <a:off x="566928" y="530352"/>
+            <a:ext cx="11055096" cy="822960"/>
+          </a:xfrm>
+          <a:prstGeom prst="rect">
+            <a:avLst/>
+          </a:prstGeom>
+          <a:noFill/>
+        </p:spPr>
+        <p:txBody>
+          <a:bodyPr wrap="square" lIns="0" rIns="0" tIns="0" bIns="0">
+            <a:spAutoFit/>
+          </a:bodyPr>
+          <a:lstStyle/>
+          <a:p>
+            <a:pPr algn="l"/>
+            <a:r>
+              <a:rPr sz="2700" b="1">
+                <a:solidFill>
+                  <a:srgbClr val="22262A"/>
+                </a:solidFill>
+                <a:latin typeface="Calibri"/>
+              </a:rPr>
+              <a:t>The delta corridor — a fence we know in advance</a:t>
+            </a:r>
+          </a:p>
+        </p:txBody>
+      </p:sp>
+      <p:sp>
+        <p:nvSpPr>
+          <p:cNvPr id="4" name="Rectangle 3"/>
+          <p:cNvSpPr/>
+          <p:nvPr/>
+        </p:nvSpPr>
+        <p:spPr>
+          <a:xfrm>
+            <a:off x="566928" y="1298448"/>
+            <a:ext cx="11055096" cy="27432"/>
+          </a:xfrm>
+          <a:prstGeom prst="rect">
+            <a:avLst/>
+          </a:prstGeom>
+          <a:solidFill>
+            <a:srgbClr val="1F77B4"/>
+          </a:solidFill>
+          <a:ln>
+            <a:noFill/>
+          </a:ln>
+        </p:spPr>
+        <p:style>
+          <a:lnRef idx="1">
+            <a:schemeClr val="accent1"/>
+          </a:lnRef>
+          <a:fillRef idx="3">
+            <a:schemeClr val="accent1"/>
+          </a:fillRef>
+          <a:effectRef idx="2">
+            <a:schemeClr val="accent1"/>
+          </a:effectRef>
+          <a:fontRef idx="minor">
+            <a:schemeClr val="lt1"/>
+          </a:fontRef>
+        </p:style>
+        <p:txBody>
+          <a:bodyPr rtlCol="0" anchor="ctr"/>
+          <a:lstStyle/>
+          <a:p>
+            <a:pPr algn="ctr"/>
+          </a:p>
+        </p:txBody>
+      </p:sp>
+      <p:sp>
+        <p:nvSpPr>
+          <p:cNvPr id="5" name="TextBox 4"/>
+          <p:cNvSpPr txBox="1"/>
+          <p:nvPr/>
+        </p:nvSpPr>
+        <p:spPr>
+          <a:xfrm>
+            <a:off x="566928" y="1444752"/>
+            <a:ext cx="11055096" cy="640080"/>
+          </a:xfrm>
+          <a:prstGeom prst="rect">
+            <a:avLst/>
+          </a:prstGeom>
+          <a:noFill/>
+        </p:spPr>
+        <p:txBody>
+          <a:bodyPr wrap="square" lIns="0" rIns="0" tIns="0" bIns="0">
+            <a:spAutoFit/>
+          </a:bodyPr>
+          <a:lstStyle/>
+          <a:p>
+            <a:pPr algn="l"/>
+            <a:r>
+              <a:rPr sz="1650" b="0">
+                <a:solidFill>
+                  <a:srgbClr val="2B3A42"/>
+                </a:solidFill>
+                <a:latin typeface="Calibri"/>
+              </a:rPr>
+              <a:t>The average-price swap’s hedge ratio is deterministic at trade date. We fence the book to it.</a:t>
+            </a:r>
+          </a:p>
+        </p:txBody>
+      </p:sp>
+      <p:sp>
+        <p:nvSpPr>
+          <p:cNvPr id="6" name="TextBox 5"/>
+          <p:cNvSpPr txBox="1"/>
+          <p:nvPr/>
+        </p:nvSpPr>
+        <p:spPr>
+          <a:xfrm>
+            <a:off x="11612880" y="6455664"/>
+            <a:ext cx="457200" cy="274320"/>
+          </a:xfrm>
+          <a:prstGeom prst="rect">
+            <a:avLst/>
+          </a:prstGeom>
+          <a:noFill/>
+        </p:spPr>
+        <p:txBody>
+          <a:bodyPr wrap="square" lIns="0" rIns="0" tIns="0" bIns="0">
+            <a:spAutoFit/>
+          </a:bodyPr>
+          <a:lstStyle/>
+          <a:p>
+            <a:pPr algn="r"/>
+            <a:r>
+              <a:rPr sz="1000" b="0">
+                <a:solidFill>
+                  <a:srgbClr val="6B7278"/>
+                </a:solidFill>
+                <a:latin typeface="Calibri"/>
+              </a:rPr>
+              <a:t>24</a:t>
+            </a:r>
+          </a:p>
+        </p:txBody>
+      </p:sp>
+      <p:sp>
+        <p:nvSpPr>
+          <p:cNvPr id="7" name="TextBox 6"/>
+          <p:cNvSpPr txBox="1"/>
+          <p:nvPr/>
+        </p:nvSpPr>
+        <p:spPr>
+          <a:xfrm>
+            <a:off x="566928" y="2148840"/>
+            <a:ext cx="6903720" cy="4023360"/>
+          </a:xfrm>
+          <a:prstGeom prst="rect">
+            <a:avLst/>
+          </a:prstGeom>
+          <a:noFill/>
+        </p:spPr>
+        <p:txBody>
+          <a:bodyPr wrap="square" lIns="0" rIns="0" tIns="0" bIns="0">
+            <a:spAutoFit/>
+          </a:bodyPr>
+          <a:lstStyle/>
+          <a:p>
+            <a:pPr>
+              <a:spcAft>
+                <a:spcPts val="800"/>
+              </a:spcAft>
+            </a:pPr>
+            <a:r>
+              <a:rPr sz="1550" b="0">
+                <a:solidFill>
+                  <a:srgbClr val="1F77B4"/>
+                </a:solidFill>
+                <a:latin typeface="Calibri"/>
+              </a:rPr>
+              <a:t>▪  </a:t>
+            </a:r>
+            <a:r>
+              <a:rPr sz="1550" b="1">
+                <a:solidFill>
+                  <a:srgbClr val="22262A"/>
+                </a:solidFill>
+                <a:latin typeface="Calibri"/>
+              </a:rPr>
+              <a:t>Known delta ramp.  </a:t>
+            </a:r>
+            <a:r>
+              <a:rPr sz="1550" b="0">
+                <a:solidFill>
+                  <a:srgbClr val="22262A"/>
+                </a:solidFill>
+                <a:latin typeface="Calibri"/>
+              </a:rPr>
+              <a:t>For a 3-month average-price swap the hedge delta is deterministic: full cover before the averaging window, then declining linearly to zero as fixings accumulate. No forecast required.</a:t>
+            </a:r>
+          </a:p>
+          <a:p>
+            <a:pPr>
+              <a:spcAft>
+                <a:spcPts val="800"/>
+              </a:spcAft>
+            </a:pPr>
+            <a:r>
+              <a:rPr sz="1550" b="0">
+                <a:solidFill>
+                  <a:srgbClr val="1F77B4"/>
+                </a:solidFill>
+                <a:latin typeface="Calibri"/>
+              </a:rPr>
+              <a:t>▪  </a:t>
+            </a:r>
+            <a:r>
+              <a:rPr sz="1550" b="1">
+                <a:solidFill>
+                  <a:srgbClr val="22262A"/>
+                </a:solidFill>
+                <a:latin typeface="Calibri"/>
+              </a:rPr>
+              <a:t>The corridor.  </a:t>
+            </a:r>
+            <a:r>
+              <a:rPr sz="1550" b="0">
+                <a:solidFill>
+                  <a:srgbClr val="22262A"/>
+                </a:solidFill>
+                <a:latin typeface="Calibri"/>
+              </a:rPr>
+              <a:t>We fence the signed total position to that ramp ± a band, enforced inside the decision grid (HedgeActionSpace.grid_at) so every action the solver can take already obeys it.</a:t>
+            </a:r>
+          </a:p>
+          <a:p>
+            <a:pPr>
+              <a:spcAft>
+                <a:spcPts val="800"/>
+              </a:spcAft>
+            </a:pPr>
+            <a:r>
+              <a:rPr sz="1550" b="0">
+                <a:solidFill>
+                  <a:srgbClr val="1F77B4"/>
+                </a:solidFill>
+                <a:latin typeface="Calibri"/>
+              </a:rPr>
+              <a:t>▪  </a:t>
+            </a:r>
+            <a:r>
+              <a:rPr sz="1550" b="1">
+                <a:solidFill>
+                  <a:srgbClr val="22262A"/>
+                </a:solidFill>
+                <a:latin typeface="Calibri"/>
+              </a:rPr>
+              <a:t>Live-aware near expiry.  </a:t>
+            </a:r>
+            <a:r>
+              <a:rPr sz="1550" b="0">
+                <a:solidFill>
+                  <a:srgbClr val="22262A"/>
+                </a:solidFill>
+                <a:latin typeface="Calibri"/>
+              </a:rPr>
+              <a:t>The fence shortens on live legs, so realized positions can never breach it.</a:t>
+            </a:r>
+          </a:p>
+          <a:p>
+            <a:pPr>
+              <a:spcAft>
+                <a:spcPts val="800"/>
+              </a:spcAft>
+            </a:pPr>
+            <a:r>
+              <a:rPr sz="1550" b="0">
+                <a:solidFill>
+                  <a:srgbClr val="1F77B4"/>
+                </a:solidFill>
+                <a:latin typeface="Calibri"/>
+              </a:rPr>
+              <a:t>▪  </a:t>
+            </a:r>
+            <a:r>
+              <a:rPr sz="1550" b="1">
+                <a:solidFill>
+                  <a:srgbClr val="22262A"/>
+                </a:solidFill>
+                <a:latin typeface="Calibri"/>
+              </a:rPr>
+              <a:t>Result.  </a:t>
+            </a:r>
+            <a:r>
+              <a:rPr sz="1550" b="0">
+                <a:solidFill>
+                  <a:srgbClr val="22262A"/>
+                </a:solidFill>
+                <a:latin typeface="Calibri"/>
+              </a:rPr>
+              <a:t>0 breaches across all 144 validation rolls (48 trades × 3 bands). Infeasible schedules fail loud.</a:t>
+            </a:r>
+          </a:p>
+        </p:txBody>
+      </p:sp>
+      <p:sp>
+        <p:nvSpPr>
+          <p:cNvPr id="8" name="Rounded Rectangle 7"/>
+          <p:cNvSpPr/>
+          <p:nvPr/>
+        </p:nvSpPr>
+        <p:spPr>
+          <a:xfrm>
+            <a:off x="7726679" y="2331720"/>
+            <a:ext cx="3895344" cy="3108960"/>
+          </a:xfrm>
+          <a:prstGeom prst="roundRect">
+            <a:avLst/>
+          </a:prstGeom>
+          <a:solidFill>
+            <a:srgbClr val="F2F4F6"/>
+          </a:solidFill>
+          <a:ln w="12700">
+            <a:solidFill>
+              <a:srgbClr val="1F77B4"/>
+            </a:solidFill>
+          </a:ln>
+        </p:spPr>
+        <p:style>
+          <a:lnRef idx="1">
+            <a:schemeClr val="accent1"/>
+          </a:lnRef>
+          <a:fillRef idx="3">
+            <a:schemeClr val="accent1"/>
+          </a:fillRef>
+          <a:effectRef idx="2">
+            <a:schemeClr val="accent1"/>
+          </a:effectRef>
+          <a:fontRef idx="minor">
+            <a:schemeClr val="lt1"/>
+          </a:fontRef>
+        </p:style>
+        <p:txBody>
+          <a:bodyPr rtlCol="0" anchor="ctr" wrap="square" lIns="201168" rIns="201168" tIns="201168"/>
+          <a:lstStyle/>
+          <a:p>
+            <a:pPr algn="l"/>
+            <a:r>
+              <a:rPr sz="1250" b="1">
+                <a:solidFill>
+                  <a:srgbClr val="1F77B4"/>
+                </a:solidFill>
+                <a:latin typeface="Calibri"/>
+              </a:rPr>
+              <a:t>THE RAMP</a:t>
+            </a:r>
+          </a:p>
+          <a:p>
             <a:pPr algn="l">
-              <a:lnSpc>
-                <a:spcPct val="100000"/>
-              </a:lnSpc>
-              <a:spcBef>
-                <a:spcPts val="0"/>
-              </a:spcBef>
-              <a:spcAft>
-                <a:spcPts val="400"/>
-              </a:spcAft>
-            </a:pPr>
-            <a:r>
-              <a:rPr sz="950" b="0" i="1">
+              <a:spcBef>
+                <a:spcPts val="600"/>
+              </a:spcBef>
+            </a:pPr>
+            <a:r>
+              <a:rPr sz="1400" b="0">
+                <a:solidFill>
+                  <a:srgbClr val="2B3A42"/>
+                </a:solidFill>
+                <a:latin typeface="Calibri"/>
+              </a:rPr>
+              <a:t>Full short before averaging starts</a:t>
+            </a:r>
+          </a:p>
+          <a:p>
+            <a:pPr algn="l">
+              <a:spcBef>
+                <a:spcPts val="600"/>
+              </a:spcBef>
+            </a:pPr>
+            <a:r>
+              <a:rPr sz="1400" b="0">
+                <a:solidFill>
+                  <a:srgbClr val="2B3A42"/>
+                </a:solidFill>
+                <a:latin typeface="Calibri"/>
+              </a:rPr>
+              <a:t>↓  linear decay across the fixings</a:t>
+            </a:r>
+          </a:p>
+          <a:p>
+            <a:pPr algn="l">
+              <a:spcBef>
+                <a:spcPts val="600"/>
+              </a:spcBef>
+            </a:pPr>
+            <a:r>
+              <a:rPr sz="1400" b="0">
+                <a:solidFill>
+                  <a:srgbClr val="2B3A42"/>
+                </a:solidFill>
+                <a:latin typeface="Calibri"/>
+              </a:rPr>
+              <a:t>→  zero at expiry</a:t>
+            </a:r>
+          </a:p>
+          <a:p>
+            <a:pPr algn="l">
+              <a:spcBef>
+                <a:spcPts val="600"/>
+              </a:spcBef>
+            </a:pPr>
+            <a:r>
+              <a:rPr sz="1400" b="0">
+                <a:solidFill>
+                  <a:srgbClr val="2B3A42"/>
+                </a:solidFill>
+                <a:latin typeface="Calibri"/>
+              </a:rPr>
+              <a:t/>
+            </a:r>
+          </a:p>
+          <a:p>
+            <a:pPr algn="l">
+              <a:spcBef>
+                <a:spcPts val="600"/>
+              </a:spcBef>
+            </a:pPr>
+            <a:r>
+              <a:rPr sz="1400" b="0">
+                <a:solidFill>
+                  <a:srgbClr val="2B3A42"/>
+                </a:solidFill>
+                <a:latin typeface="Calibri"/>
+              </a:rPr>
+              <a:t>Net position held within ± band of that path — decided, not predicted.</a:t>
+            </a:r>
+          </a:p>
+        </p:txBody>
+      </p:sp>
+      <p:sp>
+        <p:nvSpPr>
+          <p:cNvPr id="9" name="TextBox 8"/>
+          <p:cNvSpPr txBox="1"/>
+          <p:nvPr/>
+        </p:nvSpPr>
+        <p:spPr>
+          <a:xfrm>
+            <a:off x="566928" y="6473952"/>
+            <a:ext cx="11055096" cy="274320"/>
+          </a:xfrm>
+          <a:prstGeom prst="rect">
+            <a:avLst/>
+          </a:prstGeom>
+          <a:noFill/>
+        </p:spPr>
+        <p:txBody>
+          <a:bodyPr wrap="square" lIns="0" rIns="0" tIns="0" bIns="0">
+            <a:spAutoFit/>
+          </a:bodyPr>
+          <a:lstStyle/>
+          <a:p>
+            <a:pPr algn="l"/>
+            <a:r>
+              <a:rPr sz="950" b="0">
                 <a:solidFill>
                   <a:srgbClr val="6B7278"/>
                 </a:solidFill>
                 <a:latin typeface="Calibri"/>
               </a:rPr>
-              <a:t>65 tests collected · notebook 11/11 executed with 0 error outputs · commit hashes verified in git log.</a:t>
+              <a:t>Enforced once in HedgeActionSpace.grid_at(t); driver flag --delta-corridor BAND. full48_corridor_rolls.csv: breaches = 0 in every row.</a:t>
+            </a:r>
+          </a:p>
+        </p:txBody>
+      </p:sp>
+    </p:spTree>
+  </p:cSld>
+  <p:clrMapOvr>
+    <a:masterClrMapping/>
+  </p:clrMapOvr>
+</p:sld>
+</file>
+
+<file path=ppt/slides/slide34.xml><?xml version="1.0" encoding="utf-8"?>
+<p:sld xmlns:a="http://schemas.openxmlformats.org/drawingml/2006/main" xmlns:p="http://schemas.openxmlformats.org/presentationml/2006/main" xmlns:r="http://schemas.openxmlformats.org/officeDocument/2006/relationships">
+  <p:cSld>
+    <p:bg>
+      <p:bgPr>
+        <a:solidFill>
+          <a:srgbClr val="FFFFFF"/>
+        </a:solidFill>
+        <a:effectLst/>
+      </p:bgPr>
+    </p:bg>
+    <p:spTree>
+      <p:nvGrpSpPr>
+        <p:cNvPr id="1" name=""/>
+        <p:cNvGrpSpPr/>
+        <p:nvPr/>
+      </p:nvGrpSpPr>
+      <p:grpSpPr/>
+      <p:sp>
+        <p:nvSpPr>
+          <p:cNvPr id="2" name="TextBox 1"/>
+          <p:cNvSpPr txBox="1"/>
+          <p:nvPr/>
+        </p:nvSpPr>
+        <p:spPr>
+          <a:xfrm>
+            <a:off x="566928" y="274320"/>
+            <a:ext cx="11055096" cy="274320"/>
+          </a:xfrm>
+          <a:prstGeom prst="rect">
+            <a:avLst/>
+          </a:prstGeom>
+          <a:noFill/>
+        </p:spPr>
+        <p:txBody>
+          <a:bodyPr wrap="square" lIns="0" rIns="0" tIns="0" bIns="0">
+            <a:spAutoFit/>
+          </a:bodyPr>
+          <a:lstStyle/>
+          <a:p>
+            <a:pPr algn="l"/>
+            <a:r>
+              <a:rPr sz="1250" b="1">
+                <a:solidFill>
+                  <a:srgbClr val="1F77B4"/>
+                </a:solidFill>
+                <a:latin typeface="Calibri"/>
+              </a:rPr>
+              <a:t>VARIANCE CONTROL  ·  2 OF 4</a:t>
+            </a:r>
+          </a:p>
+        </p:txBody>
+      </p:sp>
+      <p:sp>
+        <p:nvSpPr>
+          <p:cNvPr id="3" name="TextBox 2"/>
+          <p:cNvSpPr txBox="1"/>
+          <p:nvPr/>
+        </p:nvSpPr>
+        <p:spPr>
+          <a:xfrm>
+            <a:off x="566928" y="530352"/>
+            <a:ext cx="11055096" cy="822960"/>
+          </a:xfrm>
+          <a:prstGeom prst="rect">
+            <a:avLst/>
+          </a:prstGeom>
+          <a:noFill/>
+        </p:spPr>
+        <p:txBody>
+          <a:bodyPr wrap="square" lIns="0" rIns="0" tIns="0" bIns="0">
+            <a:spAutoFit/>
+          </a:bodyPr>
+          <a:lstStyle/>
+          <a:p>
+            <a:pPr algn="l"/>
+            <a:r>
+              <a:rPr sz="2700" b="1">
+                <a:solidFill>
+                  <a:srgbClr val="22262A"/>
+                </a:solidFill>
+                <a:latin typeface="Calibri"/>
+              </a:rPr>
+              <a:t>The corridor frontier</a:t>
+            </a:r>
+          </a:p>
+        </p:txBody>
+      </p:sp>
+      <p:sp>
+        <p:nvSpPr>
+          <p:cNvPr id="4" name="Rectangle 3"/>
+          <p:cNvSpPr/>
+          <p:nvPr/>
+        </p:nvSpPr>
+        <p:spPr>
+          <a:xfrm>
+            <a:off x="566928" y="1298448"/>
+            <a:ext cx="11055096" cy="27432"/>
+          </a:xfrm>
+          <a:prstGeom prst="rect">
+            <a:avLst/>
+          </a:prstGeom>
+          <a:solidFill>
+            <a:srgbClr val="1F77B4"/>
+          </a:solidFill>
+          <a:ln>
+            <a:noFill/>
+          </a:ln>
+        </p:spPr>
+        <p:style>
+          <a:lnRef idx="1">
+            <a:schemeClr val="accent1"/>
+          </a:lnRef>
+          <a:fillRef idx="3">
+            <a:schemeClr val="accent1"/>
+          </a:fillRef>
+          <a:effectRef idx="2">
+            <a:schemeClr val="accent1"/>
+          </a:effectRef>
+          <a:fontRef idx="minor">
+            <a:schemeClr val="lt1"/>
+          </a:fontRef>
+        </p:style>
+        <p:txBody>
+          <a:bodyPr rtlCol="0" anchor="ctr"/>
+          <a:lstStyle/>
+          <a:p>
+            <a:pPr algn="ctr"/>
+          </a:p>
+        </p:txBody>
+      </p:sp>
+      <p:sp>
+        <p:nvSpPr>
+          <p:cNvPr id="5" name="TextBox 4"/>
+          <p:cNvSpPr txBox="1"/>
+          <p:nvPr/>
+        </p:nvSpPr>
+        <p:spPr>
+          <a:xfrm>
+            <a:off x="566928" y="1444752"/>
+            <a:ext cx="11055096" cy="640080"/>
+          </a:xfrm>
+          <a:prstGeom prst="rect">
+            <a:avLst/>
+          </a:prstGeom>
+          <a:noFill/>
+        </p:spPr>
+        <p:txBody>
+          <a:bodyPr wrap="square" lIns="0" rIns="0" tIns="0" bIns="0">
+            <a:spAutoFit/>
+          </a:bodyPr>
+          <a:lstStyle/>
+          <a:p>
+            <a:pPr algn="l"/>
+            <a:r>
+              <a:rPr sz="1650" b="0">
+                <a:solidFill>
+                  <a:srgbClr val="2B3A42"/>
+                </a:solidFill>
+                <a:latin typeface="Calibri"/>
+              </a:rPr>
+              <a:t>Tighter bands trade a little mean for a lot less variance. Band 0.60 is shipped.</a:t>
+            </a:r>
+          </a:p>
+        </p:txBody>
+      </p:sp>
+      <p:sp>
+        <p:nvSpPr>
+          <p:cNvPr id="6" name="TextBox 5"/>
+          <p:cNvSpPr txBox="1"/>
+          <p:nvPr/>
+        </p:nvSpPr>
+        <p:spPr>
+          <a:xfrm>
+            <a:off x="11612880" y="6455664"/>
+            <a:ext cx="457200" cy="274320"/>
+          </a:xfrm>
+          <a:prstGeom prst="rect">
+            <a:avLst/>
+          </a:prstGeom>
+          <a:noFill/>
+        </p:spPr>
+        <p:txBody>
+          <a:bodyPr wrap="square" lIns="0" rIns="0" tIns="0" bIns="0">
+            <a:spAutoFit/>
+          </a:bodyPr>
+          <a:lstStyle/>
+          <a:p>
+            <a:pPr algn="r"/>
+            <a:r>
+              <a:rPr sz="1000" b="0">
+                <a:solidFill>
+                  <a:srgbClr val="6B7278"/>
+                </a:solidFill>
+                <a:latin typeface="Calibri"/>
+              </a:rPr>
+              <a:t>25</a:t>
+            </a:r>
+          </a:p>
+        </p:txBody>
+      </p:sp>
+      <p:graphicFrame>
+        <p:nvGraphicFramePr>
+          <p:cNvPr id="7" name="Table 6"/>
+          <p:cNvGraphicFramePr>
+            <a:graphicFrameLocks noGrp="1"/>
+          </p:cNvGraphicFramePr>
+          <p:nvPr/>
+        </p:nvGraphicFramePr>
+        <p:xfrm>
+          <a:off x="566928" y="2194560"/>
+          <a:ext cx="11055096" cy="2651760"/>
+        </p:xfrm>
+        <a:graphic>
+          <a:graphicData uri="http://schemas.openxmlformats.org/drawingml/2006/table">
+            <a:tbl>
+              <a:tblPr/>
+              <a:tblGrid>
+                <a:gridCol w="3054096"/>
+                <a:gridCol w="1600200"/>
+                <a:gridCol w="1600200"/>
+                <a:gridCol w="1600200"/>
+                <a:gridCol w="1600200"/>
+                <a:gridCol w="1600200"/>
+              </a:tblGrid>
+              <a:tr h="530352">
+                <a:tc>
+                  <a:txBody>
+                    <a:bodyPr/>
+                    <a:lstStyle/>
+                    <a:p>
+                      <a:pPr algn="l"/>
+                      <a:r>
+                        <a:rPr sz="1400" b="1">
+                          <a:solidFill>
+                            <a:srgbClr val="FFFFFF"/>
+                          </a:solidFill>
+                          <a:latin typeface="Calibri"/>
+                        </a:rPr>
+                        <a:t>Configuration</a:t>
+                      </a:r>
+                    </a:p>
+                  </a:txBody>
+                  <a:tcPr marL="88900" marR="88900" marT="38100" marB="38100" anchor="ctr">
+                    <a:solidFill>
+                      <a:srgbClr val="2B3A42"/>
+                    </a:solidFill>
+                  </a:tcPr>
+                </a:tc>
+                <a:tc>
+                  <a:txBody>
+                    <a:bodyPr/>
+                    <a:lstStyle/>
+                    <a:p>
+                      <a:pPr algn="ctr"/>
+                      <a:r>
+                        <a:rPr sz="1400" b="1">
+                          <a:solidFill>
+                            <a:srgbClr val="FFFFFF"/>
+                          </a:solidFill>
+                          <a:latin typeface="Calibri"/>
+                        </a:rPr>
+                        <a:t>Mean $/oz</a:t>
+                      </a:r>
+                    </a:p>
+                  </a:txBody>
+                  <a:tcPr marL="88900" marR="88900" marT="38100" marB="38100" anchor="ctr">
+                    <a:solidFill>
+                      <a:srgbClr val="2B3A42"/>
+                    </a:solidFill>
+                  </a:tcPr>
+                </a:tc>
+                <a:tc>
+                  <a:txBody>
+                    <a:bodyPr/>
+                    <a:lstStyle/>
+                    <a:p>
+                      <a:pPr algn="ctr"/>
+                      <a:r>
+                        <a:rPr sz="1400" b="1">
+                          <a:solidFill>
+                            <a:srgbClr val="FFFFFF"/>
+                          </a:solidFill>
+                          <a:latin typeface="Calibri"/>
+                        </a:rPr>
+                        <a:t>Std</a:t>
+                      </a:r>
+                    </a:p>
+                  </a:txBody>
+                  <a:tcPr marL="88900" marR="88900" marT="38100" marB="38100" anchor="ctr">
+                    <a:solidFill>
+                      <a:srgbClr val="2B3A42"/>
+                    </a:solidFill>
+                  </a:tcPr>
+                </a:tc>
+                <a:tc>
+                  <a:txBody>
+                    <a:bodyPr/>
+                    <a:lstStyle/>
+                    <a:p>
+                      <a:pPr algn="ctr"/>
+                      <a:r>
+                        <a:rPr sz="1400" b="1">
+                          <a:solidFill>
+                            <a:srgbClr val="FFFFFF"/>
+                          </a:solidFill>
+                          <a:latin typeface="Calibri"/>
+                        </a:rPr>
+                        <a:t>Min</a:t>
+                      </a:r>
+                    </a:p>
+                  </a:txBody>
+                  <a:tcPr marL="88900" marR="88900" marT="38100" marB="38100" anchor="ctr">
+                    <a:solidFill>
+                      <a:srgbClr val="2B3A42"/>
+                    </a:solidFill>
+                  </a:tcPr>
+                </a:tc>
+                <a:tc>
+                  <a:txBody>
+                    <a:bodyPr/>
+                    <a:lstStyle/>
+                    <a:p>
+                      <a:pPr algn="ctr"/>
+                      <a:r>
+                        <a:rPr sz="1400" b="1">
+                          <a:solidFill>
+                            <a:srgbClr val="FFFFFF"/>
+                          </a:solidFill>
+                          <a:latin typeface="Calibri"/>
+                        </a:rPr>
+                        <a:t>p10</a:t>
+                      </a:r>
+                    </a:p>
+                  </a:txBody>
+                  <a:tcPr marL="88900" marR="88900" marT="38100" marB="38100" anchor="ctr">
+                    <a:solidFill>
+                      <a:srgbClr val="2B3A42"/>
+                    </a:solidFill>
+                  </a:tcPr>
+                </a:tc>
+                <a:tc>
+                  <a:txBody>
+                    <a:bodyPr/>
+                    <a:lstStyle/>
+                    <a:p>
+                      <a:pPr algn="ctr"/>
+                      <a:r>
+                        <a:rPr sz="1400" b="1">
+                          <a:solidFill>
+                            <a:srgbClr val="FFFFFF"/>
+                          </a:solidFill>
+                          <a:latin typeface="Calibri"/>
+                        </a:rPr>
+                        <a:t>Std vs base</a:t>
+                      </a:r>
+                    </a:p>
+                  </a:txBody>
+                  <a:tcPr marL="88900" marR="88900" marT="38100" marB="38100" anchor="ctr">
+                    <a:solidFill>
+                      <a:srgbClr val="2B3A42"/>
+                    </a:solidFill>
+                  </a:tcPr>
+                </a:tc>
+              </a:tr>
+              <a:tr h="530352">
+                <a:tc>
+                  <a:txBody>
+                    <a:bodyPr/>
+                    <a:lstStyle/>
+                    <a:p>
+                      <a:pPr algn="l"/>
+                      <a:r>
+                        <a:rPr sz="1400" b="1">
+                          <a:solidFill>
+                            <a:srgbClr val="22262A"/>
+                          </a:solidFill>
+                          <a:latin typeface="Calibri"/>
+                        </a:rPr>
+                        <a:t>Unfenced baseline</a:t>
+                      </a:r>
+                    </a:p>
+                  </a:txBody>
+                  <a:tcPr marL="88900" marR="88900" marT="38100" marB="38100" anchor="ctr">
+                    <a:solidFill>
+                      <a:srgbClr val="FFFFFF"/>
+                    </a:solidFill>
+                  </a:tcPr>
+                </a:tc>
+                <a:tc>
+                  <a:txBody>
+                    <a:bodyPr/>
+                    <a:lstStyle/>
+                    <a:p>
+                      <a:pPr algn="ctr"/>
+                      <a:r>
+                        <a:rPr sz="1400" b="0">
+                          <a:solidFill>
+                            <a:srgbClr val="22262A"/>
+                          </a:solidFill>
+                          <a:latin typeface="Calibri"/>
+                        </a:rPr>
+                        <a:t>+22.09</a:t>
+                      </a:r>
+                    </a:p>
+                  </a:txBody>
+                  <a:tcPr marL="88900" marR="88900" marT="38100" marB="38100" anchor="ctr">
+                    <a:solidFill>
+                      <a:srgbClr val="FFFFFF"/>
+                    </a:solidFill>
+                  </a:tcPr>
+                </a:tc>
+                <a:tc>
+                  <a:txBody>
+                    <a:bodyPr/>
+                    <a:lstStyle/>
+                    <a:p>
+                      <a:pPr algn="ctr"/>
+                      <a:r>
+                        <a:rPr sz="1400" b="0">
+                          <a:solidFill>
+                            <a:srgbClr val="22262A"/>
+                          </a:solidFill>
+                          <a:latin typeface="Calibri"/>
+                        </a:rPr>
+                        <a:t>88.15</a:t>
+                      </a:r>
+                    </a:p>
+                  </a:txBody>
+                  <a:tcPr marL="88900" marR="88900" marT="38100" marB="38100" anchor="ctr">
+                    <a:solidFill>
+                      <a:srgbClr val="FFFFFF"/>
+                    </a:solidFill>
+                  </a:tcPr>
+                </a:tc>
+                <a:tc>
+                  <a:txBody>
+                    <a:bodyPr/>
+                    <a:lstStyle/>
+                    <a:p>
+                      <a:pPr algn="ctr"/>
+                      <a:r>
+                        <a:rPr sz="1400" b="0">
+                          <a:solidFill>
+                            <a:srgbClr val="22262A"/>
+                          </a:solidFill>
+                          <a:latin typeface="Calibri"/>
+                        </a:rPr>
+                        <a:t>−143.70</a:t>
+                      </a:r>
+                    </a:p>
+                  </a:txBody>
+                  <a:tcPr marL="88900" marR="88900" marT="38100" marB="38100" anchor="ctr">
+                    <a:solidFill>
+                      <a:srgbClr val="FFFFFF"/>
+                    </a:solidFill>
+                  </a:tcPr>
+                </a:tc>
+                <a:tc>
+                  <a:txBody>
+                    <a:bodyPr/>
+                    <a:lstStyle/>
+                    <a:p>
+                      <a:pPr algn="ctr"/>
+                      <a:r>
+                        <a:rPr sz="1400" b="0">
+                          <a:solidFill>
+                            <a:srgbClr val="22262A"/>
+                          </a:solidFill>
+                          <a:latin typeface="Calibri"/>
+                        </a:rPr>
+                        <a:t>−83.48</a:t>
+                      </a:r>
+                    </a:p>
+                  </a:txBody>
+                  <a:tcPr marL="88900" marR="88900" marT="38100" marB="38100" anchor="ctr">
+                    <a:solidFill>
+                      <a:srgbClr val="FFFFFF"/>
+                    </a:solidFill>
+                  </a:tcPr>
+                </a:tc>
+                <a:tc>
+                  <a:txBody>
+                    <a:bodyPr/>
+                    <a:lstStyle/>
+                    <a:p>
+                      <a:pPr algn="ctr"/>
+                      <a:r>
+                        <a:rPr sz="1400" b="0">
+                          <a:solidFill>
+                            <a:srgbClr val="22262A"/>
+                          </a:solidFill>
+                          <a:latin typeface="Calibri"/>
+                        </a:rPr>
+                        <a:t>—</a:t>
+                      </a:r>
+                    </a:p>
+                  </a:txBody>
+                  <a:tcPr marL="88900" marR="88900" marT="38100" marB="38100" anchor="ctr">
+                    <a:solidFill>
+                      <a:srgbClr val="FFFFFF"/>
+                    </a:solidFill>
+                  </a:tcPr>
+                </a:tc>
+              </a:tr>
+              <a:tr h="530352">
+                <a:tc>
+                  <a:txBody>
+                    <a:bodyPr/>
+                    <a:lstStyle/>
+                    <a:p>
+                      <a:pPr algn="l"/>
+                      <a:r>
+                        <a:rPr sz="1400" b="1">
+                          <a:solidFill>
+                            <a:srgbClr val="22262A"/>
+                          </a:solidFill>
+                          <a:latin typeface="Calibri"/>
+                        </a:rPr>
+                        <a:t>Band 0.60  (shipped)</a:t>
+                      </a:r>
+                    </a:p>
+                  </a:txBody>
+                  <a:tcPr marL="88900" marR="88900" marT="38100" marB="38100" anchor="ctr">
+                    <a:solidFill>
+                      <a:srgbClr val="F2F4F6"/>
+                    </a:solidFill>
+                  </a:tcPr>
+                </a:tc>
+                <a:tc>
+                  <a:txBody>
+                    <a:bodyPr/>
+                    <a:lstStyle/>
+                    <a:p>
+                      <a:pPr algn="ctr"/>
+                      <a:r>
+                        <a:rPr sz="1400" b="0">
+                          <a:solidFill>
+                            <a:srgbClr val="22262A"/>
+                          </a:solidFill>
+                          <a:latin typeface="Calibri"/>
+                        </a:rPr>
+                        <a:t>+23.10</a:t>
+                      </a:r>
+                    </a:p>
+                  </a:txBody>
+                  <a:tcPr marL="88900" marR="88900" marT="38100" marB="38100" anchor="ctr">
+                    <a:solidFill>
+                      <a:srgbClr val="F2F4F6"/>
+                    </a:solidFill>
+                  </a:tcPr>
+                </a:tc>
+                <a:tc>
+                  <a:txBody>
+                    <a:bodyPr/>
+                    <a:lstStyle/>
+                    <a:p>
+                      <a:pPr algn="ctr"/>
+                      <a:r>
+                        <a:rPr sz="1400" b="0">
+                          <a:solidFill>
+                            <a:srgbClr val="22262A"/>
+                          </a:solidFill>
+                          <a:latin typeface="Calibri"/>
+                        </a:rPr>
+                        <a:t>60.41</a:t>
+                      </a:r>
+                    </a:p>
+                  </a:txBody>
+                  <a:tcPr marL="88900" marR="88900" marT="38100" marB="38100" anchor="ctr">
+                    <a:solidFill>
+                      <a:srgbClr val="F2F4F6"/>
+                    </a:solidFill>
+                  </a:tcPr>
+                </a:tc>
+                <a:tc>
+                  <a:txBody>
+                    <a:bodyPr/>
+                    <a:lstStyle/>
+                    <a:p>
+                      <a:pPr algn="ctr"/>
+                      <a:r>
+                        <a:rPr sz="1400" b="0">
+                          <a:solidFill>
+                            <a:srgbClr val="22262A"/>
+                          </a:solidFill>
+                          <a:latin typeface="Calibri"/>
+                        </a:rPr>
+                        <a:t>−102.22</a:t>
+                      </a:r>
+                    </a:p>
+                  </a:txBody>
+                  <a:tcPr marL="88900" marR="88900" marT="38100" marB="38100" anchor="ctr">
+                    <a:solidFill>
+                      <a:srgbClr val="F2F4F6"/>
+                    </a:solidFill>
+                  </a:tcPr>
+                </a:tc>
+                <a:tc>
+                  <a:txBody>
+                    <a:bodyPr/>
+                    <a:lstStyle/>
+                    <a:p>
+                      <a:pPr algn="ctr"/>
+                      <a:r>
+                        <a:rPr sz="1400" b="0">
+                          <a:solidFill>
+                            <a:srgbClr val="22262A"/>
+                          </a:solidFill>
+                          <a:latin typeface="Calibri"/>
+                        </a:rPr>
+                        <a:t>−52.58</a:t>
+                      </a:r>
+                    </a:p>
+                  </a:txBody>
+                  <a:tcPr marL="88900" marR="88900" marT="38100" marB="38100" anchor="ctr">
+                    <a:solidFill>
+                      <a:srgbClr val="F2F4F6"/>
+                    </a:solidFill>
+                  </a:tcPr>
+                </a:tc>
+                <a:tc>
+                  <a:txBody>
+                    <a:bodyPr/>
+                    <a:lstStyle/>
+                    <a:p>
+                      <a:pPr algn="ctr"/>
+                      <a:r>
+                        <a:rPr sz="1400" b="0">
+                          <a:solidFill>
+                            <a:srgbClr val="22262A"/>
+                          </a:solidFill>
+                          <a:latin typeface="Calibri"/>
+                        </a:rPr>
+                        <a:t>−32%</a:t>
+                      </a:r>
+                    </a:p>
+                  </a:txBody>
+                  <a:tcPr marL="88900" marR="88900" marT="38100" marB="38100" anchor="ctr">
+                    <a:solidFill>
+                      <a:srgbClr val="F2F4F6"/>
+                    </a:solidFill>
+                  </a:tcPr>
+                </a:tc>
+              </a:tr>
+              <a:tr h="530352">
+                <a:tc>
+                  <a:txBody>
+                    <a:bodyPr/>
+                    <a:lstStyle/>
+                    <a:p>
+                      <a:pPr algn="l"/>
+                      <a:r>
+                        <a:rPr sz="1400" b="1">
+                          <a:solidFill>
+                            <a:srgbClr val="22262A"/>
+                          </a:solidFill>
+                          <a:latin typeface="Calibri"/>
+                        </a:rPr>
+                        <a:t>Band 0.40</a:t>
+                      </a:r>
+                    </a:p>
+                  </a:txBody>
+                  <a:tcPr marL="88900" marR="88900" marT="38100" marB="38100" anchor="ctr">
+                    <a:solidFill>
+                      <a:srgbClr val="FFFFFF"/>
+                    </a:solidFill>
+                  </a:tcPr>
+                </a:tc>
+                <a:tc>
+                  <a:txBody>
+                    <a:bodyPr/>
+                    <a:lstStyle/>
+                    <a:p>
+                      <a:pPr algn="ctr"/>
+                      <a:r>
+                        <a:rPr sz="1400" b="0">
+                          <a:solidFill>
+                            <a:srgbClr val="22262A"/>
+                          </a:solidFill>
+                          <a:latin typeface="Calibri"/>
+                        </a:rPr>
+                        <a:t>+18.64</a:t>
+                      </a:r>
+                    </a:p>
+                  </a:txBody>
+                  <a:tcPr marL="88900" marR="88900" marT="38100" marB="38100" anchor="ctr">
+                    <a:solidFill>
+                      <a:srgbClr val="FFFFFF"/>
+                    </a:solidFill>
+                  </a:tcPr>
+                </a:tc>
+                <a:tc>
+                  <a:txBody>
+                    <a:bodyPr/>
+                    <a:lstStyle/>
+                    <a:p>
+                      <a:pPr algn="ctr"/>
+                      <a:r>
+                        <a:rPr sz="1400" b="0">
+                          <a:solidFill>
+                            <a:srgbClr val="22262A"/>
+                          </a:solidFill>
+                          <a:latin typeface="Calibri"/>
+                        </a:rPr>
+                        <a:t>47.42</a:t>
+                      </a:r>
+                    </a:p>
+                  </a:txBody>
+                  <a:tcPr marL="88900" marR="88900" marT="38100" marB="38100" anchor="ctr">
+                    <a:solidFill>
+                      <a:srgbClr val="FFFFFF"/>
+                    </a:solidFill>
+                  </a:tcPr>
+                </a:tc>
+                <a:tc>
+                  <a:txBody>
+                    <a:bodyPr/>
+                    <a:lstStyle/>
+                    <a:p>
+                      <a:pPr algn="ctr"/>
+                      <a:r>
+                        <a:rPr sz="1400" b="0">
+                          <a:solidFill>
+                            <a:srgbClr val="22262A"/>
+                          </a:solidFill>
+                          <a:latin typeface="Calibri"/>
+                        </a:rPr>
+                        <a:t>−72.18</a:t>
+                      </a:r>
+                    </a:p>
+                  </a:txBody>
+                  <a:tcPr marL="88900" marR="88900" marT="38100" marB="38100" anchor="ctr">
+                    <a:solidFill>
+                      <a:srgbClr val="FFFFFF"/>
+                    </a:solidFill>
+                  </a:tcPr>
+                </a:tc>
+                <a:tc>
+                  <a:txBody>
+                    <a:bodyPr/>
+                    <a:lstStyle/>
+                    <a:p>
+                      <a:pPr algn="ctr"/>
+                      <a:r>
+                        <a:rPr sz="1400" b="0">
+                          <a:solidFill>
+                            <a:srgbClr val="22262A"/>
+                          </a:solidFill>
+                          <a:latin typeface="Calibri"/>
+                        </a:rPr>
+                        <a:t>−33.12</a:t>
+                      </a:r>
+                    </a:p>
+                  </a:txBody>
+                  <a:tcPr marL="88900" marR="88900" marT="38100" marB="38100" anchor="ctr">
+                    <a:solidFill>
+                      <a:srgbClr val="FFFFFF"/>
+                    </a:solidFill>
+                  </a:tcPr>
+                </a:tc>
+                <a:tc>
+                  <a:txBody>
+                    <a:bodyPr/>
+                    <a:lstStyle/>
+                    <a:p>
+                      <a:pPr algn="ctr"/>
+                      <a:r>
+                        <a:rPr sz="1400" b="0">
+                          <a:solidFill>
+                            <a:srgbClr val="22262A"/>
+                          </a:solidFill>
+                          <a:latin typeface="Calibri"/>
+                        </a:rPr>
+                        <a:t>−46%</a:t>
+                      </a:r>
+                    </a:p>
+                  </a:txBody>
+                  <a:tcPr marL="88900" marR="88900" marT="38100" marB="38100" anchor="ctr">
+                    <a:solidFill>
+                      <a:srgbClr val="FFFFFF"/>
+                    </a:solidFill>
+                  </a:tcPr>
+                </a:tc>
+              </a:tr>
+              <a:tr h="530352">
+                <a:tc>
+                  <a:txBody>
+                    <a:bodyPr/>
+                    <a:lstStyle/>
+                    <a:p>
+                      <a:pPr algn="l"/>
+                      <a:r>
+                        <a:rPr sz="1400" b="1">
+                          <a:solidFill>
+                            <a:srgbClr val="22262A"/>
+                          </a:solidFill>
+                          <a:latin typeface="Calibri"/>
+                        </a:rPr>
+                        <a:t>Band 0.25</a:t>
+                      </a:r>
+                    </a:p>
+                  </a:txBody>
+                  <a:tcPr marL="88900" marR="88900" marT="38100" marB="38100" anchor="ctr">
+                    <a:solidFill>
+                      <a:srgbClr val="F2F4F6"/>
+                    </a:solidFill>
+                  </a:tcPr>
+                </a:tc>
+                <a:tc>
+                  <a:txBody>
+                    <a:bodyPr/>
+                    <a:lstStyle/>
+                    <a:p>
+                      <a:pPr algn="ctr"/>
+                      <a:r>
+                        <a:rPr sz="1400" b="0">
+                          <a:solidFill>
+                            <a:srgbClr val="22262A"/>
+                          </a:solidFill>
+                          <a:latin typeface="Calibri"/>
+                        </a:rPr>
+                        <a:t>+16.88</a:t>
+                      </a:r>
+                    </a:p>
+                  </a:txBody>
+                  <a:tcPr marL="88900" marR="88900" marT="38100" marB="38100" anchor="ctr">
+                    <a:solidFill>
+                      <a:srgbClr val="F2F4F6"/>
+                    </a:solidFill>
+                  </a:tcPr>
+                </a:tc>
+                <a:tc>
+                  <a:txBody>
+                    <a:bodyPr/>
+                    <a:lstStyle/>
+                    <a:p>
+                      <a:pPr algn="ctr"/>
+                      <a:r>
+                        <a:rPr sz="1400" b="0">
+                          <a:solidFill>
+                            <a:srgbClr val="22262A"/>
+                          </a:solidFill>
+                          <a:latin typeface="Calibri"/>
+                        </a:rPr>
+                        <a:t>38.16</a:t>
+                      </a:r>
+                    </a:p>
+                  </a:txBody>
+                  <a:tcPr marL="88900" marR="88900" marT="38100" marB="38100" anchor="ctr">
+                    <a:solidFill>
+                      <a:srgbClr val="F2F4F6"/>
+                    </a:solidFill>
+                  </a:tcPr>
+                </a:tc>
+                <a:tc>
+                  <a:txBody>
+                    <a:bodyPr/>
+                    <a:lstStyle/>
+                    <a:p>
+                      <a:pPr algn="ctr"/>
+                      <a:r>
+                        <a:rPr sz="1400" b="0">
+                          <a:solidFill>
+                            <a:srgbClr val="22262A"/>
+                          </a:solidFill>
+                          <a:latin typeface="Calibri"/>
+                        </a:rPr>
+                        <a:t>−66.21</a:t>
+                      </a:r>
+                    </a:p>
+                  </a:txBody>
+                  <a:tcPr marL="88900" marR="88900" marT="38100" marB="38100" anchor="ctr">
+                    <a:solidFill>
+                      <a:srgbClr val="F2F4F6"/>
+                    </a:solidFill>
+                  </a:tcPr>
+                </a:tc>
+                <a:tc>
+                  <a:txBody>
+                    <a:bodyPr/>
+                    <a:lstStyle/>
+                    <a:p>
+                      <a:pPr algn="ctr"/>
+                      <a:r>
+                        <a:rPr sz="1400" b="0">
+                          <a:solidFill>
+                            <a:srgbClr val="22262A"/>
+                          </a:solidFill>
+                          <a:latin typeface="Calibri"/>
+                        </a:rPr>
+                        <a:t>−24.56</a:t>
+                      </a:r>
+                    </a:p>
+                  </a:txBody>
+                  <a:tcPr marL="88900" marR="88900" marT="38100" marB="38100" anchor="ctr">
+                    <a:solidFill>
+                      <a:srgbClr val="F2F4F6"/>
+                    </a:solidFill>
+                  </a:tcPr>
+                </a:tc>
+                <a:tc>
+                  <a:txBody>
+                    <a:bodyPr/>
+                    <a:lstStyle/>
+                    <a:p>
+                      <a:pPr algn="ctr"/>
+                      <a:r>
+                        <a:rPr sz="1400" b="0">
+                          <a:solidFill>
+                            <a:srgbClr val="22262A"/>
+                          </a:solidFill>
+                          <a:latin typeface="Calibri"/>
+                        </a:rPr>
+                        <a:t>−57%</a:t>
+                      </a:r>
+                    </a:p>
+                  </a:txBody>
+                  <a:tcPr marL="88900" marR="88900" marT="38100" marB="38100" anchor="ctr">
+                    <a:solidFill>
+                      <a:srgbClr val="F2F4F6"/>
+                    </a:solidFill>
+                  </a:tcPr>
+                </a:tc>
+              </a:tr>
+            </a:tbl>
+          </a:graphicData>
+        </a:graphic>
+      </p:graphicFrame>
+      <p:sp>
+        <p:nvSpPr>
+          <p:cNvPr id="8" name="TextBox 7"/>
+          <p:cNvSpPr txBox="1"/>
+          <p:nvPr/>
+        </p:nvSpPr>
+        <p:spPr>
+          <a:xfrm>
+            <a:off x="566928" y="5074920"/>
+            <a:ext cx="11055096" cy="1188720"/>
+          </a:xfrm>
+          <a:prstGeom prst="rect">
+            <a:avLst/>
+          </a:prstGeom>
+          <a:noFill/>
+        </p:spPr>
+        <p:txBody>
+          <a:bodyPr wrap="square" lIns="0" rIns="0" tIns="0" bIns="0">
+            <a:spAutoFit/>
+          </a:bodyPr>
+          <a:lstStyle/>
+          <a:p>
+            <a:pPr>
+              <a:spcAft>
+                <a:spcPts val="800"/>
+              </a:spcAft>
+            </a:pPr>
+            <a:r>
+              <a:rPr sz="1500" b="0">
+                <a:solidFill>
+                  <a:srgbClr val="1F77B4"/>
+                </a:solidFill>
+                <a:latin typeface="Calibri"/>
+              </a:rPr>
+              <a:t>▪  </a:t>
+            </a:r>
+            <a:r>
+              <a:rPr sz="1500" b="0">
+                <a:solidFill>
+                  <a:srgbClr val="22262A"/>
+                </a:solidFill>
+                <a:latin typeface="Calibri"/>
+              </a:rPr>
+              <a:t>All bands: 48/48 causal-bound PASS, 0 breaches. Band 0.60 Pareto-dominates the baseline — higher mean, lower std. Band 0.40 is available where the mandate wants a deeper risk cut (−46%).</a:t>
+            </a:r>
+          </a:p>
+        </p:txBody>
+      </p:sp>
+      <p:sp>
+        <p:nvSpPr>
+          <p:cNvPr id="9" name="TextBox 8"/>
+          <p:cNvSpPr txBox="1"/>
+          <p:nvPr/>
+        </p:nvSpPr>
+        <p:spPr>
+          <a:xfrm>
+            <a:off x="566928" y="6473952"/>
+            <a:ext cx="11055096" cy="274320"/>
+          </a:xfrm>
+          <a:prstGeom prst="rect">
+            <a:avLst/>
+          </a:prstGeom>
+          <a:noFill/>
+        </p:spPr>
+        <p:txBody>
+          <a:bodyPr wrap="square" lIns="0" rIns="0" tIns="0" bIns="0">
+            <a:spAutoFit/>
+          </a:bodyPr>
+          <a:lstStyle/>
+          <a:p>
+            <a:pPr algn="l"/>
+            <a:r>
+              <a:rPr sz="950" b="0">
+                <a:solidFill>
+                  <a:srgbClr val="6B7278"/>
+                </a:solidFill>
+                <a:latin typeface="Calibri"/>
+              </a:rPr>
+              <a:t>artifacts/walk_forward/full48_corridor_rolls.csv · full48_baseline.csv (48 trades each). p10 = 10th percentile of realized $/oz.</a:t>
+            </a:r>
+          </a:p>
+        </p:txBody>
+      </p:sp>
+    </p:spTree>
+  </p:cSld>
+  <p:clrMapOvr>
+    <a:masterClrMapping/>
+  </p:clrMapOvr>
+</p:sld>
+</file>
+
+<file path=ppt/slides/slide35.xml><?xml version="1.0" encoding="utf-8"?>
+<p:sld xmlns:a="http://schemas.openxmlformats.org/drawingml/2006/main" xmlns:p="http://schemas.openxmlformats.org/presentationml/2006/main" xmlns:r="http://schemas.openxmlformats.org/officeDocument/2006/relationships">
+  <p:cSld>
+    <p:bg>
+      <p:bgPr>
+        <a:solidFill>
+          <a:srgbClr val="FFFFFF"/>
+        </a:solidFill>
+        <a:effectLst/>
+      </p:bgPr>
+    </p:bg>
+    <p:spTree>
+      <p:nvGrpSpPr>
+        <p:cNvPr id="1" name=""/>
+        <p:cNvGrpSpPr/>
+        <p:nvPr/>
+      </p:nvGrpSpPr>
+      <p:grpSpPr/>
+      <p:sp>
+        <p:nvSpPr>
+          <p:cNvPr id="2" name="TextBox 1"/>
+          <p:cNvSpPr txBox="1"/>
+          <p:nvPr/>
+        </p:nvSpPr>
+        <p:spPr>
+          <a:xfrm>
+            <a:off x="566928" y="274320"/>
+            <a:ext cx="11055096" cy="274320"/>
+          </a:xfrm>
+          <a:prstGeom prst="rect">
+            <a:avLst/>
+          </a:prstGeom>
+          <a:noFill/>
+        </p:spPr>
+        <p:txBody>
+          <a:bodyPr wrap="square" lIns="0" rIns="0" tIns="0" bIns="0">
+            <a:spAutoFit/>
+          </a:bodyPr>
+          <a:lstStyle/>
+          <a:p>
+            <a:pPr algn="l"/>
+            <a:r>
+              <a:rPr sz="1250" b="1">
+                <a:solidFill>
+                  <a:srgbClr val="1F77B4"/>
+                </a:solidFill>
+                <a:latin typeface="Calibri"/>
+              </a:rPr>
+              <a:t>VARIANCE CONTROL  ·  3 OF 4</a:t>
+            </a:r>
+          </a:p>
+        </p:txBody>
+      </p:sp>
+      <p:sp>
+        <p:nvSpPr>
+          <p:cNvPr id="3" name="TextBox 2"/>
+          <p:cNvSpPr txBox="1"/>
+          <p:nvPr/>
+        </p:nvSpPr>
+        <p:spPr>
+          <a:xfrm>
+            <a:off x="566928" y="530352"/>
+            <a:ext cx="11055096" cy="822960"/>
+          </a:xfrm>
+          <a:prstGeom prst="rect">
+            <a:avLst/>
+          </a:prstGeom>
+          <a:noFill/>
+        </p:spPr>
+        <p:txBody>
+          <a:bodyPr wrap="square" lIns="0" rIns="0" tIns="0" bIns="0">
+            <a:spAutoFit/>
+          </a:bodyPr>
+          <a:lstStyle/>
+          <a:p>
+            <a:pPr algn="l"/>
+            <a:r>
+              <a:rPr sz="2700" b="1">
+                <a:solidFill>
+                  <a:srgbClr val="22262A"/>
+                </a:solidFill>
+                <a:latin typeface="Calibri"/>
+              </a:rPr>
+              <a:t>A risk control, not a P&amp;L enhancer</a:t>
+            </a:r>
+          </a:p>
+        </p:txBody>
+      </p:sp>
+      <p:sp>
+        <p:nvSpPr>
+          <p:cNvPr id="4" name="Rectangle 3"/>
+          <p:cNvSpPr/>
+          <p:nvPr/>
+        </p:nvSpPr>
+        <p:spPr>
+          <a:xfrm>
+            <a:off x="566928" y="1298448"/>
+            <a:ext cx="11055096" cy="27432"/>
+          </a:xfrm>
+          <a:prstGeom prst="rect">
+            <a:avLst/>
+          </a:prstGeom>
+          <a:solidFill>
+            <a:srgbClr val="1F77B4"/>
+          </a:solidFill>
+          <a:ln>
+            <a:noFill/>
+          </a:ln>
+        </p:spPr>
+        <p:style>
+          <a:lnRef idx="1">
+            <a:schemeClr val="accent1"/>
+          </a:lnRef>
+          <a:fillRef idx="3">
+            <a:schemeClr val="accent1"/>
+          </a:fillRef>
+          <a:effectRef idx="2">
+            <a:schemeClr val="accent1"/>
+          </a:effectRef>
+          <a:fontRef idx="minor">
+            <a:schemeClr val="lt1"/>
+          </a:fontRef>
+        </p:style>
+        <p:txBody>
+          <a:bodyPr rtlCol="0" anchor="ctr"/>
+          <a:lstStyle/>
+          <a:p>
+            <a:pPr algn="ctr"/>
+          </a:p>
+        </p:txBody>
+      </p:sp>
+      <p:sp>
+        <p:nvSpPr>
+          <p:cNvPr id="5" name="TextBox 4"/>
+          <p:cNvSpPr txBox="1"/>
+          <p:nvPr/>
+        </p:nvSpPr>
+        <p:spPr>
+          <a:xfrm>
+            <a:off x="566928" y="1444752"/>
+            <a:ext cx="11055096" cy="640080"/>
+          </a:xfrm>
+          <a:prstGeom prst="rect">
+            <a:avLst/>
+          </a:prstGeom>
+          <a:noFill/>
+        </p:spPr>
+        <p:txBody>
+          <a:bodyPr wrap="square" lIns="0" rIns="0" tIns="0" bIns="0">
+            <a:spAutoFit/>
+          </a:bodyPr>
+          <a:lstStyle/>
+          <a:p>
+            <a:pPr algn="l"/>
+            <a:r>
+              <a:rPr sz="1650" b="0">
+                <a:solidFill>
+                  <a:srgbClr val="2B3A42"/>
+                </a:solidFill>
+                <a:latin typeface="Calibri"/>
+              </a:rPr>
+              <a:t>Management-grade honesty: the mean differences are noise; the variance ordering is certain.</a:t>
+            </a:r>
+          </a:p>
+        </p:txBody>
+      </p:sp>
+      <p:sp>
+        <p:nvSpPr>
+          <p:cNvPr id="6" name="TextBox 5"/>
+          <p:cNvSpPr txBox="1"/>
+          <p:nvPr/>
+        </p:nvSpPr>
+        <p:spPr>
+          <a:xfrm>
+            <a:off x="11612880" y="6455664"/>
+            <a:ext cx="457200" cy="274320"/>
+          </a:xfrm>
+          <a:prstGeom prst="rect">
+            <a:avLst/>
+          </a:prstGeom>
+          <a:noFill/>
+        </p:spPr>
+        <p:txBody>
+          <a:bodyPr wrap="square" lIns="0" rIns="0" tIns="0" bIns="0">
+            <a:spAutoFit/>
+          </a:bodyPr>
+          <a:lstStyle/>
+          <a:p>
+            <a:pPr algn="r"/>
+            <a:r>
+              <a:rPr sz="1000" b="0">
+                <a:solidFill>
+                  <a:srgbClr val="6B7278"/>
+                </a:solidFill>
+                <a:latin typeface="Calibri"/>
+              </a:rPr>
+              <a:t>26</a:t>
+            </a:r>
+          </a:p>
+        </p:txBody>
+      </p:sp>
+      <p:sp>
+        <p:nvSpPr>
+          <p:cNvPr id="7" name="TextBox 6"/>
+          <p:cNvSpPr txBox="1"/>
+          <p:nvPr/>
+        </p:nvSpPr>
+        <p:spPr>
+          <a:xfrm>
+            <a:off x="566928" y="2148840"/>
+            <a:ext cx="6903720" cy="4023360"/>
+          </a:xfrm>
+          <a:prstGeom prst="rect">
+            <a:avLst/>
+          </a:prstGeom>
+          <a:noFill/>
+        </p:spPr>
+        <p:txBody>
+          <a:bodyPr wrap="square" lIns="0" rIns="0" tIns="0" bIns="0">
+            <a:spAutoFit/>
+          </a:bodyPr>
+          <a:lstStyle/>
+          <a:p>
+            <a:pPr>
+              <a:spcAft>
+                <a:spcPts val="800"/>
+              </a:spcAft>
+            </a:pPr>
+            <a:r>
+              <a:rPr sz="1550" b="0">
+                <a:solidFill>
+                  <a:srgbClr val="1F77B4"/>
+                </a:solidFill>
+                <a:latin typeface="Calibri"/>
+              </a:rPr>
+              <a:t>▪  </a:t>
+            </a:r>
+            <a:r>
+              <a:rPr sz="1550" b="1">
+                <a:solidFill>
+                  <a:srgbClr val="22262A"/>
+                </a:solidFill>
+                <a:latin typeface="Calibri"/>
+              </a:rPr>
+              <a:t>Mean differences are noise.  </a:t>
+            </a:r>
+            <a:r>
+              <a:rPr sz="1550" b="0">
+                <a:solidFill>
+                  <a:srgbClr val="22262A"/>
+                </a:solidFill>
+                <a:latin typeface="Calibri"/>
+              </a:rPr>
+              <a:t>Band 0.60 vs unfenced: paired Δ = +1.0 $/oz, SE 6.2, t = 0.16. Band 0.40 vs 0.60: Δ = −4.5 ± 2.9, t = −1.5. Neither is distinguishable from zero.</a:t>
+            </a:r>
+          </a:p>
+          <a:p>
+            <a:pPr>
+              <a:spcAft>
+                <a:spcPts val="800"/>
+              </a:spcAft>
+            </a:pPr>
+            <a:r>
+              <a:rPr sz="1550" b="0">
+                <a:solidFill>
+                  <a:srgbClr val="1F77B4"/>
+                </a:solidFill>
+                <a:latin typeface="Calibri"/>
+              </a:rPr>
+              <a:t>▪  </a:t>
+            </a:r>
+            <a:r>
+              <a:rPr sz="1550" b="1">
+                <a:solidFill>
+                  <a:srgbClr val="22262A"/>
+                </a:solidFill>
+                <a:latin typeface="Calibri"/>
+              </a:rPr>
+              <a:t>The variance cut is certain.  </a:t>
+            </a:r>
+            <a:r>
+              <a:rPr sz="1550" b="0">
+                <a:solidFill>
+                  <a:srgbClr val="22262A"/>
+                </a:solidFill>
+                <a:latin typeface="Calibri"/>
+              </a:rPr>
+              <a:t>std(fenced) &lt; std(unfenced) in 100% of 20,000 paired bootstraps, for every band.</a:t>
+            </a:r>
+          </a:p>
+          <a:p>
+            <a:pPr>
+              <a:spcAft>
+                <a:spcPts val="800"/>
+              </a:spcAft>
+            </a:pPr>
+            <a:r>
+              <a:rPr sz="1550" b="0">
+                <a:solidFill>
+                  <a:srgbClr val="1F77B4"/>
+                </a:solidFill>
+                <a:latin typeface="Calibri"/>
+              </a:rPr>
+              <a:t>▪  </a:t>
+            </a:r>
+            <a:r>
+              <a:rPr sz="1550" b="1">
+                <a:solidFill>
+                  <a:srgbClr val="22262A"/>
+                </a:solidFill>
+                <a:latin typeface="Calibri"/>
+              </a:rPr>
+              <a:t>Where the P&amp;L comes from.  </a:t>
+            </a:r>
+            <a:r>
+              <a:rPr sz="1550" b="0">
+                <a:solidFill>
+                  <a:srgbClr val="22262A"/>
+                </a:solidFill>
+                <a:latin typeface="Calibri"/>
+              </a:rPr>
+              <a:t>The locked dealer margin, not a market view. A configuration that reliably predicted a month’s direction would be the phantom-alpha bug we eliminated in the integrity review — the corrected world is built E[dF] = 0 by construction.</a:t>
+            </a:r>
+          </a:p>
+        </p:txBody>
+      </p:sp>
+      <p:sp>
+        <p:nvSpPr>
+          <p:cNvPr id="8" name="Rounded Rectangle 7"/>
+          <p:cNvSpPr/>
+          <p:nvPr/>
+        </p:nvSpPr>
+        <p:spPr>
+          <a:xfrm>
+            <a:off x="7726679" y="2514600"/>
+            <a:ext cx="3895344" cy="2651760"/>
+          </a:xfrm>
+          <a:prstGeom prst="roundRect">
+            <a:avLst/>
+          </a:prstGeom>
+          <a:solidFill>
+            <a:srgbClr val="2B3A42"/>
+          </a:solidFill>
+          <a:ln>
+            <a:noFill/>
+          </a:ln>
+        </p:spPr>
+        <p:style>
+          <a:lnRef idx="1">
+            <a:schemeClr val="accent1"/>
+          </a:lnRef>
+          <a:fillRef idx="3">
+            <a:schemeClr val="accent1"/>
+          </a:fillRef>
+          <a:effectRef idx="2">
+            <a:schemeClr val="accent1"/>
+          </a:effectRef>
+          <a:fontRef idx="minor">
+            <a:schemeClr val="lt1"/>
+          </a:fontRef>
+        </p:style>
+        <p:txBody>
+          <a:bodyPr rtlCol="0" anchor="ctr" wrap="square" lIns="228600" rIns="228600" tIns="228600"/>
+          <a:lstStyle/>
+          <a:p>
+            <a:pPr algn="l"/>
+            <a:r>
+              <a:rPr sz="1250" b="1">
+                <a:solidFill>
+                  <a:srgbClr val="8EC6EC"/>
+                </a:solidFill>
+                <a:latin typeface="Calibri"/>
+              </a:rPr>
+              <a:t>THE MESSAGE</a:t>
+            </a:r>
+          </a:p>
+          <a:p>
+            <a:pPr algn="l">
+              <a:spcBef>
+                <a:spcPts val="800"/>
+              </a:spcBef>
+            </a:pPr>
+            <a:r>
+              <a:rPr sz="1500" b="0">
+                <a:solidFill>
+                  <a:srgbClr val="FFFFFF"/>
+                </a:solidFill>
+                <a:latin typeface="Calibri"/>
+              </a:rPr>
+              <a:t>The corridor is insurance on the variance —</a:t>
+            </a:r>
+          </a:p>
+          <a:p>
+            <a:pPr algn="l">
+              <a:spcBef>
+                <a:spcPts val="800"/>
+              </a:spcBef>
+            </a:pPr>
+            <a:r>
+              <a:rPr sz="1500" b="0">
+                <a:solidFill>
+                  <a:srgbClr val="FFFFFF"/>
+                </a:solidFill>
+                <a:latin typeface="Calibri"/>
+              </a:rPr>
+              <a:t>priced at ≈ $0 of expected P&amp;L.</a:t>
+            </a:r>
+          </a:p>
+          <a:p>
+            <a:pPr algn="l">
+              <a:spcBef>
+                <a:spcPts val="800"/>
+              </a:spcBef>
+            </a:pPr>
+            <a:r>
+              <a:rPr sz="1500" b="0">
+                <a:solidFill>
+                  <a:srgbClr val="FFFFFF"/>
+                </a:solidFill>
+                <a:latin typeface="Calibri"/>
+              </a:rPr>
+              <a:t/>
+            </a:r>
+          </a:p>
+          <a:p>
+            <a:pPr algn="l">
+              <a:spcBef>
+                <a:spcPts val="800"/>
+              </a:spcBef>
+            </a:pPr>
+            <a:r>
+              <a:rPr sz="1500" b="0">
+                <a:solidFill>
+                  <a:srgbClr val="FFFFFF"/>
+                </a:solidFill>
+                <a:latin typeface="Calibri"/>
+              </a:rPr>
+              <a:t>That is exactly what a martingale-disciplined model must show.</a:t>
+            </a:r>
+          </a:p>
+        </p:txBody>
+      </p:sp>
+      <p:sp>
+        <p:nvSpPr>
+          <p:cNvPr id="9" name="TextBox 8"/>
+          <p:cNvSpPr txBox="1"/>
+          <p:nvPr/>
+        </p:nvSpPr>
+        <p:spPr>
+          <a:xfrm>
+            <a:off x="566928" y="6473952"/>
+            <a:ext cx="11055096" cy="274320"/>
+          </a:xfrm>
+          <a:prstGeom prst="rect">
+            <a:avLst/>
+          </a:prstGeom>
+          <a:noFill/>
+        </p:spPr>
+        <p:txBody>
+          <a:bodyPr wrap="square" lIns="0" rIns="0" tIns="0" bIns="0">
+            <a:spAutoFit/>
+          </a:bodyPr>
+          <a:lstStyle/>
+          <a:p>
+            <a:pPr algn="l"/>
+            <a:r>
+              <a:rPr sz="950" b="0">
+                <a:solidFill>
+                  <a:srgbClr val="6B7278"/>
+                </a:solidFill>
+                <a:latin typeface="Calibri"/>
+              </a:rPr>
+              <a:t>Paired stats and 20k paired bootstrap (seed 12345) recomputed from full48_baseline.csv + full48_corridor_rolls.csv.</a:t>
+            </a:r>
+          </a:p>
+        </p:txBody>
+      </p:sp>
+    </p:spTree>
+  </p:cSld>
+  <p:clrMapOvr>
+    <a:masterClrMapping/>
+  </p:clrMapOvr>
+</p:sld>
+</file>
+
+<file path=ppt/slides/slide36.xml><?xml version="1.0" encoding="utf-8"?>
+<p:sld xmlns:a="http://schemas.openxmlformats.org/drawingml/2006/main" xmlns:p="http://schemas.openxmlformats.org/presentationml/2006/main" xmlns:r="http://schemas.openxmlformats.org/officeDocument/2006/relationships">
+  <p:cSld>
+    <p:bg>
+      <p:bgPr>
+        <a:solidFill>
+          <a:srgbClr val="FFFFFF"/>
+        </a:solidFill>
+        <a:effectLst/>
+      </p:bgPr>
+    </p:bg>
+    <p:spTree>
+      <p:nvGrpSpPr>
+        <p:cNvPr id="1" name=""/>
+        <p:cNvGrpSpPr/>
+        <p:nvPr/>
+      </p:nvGrpSpPr>
+      <p:grpSpPr/>
+      <p:sp>
+        <p:nvSpPr>
+          <p:cNvPr id="2" name="TextBox 1"/>
+          <p:cNvSpPr txBox="1"/>
+          <p:nvPr/>
+        </p:nvSpPr>
+        <p:spPr>
+          <a:xfrm>
+            <a:off x="566928" y="274320"/>
+            <a:ext cx="11055096" cy="274320"/>
+          </a:xfrm>
+          <a:prstGeom prst="rect">
+            <a:avLst/>
+          </a:prstGeom>
+          <a:noFill/>
+        </p:spPr>
+        <p:txBody>
+          <a:bodyPr wrap="square" lIns="0" rIns="0" tIns="0" bIns="0">
+            <a:spAutoFit/>
+          </a:bodyPr>
+          <a:lstStyle/>
+          <a:p>
+            <a:pPr algn="l"/>
+            <a:r>
+              <a:rPr sz="1250" b="1">
+                <a:solidFill>
+                  <a:srgbClr val="1F77B4"/>
+                </a:solidFill>
+                <a:latin typeface="Calibri"/>
+              </a:rPr>
+              <a:t>VARIANCE CONTROL  ·  4 OF 4</a:t>
+            </a:r>
+          </a:p>
+        </p:txBody>
+      </p:sp>
+      <p:sp>
+        <p:nvSpPr>
+          <p:cNvPr id="3" name="TextBox 2"/>
+          <p:cNvSpPr txBox="1"/>
+          <p:nvPr/>
+        </p:nvSpPr>
+        <p:spPr>
+          <a:xfrm>
+            <a:off x="566928" y="530352"/>
+            <a:ext cx="11055096" cy="822960"/>
+          </a:xfrm>
+          <a:prstGeom prst="rect">
+            <a:avLst/>
+          </a:prstGeom>
+          <a:noFill/>
+        </p:spPr>
+        <p:txBody>
+          <a:bodyPr wrap="square" lIns="0" rIns="0" tIns="0" bIns="0">
+            <a:spAutoFit/>
+          </a:bodyPr>
+          <a:lstStyle/>
+          <a:p>
+            <a:pPr algn="l"/>
+            <a:r>
+              <a:rPr sz="2700" b="1">
+                <a:solidFill>
+                  <a:srgbClr val="22262A"/>
+                </a:solidFill>
+                <a:latin typeface="Calibri"/>
+              </a:rPr>
+              <a:t>One model serves any mandate band</a:t>
+            </a:r>
+          </a:p>
+        </p:txBody>
+      </p:sp>
+      <p:sp>
+        <p:nvSpPr>
+          <p:cNvPr id="4" name="Rectangle 3"/>
+          <p:cNvSpPr/>
+          <p:nvPr/>
+        </p:nvSpPr>
+        <p:spPr>
+          <a:xfrm>
+            <a:off x="566928" y="1298448"/>
+            <a:ext cx="11055096" cy="27432"/>
+          </a:xfrm>
+          <a:prstGeom prst="rect">
+            <a:avLst/>
+          </a:prstGeom>
+          <a:solidFill>
+            <a:srgbClr val="1F77B4"/>
+          </a:solidFill>
+          <a:ln>
+            <a:noFill/>
+          </a:ln>
+        </p:spPr>
+        <p:style>
+          <a:lnRef idx="1">
+            <a:schemeClr val="accent1"/>
+          </a:lnRef>
+          <a:fillRef idx="3">
+            <a:schemeClr val="accent1"/>
+          </a:fillRef>
+          <a:effectRef idx="2">
+            <a:schemeClr val="accent1"/>
+          </a:effectRef>
+          <a:fontRef idx="minor">
+            <a:schemeClr val="lt1"/>
+          </a:fontRef>
+        </p:style>
+        <p:txBody>
+          <a:bodyPr rtlCol="0" anchor="ctr"/>
+          <a:lstStyle/>
+          <a:p>
+            <a:pPr algn="ctr"/>
+          </a:p>
+        </p:txBody>
+      </p:sp>
+      <p:sp>
+        <p:nvSpPr>
+          <p:cNvPr id="5" name="TextBox 4"/>
+          <p:cNvSpPr txBox="1"/>
+          <p:nvPr/>
+        </p:nvSpPr>
+        <p:spPr>
+          <a:xfrm>
+            <a:off x="566928" y="1444752"/>
+            <a:ext cx="11055096" cy="640080"/>
+          </a:xfrm>
+          <a:prstGeom prst="rect">
+            <a:avLst/>
+          </a:prstGeom>
+          <a:noFill/>
+        </p:spPr>
+        <p:txBody>
+          <a:bodyPr wrap="square" lIns="0" rIns="0" tIns="0" bIns="0">
+            <a:spAutoFit/>
+          </a:bodyPr>
+          <a:lstStyle/>
+          <a:p>
+            <a:pPr algn="l"/>
+            <a:r>
+              <a:rPr sz="1650" b="0">
+                <a:solidFill>
+                  <a:srgbClr val="2B3A42"/>
+                </a:solidFill>
+                <a:latin typeface="Calibri"/>
+              </a:rPr>
+              <a:t>We retrained the whole stack inside the fence. It changed nothing — by design.</a:t>
+            </a:r>
+          </a:p>
+        </p:txBody>
+      </p:sp>
+      <p:sp>
+        <p:nvSpPr>
+          <p:cNvPr id="6" name="TextBox 5"/>
+          <p:cNvSpPr txBox="1"/>
+          <p:nvPr/>
+        </p:nvSpPr>
+        <p:spPr>
+          <a:xfrm>
+            <a:off x="11612880" y="6455664"/>
+            <a:ext cx="457200" cy="274320"/>
+          </a:xfrm>
+          <a:prstGeom prst="rect">
+            <a:avLst/>
+          </a:prstGeom>
+          <a:noFill/>
+        </p:spPr>
+        <p:txBody>
+          <a:bodyPr wrap="square" lIns="0" rIns="0" tIns="0" bIns="0">
+            <a:spAutoFit/>
+          </a:bodyPr>
+          <a:lstStyle/>
+          <a:p>
+            <a:pPr algn="r"/>
+            <a:r>
+              <a:rPr sz="1000" b="0">
+                <a:solidFill>
+                  <a:srgbClr val="6B7278"/>
+                </a:solidFill>
+                <a:latin typeface="Calibri"/>
+              </a:rPr>
+              <a:t>27</a:t>
+            </a:r>
+          </a:p>
+        </p:txBody>
+      </p:sp>
+      <p:sp>
+        <p:nvSpPr>
+          <p:cNvPr id="7" name="TextBox 6"/>
+          <p:cNvSpPr txBox="1"/>
+          <p:nvPr/>
+        </p:nvSpPr>
+        <p:spPr>
+          <a:xfrm>
+            <a:off x="566928" y="2103120"/>
+            <a:ext cx="11055096" cy="4114800"/>
+          </a:xfrm>
+          <a:prstGeom prst="rect">
+            <a:avLst/>
+          </a:prstGeom>
+          <a:noFill/>
+        </p:spPr>
+        <p:txBody>
+          <a:bodyPr wrap="square" lIns="0" rIns="0" tIns="0" bIns="0">
+            <a:spAutoFit/>
+          </a:bodyPr>
+          <a:lstStyle/>
+          <a:p>
+            <a:pPr>
+              <a:spcAft>
+                <a:spcPts val="800"/>
+              </a:spcAft>
+            </a:pPr>
+            <a:r>
+              <a:rPr sz="1500" b="0">
+                <a:solidFill>
+                  <a:srgbClr val="1F77B4"/>
+                </a:solidFill>
+                <a:latin typeface="Calibri"/>
+              </a:rPr>
+              <a:t>▪  </a:t>
+            </a:r>
+            <a:r>
+              <a:rPr sz="1500" b="1">
+                <a:solidFill>
+                  <a:srgbClr val="22262A"/>
+                </a:solidFill>
+                <a:latin typeface="Calibri"/>
+              </a:rPr>
+              <a:t>Train-inside-the-fence = train-then-fence.  </a:t>
+            </a:r>
+            <a:r>
+              <a:rPr sz="1500" b="0">
+                <a:solidFill>
+                  <a:srgbClr val="22262A"/>
+                </a:solidFill>
+                <a:latin typeface="Calibri"/>
+              </a:rPr>
+              <a:t>Retraining the full solver inside the corridor reproduced the roll-time-fence trajectories bit-for-bit (L1 = 0.0; e.g. 202105 wT = −$60,552.66 both ways, 202102 wT = +$326,660.72 both ways). In-sim utility moved by ≈ 2×10⁻⁵ (noise).</a:t>
+            </a:r>
+          </a:p>
+          <a:p>
+            <a:pPr>
+              <a:spcAft>
+                <a:spcPts val="800"/>
+              </a:spcAft>
+            </a:pPr>
+            <a:r>
+              <a:rPr sz="1500" b="0">
+                <a:solidFill>
+                  <a:srgbClr val="1F77B4"/>
+                </a:solidFill>
+                <a:latin typeface="Calibri"/>
+              </a:rPr>
+              <a:t>▪  </a:t>
+            </a:r>
+            <a:r>
+              <a:rPr sz="1500" b="1">
+                <a:solidFill>
+                  <a:srgbClr val="22262A"/>
+                </a:solidFill>
+                <a:latin typeface="Calibri"/>
+              </a:rPr>
+              <a:t>Deployment consequence.  </a:t>
+            </a:r>
+            <a:r>
+              <a:rPr sz="1500" b="0">
+                <a:solidFill>
+                  <a:srgbClr val="22262A"/>
+                </a:solidFill>
+                <a:latin typeface="Calibri"/>
+              </a:rPr>
+              <a:t>One corridor-free checkpoint set covers every mandate band; fences are applied at roll time against provenance-checked artifacts. No per-client retraining.</a:t>
+            </a:r>
+          </a:p>
+          <a:p>
+            <a:pPr>
+              <a:spcAft>
+                <a:spcPts val="800"/>
+              </a:spcAft>
+            </a:pPr>
+            <a:r>
+              <a:rPr sz="1500" b="0">
+                <a:solidFill>
+                  <a:srgbClr val="1F77B4"/>
+                </a:solidFill>
+                <a:latin typeface="Calibri"/>
+              </a:rPr>
+              <a:t>▪  </a:t>
+            </a:r>
+            <a:r>
+              <a:rPr sz="1500" b="1">
+                <a:solidFill>
+                  <a:srgbClr val="22262A"/>
+                </a:solidFill>
+                <a:latin typeface="Calibri"/>
+              </a:rPr>
+              <a:t>The band cannot be timed from inside the model.  </a:t>
+            </a:r>
+            <a:r>
+              <a:rPr sz="1500" b="0">
+                <a:solidFill>
+                  <a:srgbClr val="22262A"/>
+                </a:solidFill>
+                <a:latin typeface="Calibri"/>
+              </a:rPr>
+              <a:t>A fenced-utility selector picks the right band only 29–31% of the time (33% = chance); u-margin vs realized-margin correlation ≈ 0. Consistent with martingale discipline.</a:t>
+            </a:r>
+          </a:p>
+          <a:p>
+            <a:pPr>
+              <a:spcAft>
+                <a:spcPts val="800"/>
+              </a:spcAft>
+            </a:pPr>
+            <a:r>
+              <a:rPr sz="1500" b="0">
+                <a:solidFill>
+                  <a:srgbClr val="1F77B4"/>
+                </a:solidFill>
+                <a:latin typeface="Calibri"/>
+              </a:rPr>
+              <a:t>▪  </a:t>
+            </a:r>
+            <a:r>
+              <a:rPr sz="1500" b="1">
+                <a:solidFill>
+                  <a:srgbClr val="22262A"/>
+                </a:solidFill>
+                <a:latin typeface="Calibri"/>
+              </a:rPr>
+              <a:t>The prize needs outside information.  </a:t>
+            </a:r>
+            <a:r>
+              <a:rPr sz="1500" b="0">
+                <a:solidFill>
+                  <a:srgbClr val="22262A"/>
+                </a:solidFill>
+                <a:latin typeface="Calibri"/>
+              </a:rPr>
+              <a:t>Hindsight-optimal per-month band selection over {0.40, 0.60, unfenced} would have returned +43.6 $/oz vs +23.1 shipped — ≈ +20/oz of headroom, reachable only with genuine external signal (see Future Work).</a:t>
+            </a:r>
+          </a:p>
+        </p:txBody>
+      </p:sp>
+      <p:sp>
+        <p:nvSpPr>
+          <p:cNvPr id="8" name="TextBox 7"/>
+          <p:cNvSpPr txBox="1"/>
+          <p:nvPr/>
+        </p:nvSpPr>
+        <p:spPr>
+          <a:xfrm>
+            <a:off x="566928" y="6473952"/>
+            <a:ext cx="11055096" cy="274320"/>
+          </a:xfrm>
+          <a:prstGeom prst="rect">
+            <a:avLst/>
+          </a:prstGeom>
+          <a:noFill/>
+        </p:spPr>
+        <p:txBody>
+          <a:bodyPr wrap="square" lIns="0" rIns="0" tIns="0" bIns="0">
+            <a:spAutoFit/>
+          </a:bodyPr>
+          <a:lstStyle/>
+          <a:p>
+            <a:pPr algn="l"/>
+            <a:r>
+              <a:rPr sz="950" b="0">
+                <a:solidFill>
+                  <a:srgbClr val="6B7278"/>
+                </a:solidFill>
+                <a:latin typeface="Calibri"/>
+              </a:rPr>
+              <a:t>tb_insim_202105_b040.json · tb_insim_202102_b040.json · train_in_corridor_subset.csv · adaptive_corridor_sweep.csv / _verdict.md.</a:t>
+            </a:r>
+          </a:p>
+        </p:txBody>
+      </p:sp>
+    </p:spTree>
+  </p:cSld>
+  <p:clrMapOvr>
+    <a:masterClrMapping/>
+  </p:clrMapOvr>
+</p:sld>
+</file>
+
+<file path=ppt/slides/slide37.xml><?xml version="1.0" encoding="utf-8"?>
+<p:sld xmlns:a="http://schemas.openxmlformats.org/drawingml/2006/main" xmlns:p="http://schemas.openxmlformats.org/presentationml/2006/main" xmlns:r="http://schemas.openxmlformats.org/officeDocument/2006/relationships">
+  <p:cSld>
+    <p:bg>
+      <p:bgPr>
+        <a:solidFill>
+          <a:srgbClr val="FFFFFF"/>
+        </a:solidFill>
+        <a:effectLst/>
+      </p:bgPr>
+    </p:bg>
+    <p:spTree>
+      <p:nvGrpSpPr>
+        <p:cNvPr id="1" name=""/>
+        <p:cNvGrpSpPr/>
+        <p:nvPr/>
+      </p:nvGrpSpPr>
+      <p:grpSpPr/>
+      <p:sp>
+        <p:nvSpPr>
+          <p:cNvPr id="2" name="TextBox 1"/>
+          <p:cNvSpPr txBox="1"/>
+          <p:nvPr/>
+        </p:nvSpPr>
+        <p:spPr>
+          <a:xfrm>
+            <a:off x="566928" y="274320"/>
+            <a:ext cx="11055096" cy="274320"/>
+          </a:xfrm>
+          <a:prstGeom prst="rect">
+            <a:avLst/>
+          </a:prstGeom>
+          <a:noFill/>
+        </p:spPr>
+        <p:txBody>
+          <a:bodyPr wrap="square" lIns="0" rIns="0" tIns="0" bIns="0">
+            <a:spAutoFit/>
+          </a:bodyPr>
+          <a:lstStyle/>
+          <a:p>
+            <a:pPr algn="l"/>
+            <a:r>
+              <a:rPr sz="1250" b="1">
+                <a:solidFill>
+                  <a:srgbClr val="1F77B4"/>
+                </a:solidFill>
+                <a:latin typeface="Calibri"/>
+              </a:rPr>
+              <a:t>FUTURE WORK</a:t>
+            </a:r>
+          </a:p>
+        </p:txBody>
+      </p:sp>
+      <p:sp>
+        <p:nvSpPr>
+          <p:cNvPr id="3" name="TextBox 2"/>
+          <p:cNvSpPr txBox="1"/>
+          <p:nvPr/>
+        </p:nvSpPr>
+        <p:spPr>
+          <a:xfrm>
+            <a:off x="566928" y="530352"/>
+            <a:ext cx="11055096" cy="822960"/>
+          </a:xfrm>
+          <a:prstGeom prst="rect">
+            <a:avLst/>
+          </a:prstGeom>
+          <a:noFill/>
+        </p:spPr>
+        <p:txBody>
+          <a:bodyPr wrap="square" lIns="0" rIns="0" tIns="0" bIns="0">
+            <a:spAutoFit/>
+          </a:bodyPr>
+          <a:lstStyle/>
+          <a:p>
+            <a:pPr algn="l"/>
+            <a:r>
+              <a:rPr sz="2700" b="1">
+                <a:solidFill>
+                  <a:srgbClr val="22262A"/>
+                </a:solidFill>
+                <a:latin typeface="Calibri"/>
+              </a:rPr>
+              <a:t>Future work</a:t>
+            </a:r>
+          </a:p>
+        </p:txBody>
+      </p:sp>
+      <p:sp>
+        <p:nvSpPr>
+          <p:cNvPr id="4" name="Rectangle 3"/>
+          <p:cNvSpPr/>
+          <p:nvPr/>
+        </p:nvSpPr>
+        <p:spPr>
+          <a:xfrm>
+            <a:off x="566928" y="1298448"/>
+            <a:ext cx="11055096" cy="27432"/>
+          </a:xfrm>
+          <a:prstGeom prst="rect">
+            <a:avLst/>
+          </a:prstGeom>
+          <a:solidFill>
+            <a:srgbClr val="1F77B4"/>
+          </a:solidFill>
+          <a:ln>
+            <a:noFill/>
+          </a:ln>
+        </p:spPr>
+        <p:style>
+          <a:lnRef idx="1">
+            <a:schemeClr val="accent1"/>
+          </a:lnRef>
+          <a:fillRef idx="3">
+            <a:schemeClr val="accent1"/>
+          </a:fillRef>
+          <a:effectRef idx="2">
+            <a:schemeClr val="accent1"/>
+          </a:effectRef>
+          <a:fontRef idx="minor">
+            <a:schemeClr val="lt1"/>
+          </a:fontRef>
+        </p:style>
+        <p:txBody>
+          <a:bodyPr rtlCol="0" anchor="ctr"/>
+          <a:lstStyle/>
+          <a:p>
+            <a:pPr algn="ctr"/>
+          </a:p>
+        </p:txBody>
+      </p:sp>
+      <p:sp>
+        <p:nvSpPr>
+          <p:cNvPr id="5" name="TextBox 4"/>
+          <p:cNvSpPr txBox="1"/>
+          <p:nvPr/>
+        </p:nvSpPr>
+        <p:spPr>
+          <a:xfrm>
+            <a:off x="566928" y="1444752"/>
+            <a:ext cx="11055096" cy="640080"/>
+          </a:xfrm>
+          <a:prstGeom prst="rect">
+            <a:avLst/>
+          </a:prstGeom>
+          <a:noFill/>
+        </p:spPr>
+        <p:txBody>
+          <a:bodyPr wrap="square" lIns="0" rIns="0" tIns="0" bIns="0">
+            <a:spAutoFit/>
+          </a:bodyPr>
+          <a:lstStyle/>
+          <a:p>
+            <a:pPr algn="l"/>
+            <a:r>
+              <a:rPr sz="1650" b="0">
+                <a:solidFill>
+                  <a:srgbClr val="2B3A42"/>
+                </a:solidFill>
+                <a:latin typeface="Calibri"/>
+              </a:rPr>
+              <a:t>Six scoped items, ordered by leverage.</a:t>
+            </a:r>
+          </a:p>
+        </p:txBody>
+      </p:sp>
+      <p:sp>
+        <p:nvSpPr>
+          <p:cNvPr id="6" name="TextBox 5"/>
+          <p:cNvSpPr txBox="1"/>
+          <p:nvPr/>
+        </p:nvSpPr>
+        <p:spPr>
+          <a:xfrm>
+            <a:off x="11612880" y="6455664"/>
+            <a:ext cx="457200" cy="274320"/>
+          </a:xfrm>
+          <a:prstGeom prst="rect">
+            <a:avLst/>
+          </a:prstGeom>
+          <a:noFill/>
+        </p:spPr>
+        <p:txBody>
+          <a:bodyPr wrap="square" lIns="0" rIns="0" tIns="0" bIns="0">
+            <a:spAutoFit/>
+          </a:bodyPr>
+          <a:lstStyle/>
+          <a:p>
+            <a:pPr algn="r"/>
+            <a:r>
+              <a:rPr sz="1000" b="0">
+                <a:solidFill>
+                  <a:srgbClr val="6B7278"/>
+                </a:solidFill>
+                <a:latin typeface="Calibri"/>
+              </a:rPr>
+              <a:t>33</a:t>
+            </a:r>
+          </a:p>
+        </p:txBody>
+      </p:sp>
+      <p:graphicFrame>
+        <p:nvGraphicFramePr>
+          <p:cNvPr id="7" name="Table 6"/>
+          <p:cNvGraphicFramePr>
+            <a:graphicFrameLocks noGrp="1"/>
+          </p:cNvGraphicFramePr>
+          <p:nvPr/>
+        </p:nvGraphicFramePr>
+        <p:xfrm>
+          <a:off x="566928" y="2148840"/>
+          <a:ext cx="11055095" cy="3977638"/>
+        </p:xfrm>
+        <a:graphic>
+          <a:graphicData uri="http://schemas.openxmlformats.org/drawingml/2006/table">
+            <a:tbl>
+              <a:tblPr/>
+              <a:tblGrid>
+                <a:gridCol w="3246120"/>
+                <a:gridCol w="7808975"/>
+              </a:tblGrid>
+              <a:tr h="568234">
+                <a:tc>
+                  <a:txBody>
+                    <a:bodyPr/>
+                    <a:lstStyle/>
+                    <a:p>
+                      <a:pPr algn="l"/>
+                      <a:r>
+                        <a:rPr sz="1350" b="1">
+                          <a:solidFill>
+                            <a:srgbClr val="FFFFFF"/>
+                          </a:solidFill>
+                          <a:latin typeface="Calibri"/>
+                        </a:rPr>
+                        <a:t>Item</a:t>
+                      </a:r>
+                    </a:p>
+                  </a:txBody>
+                  <a:tcPr marL="88900" marR="88900" marT="38100" marB="38100" anchor="ctr">
+                    <a:solidFill>
+                      <a:srgbClr val="2B3A42"/>
+                    </a:solidFill>
+                  </a:tcPr>
+                </a:tc>
+                <a:tc>
+                  <a:txBody>
+                    <a:bodyPr/>
+                    <a:lstStyle/>
+                    <a:p>
+                      <a:pPr algn="l"/>
+                      <a:r>
+                        <a:rPr sz="1350" b="1">
+                          <a:solidFill>
+                            <a:srgbClr val="FFFFFF"/>
+                          </a:solidFill>
+                          <a:latin typeface="Calibri"/>
+                        </a:rPr>
+                        <a:t>Plan / value</a:t>
+                      </a:r>
+                    </a:p>
+                  </a:txBody>
+                  <a:tcPr marL="88900" marR="88900" marT="38100" marB="38100" anchor="ctr">
+                    <a:solidFill>
+                      <a:srgbClr val="2B3A42"/>
+                    </a:solidFill>
+                  </a:tcPr>
+                </a:tc>
+              </a:tr>
+              <a:tr h="568234">
+                <a:tc>
+                  <a:txBody>
+                    <a:bodyPr/>
+                    <a:lstStyle/>
+                    <a:p>
+                      <a:pPr algn="l"/>
+                      <a:r>
+                        <a:rPr sz="1350" b="1">
+                          <a:solidFill>
+                            <a:srgbClr val="22262A"/>
+                          </a:solidFill>
+                          <a:latin typeface="Calibri"/>
+                        </a:rPr>
+                        <a:t>Book of APS — netted corridors</a:t>
+                      </a:r>
+                    </a:p>
+                  </a:txBody>
+                  <a:tcPr marL="88900" marR="88900" marT="38100" marB="38100" anchor="ctr">
+                    <a:solidFill>
+                      <a:srgbClr val="FFFFFF"/>
+                    </a:solidFill>
+                  </a:tcPr>
+                </a:tc>
+                <a:tc>
+                  <a:txBody>
+                    <a:bodyPr/>
+                    <a:lstStyle/>
+                    <a:p>
+                      <a:pPr algn="l"/>
+                      <a:r>
+                        <a:rPr sz="1350" b="0">
+                          <a:solidFill>
+                            <a:srgbClr val="22262A"/>
+                          </a:solidFill>
+                          <a:latin typeface="Calibri"/>
+                        </a:rPr>
+                        <a:t>Net fence across deals (e.g. 2 long + 1 short, expiries ≤ 4 mo). Sign-crossing schedules already supported; needs a book-level driver + validation.</a:t>
+                      </a:r>
+                    </a:p>
+                  </a:txBody>
+                  <a:tcPr marL="88900" marR="88900" marT="38100" marB="38100" anchor="ctr">
+                    <a:solidFill>
+                      <a:srgbClr val="FFFFFF"/>
+                    </a:solidFill>
+                  </a:tcPr>
+                </a:tc>
+              </a:tr>
+              <a:tr h="568234">
+                <a:tc>
+                  <a:txBody>
+                    <a:bodyPr/>
+                    <a:lstStyle/>
+                    <a:p>
+                      <a:pPr algn="l"/>
+                      <a:r>
+                        <a:rPr sz="1350" b="1">
+                          <a:solidFill>
+                            <a:srgbClr val="22262A"/>
+                          </a:solidFill>
+                          <a:latin typeface="Calibri"/>
+                        </a:rPr>
+                        <a:t>Band adaptivity from EXTERNAL signal</a:t>
+                      </a:r>
+                    </a:p>
+                  </a:txBody>
+                  <a:tcPr marL="88900" marR="88900" marT="38100" marB="38100" anchor="ctr">
+                    <a:solidFill>
+                      <a:srgbClr val="F2F4F6"/>
+                    </a:solidFill>
+                  </a:tcPr>
+                </a:tc>
+                <a:tc>
+                  <a:txBody>
+                    <a:bodyPr/>
+                    <a:lstStyle/>
+                    <a:p>
+                      <a:pPr algn="l"/>
+                      <a:r>
+                        <a:rPr sz="1350" b="0">
+                          <a:solidFill>
+                            <a:srgbClr val="22262A"/>
+                          </a:solidFill>
+                          <a:latin typeface="Calibri"/>
+                        </a:rPr>
+                        <a:t>Condition the band on realized vol / regime state; leave-one-out validated on the 48 months. The only route to the ≈ +20/oz hindsight headroom.</a:t>
+                      </a:r>
+                    </a:p>
+                  </a:txBody>
+                  <a:tcPr marL="88900" marR="88900" marT="38100" marB="38100" anchor="ctr">
+                    <a:solidFill>
+                      <a:srgbClr val="F2F4F6"/>
+                    </a:solidFill>
+                  </a:tcPr>
+                </a:tc>
+              </a:tr>
+              <a:tr h="568234">
+                <a:tc>
+                  <a:txBody>
+                    <a:bodyPr/>
+                    <a:lstStyle/>
+                    <a:p>
+                      <a:pPr algn="l"/>
+                      <a:r>
+                        <a:rPr sz="1350" b="1">
+                          <a:solidFill>
+                            <a:srgbClr val="22262A"/>
+                          </a:solidFill>
+                          <a:latin typeface="Calibri"/>
+                        </a:rPr>
+                        <a:t>Realistic CME friction</a:t>
+                      </a:r>
+                    </a:p>
+                  </a:txBody>
+                  <a:tcPr marL="88900" marR="88900" marT="38100" marB="38100" anchor="ctr">
+                    <a:solidFill>
+                      <a:srgbClr val="FFFFFF"/>
+                    </a:solidFill>
+                  </a:tcPr>
+                </a:tc>
+                <a:tc>
+                  <a:txBody>
+                    <a:bodyPr/>
+                    <a:lstStyle/>
+                    <a:p>
+                      <a:pPr algn="l"/>
+                      <a:r>
+                        <a:rPr sz="1350" b="0">
+                          <a:solidFill>
+                            <a:srgbClr val="22262A"/>
+                          </a:solidFill>
+                          <a:latin typeface="Calibri"/>
+                        </a:rPr>
+                        <a:t>Replace the flat 10 bps bid-offer with calibrated exchange fee + market-impact data.</a:t>
+                      </a:r>
+                    </a:p>
+                  </a:txBody>
+                  <a:tcPr marL="88900" marR="88900" marT="38100" marB="38100" anchor="ctr">
+                    <a:solidFill>
+                      <a:srgbClr val="FFFFFF"/>
+                    </a:solidFill>
+                  </a:tcPr>
+                </a:tc>
+              </a:tr>
+              <a:tr h="568234">
+                <a:tc>
+                  <a:txBody>
+                    <a:bodyPr/>
+                    <a:lstStyle/>
+                    <a:p>
+                      <a:pPr algn="l"/>
+                      <a:r>
+                        <a:rPr sz="1350" b="1">
+                          <a:solidFill>
+                            <a:srgbClr val="22262A"/>
+                          </a:solidFill>
+                          <a:latin typeface="Calibri"/>
+                        </a:rPr>
+                        <a:t>Re-validate cross-market dual-strip</a:t>
+                      </a:r>
+                    </a:p>
+                  </a:txBody>
+                  <a:tcPr marL="88900" marR="88900" marT="38100" marB="38100" anchor="ctr">
+                    <a:solidFill>
+                      <a:srgbClr val="F2F4F6"/>
+                    </a:solidFill>
+                  </a:tcPr>
+                </a:tc>
+                <a:tc>
+                  <a:txBody>
+                    <a:bodyPr/>
+                    <a:lstStyle/>
+                    <a:p>
+                      <a:pPr algn="l"/>
+                      <a:r>
+                        <a:rPr sz="1350" b="0">
+                          <a:solidFill>
+                            <a:srgbClr val="22262A"/>
+                          </a:solidFill>
+                          <a:latin typeface="Calibri"/>
+                        </a:rPr>
+                        <a:t>Confirm the CME-strip / LME-liability edge holds in the corrected martingale world.</a:t>
+                      </a:r>
+                    </a:p>
+                  </a:txBody>
+                  <a:tcPr marL="88900" marR="88900" marT="38100" marB="38100" anchor="ctr">
+                    <a:solidFill>
+                      <a:srgbClr val="F2F4F6"/>
+                    </a:solidFill>
+                  </a:tcPr>
+                </a:tc>
+              </a:tr>
+              <a:tr h="568234">
+                <a:tc>
+                  <a:txBody>
+                    <a:bodyPr/>
+                    <a:lstStyle/>
+                    <a:p>
+                      <a:pPr algn="l"/>
+                      <a:r>
+                        <a:rPr sz="1350" b="1">
+                          <a:solidFill>
+                            <a:srgbClr val="22262A"/>
+                          </a:solidFill>
+                          <a:latin typeface="Calibri"/>
+                        </a:rPr>
+                        <a:t>Hard calibration gate</a:t>
+                      </a:r>
+                    </a:p>
+                  </a:txBody>
+                  <a:tcPr marL="88900" marR="88900" marT="38100" marB="38100" anchor="ctr">
+                    <a:solidFill>
+                      <a:srgbClr val="FFFFFF"/>
+                    </a:solidFill>
+                  </a:tcPr>
+                </a:tc>
+                <a:tc>
+                  <a:txBody>
+                    <a:bodyPr/>
+                    <a:lstStyle/>
+                    <a:p>
+                      <a:pPr algn="l"/>
+                      <a:r>
+                        <a:rPr sz="1350" b="0">
+                          <a:solidFill>
+                            <a:srgbClr val="22262A"/>
+                          </a:solidFill>
+                          <a:latin typeface="Calibri"/>
+                        </a:rPr>
+                        <a:t>Make E[dF] ≈ 0 on every tradeable a blocking check at every calibration — institutionalize the integrity lesson.</a:t>
+                      </a:r>
+                    </a:p>
+                  </a:txBody>
+                  <a:tcPr marL="88900" marR="88900" marT="38100" marB="38100" anchor="ctr">
+                    <a:solidFill>
+                      <a:srgbClr val="FFFFFF"/>
+                    </a:solidFill>
+                  </a:tcPr>
+                </a:tc>
+              </a:tr>
+              <a:tr h="568234">
+                <a:tc>
+                  <a:txBody>
+                    <a:bodyPr/>
+                    <a:lstStyle/>
+                    <a:p>
+                      <a:pPr algn="l"/>
+                      <a:r>
+                        <a:rPr sz="1350" b="1">
+                          <a:solidFill>
+                            <a:srgbClr val="22262A"/>
+                          </a:solidFill>
+                          <a:latin typeface="Calibri"/>
+                        </a:rPr>
+                        <a:t>Multi-GPU scale-out</a:t>
+                      </a:r>
+                    </a:p>
+                  </a:txBody>
+                  <a:tcPr marL="88900" marR="88900" marT="38100" marB="38100" anchor="ctr">
+                    <a:solidFill>
+                      <a:srgbClr val="F2F4F6"/>
+                    </a:solidFill>
+                  </a:tcPr>
+                </a:tc>
+                <a:tc>
+                  <a:txBody>
+                    <a:bodyPr/>
+                    <a:lstStyle/>
+                    <a:p>
+                      <a:pPr algn="l"/>
+                      <a:r>
+                        <a:rPr sz="1350" b="0">
+                          <a:solidFill>
+                            <a:srgbClr val="22262A"/>
+                          </a:solidFill>
+                          <a:latin typeface="Calibri"/>
+                        </a:rPr>
+                        <a:t>Recipe documented for 4×A100 servers (batch / inner parameters).</a:t>
+                      </a:r>
+                    </a:p>
+                  </a:txBody>
+                  <a:tcPr marL="88900" marR="88900" marT="38100" marB="38100" anchor="ctr">
+                    <a:solidFill>
+                      <a:srgbClr val="F2F4F6"/>
+                    </a:solidFill>
+                  </a:tcPr>
+                </a:tc>
+              </a:tr>
+            </a:tbl>
+          </a:graphicData>
+        </a:graphic>
+      </p:graphicFrame>
+      <p:sp>
+        <p:nvSpPr>
+          <p:cNvPr id="8" name="TextBox 7"/>
+          <p:cNvSpPr txBox="1"/>
+          <p:nvPr/>
+        </p:nvSpPr>
+        <p:spPr>
+          <a:xfrm>
+            <a:off x="566928" y="6473952"/>
+            <a:ext cx="11055096" cy="274320"/>
+          </a:xfrm>
+          <a:prstGeom prst="rect">
+            <a:avLst/>
+          </a:prstGeom>
+          <a:noFill/>
+        </p:spPr>
+        <p:txBody>
+          <a:bodyPr wrap="square" lIns="0" rIns="0" tIns="0" bIns="0">
+            <a:spAutoFit/>
+          </a:bodyPr>
+          <a:lstStyle/>
+          <a:p>
+            <a:pPr algn="l"/>
+            <a:r>
+              <a:rPr sz="950" b="0">
+                <a:solidFill>
+                  <a:srgbClr val="6B7278"/>
+                </a:solidFill>
+                <a:latin typeface="Calibri"/>
+              </a:rPr>
+              <a:t>STATUS_NOTE_corridor.md open items. Machinery: Total_Position_Schedule — per-step [Min_Total, Max_Total] knots on the signed total position.</a:t>
             </a:r>
           </a:p>
         </p:txBody>

--- a/artifacts/platinum_hedge_management_deck.pptx
+++ b/artifacts/platinum_hedge_management_deck.pptx
@@ -16340,7 +16340,7 @@
                 </a:solidFill>
                 <a:latin typeface="Calibri"/>
               </a:rPr>
-              <a:t>MODEL UPGRADE  ·  INTERIM — VALIDATION IN PROGRESS  ·  1 OF 3</a:t>
+              <a:t>MODEL UPGRADE  ·  FINAL VALIDATION &amp; OPERATING POINT  ·  1 OF 3</a:t>
             </a:r>
           </a:p>
         </p:txBody>
@@ -16453,7 +16453,7 @@
                 </a:solidFill>
                 <a:latin typeface="Calibri"/>
               </a:rPr>
-              <a:t>The platinum spot model is being swapped: GARCH(1,1) with Student-t shocks, in place of the 3-regime hidden-Markov world.</a:t>
+              <a:t>The 48-trade walk-forward is COMPLETE. GARCH(1,1) with Student-t shocks replaces the 3-regime hidden-Markov world — a governance and robustness upgrade, not a P&amp;L improvement.</a:t>
             </a:r>
           </a:p>
         </p:txBody>
@@ -16699,7 +16699,7 @@
                 </a:solidFill>
                 <a:latin typeface="Calibri"/>
               </a:rPr>
-              <a:t>STATUS</a:t>
+              <a:t>VERDICT</a:t>
             </a:r>
           </a:p>
           <a:p>
@@ -16715,7 +16715,7 @@
                 </a:solidFill>
                 <a:latin typeface="Calibri"/>
               </a:rPr>
-              <a:t>Validation walk-forward is IN PROGRESS — 36 of the 48 trades have landed.</a:t>
+              <a:t>All 48 trades are in. Integrity gates PASS; performance gates are NEUTRAL — the means are statistically indistinguishable (paired t = −0.71 unfenced).</a:t>
             </a:r>
           </a:p>
           <a:p>
@@ -16763,7 +16763,7 @@
                 </a:solidFill>
                 <a:latin typeface="Calibri"/>
               </a:rPr>
-              <a:t>The shipping default remains the HMM until all 48 land and the criteria on the next-but-one slide are met.</a:t>
+              <a:t>No performance-forced flip. GARCH is recommended on governance grounds — an observable volatility state, a directly-testable no-alpha property, and market_dim 7 vs 9.</a:t>
             </a:r>
           </a:p>
         </p:txBody>
@@ -16798,7 +16798,7 @@
                 </a:solidFill>
                 <a:latin typeface="Calibri"/>
               </a:rPr>
-              <a:t>GARCHSpotModel_spec.md (§1, §1a, §6) · commit c52411d · parameters fitted on data/pl_exp.csv (16 years). Interim walk-forward: garch48_interim.csv.</a:t>
+              <a:t>GARCHSpotModel_spec.md (§1, §1a, §6) · commits c52411d · 11ef68d · parameters fitted on data/pl_exp.csv (16 years). Final 48-trade walk-forward: artifacts/walk_forward/garch48_final.csv.</a:t>
             </a:r>
           </a:p>
         </p:txBody>
@@ -16851,7 +16851,7 @@
                 </a:solidFill>
                 <a:latin typeface="Calibri"/>
               </a:rPr>
-              <a:t>MODEL UPGRADE  ·  INTERIM — VALIDATION IN PROGRESS  ·  2 OF 3</a:t>
+              <a:t>MODEL UPGRADE  ·  FINAL VALIDATION &amp; OPERATING POINT  ·  2 OF 3</a:t>
             </a:r>
           </a:p>
         </p:txBody>
@@ -16886,7 +16886,7 @@
                 </a:solidFill>
                 <a:latin typeface="Calibri"/>
               </a:rPr>
-              <a:t>Interim results — 36 of 48 trades</a:t>
+              <a:t>Final results — 48 trades</a:t>
             </a:r>
           </a:p>
         </p:txBody>
@@ -16964,7 +16964,7 @@
                 </a:solidFill>
                 <a:latin typeface="Calibri"/>
               </a:rPr>
-              <a:t>PRELIMINARY. Paired on the same 36 months (Jan-2020 – Jun-2023); the remaining 12 trades are still running.</a:t>
+              <a:t>COMPLETE. Paired on all 48 months (Jan-2020 – Dec-2023), unfenced and inside the shipped corridor at bands 0.60 and 0.40.</a:t>
             </a:r>
           </a:p>
         </p:txBody>
@@ -17039,7 +17039,7 @@
                           </a:solidFill>
                           <a:latin typeface="Calibri"/>
                         </a:rPr>
-                        <a:t>Statistic</a:t>
+                        <a:t>Configuration</a:t>
                       </a:r>
                     </a:p>
                   </a:txBody>
@@ -17062,7 +17062,7 @@
                           </a:solidFill>
                           <a:latin typeface="Calibri"/>
                         </a:rPr>
-                        <a:t>GARCH world (new)</a:t>
+                        <a:t>GARCH world</a:t>
                       </a:r>
                     </a:p>
                   </a:txBody>
@@ -17085,7 +17085,7 @@
                           </a:solidFill>
                           <a:latin typeface="Calibri"/>
                         </a:rPr>
-                        <a:t>HMM world (baseline)</a:t>
+                        <a:t>HMM world</a:t>
                       </a:r>
                     </a:p>
                   </a:txBody>
@@ -17110,7 +17110,7 @@
                           </a:solidFill>
                           <a:latin typeface="Calibri"/>
                         </a:rPr>
-                        <a:t>Trades (paired)</a:t>
+                        <a:t>Unfenced — mean ($/oz)</a:t>
                       </a:r>
                     </a:p>
                   </a:txBody>
@@ -17133,7 +17133,7 @@
                           </a:solidFill>
                           <a:latin typeface="Calibri"/>
                         </a:rPr>
-                        <a:t>36</a:t>
+                        <a:t>+19.21</a:t>
                       </a:r>
                     </a:p>
                   </a:txBody>
@@ -17156,7 +17156,7 @@
                           </a:solidFill>
                           <a:latin typeface="Calibri"/>
                         </a:rPr>
-                        <a:t>36</a:t>
+                        <a:t>+22.09</a:t>
                       </a:r>
                     </a:p>
                   </a:txBody>
@@ -17181,7 +17181,7 @@
                           </a:solidFill>
                           <a:latin typeface="Calibri"/>
                         </a:rPr>
-                        <a:t>Mean ($/oz)</a:t>
+                        <a:t>Unfenced — std dev</a:t>
                       </a:r>
                     </a:p>
                   </a:txBody>
@@ -17204,7 +17204,7 @@
                           </a:solidFill>
                           <a:latin typeface="Calibri"/>
                         </a:rPr>
-                        <a:t>+18.26</a:t>
+                        <a:t>82.6</a:t>
                       </a:r>
                     </a:p>
                   </a:txBody>
@@ -17227,7 +17227,7 @@
                           </a:solidFill>
                           <a:latin typeface="Calibri"/>
                         </a:rPr>
-                        <a:t>+17.28</a:t>
+                        <a:t>88.2</a:t>
                       </a:r>
                     </a:p>
                   </a:txBody>
@@ -17252,7 +17252,7 @@
                           </a:solidFill>
                           <a:latin typeface="Calibri"/>
                         </a:rPr>
-                        <a:t>Std dev</a:t>
+                        <a:t>Corridor 0.60 — mean</a:t>
                       </a:r>
                     </a:p>
                   </a:txBody>
@@ -17275,7 +17275,7 @@
                           </a:solidFill>
                           <a:latin typeface="Calibri"/>
                         </a:rPr>
-                        <a:t>84.29</a:t>
+                        <a:t>+22.86</a:t>
                       </a:r>
                     </a:p>
                   </a:txBody>
@@ -17298,7 +17298,7 @@
                           </a:solidFill>
                           <a:latin typeface="Calibri"/>
                         </a:rPr>
-                        <a:t>92.38</a:t>
+                        <a:t>+23.10</a:t>
                       </a:r>
                     </a:p>
                   </a:txBody>
@@ -17323,7 +17323,7 @@
                           </a:solidFill>
                           <a:latin typeface="Calibri"/>
                         </a:rPr>
-                        <a:t>Min</a:t>
+                        <a:t>Corridor 0.40 — mean</a:t>
                       </a:r>
                     </a:p>
                   </a:txBody>
@@ -17346,7 +17346,7 @@
                           </a:solidFill>
                           <a:latin typeface="Calibri"/>
                         </a:rPr>
-                        <a:t>−127.46</a:t>
+                        <a:t>+18.69</a:t>
                       </a:r>
                     </a:p>
                   </a:txBody>
@@ -17369,7 +17369,7 @@
                           </a:solidFill>
                           <a:latin typeface="Calibri"/>
                         </a:rPr>
-                        <a:t>−143.70</a:t>
+                        <a:t>+18.64</a:t>
                       </a:r>
                     </a:p>
                   </a:txBody>
@@ -17394,7 +17394,7 @@
                           </a:solidFill>
                           <a:latin typeface="Calibri"/>
                         </a:rPr>
-                        <a:t>Median</a:t>
+                        <a:t>Causal-bound PASS (all)</a:t>
                       </a:r>
                     </a:p>
                   </a:txBody>
@@ -17417,7 +17417,7 @@
                           </a:solidFill>
                           <a:latin typeface="Calibri"/>
                         </a:rPr>
-                        <a:t>+8.66</a:t>
+                        <a:t>48 / 48</a:t>
                       </a:r>
                     </a:p>
                   </a:txBody>
@@ -17440,7 +17440,7 @@
                           </a:solidFill>
                           <a:latin typeface="Calibri"/>
                         </a:rPr>
-                        <a:t>−2.66</a:t>
+                        <a:t>48 / 48</a:t>
                       </a:r>
                     </a:p>
                   </a:txBody>
@@ -17465,7 +17465,7 @@
                           </a:solidFill>
                           <a:latin typeface="Calibri"/>
                         </a:rPr>
-                        <a:t>Causal-bound PASS</a:t>
+                        <a:t>Paired Δ unfenced (G−H)</a:t>
                       </a:r>
                     </a:p>
                   </a:txBody>
@@ -17488,7 +17488,7 @@
                           </a:solidFill>
                           <a:latin typeface="Calibri"/>
                         </a:rPr>
-                        <a:t>36 / 36</a:t>
+                        <a:t>−2.89 ± 4.05</a:t>
                       </a:r>
                     </a:p>
                   </a:txBody>
@@ -17511,7 +17511,7 @@
                           </a:solidFill>
                           <a:latin typeface="Calibri"/>
                         </a:rPr>
-                        <a:t>36 / 36</a:t>
+                        <a:t>t = −0.71</a:t>
                       </a:r>
                     </a:p>
                   </a:txBody>
@@ -17536,7 +17536,7 @@
                           </a:solidFill>
                           <a:latin typeface="Calibri"/>
                         </a:rPr>
-                        <a:t>Paired Δ (GARCH − HMM)</a:t>
+                        <a:t>Paired Δ fenced 0.60 / 0.40</a:t>
                       </a:r>
                     </a:p>
                   </a:txBody>
@@ -17559,7 +17559,7 @@
                           </a:solidFill>
                           <a:latin typeface="Calibri"/>
                         </a:rPr>
-                        <a:t>+0.98 ± 4.83</a:t>
+                        <a:t>−0.24 / +0.05</a:t>
                       </a:r>
                     </a:p>
                   </a:txBody>
@@ -17582,7 +17582,7 @@
                           </a:solidFill>
                           <a:latin typeface="Calibri"/>
                         </a:rPr>
-                        <a:t>t = 0.20</a:t>
+                        <a:t>t = −0.06 / +0.02</a:t>
                       </a:r>
                     </a:p>
                   </a:txBody>
@@ -17774,7 +17774,7 @@
                           </a:solidFill>
                           <a:latin typeface="Calibri"/>
                         </a:rPr>
-                        <a:t>2021  (6 of 12)</a:t>
+                        <a:t>2021  (12 mo)</a:t>
                       </a:r>
                     </a:p>
                   </a:txBody>
@@ -17797,7 +17797,7 @@
                           </a:solidFill>
                           <a:latin typeface="Calibri"/>
                         </a:rPr>
-                        <a:t>+10.71</a:t>
+                        <a:t>+15.55</a:t>
                       </a:r>
                     </a:p>
                   </a:txBody>
@@ -17820,7 +17820,7 @@
                           </a:solidFill>
                           <a:latin typeface="Calibri"/>
                         </a:rPr>
-                        <a:t>+3.88</a:t>
+                        <a:t>+24.29</a:t>
                       </a:r>
                     </a:p>
                   </a:txBody>
@@ -17916,7 +17916,7 @@
                           </a:solidFill>
                           <a:latin typeface="Calibri"/>
                         </a:rPr>
-                        <a:t>2023  (6 of 12)</a:t>
+                        <a:t>2023  (12 mo)</a:t>
                       </a:r>
                     </a:p>
                   </a:txBody>
@@ -17939,7 +17939,7 @@
                           </a:solidFill>
                           <a:latin typeface="Calibri"/>
                         </a:rPr>
-                        <a:t>+46.57</a:t>
+                        <a:t>+35.13</a:t>
                       </a:r>
                     </a:p>
                   </a:txBody>
@@ -17962,7 +17962,7 @@
                           </a:solidFill>
                           <a:latin typeface="Calibri"/>
                         </a:rPr>
-                        <a:t>+53.75</a:t>
+                        <a:t>+41.07</a:t>
                       </a:r>
                     </a:p>
                   </a:txBody>
@@ -18007,7 +18007,7 @@
                 </a:solidFill>
                 <a:latin typeface="Calibri"/>
               </a:rPr>
-              <a:t>PARTIAL YEARS: 2021 and 2023 carry only 6 of 12 months so far, so neither is comparable to the full-year baseline figures on slide 22.</a:t>
+              <a:t>ALL YEARS COMPLETE — each row is now a full 12 months, directly comparable to the four-year baseline (slides 21–22). GARCH and HMM track within a year's noise; 2022 was the weak year in both worlds.</a:t>
             </a:r>
           </a:p>
         </p:txBody>
@@ -18042,7 +18042,7 @@
                 </a:solidFill>
                 <a:latin typeface="Calibri"/>
               </a:rPr>
-              <a:t>artifacts/walk_forward/garch48_interim.csv (36 rows) vs full48_baseline.csv, restricted to the 36 shared months. Every row bounded below by no-hedge, above by perfect-foresight on the traded leg.</a:t>
+              <a:t>artifacts/walk_forward/garch48_final.csv (48) vs full48_baseline.csv, paired on all 48 months; corridor rows from garch48_corridor_rolls.csv · full48_corridor_rolls.csv. Every row bounded below by no-hedge, above by perfect-foresight on the traded leg.</a:t>
             </a:r>
           </a:p>
         </p:txBody>
@@ -18065,7 +18065,7 @@
         </p:spPr>
         <p:txBody>
           <a:bodyPr wrap="square" lIns="0" rIns="0" tIns="0" bIns="0">
-            <a:spAutoFit/>
+            <a:normAutofit/>
           </a:bodyPr>
           <a:lstStyle/>
           <a:p>
@@ -18077,7 +18077,7 @@
                 </a:solidFill>
                 <a:latin typeface="Calibri"/>
               </a:rPr>
-              <a:t>THE READING: the means are statistically indistinguishable (paired t = 0.20) — as two martingale worlds should be. The signal worth watching is dispersion (84.3 vs 92.4 on the same months); at n = 36 that is NOT yet a conclusion.</a:t>
+              <a:t>THE READING: the fence dominates the model. Swapping the spot model moves the mean nothing at n = 48 (paired t = −0.71 unfenced, ≈ 0 inside the corridor). The corridor's variance cut — std −27% at 0.60, −41% at 0.40 — is model-agnostic: it shows up identically in both worlds.</a:t>
             </a:r>
           </a:p>
         </p:txBody>
@@ -18932,7 +18932,7 @@
                           </a:solidFill>
                           <a:latin typeface="Calibri"/>
                         </a:rPr>
-                        <a:t>Model upgrade in validation — GARCH world  (INTERIM)</a:t>
+                        <a:t>Model upgrade — GARCH world: final validation &amp; operating point</a:t>
                       </a:r>
                     </a:p>
                   </a:txBody>
@@ -19302,7 +19302,7 @@
                 </a:solidFill>
                 <a:latin typeface="Calibri"/>
               </a:rPr>
-              <a:t>MODEL UPGRADE  ·  INTERIM — VALIDATION IN PROGRESS  ·  3 OF 3</a:t>
+              <a:t>MODEL UPGRADE  ·  FINAL VALIDATION &amp; OPERATING POINT  ·  3 OF 3</a:t>
             </a:r>
           </a:p>
         </p:txBody>
@@ -19337,7 +19337,7 @@
                 </a:solidFill>
                 <a:latin typeface="Calibri"/>
               </a:rPr>
-              <a:t>What decides ship / no-ship</a:t>
+              <a:t>Controlling the tail — the operating point</a:t>
             </a:r>
           </a:p>
         </p:txBody>
@@ -19415,7 +19415,7 @@
                 </a:solidFill>
                 <a:latin typeface="Calibri"/>
               </a:rPr>
-              <a:t>The promotion criteria were fixed BEFORE any results were seen. Nothing on the previous slide changes them.</a:t>
+              <a:t>The loss tail is a half-hedged book, not a set of mistakes. Tightening the roll-time band cuts dispersion with no retraining and no breaches.</a:t>
             </a:r>
           </a:p>
         </p:txBody>
@@ -19455,27 +19455,66 @@
           </a:p>
         </p:txBody>
       </p:sp>
+      <p:sp>
+        <p:nvSpPr>
+          <p:cNvPr id="8" name="TextBox 7"/>
+          <p:cNvSpPr txBox="1"/>
+          <p:nvPr/>
+        </p:nvSpPr>
+        <p:spPr>
+          <a:xfrm>
+            <a:off x="566928" y="6473952"/>
+            <a:ext cx="11055096" cy="274320"/>
+          </a:xfrm>
+          <a:prstGeom prst="rect">
+            <a:avLst/>
+          </a:prstGeom>
+          <a:noFill/>
+        </p:spPr>
+        <p:txBody>
+          <a:bodyPr wrap="square" lIns="0" rIns="0" tIns="0" bIns="0">
+            <a:spAutoFit/>
+          </a:bodyPr>
+          <a:lstStyle/>
+          <a:p>
+            <a:pPr algn="l"/>
+            <a:r>
+              <a:rPr sz="950" b="0">
+                <a:solidFill>
+                  <a:srgbClr val="6B7278"/>
+                </a:solidFill>
+                <a:latin typeface="Calibri"/>
+              </a:rPr>
+              <a:t>artifacts/walk_forward/corridor_band_frontier.csv (both worlds, bands 0.15–0.60) · garch48_corridor_rolls.csv. Loss-tail analysis: commit 5e61ae5. CVaR5 = mean of the worst 3 months; worst month = min realized $/oz.</a:t>
+            </a:r>
+          </a:p>
+        </p:txBody>
+      </p:sp>
       <p:graphicFrame>
         <p:nvGraphicFramePr>
-          <p:cNvPr id="7" name="Table 6"/>
+          <p:cNvPr id="950" name="FrontierTable"/>
           <p:cNvGraphicFramePr>
             <a:graphicFrameLocks noGrp="1"/>
           </p:cNvGraphicFramePr>
           <p:nvPr/>
         </p:nvGraphicFramePr>
         <p:xfrm>
-          <a:off x="566928" y="2148840"/>
-          <a:ext cx="11055095" cy="3977638"/>
+          <a:off x="566928" y="2103120"/>
+          <a:ext cx="11055096" cy="1920240"/>
         </p:xfrm>
         <a:graphic>
           <a:graphicData uri="http://schemas.openxmlformats.org/drawingml/2006/table">
             <a:tbl>
               <a:tblPr/>
               <a:tblGrid>
-                <a:gridCol w="3246120"/>
-                <a:gridCol w="7808975"/>
+                <a:gridCol w="3054096"/>
+                <a:gridCol w="1600200"/>
+                <a:gridCol w="1600200"/>
+                <a:gridCol w="1600200"/>
+                <a:gridCol w="1600200"/>
+                <a:gridCol w="1600200"/>
               </a:tblGrid>
-              <a:tr h="568234">
+              <a:tr h="274320">
                 <a:tc>
                   <a:txBody>
                     <a:bodyPr/>
@@ -19483,13 +19522,13 @@
                     <a:p>
                       <a:pPr algn="l"/>
                       <a:r>
-                        <a:rPr sz="1350" b="1">
+                        <a:rPr sz="1400" b="1">
                           <a:solidFill>
                             <a:srgbClr val="FFFFFF"/>
                           </a:solidFill>
                           <a:latin typeface="Calibri"/>
                         </a:rPr>
-                        <a:t>Criterion</a:t>
+                        <a:t>Roll-time band</a:t>
                       </a:r>
                     </a:p>
                   </a:txBody>
@@ -19504,26 +19543,258 @@
                     <a:bodyPr/>
                     <a:lstStyle/>
                     <a:p>
+                      <a:pPr algn="ctr"/>
+                      <a:r>
+                        <a:rPr sz="1400" b="1">
+                          <a:solidFill>
+                            <a:srgbClr val="FFFFFF"/>
+                          </a:solidFill>
+                          <a:latin typeface="Calibri"/>
+                        </a:rPr>
+                        <a:t>Mean $/oz</a:t>
+                      </a:r>
+                    </a:p>
+                  </a:txBody>
+                  <a:tcPr marL="88900" marR="88900" marT="38100" marB="38100" anchor="ctr">
+                    <a:solidFill>
+                      <a:srgbClr val="2B3A42"/>
+                    </a:solidFill>
+                  </a:tcPr>
+                </a:tc>
+                <a:tc>
+                  <a:txBody>
+                    <a:bodyPr/>
+                    <a:lstStyle/>
+                    <a:p>
+                      <a:pPr algn="ctr"/>
+                      <a:r>
+                        <a:rPr sz="1400" b="1">
+                          <a:solidFill>
+                            <a:srgbClr val="FFFFFF"/>
+                          </a:solidFill>
+                          <a:latin typeface="Calibri"/>
+                        </a:rPr>
+                        <a:t>Std</a:t>
+                      </a:r>
+                    </a:p>
+                  </a:txBody>
+                  <a:tcPr marL="88900" marR="88900" marT="38100" marB="38100" anchor="ctr">
+                    <a:solidFill>
+                      <a:srgbClr val="2B3A42"/>
+                    </a:solidFill>
+                  </a:tcPr>
+                </a:tc>
+                <a:tc>
+                  <a:txBody>
+                    <a:bodyPr/>
+                    <a:lstStyle/>
+                    <a:p>
+                      <a:pPr algn="ctr"/>
+                      <a:r>
+                        <a:rPr sz="1400" b="1">
+                          <a:solidFill>
+                            <a:srgbClr val="FFFFFF"/>
+                          </a:solidFill>
+                          <a:latin typeface="Calibri"/>
+                        </a:rPr>
+                        <a:t>Mean / Std</a:t>
+                      </a:r>
+                    </a:p>
+                  </a:txBody>
+                  <a:tcPr marL="88900" marR="88900" marT="38100" marB="38100" anchor="ctr">
+                    <a:solidFill>
+                      <a:srgbClr val="2B3A42"/>
+                    </a:solidFill>
+                  </a:tcPr>
+                </a:tc>
+                <a:tc>
+                  <a:txBody>
+                    <a:bodyPr/>
+                    <a:lstStyle/>
+                    <a:p>
+                      <a:pPr algn="ctr"/>
+                      <a:r>
+                        <a:rPr sz="1400" b="1">
+                          <a:solidFill>
+                            <a:srgbClr val="FFFFFF"/>
+                          </a:solidFill>
+                          <a:latin typeface="Calibri"/>
+                        </a:rPr>
+                        <a:t>CVaR5</a:t>
+                      </a:r>
+                    </a:p>
+                  </a:txBody>
+                  <a:tcPr marL="88900" marR="88900" marT="38100" marB="38100" anchor="ctr">
+                    <a:solidFill>
+                      <a:srgbClr val="2B3A42"/>
+                    </a:solidFill>
+                  </a:tcPr>
+                </a:tc>
+                <a:tc>
+                  <a:txBody>
+                    <a:bodyPr/>
+                    <a:lstStyle/>
+                    <a:p>
+                      <a:pPr algn="ctr"/>
+                      <a:r>
+                        <a:rPr sz="1400" b="1">
+                          <a:solidFill>
+                            <a:srgbClr val="FFFFFF"/>
+                          </a:solidFill>
+                          <a:latin typeface="Calibri"/>
+                        </a:rPr>
+                        <a:t>Worst month</a:t>
+                      </a:r>
+                    </a:p>
+                  </a:txBody>
+                  <a:tcPr marL="88900" marR="88900" marT="38100" marB="38100" anchor="ctr">
+                    <a:solidFill>
+                      <a:srgbClr val="2B3A42"/>
+                    </a:solidFill>
+                  </a:tcPr>
+                </a:tc>
+              </a:tr>
+              <a:tr h="274320">
+                <a:tc>
+                  <a:txBody>
+                    <a:bodyPr/>
+                    <a:lstStyle/>
+                    <a:p>
                       <a:pPr algn="l"/>
                       <a:r>
-                        <a:rPr sz="1350" b="1">
-                          <a:solidFill>
-                            <a:srgbClr val="FFFFFF"/>
-                          </a:solidFill>
-                          <a:latin typeface="Calibri"/>
-                        </a:rPr>
-                        <a:t>Bar to clear</a:t>
-                      </a:r>
-                    </a:p>
-                  </a:txBody>
-                  <a:tcPr marL="88900" marR="88900" marT="38100" marB="38100" anchor="ctr">
-                    <a:solidFill>
-                      <a:srgbClr val="2B3A42"/>
+                        <a:rPr sz="1400" b="1">
+                          <a:solidFill>
+                            <a:srgbClr val="22262A"/>
+                          </a:solidFill>
+                          <a:latin typeface="Calibri"/>
+                        </a:rPr>
+                        <a:t>0.60  (shipped)</a:t>
+                      </a:r>
+                    </a:p>
+                  </a:txBody>
+                  <a:tcPr marL="88900" marR="88900" marT="38100" marB="38100" anchor="ctr">
+                    <a:solidFill>
+                      <a:srgbClr val="FFFFFF"/>
+                    </a:solidFill>
+                  </a:tcPr>
+                </a:tc>
+                <a:tc>
+                  <a:txBody>
+                    <a:bodyPr/>
+                    <a:lstStyle/>
+                    <a:p>
+                      <a:pPr algn="ctr"/>
+                      <a:r>
+                        <a:rPr sz="1400" b="0">
+                          <a:solidFill>
+                            <a:srgbClr val="22262A"/>
+                          </a:solidFill>
+                          <a:latin typeface="Calibri"/>
+                        </a:rPr>
+                        <a:t>+22.86</a:t>
+                      </a:r>
+                    </a:p>
+                  </a:txBody>
+                  <a:tcPr marL="88900" marR="88900" marT="38100" marB="38100" anchor="ctr">
+                    <a:solidFill>
+                      <a:srgbClr val="FFFFFF"/>
+                    </a:solidFill>
+                  </a:tcPr>
+                </a:tc>
+                <a:tc>
+                  <a:txBody>
+                    <a:bodyPr/>
+                    <a:lstStyle/>
+                    <a:p>
+                      <a:pPr algn="ctr"/>
+                      <a:r>
+                        <a:rPr sz="1400" b="0">
+                          <a:solidFill>
+                            <a:srgbClr val="22262A"/>
+                          </a:solidFill>
+                          <a:latin typeface="Calibri"/>
+                        </a:rPr>
+                        <a:t>60.1</a:t>
+                      </a:r>
+                    </a:p>
+                  </a:txBody>
+                  <a:tcPr marL="88900" marR="88900" marT="38100" marB="38100" anchor="ctr">
+                    <a:solidFill>
+                      <a:srgbClr val="FFFFFF"/>
+                    </a:solidFill>
+                  </a:tcPr>
+                </a:tc>
+                <a:tc>
+                  <a:txBody>
+                    <a:bodyPr/>
+                    <a:lstStyle/>
+                    <a:p>
+                      <a:pPr algn="ctr"/>
+                      <a:r>
+                        <a:rPr sz="1400" b="0">
+                          <a:solidFill>
+                            <a:srgbClr val="22262A"/>
+                          </a:solidFill>
+                          <a:latin typeface="Calibri"/>
+                        </a:rPr>
+                        <a:t>0.380</a:t>
+                      </a:r>
+                    </a:p>
+                  </a:txBody>
+                  <a:tcPr marL="88900" marR="88900" marT="38100" marB="38100" anchor="ctr">
+                    <a:solidFill>
+                      <a:srgbClr val="FFFFFF"/>
+                    </a:solidFill>
+                  </a:tcPr>
+                </a:tc>
+                <a:tc>
+                  <a:txBody>
+                    <a:bodyPr/>
+                    <a:lstStyle/>
+                    <a:p>
+                      <a:pPr algn="ctr"/>
+                      <a:r>
+                        <a:rPr sz="1400" b="0">
+                          <a:solidFill>
+                            <a:srgbClr val="22262A"/>
+                          </a:solidFill>
+                          <a:latin typeface="Calibri"/>
+                        </a:rPr>
+                        <a:t>−79.9</a:t>
+                      </a:r>
+                    </a:p>
+                  </a:txBody>
+                  <a:tcPr marL="88900" marR="88900" marT="38100" marB="38100" anchor="ctr">
+                    <a:solidFill>
+                      <a:srgbClr val="FFFFFF"/>
+                    </a:solidFill>
+                  </a:tcPr>
+                </a:tc>
+                <a:tc>
+                  <a:txBody>
+                    <a:bodyPr/>
+                    <a:lstStyle/>
+                    <a:p>
+                      <a:pPr algn="ctr"/>
+                      <a:r>
+                        <a:rPr sz="1400" b="0">
+                          <a:solidFill>
+                            <a:srgbClr val="22262A"/>
+                          </a:solidFill>
+                          <a:latin typeface="Calibri"/>
+                        </a:rPr>
+                        <a:t>−81.4</a:t>
+                      </a:r>
+                    </a:p>
+                  </a:txBody>
+                  <a:tcPr marL="88900" marR="88900" marT="38100" marB="38100" anchor="ctr">
+                    <a:solidFill>
+                      <a:srgbClr val="FFFFFF"/>
                     </a:solidFill>
                   </a:tcPr>
                 </a:tc>
               </a:tr>
-              <a:tr h="568234">
+              <a:tr h="274320">
                 <a:tc>
                   <a:txBody>
                     <a:bodyPr/>
@@ -19531,13 +19802,153 @@
                     <a:p>
                       <a:pPr algn="l"/>
                       <a:r>
-                        <a:rPr sz="1350" b="1">
-                          <a:solidFill>
-                            <a:srgbClr val="22262A"/>
-                          </a:solidFill>
-                          <a:latin typeface="Calibri"/>
-                        </a:rPr>
-                        <a:t>Causal bound</a:t>
+                        <a:rPr sz="1400" b="1">
+                          <a:solidFill>
+                            <a:srgbClr val="22262A"/>
+                          </a:solidFill>
+                          <a:latin typeface="Calibri"/>
+                        </a:rPr>
+                        <a:t>0.50</a:t>
+                      </a:r>
+                    </a:p>
+                  </a:txBody>
+                  <a:tcPr marL="88900" marR="88900" marT="38100" marB="38100" anchor="ctr">
+                    <a:solidFill>
+                      <a:srgbClr val="F2F4F6"/>
+                    </a:solidFill>
+                  </a:tcPr>
+                </a:tc>
+                <a:tc>
+                  <a:txBody>
+                    <a:bodyPr/>
+                    <a:lstStyle/>
+                    <a:p>
+                      <a:pPr algn="ctr"/>
+                      <a:r>
+                        <a:rPr sz="1400" b="0">
+                          <a:solidFill>
+                            <a:srgbClr val="22262A"/>
+                          </a:solidFill>
+                          <a:latin typeface="Calibri"/>
+                        </a:rPr>
+                        <a:t>+21.91</a:t>
+                      </a:r>
+                    </a:p>
+                  </a:txBody>
+                  <a:tcPr marL="88900" marR="88900" marT="38100" marB="38100" anchor="ctr">
+                    <a:solidFill>
+                      <a:srgbClr val="F2F4F6"/>
+                    </a:solidFill>
+                  </a:tcPr>
+                </a:tc>
+                <a:tc>
+                  <a:txBody>
+                    <a:bodyPr/>
+                    <a:lstStyle/>
+                    <a:p>
+                      <a:pPr algn="ctr"/>
+                      <a:r>
+                        <a:rPr sz="1400" b="0">
+                          <a:solidFill>
+                            <a:srgbClr val="22262A"/>
+                          </a:solidFill>
+                          <a:latin typeface="Calibri"/>
+                        </a:rPr>
+                        <a:t>57.2</a:t>
+                      </a:r>
+                    </a:p>
+                  </a:txBody>
+                  <a:tcPr marL="88900" marR="88900" marT="38100" marB="38100" anchor="ctr">
+                    <a:solidFill>
+                      <a:srgbClr val="F2F4F6"/>
+                    </a:solidFill>
+                  </a:tcPr>
+                </a:tc>
+                <a:tc>
+                  <a:txBody>
+                    <a:bodyPr/>
+                    <a:lstStyle/>
+                    <a:p>
+                      <a:pPr algn="ctr"/>
+                      <a:r>
+                        <a:rPr sz="1400" b="0">
+                          <a:solidFill>
+                            <a:srgbClr val="22262A"/>
+                          </a:solidFill>
+                          <a:latin typeface="Calibri"/>
+                        </a:rPr>
+                        <a:t>0.383</a:t>
+                      </a:r>
+                    </a:p>
+                  </a:txBody>
+                  <a:tcPr marL="88900" marR="88900" marT="38100" marB="38100" anchor="ctr">
+                    <a:solidFill>
+                      <a:srgbClr val="F2F4F6"/>
+                    </a:solidFill>
+                  </a:tcPr>
+                </a:tc>
+                <a:tc>
+                  <a:txBody>
+                    <a:bodyPr/>
+                    <a:lstStyle/>
+                    <a:p>
+                      <a:pPr algn="ctr"/>
+                      <a:r>
+                        <a:rPr sz="1400" b="0">
+                          <a:solidFill>
+                            <a:srgbClr val="22262A"/>
+                          </a:solidFill>
+                          <a:latin typeface="Calibri"/>
+                        </a:rPr>
+                        <a:t>−77.0</a:t>
+                      </a:r>
+                    </a:p>
+                  </a:txBody>
+                  <a:tcPr marL="88900" marR="88900" marT="38100" marB="38100" anchor="ctr">
+                    <a:solidFill>
+                      <a:srgbClr val="F2F4F6"/>
+                    </a:solidFill>
+                  </a:tcPr>
+                </a:tc>
+                <a:tc>
+                  <a:txBody>
+                    <a:bodyPr/>
+                    <a:lstStyle/>
+                    <a:p>
+                      <a:pPr algn="ctr"/>
+                      <a:r>
+                        <a:rPr sz="1400" b="0">
+                          <a:solidFill>
+                            <a:srgbClr val="22262A"/>
+                          </a:solidFill>
+                          <a:latin typeface="Calibri"/>
+                        </a:rPr>
+                        <a:t>−81.2</a:t>
+                      </a:r>
+                    </a:p>
+                  </a:txBody>
+                  <a:tcPr marL="88900" marR="88900" marT="38100" marB="38100" anchor="ctr">
+                    <a:solidFill>
+                      <a:srgbClr val="F2F4F6"/>
+                    </a:solidFill>
+                  </a:tcPr>
+                </a:tc>
+              </a:tr>
+              <a:tr h="274320">
+                <a:tc>
+                  <a:txBody>
+                    <a:bodyPr/>
+                    <a:lstStyle/>
+                    <a:p>
+                      <a:pPr algn="l"/>
+                      <a:r>
+                        <a:rPr sz="1400" b="1">
+                          <a:solidFill>
+                            <a:srgbClr val="22262A"/>
+                          </a:solidFill>
+                          <a:latin typeface="Calibri"/>
+                        </a:rPr>
+                        <a:t>0.40</a:t>
                       </a:r>
                     </a:p>
                   </a:txBody>
@@ -19552,15 +19963,272 @@
                     <a:bodyPr/>
                     <a:lstStyle/>
                     <a:p>
+                      <a:pPr algn="ctr"/>
+                      <a:r>
+                        <a:rPr sz="1400" b="0">
+                          <a:solidFill>
+                            <a:srgbClr val="22262A"/>
+                          </a:solidFill>
+                          <a:latin typeface="Calibri"/>
+                        </a:rPr>
+                        <a:t>+18.69</a:t>
+                      </a:r>
+                    </a:p>
+                  </a:txBody>
+                  <a:tcPr marL="88900" marR="88900" marT="38100" marB="38100" anchor="ctr">
+                    <a:solidFill>
+                      <a:srgbClr val="FFFFFF"/>
+                    </a:solidFill>
+                  </a:tcPr>
+                </a:tc>
+                <a:tc>
+                  <a:txBody>
+                    <a:bodyPr/>
+                    <a:lstStyle/>
+                    <a:p>
+                      <a:pPr algn="ctr"/>
+                      <a:r>
+                        <a:rPr sz="1400" b="0">
+                          <a:solidFill>
+                            <a:srgbClr val="22262A"/>
+                          </a:solidFill>
+                          <a:latin typeface="Calibri"/>
+                        </a:rPr>
+                        <a:t>48.6</a:t>
+                      </a:r>
+                    </a:p>
+                  </a:txBody>
+                  <a:tcPr marL="88900" marR="88900" marT="38100" marB="38100" anchor="ctr">
+                    <a:solidFill>
+                      <a:srgbClr val="FFFFFF"/>
+                    </a:solidFill>
+                  </a:tcPr>
+                </a:tc>
+                <a:tc>
+                  <a:txBody>
+                    <a:bodyPr/>
+                    <a:lstStyle/>
+                    <a:p>
+                      <a:pPr algn="ctr"/>
+                      <a:r>
+                        <a:rPr sz="1400" b="0">
+                          <a:solidFill>
+                            <a:srgbClr val="22262A"/>
+                          </a:solidFill>
+                          <a:latin typeface="Calibri"/>
+                        </a:rPr>
+                        <a:t>0.385</a:t>
+                      </a:r>
+                    </a:p>
+                  </a:txBody>
+                  <a:tcPr marL="88900" marR="88900" marT="38100" marB="38100" anchor="ctr">
+                    <a:solidFill>
+                      <a:srgbClr val="FFFFFF"/>
+                    </a:solidFill>
+                  </a:tcPr>
+                </a:tc>
+                <a:tc>
+                  <a:txBody>
+                    <a:bodyPr/>
+                    <a:lstStyle/>
+                    <a:p>
+                      <a:pPr algn="ctr"/>
+                      <a:r>
+                        <a:rPr sz="1400" b="0">
+                          <a:solidFill>
+                            <a:srgbClr val="22262A"/>
+                          </a:solidFill>
+                          <a:latin typeface="Calibri"/>
+                        </a:rPr>
+                        <a:t>−64.3</a:t>
+                      </a:r>
+                    </a:p>
+                  </a:txBody>
+                  <a:tcPr marL="88900" marR="88900" marT="38100" marB="38100" anchor="ctr">
+                    <a:solidFill>
+                      <a:srgbClr val="FFFFFF"/>
+                    </a:solidFill>
+                  </a:tcPr>
+                </a:tc>
+                <a:tc>
+                  <a:txBody>
+                    <a:bodyPr/>
+                    <a:lstStyle/>
+                    <a:p>
+                      <a:pPr algn="ctr"/>
+                      <a:r>
+                        <a:rPr sz="1400" b="0">
+                          <a:solidFill>
+                            <a:srgbClr val="22262A"/>
+                          </a:solidFill>
+                          <a:latin typeface="Calibri"/>
+                        </a:rPr>
+                        <a:t>−80.9</a:t>
+                      </a:r>
+                    </a:p>
+                  </a:txBody>
+                  <a:tcPr marL="88900" marR="88900" marT="38100" marB="38100" anchor="ctr">
+                    <a:solidFill>
+                      <a:srgbClr val="FFFFFF"/>
+                    </a:solidFill>
+                  </a:tcPr>
+                </a:tc>
+              </a:tr>
+              <a:tr h="274320">
+                <a:tc>
+                  <a:txBody>
+                    <a:bodyPr/>
+                    <a:lstStyle/>
+                    <a:p>
                       <a:pPr algn="l"/>
                       <a:r>
-                        <a:rPr sz="1350" b="0">
-                          <a:solidFill>
-                            <a:srgbClr val="22262A"/>
-                          </a:solidFill>
-                          <a:latin typeface="Calibri"/>
-                        </a:rPr>
-                        <a:t>48 / 48 trades inside the per-trade causal bound. No exceptions.</a:t>
+                        <a:rPr sz="1400" b="1">
+                          <a:solidFill>
+                            <a:srgbClr val="22262A"/>
+                          </a:solidFill>
+                          <a:latin typeface="Calibri"/>
+                        </a:rPr>
+                        <a:t>0.30</a:t>
+                      </a:r>
+                    </a:p>
+                  </a:txBody>
+                  <a:tcPr marL="88900" marR="88900" marT="38100" marB="38100" anchor="ctr">
+                    <a:solidFill>
+                      <a:srgbClr val="F2F4F6"/>
+                    </a:solidFill>
+                  </a:tcPr>
+                </a:tc>
+                <a:tc>
+                  <a:txBody>
+                    <a:bodyPr/>
+                    <a:lstStyle/>
+                    <a:p>
+                      <a:pPr algn="ctr"/>
+                      <a:r>
+                        <a:rPr sz="1400" b="0">
+                          <a:solidFill>
+                            <a:srgbClr val="22262A"/>
+                          </a:solidFill>
+                          <a:latin typeface="Calibri"/>
+                        </a:rPr>
+                        <a:t>+17.15</a:t>
+                      </a:r>
+                    </a:p>
+                  </a:txBody>
+                  <a:tcPr marL="88900" marR="88900" marT="38100" marB="38100" anchor="ctr">
+                    <a:solidFill>
+                      <a:srgbClr val="F2F4F6"/>
+                    </a:solidFill>
+                  </a:tcPr>
+                </a:tc>
+                <a:tc>
+                  <a:txBody>
+                    <a:bodyPr/>
+                    <a:lstStyle/>
+                    <a:p>
+                      <a:pPr algn="ctr"/>
+                      <a:r>
+                        <a:rPr sz="1400" b="0">
+                          <a:solidFill>
+                            <a:srgbClr val="22262A"/>
+                          </a:solidFill>
+                          <a:latin typeface="Calibri"/>
+                        </a:rPr>
+                        <a:t>39.2</a:t>
+                      </a:r>
+                    </a:p>
+                  </a:txBody>
+                  <a:tcPr marL="88900" marR="88900" marT="38100" marB="38100" anchor="ctr">
+                    <a:solidFill>
+                      <a:srgbClr val="F2F4F6"/>
+                    </a:solidFill>
+                  </a:tcPr>
+                </a:tc>
+                <a:tc>
+                  <a:txBody>
+                    <a:bodyPr/>
+                    <a:lstStyle/>
+                    <a:p>
+                      <a:pPr algn="ctr"/>
+                      <a:r>
+                        <a:rPr sz="1400" b="0">
+                          <a:solidFill>
+                            <a:srgbClr val="22262A"/>
+                          </a:solidFill>
+                          <a:latin typeface="Calibri"/>
+                        </a:rPr>
+                        <a:t>0.438</a:t>
+                      </a:r>
+                    </a:p>
+                  </a:txBody>
+                  <a:tcPr marL="88900" marR="88900" marT="38100" marB="38100" anchor="ctr">
+                    <a:solidFill>
+                      <a:srgbClr val="F2F4F6"/>
+                    </a:solidFill>
+                  </a:tcPr>
+                </a:tc>
+                <a:tc>
+                  <a:txBody>
+                    <a:bodyPr/>
+                    <a:lstStyle/>
+                    <a:p>
+                      <a:pPr algn="ctr"/>
+                      <a:r>
+                        <a:rPr sz="1400" b="0">
+                          <a:solidFill>
+                            <a:srgbClr val="22262A"/>
+                          </a:solidFill>
+                          <a:latin typeface="Calibri"/>
+                        </a:rPr>
+                        <a:t>−47.9</a:t>
+                      </a:r>
+                    </a:p>
+                  </a:txBody>
+                  <a:tcPr marL="88900" marR="88900" marT="38100" marB="38100" anchor="ctr">
+                    <a:solidFill>
+                      <a:srgbClr val="F2F4F6"/>
+                    </a:solidFill>
+                  </a:tcPr>
+                </a:tc>
+                <a:tc>
+                  <a:txBody>
+                    <a:bodyPr/>
+                    <a:lstStyle/>
+                    <a:p>
+                      <a:pPr algn="ctr"/>
+                      <a:r>
+                        <a:rPr sz="1400" b="0">
+                          <a:solidFill>
+                            <a:srgbClr val="22262A"/>
+                          </a:solidFill>
+                          <a:latin typeface="Calibri"/>
+                        </a:rPr>
+                        <a:t>−55.0</a:t>
+                      </a:r>
+                    </a:p>
+                  </a:txBody>
+                  <a:tcPr marL="88900" marR="88900" marT="38100" marB="38100" anchor="ctr">
+                    <a:solidFill>
+                      <a:srgbClr val="F2F4F6"/>
+                    </a:solidFill>
+                  </a:tcPr>
+                </a:tc>
+              </a:tr>
+              <a:tr h="274320">
+                <a:tc>
+                  <a:txBody>
+                    <a:bodyPr/>
+                    <a:lstStyle/>
+                    <a:p>
+                      <a:pPr algn="l"/>
+                      <a:r>
+                        <a:rPr sz="1400" b="1">
+                          <a:solidFill>
+                            <a:srgbClr val="22262A"/>
+                          </a:solidFill>
+                          <a:latin typeface="Calibri"/>
+                        </a:rPr>
+                        <a:t>0.25</a:t>
                       </a:r>
                     </a:p>
                   </a:txBody>
@@ -19570,8 +20238,123 @@
                     </a:solidFill>
                   </a:tcPr>
                 </a:tc>
+                <a:tc>
+                  <a:txBody>
+                    <a:bodyPr/>
+                    <a:lstStyle/>
+                    <a:p>
+                      <a:pPr algn="ctr"/>
+                      <a:r>
+                        <a:rPr sz="1400" b="0">
+                          <a:solidFill>
+                            <a:srgbClr val="22262A"/>
+                          </a:solidFill>
+                          <a:latin typeface="Calibri"/>
+                        </a:rPr>
+                        <a:t>+16.85</a:t>
+                      </a:r>
+                    </a:p>
+                  </a:txBody>
+                  <a:tcPr marL="88900" marR="88900" marT="38100" marB="38100" anchor="ctr">
+                    <a:solidFill>
+                      <a:srgbClr val="FFFFFF"/>
+                    </a:solidFill>
+                  </a:tcPr>
+                </a:tc>
+                <a:tc>
+                  <a:txBody>
+                    <a:bodyPr/>
+                    <a:lstStyle/>
+                    <a:p>
+                      <a:pPr algn="ctr"/>
+                      <a:r>
+                        <a:rPr sz="1400" b="0">
+                          <a:solidFill>
+                            <a:srgbClr val="22262A"/>
+                          </a:solidFill>
+                          <a:latin typeface="Calibri"/>
+                        </a:rPr>
+                        <a:t>37.9</a:t>
+                      </a:r>
+                    </a:p>
+                  </a:txBody>
+                  <a:tcPr marL="88900" marR="88900" marT="38100" marB="38100" anchor="ctr">
+                    <a:solidFill>
+                      <a:srgbClr val="FFFFFF"/>
+                    </a:solidFill>
+                  </a:tcPr>
+                </a:tc>
+                <a:tc>
+                  <a:txBody>
+                    <a:bodyPr/>
+                    <a:lstStyle/>
+                    <a:p>
+                      <a:pPr algn="ctr"/>
+                      <a:r>
+                        <a:rPr sz="1400" b="0">
+                          <a:solidFill>
+                            <a:srgbClr val="22262A"/>
+                          </a:solidFill>
+                          <a:latin typeface="Calibri"/>
+                        </a:rPr>
+                        <a:t>0.444</a:t>
+                      </a:r>
+                    </a:p>
+                  </a:txBody>
+                  <a:tcPr marL="88900" marR="88900" marT="38100" marB="38100" anchor="ctr">
+                    <a:solidFill>
+                      <a:srgbClr val="FFFFFF"/>
+                    </a:solidFill>
+                  </a:tcPr>
+                </a:tc>
+                <a:tc>
+                  <a:txBody>
+                    <a:bodyPr/>
+                    <a:lstStyle/>
+                    <a:p>
+                      <a:pPr algn="ctr"/>
+                      <a:r>
+                        <a:rPr sz="1400" b="0">
+                          <a:solidFill>
+                            <a:srgbClr val="22262A"/>
+                          </a:solidFill>
+                          <a:latin typeface="Calibri"/>
+                        </a:rPr>
+                        <a:t>−47.5</a:t>
+                      </a:r>
+                    </a:p>
+                  </a:txBody>
+                  <a:tcPr marL="88900" marR="88900" marT="38100" marB="38100" anchor="ctr">
+                    <a:solidFill>
+                      <a:srgbClr val="FFFFFF"/>
+                    </a:solidFill>
+                  </a:tcPr>
+                </a:tc>
+                <a:tc>
+                  <a:txBody>
+                    <a:bodyPr/>
+                    <a:lstStyle/>
+                    <a:p>
+                      <a:pPr algn="ctr"/>
+                      <a:r>
+                        <a:rPr sz="1400" b="0">
+                          <a:solidFill>
+                            <a:srgbClr val="22262A"/>
+                          </a:solidFill>
+                          <a:latin typeface="Calibri"/>
+                        </a:rPr>
+                        <a:t>−55.9</a:t>
+                      </a:r>
+                    </a:p>
+                  </a:txBody>
+                  <a:tcPr marL="88900" marR="88900" marT="38100" marB="38100" anchor="ctr">
+                    <a:solidFill>
+                      <a:srgbClr val="FFFFFF"/>
+                    </a:solidFill>
+                  </a:tcPr>
+                </a:tc>
               </a:tr>
-              <a:tr h="568234">
+              <a:tr h="274320">
                 <a:tc>
                   <a:txBody>
                     <a:bodyPr/>
@@ -19579,13 +20362,13 @@
                     <a:p>
                       <a:pPr algn="l"/>
                       <a:r>
-                        <a:rPr sz="1350" b="1">
-                          <a:solidFill>
-                            <a:srgbClr val="22262A"/>
-                          </a:solidFill>
-                          <a:latin typeface="Calibri"/>
-                        </a:rPr>
-                        <a:t>Corridor</a:t>
+                        <a:rPr sz="1400" b="1">
+                          <a:solidFill>
+                            <a:srgbClr val="22262A"/>
+                          </a:solidFill>
+                          <a:latin typeface="Calibri"/>
+                        </a:rPr>
+                        <a:t>0.15  (recommended)</a:t>
                       </a:r>
                     </a:p>
                   </a:txBody>
@@ -19600,15 +20383,15 @@
                     <a:bodyPr/>
                     <a:lstStyle/>
                     <a:p>
-                      <a:pPr algn="l"/>
-                      <a:r>
-                        <a:rPr sz="1350" b="0">
-                          <a:solidFill>
-                            <a:srgbClr val="22262A"/>
-                          </a:solidFill>
-                          <a:latin typeface="Calibri"/>
-                        </a:rPr>
-                        <a:t>Zero breaches when the delta corridor is re-run at bands 0.60 and 0.40 (the shipped risk control, slides 24–27).</a:t>
+                      <a:pPr algn="ctr"/>
+                      <a:r>
+                        <a:rPr sz="1400" b="0">
+                          <a:solidFill>
+                            <a:srgbClr val="22262A"/>
+                          </a:solidFill>
+                          <a:latin typeface="Calibri"/>
+                        </a:rPr>
+                        <a:t>+17.40</a:t>
                       </a:r>
                     </a:p>
                   </a:txBody>
@@ -19618,28 +20401,26 @@
                     </a:solidFill>
                   </a:tcPr>
                 </a:tc>
-              </a:tr>
-              <a:tr h="568234">
                 <a:tc>
                   <a:txBody>
                     <a:bodyPr/>
                     <a:lstStyle/>
                     <a:p>
-                      <a:pPr algn="l"/>
-                      <a:r>
-                        <a:rPr sz="1350" b="1">
-                          <a:solidFill>
-                            <a:srgbClr val="22262A"/>
-                          </a:solidFill>
-                          <a:latin typeface="Calibri"/>
-                        </a:rPr>
-                        <a:t>Mean</a:t>
-                      </a:r>
-                    </a:p>
-                  </a:txBody>
-                  <a:tcPr marL="88900" marR="88900" marT="38100" marB="38100" anchor="ctr">
-                    <a:solidFill>
-                      <a:srgbClr val="FFFFFF"/>
+                      <a:pPr algn="ctr"/>
+                      <a:r>
+                        <a:rPr sz="1400" b="0">
+                          <a:solidFill>
+                            <a:srgbClr val="22262A"/>
+                          </a:solidFill>
+                          <a:latin typeface="Calibri"/>
+                        </a:rPr>
+                        <a:t>31.3</a:t>
+                      </a:r>
+                    </a:p>
+                  </a:txBody>
+                  <a:tcPr marL="88900" marR="88900" marT="38100" marB="38100" anchor="ctr">
+                    <a:solidFill>
+                      <a:srgbClr val="F2F4F6"/>
                     </a:solidFill>
                   </a:tcPr>
                 </a:tc>
@@ -19648,40 +20429,38 @@
                     <a:bodyPr/>
                     <a:lstStyle/>
                     <a:p>
-                      <a:pPr algn="l"/>
-                      <a:r>
-                        <a:rPr sz="1350" b="0">
-                          <a:solidFill>
-                            <a:srgbClr val="22262A"/>
-                          </a:solidFill>
-                          <a:latin typeface="Calibri"/>
-                        </a:rPr>
-                        <a:t>Within noise of the HMM baseline. We are not buying a higher mean — we are buying a better-identified state.</a:t>
-                      </a:r>
-                    </a:p>
-                  </a:txBody>
-                  <a:tcPr marL="88900" marR="88900" marT="38100" marB="38100" anchor="ctr">
-                    <a:solidFill>
-                      <a:srgbClr val="FFFFFF"/>
-                    </a:solidFill>
-                  </a:tcPr>
-                </a:tc>
-              </a:tr>
-              <a:tr h="568234">
+                      <a:pPr algn="ctr"/>
+                      <a:r>
+                        <a:rPr sz="1400" b="0">
+                          <a:solidFill>
+                            <a:srgbClr val="22262A"/>
+                          </a:solidFill>
+                          <a:latin typeface="Calibri"/>
+                        </a:rPr>
+                        <a:t>0.557</a:t>
+                      </a:r>
+                    </a:p>
+                  </a:txBody>
+                  <a:tcPr marL="88900" marR="88900" marT="38100" marB="38100" anchor="ctr">
+                    <a:solidFill>
+                      <a:srgbClr val="F2F4F6"/>
+                    </a:solidFill>
+                  </a:tcPr>
+                </a:tc>
                 <a:tc>
                   <a:txBody>
                     <a:bodyPr/>
                     <a:lstStyle/>
                     <a:p>
-                      <a:pPr algn="l"/>
-                      <a:r>
-                        <a:rPr sz="1350" b="1">
-                          <a:solidFill>
-                            <a:srgbClr val="22262A"/>
-                          </a:solidFill>
-                          <a:latin typeface="Calibri"/>
-                        </a:rPr>
-                        <a:t>Dispersion</a:t>
+                      <a:pPr algn="ctr"/>
+                      <a:r>
+                        <a:rPr sz="1400" b="0">
+                          <a:solidFill>
+                            <a:srgbClr val="22262A"/>
+                          </a:solidFill>
+                          <a:latin typeface="Calibri"/>
+                        </a:rPr>
+                        <a:t>−40.9</a:t>
                       </a:r>
                     </a:p>
                   </a:txBody>
@@ -19696,111 +20475,15 @@
                     <a:bodyPr/>
                     <a:lstStyle/>
                     <a:p>
-                      <a:pPr algn="l"/>
-                      <a:r>
-                        <a:rPr sz="1350" b="0">
-                          <a:solidFill>
-                            <a:srgbClr val="22262A"/>
-                          </a:solidFill>
-                          <a:latin typeface="Calibri"/>
-                        </a:rPr>
-                        <a:t>No worse than the baseline over the full 48 months.</a:t>
-                      </a:r>
-                    </a:p>
-                  </a:txBody>
-                  <a:tcPr marL="88900" marR="88900" marT="38100" marB="38100" anchor="ctr">
-                    <a:solidFill>
-                      <a:srgbClr val="F2F4F6"/>
-                    </a:solidFill>
-                  </a:tcPr>
-                </a:tc>
-              </a:tr>
-              <a:tr h="568234">
-                <a:tc>
-                  <a:txBody>
-                    <a:bodyPr/>
-                    <a:lstStyle/>
-                    <a:p>
-                      <a:pPr algn="l"/>
-                      <a:r>
-                        <a:rPr sz="1350" b="1">
-                          <a:solidFill>
-                            <a:srgbClr val="22262A"/>
-                          </a:solidFill>
-                          <a:latin typeface="Calibri"/>
-                        </a:rPr>
-                        <a:t>Martingale check</a:t>
-                      </a:r>
-                    </a:p>
-                  </a:txBody>
-                  <a:tcPr marL="88900" marR="88900" marT="38100" marB="38100" anchor="ctr">
-                    <a:solidFill>
-                      <a:srgbClr val="FFFFFF"/>
-                    </a:solidFill>
-                  </a:tcPr>
-                </a:tc>
-                <a:tc>
-                  <a:txBody>
-                    <a:bodyPr/>
-                    <a:lstStyle/>
-                    <a:p>
-                      <a:pPr algn="l"/>
-                      <a:r>
-                        <a:rPr sz="1350" b="0">
-                          <a:solidFill>
-                            <a:srgbClr val="22262A"/>
-                          </a:solidFill>
-                          <a:latin typeface="Calibri"/>
-                        </a:rPr>
-                        <a:t>E[return | volatility state] = 0 asserted at every calibration; any executable drift on the tradeable leg REJECTS the calibration.</a:t>
-                      </a:r>
-                    </a:p>
-                  </a:txBody>
-                  <a:tcPr marL="88900" marR="88900" marT="38100" marB="38100" anchor="ctr">
-                    <a:solidFill>
-                      <a:srgbClr val="FFFFFF"/>
-                    </a:solidFill>
-                  </a:tcPr>
-                </a:tc>
-              </a:tr>
-              <a:tr h="568234">
-                <a:tc>
-                  <a:txBody>
-                    <a:bodyPr/>
-                    <a:lstStyle/>
-                    <a:p>
-                      <a:pPr algn="l"/>
-                      <a:r>
-                        <a:rPr sz="1350" b="1">
-                          <a:solidFill>
-                            <a:srgbClr val="22262A"/>
-                          </a:solidFill>
-                          <a:latin typeface="Calibri"/>
-                        </a:rPr>
-                        <a:t>Then, and only then</a:t>
-                      </a:r>
-                    </a:p>
-                  </a:txBody>
-                  <a:tcPr marL="88900" marR="88900" marT="38100" marB="38100" anchor="ctr">
-                    <a:solidFill>
-                      <a:srgbClr val="F2F4F6"/>
-                    </a:solidFill>
-                  </a:tcPr>
-                </a:tc>
-                <a:tc>
-                  <a:txBody>
-                    <a:bodyPr/>
-                    <a:lstStyle/>
-                    <a:p>
-                      <a:pPr algn="l"/>
-                      <a:r>
-                        <a:rPr sz="1350" b="0">
-                          <a:solidFill>
-                            <a:srgbClr val="22262A"/>
-                          </a:solidFill>
-                          <a:latin typeface="Calibri"/>
-                        </a:rPr>
-                        <a:t>Final numbers, the corridor re-run and the ship / no-ship call — when all 48 trades land.</a:t>
+                      <a:pPr algn="ctr"/>
+                      <a:r>
+                        <a:rPr sz="1400" b="0">
+                          <a:solidFill>
+                            <a:srgbClr val="22262A"/>
+                          </a:solidFill>
+                          <a:latin typeface="Calibri"/>
+                        </a:rPr>
+                        <a:t>−57.7</a:t>
                       </a:r>
                     </a:p>
                   </a:txBody>
@@ -19817,14 +20500,14 @@
       </p:graphicFrame>
       <p:sp>
         <p:nvSpPr>
-          <p:cNvPr id="8" name="TextBox 7"/>
+          <p:cNvPr id="951" name="TextBox 950"/>
           <p:cNvSpPr txBox="1"/>
           <p:nvPr/>
         </p:nvSpPr>
         <p:spPr>
           <a:xfrm>
-            <a:off x="566928" y="6473952"/>
-            <a:ext cx="11055096" cy="274320"/>
+            <a:off x="566928" y="4133087"/>
+            <a:ext cx="11055096" cy="530352"/>
           </a:xfrm>
           <a:prstGeom prst="rect">
             <a:avLst/>
@@ -19832,20 +20515,216 @@
           <a:noFill/>
         </p:spPr>
         <p:txBody>
-          <a:bodyPr wrap="square" lIns="0" rIns="0" tIns="0" bIns="0">
+          <a:bodyPr wrap="square">
             <a:spAutoFit/>
           </a:bodyPr>
           <a:lstStyle/>
           <a:p>
-            <a:pPr algn="l"/>
-            <a:r>
-              <a:rPr sz="950" b="0">
-                <a:solidFill>
-                  <a:srgbClr val="6B7278"/>
-                </a:solidFill>
-                <a:latin typeface="Calibri"/>
-              </a:rPr>
-              <a:t>Criteria recorded in GARCHSpotModel_spec.md ahead of the walk-forward · commit c52411d. Shipping default remains the HMM until every criterion is met.</a:t>
+            <a:r>
+              <a:rPr sz="1350">
+                <a:solidFill>
+                  <a:srgbClr val="1F77B4"/>
+                </a:solidFill>
+                <a:latin typeface="Calibri"/>
+              </a:rPr>
+              <a:t>▪  </a:t>
+            </a:r>
+            <a:r>
+              <a:rPr sz="1350" b="1">
+                <a:solidFill>
+                  <a:srgbClr val="22262A"/>
+                </a:solidFill>
+                <a:latin typeface="Calibri"/>
+              </a:rPr>
+              <a:t>RECOMMENDATION — tighten the roll-time band 0.60 → 0.15.  </a:t>
+            </a:r>
+            <a:r>
+              <a:rPr sz="1350">
+                <a:solidFill>
+                  <a:srgbClr val="22262A"/>
+                </a:solidFill>
+                <a:latin typeface="Calibri"/>
+              </a:rPr>
+              <a:t>Mean / std roughly doubles (0.38 → 0.56), CVaR5 halves (−80 → −41), worst month −81 → −58 — with no retraining, 0 breaches and 48/48 causal-bound PASS at every band.</a:t>
+            </a:r>
+          </a:p>
+        </p:txBody>
+      </p:sp>
+      <p:sp>
+        <p:nvSpPr>
+          <p:cNvPr id="952" name="Rounded Rectangle 951"/>
+          <p:cNvSpPr/>
+          <p:nvPr/>
+        </p:nvSpPr>
+        <p:spPr>
+          <a:xfrm>
+            <a:off x="566928" y="4690872"/>
+            <a:ext cx="5349240" cy="1335024"/>
+          </a:xfrm>
+          <a:prstGeom prst="roundRect">
+            <a:avLst/>
+          </a:prstGeom>
+          <a:solidFill>
+            <a:srgbClr val="F2F4F6"/>
+          </a:solidFill>
+          <a:ln w="9525">
+            <a:solidFill>
+              <a:srgbClr val="D6DBDF"/>
+            </a:solidFill>
+          </a:ln>
+          <a:effectLst/>
+        </p:spPr>
+        <p:style>
+          <a:lnRef idx="1">
+            <a:schemeClr val="accent1"/>
+          </a:lnRef>
+          <a:fillRef idx="3">
+            <a:schemeClr val="accent1"/>
+          </a:fillRef>
+          <a:effectRef idx="2">
+            <a:schemeClr val="accent1"/>
+          </a:effectRef>
+          <a:fontRef idx="minor">
+            <a:schemeClr val="lt1"/>
+          </a:fontRef>
+        </p:style>
+        <p:txBody>
+          <a:bodyPr rtlCol="0" anchor="t" wrap="square" lIns="137160" rIns="137160" tIns="91440" bIns="73152">
+            <a:normAutofit/>
+          </a:bodyPr>
+          <a:lstStyle/>
+          <a:p>
+            <a:pPr algn="ctr"/>
+            <a:r>
+              <a:rPr sz="1200" b="1">
+                <a:solidFill>
+                  <a:srgbClr val="B03A2E"/>
+                </a:solidFill>
+                <a:latin typeface="Calibri"/>
+              </a:rPr>
+              <a:t>CAVEAT 1  ·  THE MEAN IS NOISE</a:t>
+            </a:r>
+          </a:p>
+          <a:p>
+            <a:r>
+              <a:rPr sz="1150">
+                <a:solidFill>
+                  <a:srgbClr val="2B3A42"/>
+                </a:solidFill>
+                <a:latin typeface="Calibri"/>
+              </a:rPr>
+              <a:t>The ≈−1.8/oz give-back at 0.15 is statistically indistinguishable from zero (95% CI [−22, +18]); 0.15 owning the best mean among tight bands is noise. The robust fact is the monotone std / CVaR ordering — the variance cut is certain (P(std lower) = 1.00).</a:t>
+            </a:r>
+          </a:p>
+        </p:txBody>
+      </p:sp>
+      <p:sp>
+        <p:nvSpPr>
+          <p:cNvPr id="953" name="Rounded Rectangle 952"/>
+          <p:cNvSpPr/>
+          <p:nvPr/>
+        </p:nvSpPr>
+        <p:spPr>
+          <a:xfrm>
+            <a:off x="6272784" y="4690872"/>
+            <a:ext cx="5349240" cy="1335024"/>
+          </a:xfrm>
+          <a:prstGeom prst="roundRect">
+            <a:avLst/>
+          </a:prstGeom>
+          <a:solidFill>
+            <a:srgbClr val="F2F4F6"/>
+          </a:solidFill>
+          <a:ln w="9525">
+            <a:solidFill>
+              <a:srgbClr val="D6DBDF"/>
+            </a:solidFill>
+          </a:ln>
+          <a:effectLst/>
+        </p:spPr>
+        <p:style>
+          <a:lnRef idx="1">
+            <a:schemeClr val="accent1"/>
+          </a:lnRef>
+          <a:fillRef idx="3">
+            <a:schemeClr val="accent1"/>
+          </a:fillRef>
+          <a:effectRef idx="2">
+            <a:schemeClr val="accent1"/>
+          </a:effectRef>
+          <a:fontRef idx="minor">
+            <a:schemeClr val="lt1"/>
+          </a:fontRef>
+        </p:style>
+        <p:txBody>
+          <a:bodyPr rtlCol="0" anchor="t" wrap="square" lIns="137160" rIns="137160" tIns="91440" bIns="73152">
+            <a:normAutofit/>
+          </a:bodyPr>
+          <a:lstStyle/>
+          <a:p>
+            <a:pPr algn="ctr"/>
+            <a:r>
+              <a:rPr sz="1200" b="1">
+                <a:solidFill>
+                  <a:srgbClr val="B03A2E"/>
+                </a:solidFill>
+                <a:latin typeface="Calibri"/>
+              </a:rPr>
+              <a:t>CAVEAT 2  ·  GROSS OF COSTS</a:t>
+            </a:r>
+          </a:p>
+          <a:p>
+            <a:r>
+              <a:rPr sz="1150">
+                <a:solidFill>
+                  <a:srgbClr val="2B3A42"/>
+                </a:solidFill>
+                <a:latin typeface="Calibri"/>
+              </a:rPr>
+              <a:t>All rows are GROSS. Churn (≈255 contracts) is unchanged across bands, so ≈10 bps ≈ −5/oz off every row uniformly. The net-of-cost ranking has NOT been re-verified — 0.15 is a RECOMMENDATION PENDING a cost-aware confirmation, not a shipped decision.</a:t>
+            </a:r>
+          </a:p>
+        </p:txBody>
+      </p:sp>
+      <p:sp>
+        <p:nvSpPr>
+          <p:cNvPr id="954" name="TextBox 953"/>
+          <p:cNvSpPr txBox="1"/>
+          <p:nvPr/>
+        </p:nvSpPr>
+        <p:spPr>
+          <a:xfrm>
+            <a:off x="566928" y="6089904"/>
+            <a:ext cx="11055096" cy="365760"/>
+          </a:xfrm>
+          <a:prstGeom prst="rect">
+            <a:avLst/>
+          </a:prstGeom>
+          <a:noFill/>
+        </p:spPr>
+        <p:txBody>
+          <a:bodyPr wrap="square">
+            <a:spAutoFit/>
+          </a:bodyPr>
+          <a:lstStyle/>
+          <a:p>
+            <a:r>
+              <a:rPr sz="1150" b="1">
+                <a:solidFill>
+                  <a:srgbClr val="2B3A42"/>
+                </a:solidFill>
+                <a:latin typeface="Calibri"/>
+              </a:rPr>
+              <a:t>Basis is the residual floor:  </a:t>
+            </a:r>
+            <a:r>
+              <a:rPr sz="1150">
+                <a:solidFill>
+                  <a:srgbClr val="2B3A42"/>
+                </a:solidFill>
+                <a:latin typeface="Calibri"/>
+              </a:rPr>
+              <a:t>as the fence tightens, basis–P&amp;L correlation rises to +0.72 at band 0.15 (≈79% of the residual std is basis). A CME-only hedge cannot hedge LME basis, so ≈25 $/oz of std is a wall no band can cross.</a:t>
             </a:r>
           </a:p>
         </p:txBody>
@@ -22721,7 +23600,7 @@
                 </a:solidFill>
                 <a:latin typeface="Calibri"/>
               </a:rPr>
-              <a:t>Seven scoped items, ordered by leverage.</a:t>
+              <a:t>Eight scoped items, ordered by leverage.</a:t>
             </a:r>
           </a:p>
         </p:txBody>
@@ -22962,7 +23841,7 @@
                           </a:solidFill>
                           <a:latin typeface="Calibri"/>
                         </a:rPr>
-                        <a:t>Replace the flat 10 bps bid-offer with calibrated exchange fee + market-impact data.</a:t>
+                        <a:t>Replace the flat 10 bps bid-offer with calibrated exchange fee + market-impact data, then re-verify the net-of-cost band ranking before adopting the tighter 0.15 operating point.</a:t>
                       </a:r>
                     </a:p>
                   </a:txBody>
@@ -23161,6 +24040,54 @@
                   <a:tcPr marL="88900" marR="88900" marT="38100" marB="38100" anchor="ctr">
                     <a:solidFill>
                       <a:srgbClr val="FFFFFF"/>
+                    </a:solidFill>
+                  </a:tcPr>
+                </a:tc>
+              </a:tr>
+              <a:tr h="497204">
+                <a:tc>
+                  <a:txBody>
+                    <a:bodyPr/>
+                    <a:lstStyle/>
+                    <a:p>
+                      <a:pPr algn="l"/>
+                      <a:r>
+                        <a:rPr sz="1350" b="1">
+                          <a:solidFill>
+                            <a:srgbClr val="22262A"/>
+                          </a:solidFill>
+                          <a:latin typeface="Calibri"/>
+                        </a:rPr>
+                        <a:t>Hedge the LME basis floor</a:t>
+                      </a:r>
+                    </a:p>
+                  </a:txBody>
+                  <a:tcPr marL="88900" marR="88900" marT="38100" marB="38100" anchor="ctr">
+                    <a:solidFill>
+                      <a:srgbClr val="F2F4F6"/>
+                    </a:solidFill>
+                  </a:tcPr>
+                </a:tc>
+                <a:tc>
+                  <a:txBody>
+                    <a:bodyPr/>
+                    <a:lstStyle/>
+                    <a:p>
+                      <a:pPr algn="l"/>
+                      <a:r>
+                        <a:rPr sz="1350" b="0">
+                          <a:solidFill>
+                            <a:srgbClr val="22262A"/>
+                          </a:solidFill>
+                          <a:latin typeface="Calibri"/>
+                        </a:rPr>
+                        <a:t>At tight bands ≈79% of residual std is basis (ρ → +0.72 at 0.15); a CME-only strip cannot hedge it (≈25 $/oz wall). Add an LME-priced instrument to attack the residual variance.</a:t>
+                      </a:r>
+                    </a:p>
+                  </a:txBody>
+                  <a:tcPr marL="88900" marR="88900" marT="38100" marB="38100" anchor="ctr">
+                    <a:solidFill>
+                      <a:srgbClr val="F2F4F6"/>
                     </a:solidFill>
                   </a:tcPr>
                 </a:tc>
@@ -26702,7 +27629,7 @@
                           </a:solidFill>
                           <a:latin typeface="Calibri"/>
                         </a:rPr>
-                        <a:t>c87284d · f8c067b · 5460692 · 74ef6de · c52411d</a:t>
+                        <a:t>c87284d · f8c067b · 5460692 · 74ef6de · c52411d · 11ef68d · 5e61ae5</a:t>
                       </a:r>
                     </a:p>
                   </a:txBody>
@@ -26775,7 +27702,7 @@
                           </a:solidFill>
                           <a:latin typeface="Calibri"/>
                         </a:rPr>
-                        <a:t>GARCH interim walk-forward</a:t>
+                        <a:t>GARCH 4-year walk-forward</a:t>
                       </a:r>
                     </a:p>
                   </a:txBody>
@@ -26798,7 +27725,7 @@
                           </a:solidFill>
                           <a:latin typeface="Calibri"/>
                         </a:rPr>
-                        <a:t>artifacts/walk_forward/garch48_interim.csv  (36 of 48 trades, INTERIM — run in progress)</a:t>
+                        <a:t>artifacts/walk_forward/garch48_final.csv  (48 trades, 3-seed ensemble, roll-inner 512)</a:t>
                       </a:r>
                     </a:p>
                   </a:txBody>
@@ -26853,6 +27780,54 @@
                   <a:tcPr marL="88900" marR="88900" marT="38100" marB="38100" anchor="ctr">
                     <a:solidFill>
                       <a:srgbClr val="FFFFFF"/>
+                    </a:solidFill>
+                  </a:tcPr>
+                </a:tc>
+              </a:tr>
+              <a:tr h="300445">
+                <a:tc>
+                  <a:txBody>
+                    <a:bodyPr/>
+                    <a:lstStyle/>
+                    <a:p>
+                      <a:pPr algn="l"/>
+                      <a:r>
+                        <a:rPr sz="1250" b="1">
+                          <a:solidFill>
+                            <a:srgbClr val="22262A"/>
+                          </a:solidFill>
+                          <a:latin typeface="Calibri"/>
+                        </a:rPr>
+                        <a:t>GARCH corridor + band frontier</a:t>
+                      </a:r>
+                    </a:p>
+                  </a:txBody>
+                  <a:tcPr marL="88900" marR="88900" marT="38100" marB="38100" anchor="ctr">
+                    <a:solidFill>
+                      <a:srgbClr val="F2F4F6"/>
+                    </a:solidFill>
+                  </a:tcPr>
+                </a:tc>
+                <a:tc>
+                  <a:txBody>
+                    <a:bodyPr/>
+                    <a:lstStyle/>
+                    <a:p>
+                      <a:pPr algn="l"/>
+                      <a:r>
+                        <a:rPr sz="1250" b="0">
+                          <a:solidFill>
+                            <a:srgbClr val="22262A"/>
+                          </a:solidFill>
+                          <a:latin typeface="Calibri"/>
+                        </a:rPr>
+                        <a:t>artifacts/walk_forward/garch48_corridor_rolls.csv · corridor_band_frontier.csv  (bands 0.15–0.60, both worlds)</a:t>
+                      </a:r>
+                    </a:p>
+                  </a:txBody>
+                  <a:tcPr marL="88900" marR="88900" marT="38100" marB="38100" anchor="ctr">
+                    <a:solidFill>
+                      <a:srgbClr val="F2F4F6"/>
                     </a:solidFill>
                   </a:tcPr>
                 </a:tc>

--- a/artifacts/platinum_hedge_management_deck.pptx
+++ b/artifacts/platinum_hedge_management_deck.pptx
@@ -19485,7 +19485,7 @@
                 </a:solidFill>
                 <a:latin typeface="Calibri"/>
               </a:rPr>
-              <a:t>artifacts/walk_forward/corridor_band_frontier.csv (both worlds, bands 0.15–0.60) · garch48_corridor_rolls.csv. Loss-tail analysis: commit 5e61ae5. CVaR5 = mean of the worst 3 months; worst month = min realized $/oz.</a:t>
+              <a:t>artifacts/walk_forward/corridor_band_frontier.csv (both worlds, bands 0.15–0.60) · garch48_corridor_rolls.csv. Loss-tail analysis: commit 5e61ae5. CVaR5 = mean of the worst 3 months; worst month = min realized $/oz.  Net of realistic cost: net_of_cost_frontier.csv · cost_model_realistic.json (commit 3073bf0).</a:t>
             </a:r>
           </a:p>
         </p:txBody>
@@ -20666,11 +20666,11 @@
             <a:r>
               <a:rPr sz="1200" b="1">
                 <a:solidFill>
-                  <a:srgbClr val="B03A2E"/>
-                </a:solidFill>
-                <a:latin typeface="Calibri"/>
-              </a:rPr>
-              <a:t>CAVEAT 2  ·  GROSS OF COSTS</a:t>
+                  <a:srgbClr val="1F77B4"/>
+                </a:solidFill>
+                <a:latin typeface="Calibri"/>
+              </a:rPr>
+              <a:t>CONFIRMED  ·  NET OF REALISTIC COST</a:t>
             </a:r>
           </a:p>
           <a:p>
@@ -20681,7 +20681,7 @@
                 </a:solidFill>
                 <a:latin typeface="Calibri"/>
               </a:rPr>
-              <a:t>All rows are GROSS. Churn (≈255 contracts) is unchanged across bands, so ≈10 bps ≈ −5/oz off every row uniformly. The net-of-cost ranking has NOT been re-verified — 0.15 is a RECOMMENDATION PENDING a cost-aware confirmation, not a shipped decision.</a:t>
+              <a:t>Re-verified net of a maturity/vol cost model — M1/M2/M3 = 6/11/34 bps from open interest, plus a margin-funding term. Under BOTH a base and a stressed cost case, band 0.15 stays best risk-adjusted — 18.2 $/oz, std 35, mean/std 0.52, mean/CVaR5 0.41, 48/48 bound-PASS, 0 breaches. Figures are OI/vol proxies pending 2 pm-synced intraday calibration.</a:t>
             </a:r>
           </a:p>
         </p:txBody>
@@ -23818,7 +23818,7 @@
                           </a:solidFill>
                           <a:latin typeface="Calibri"/>
                         </a:rPr>
-                        <a:t>Realistic CME friction</a:t>
+                        <a:t>Intraday-calibrated CME friction</a:t>
                       </a:r>
                     </a:p>
                   </a:txBody>
@@ -23841,7 +23841,7 @@
                           </a:solidFill>
                           <a:latin typeface="Calibri"/>
                         </a:rPr>
-                        <a:t>Replace the flat 10 bps bid-offer with calibrated exchange fee + market-impact data, then re-verify the net-of-cost band ranking before adopting the tighter 0.15 operating point.</a:t>
+                        <a:t>DONE — net-of-cost band ranking re-verified under a realistic maturity/vol cost model (M1/M2/M3 = 6/11/34 bps, OI-calibrated); band 0.15 holds under base and stressed cost. Remaining: 2 pm-synced intraday spread capture, revisit as it accrues.</a:t>
                       </a:r>
                     </a:p>
                   </a:txBody>
@@ -27629,7 +27629,7 @@
                           </a:solidFill>
                           <a:latin typeface="Calibri"/>
                         </a:rPr>
-                        <a:t>c87284d · f8c067b · 5460692 · 74ef6de · c52411d · 11ef68d · 5e61ae5</a:t>
+                        <a:t>c87284d · f8c067b · 5460692 · 74ef6de · c52411d · 11ef68d · 5e61ae5 · 3073bf0</a:t>
                       </a:r>
                     </a:p>
                   </a:txBody>
@@ -27798,7 +27798,7 @@
                           </a:solidFill>
                           <a:latin typeface="Calibri"/>
                         </a:rPr>
-                        <a:t>GARCH corridor + band frontier</a:t>
+                        <a:t>Band frontier + net-of-cost</a:t>
                       </a:r>
                     </a:p>
                   </a:txBody>
@@ -27821,7 +27821,7 @@
                           </a:solidFill>
                           <a:latin typeface="Calibri"/>
                         </a:rPr>
-                        <a:t>artifacts/walk_forward/garch48_corridor_rolls.csv · corridor_band_frontier.csv  (bands 0.15–0.60, both worlds)</a:t>
+                        <a:t>garch48_corridor_rolls.csv · corridor_band_frontier.csv · net_of_cost_frontier.csv · cost_model_realistic.json  (bands 0.15–0.60; base / high cost)</a:t>
                       </a:r>
                     </a:p>
                   </a:txBody>

--- a/artifacts/platinum_hedge_management_deck.pptx
+++ b/artifacts/platinum_hedge_management_deck.pptx
@@ -35,6 +35,7 @@
     <p:sldId id="293" r:id="rId44"/>
     <p:sldId id="294" r:id="rId45"/>
     <p:sldId id="295" r:id="rId46"/>
+    <p:sldId id="296" r:id="rId47"/>
     <p:sldId id="277" r:id="rId28"/>
     <p:sldId id="278" r:id="rId29"/>
     <p:sldId id="279" r:id="rId30"/>
@@ -6466,7 +6467,7 @@
                 </a:solidFill>
                 <a:latin typeface="Calibri"/>
               </a:rPr>
-              <a:t>Full-24 means: la_attribution.csv (av 2.5) · aversion6_24trade_final.csv (av 6). * Av 12 = 10-trade sweep subset, Δ within ±$100/oz seed noise.</a:t>
+              <a:t>Full-24 means: av-2.5 baseline source pending recommit (la_attribution.csv) · aversion6_24trade_final.csv (av 6, mean +18.19). * Av 12 = 10-trade sweep subset, Δ within ±$100/oz seed noise.</a:t>
             </a:r>
           </a:p>
         </p:txBody>
@@ -8242,7 +8243,7 @@
                 </a:solidFill>
                 <a:latin typeface="Calibri"/>
               </a:rPr>
-              <a:t>Both CSVs: bound_pass = True on 24/24 rows. Bit-gates: fixture V_0 + stepper floats (65-test suite).</a:t>
+              <a:t>Both CSVs: bound_pass = True on 24/24 rows. Bit-gates: fixture V_0 + stepper floats (349-test suite).</a:t>
             </a:r>
           </a:p>
         </p:txBody>
@@ -11841,7 +11842,7 @@
                 </a:solidFill>
                 <a:latin typeface="Calibri"/>
               </a:rPr>
-              <a:t>la_attribution.csv (aversion 2.5 baseline) + aversion6_24trade_final.csv (aversion 6).</a:t>
+              <a:t>av-2.5 baseline: source pending recommit (la_attribution.csv) + aversion6_24trade_final.csv (aversion 6, mean +18.19).</a:t>
             </a:r>
           </a:p>
         </p:txBody>
@@ -12337,7 +12338,7 @@
                 </a:solidFill>
                 <a:latin typeface="Calibri"/>
               </a:rPr>
-              <a:t>Full-lock verified through the real stepper. Benchmarks frictionless; net-of-cost reported uniformly.</a:t>
+              <a:t>Full-lock verified through the real stepper. Benchmarks frictionless; net-of-cost reported uniformly. Full-lock decomposition (+15.25) source pending recommit (la_attribution.csv).</a:t>
             </a:r>
           </a:p>
         </p:txBody>
@@ -12632,7 +12633,7 @@
                           </a:solidFill>
                           <a:latin typeface="Calibri"/>
                         </a:rPr>
-                        <a:t>Corridor 0.60 (shipped)</a:t>
+                        <a:t>Corridor 0.60 (shipped-interim)</a:t>
                       </a:r>
                     </a:p>
                   </a:txBody>
@@ -14553,7 +14554,7 @@
                 </a:solidFill>
                 <a:latin typeface="Calibri"/>
               </a:rPr>
-              <a:t>Tighter bands trade a little mean for a lot less variance. Band 0.60 is shipped.</a:t>
+              <a:t>Tighter bands trade a little mean for a lot less variance. Band 0.60 is the shipped-interim point; slides 30–31 recommend tightening to 0.15.</a:t>
             </a:r>
           </a:p>
         </p:txBody>
@@ -14911,7 +14912,7 @@
                           </a:solidFill>
                           <a:latin typeface="Calibri"/>
                         </a:rPr>
-                        <a:t>Band 0.60  (shipped)</a:t>
+                        <a:t>Band 0.60  (shipped-interim)</a:t>
                       </a:r>
                     </a:p>
                   </a:txBody>
@@ -16340,7 +16341,7 @@
                 </a:solidFill>
                 <a:latin typeface="Calibri"/>
               </a:rPr>
-              <a:t>MODEL UPGRADE  ·  FINAL VALIDATION &amp; OPERATING POINT  ·  1 OF 3</a:t>
+              <a:t>MODEL UPGRADE  ·  FINAL VALIDATION &amp; OPERATING POINT  ·  1 OF 4</a:t>
             </a:r>
           </a:p>
         </p:txBody>
@@ -16570,7 +16571,7 @@
                 </a:solidFill>
                 <a:latin typeface="Calibri"/>
               </a:rPr>
-              <a:t>The no-alpha property is now DIRECTLY testable.  </a:t>
+              <a:t>The no-alpha property is now testable in log AND price space.  </a:t>
             </a:r>
             <a:r>
               <a:rPr sz="1350" b="0">
@@ -16579,7 +16580,7 @@
                 </a:solidFill>
                 <a:latin typeface="Calibri"/>
               </a:rPr>
-              <a:t>Because the volatility state is observed, E[return | volatility state] = 0 can be asserted at every calibration. That is the exact class of bug the integrity review found (slides 31–33) — a governance win, not just a modelling one.</a:t>
+              <a:t>With volatility observed, E[return | volatility state] = 0 holds in log space. A post-review price-space check then caught what the log test was structurally blind to — a +4.16%/yr Jensen price-drift on the tradeable spot (E[dS/S] ≈ ½·h) — removed via Convexity_Correction, so E[dF] ≈ 0 is now assertable in PRICE space too. Verified P&amp;L-neutral (paired +1.31 ± 1.10; no walk-forward number changes). The integrity discipline (slides 32–34) working.</a:t>
             </a:r>
           </a:p>
           <a:p>
@@ -16647,7 +16648,7 @@
                 </a:solidFill>
                 <a:latin typeface="Calibri"/>
               </a:rPr>
-              <a:t>The calculation stack was generalized to a model-agnostic protocol: the spot model changes via the MarketData file, with no code change, proven by a committed both-worlds test (HMM bit-identical). An independent audit caught a clock bug pre-commit — per-business-day volatility injected on a calendar-daily grid, inflating vol ×1.20 — now fixed and gated by regression tests. 101 tests green.</a:t>
+              <a:t>The calculation stack was generalized to a model-agnostic protocol: the spot model changes via the MarketData file, with no code change, proven by a committed both-worlds test (HMM bit-identical). An independent audit caught a clock bug pre-commit — per-business-day volatility injected on a calendar-daily grid, inflating vol ×1.20 — now fixed and gated by regression tests. 349 tests green.</a:t>
             </a:r>
           </a:p>
         </p:txBody>
@@ -16763,7 +16764,7 @@
                 </a:solidFill>
                 <a:latin typeface="Calibri"/>
               </a:rPr>
-              <a:t>No performance-forced flip. GARCH is recommended on governance grounds — an observable volatility state, a directly-testable no-alpha property, and market_dim 7 vs 9.</a:t>
+              <a:t>No performance-forced flip. GARCH is recommended on governance grounds — an observable volatility state, a no-alpha property testable in log and price space, and market_dim 7 vs 9.</a:t>
             </a:r>
           </a:p>
         </p:txBody>
@@ -16798,7 +16799,7 @@
                 </a:solidFill>
                 <a:latin typeface="Calibri"/>
               </a:rPr>
-              <a:t>GARCHSpotModel_spec.md (§1, §1a, §6) · commits c52411d · 11ef68d · parameters fitted on data/pl_exp.csv (16 years). Final 48-trade walk-forward: artifacts/walk_forward/garch48_final.csv.</a:t>
+              <a:t>GARCHSpotModel_spec.md (§1, §1a, §6) · commits c52411d · 11ef68d · parameters fitted on data/pl_exp.csv (16 years). Final 48-trade walk-forward: artifacts/walk_forward/garch48_final.csv. Driftless price-martingale fix: commits c23d4aa · 5e4e041 · 4f08450 · driftless_subset_paired.csv (P&amp;L within noise, no restatement).</a:t>
             </a:r>
           </a:p>
         </p:txBody>
@@ -16851,7 +16852,7 @@
                 </a:solidFill>
                 <a:latin typeface="Calibri"/>
               </a:rPr>
-              <a:t>MODEL UPGRADE  ·  FINAL VALIDATION &amp; OPERATING POINT  ·  2 OF 3</a:t>
+              <a:t>MODEL UPGRADE  ·  FINAL VALIDATION &amp; OPERATING POINT  ·  2 OF 4</a:t>
             </a:r>
           </a:p>
         </p:txBody>
@@ -18909,7 +18910,7 @@
                           </a:solidFill>
                           <a:latin typeface="Calibri"/>
                         </a:rPr>
-                        <a:t>28 – 30</a:t>
+                        <a:t>28 – 31</a:t>
                       </a:r>
                     </a:p>
                   </a:txBody>
@@ -18932,7 +18933,7 @@
                           </a:solidFill>
                           <a:latin typeface="Calibri"/>
                         </a:rPr>
-                        <a:t>Model upgrade — GARCH world: final validation &amp; operating point</a:t>
+                        <a:t>Model upgrade — GARCH world: validation, operating point &amp; tail diagnosis</a:t>
                       </a:r>
                     </a:p>
                   </a:txBody>
@@ -18980,7 +18981,7 @@
                           </a:solidFill>
                           <a:latin typeface="Calibri"/>
                         </a:rPr>
-                        <a:t>31 – 33</a:t>
+                        <a:t>32 – 34</a:t>
                       </a:r>
                     </a:p>
                   </a:txBody>
@@ -19051,7 +19052,7 @@
                           </a:solidFill>
                           <a:latin typeface="Calibri"/>
                         </a:rPr>
-                        <a:t>34 – 35</a:t>
+                        <a:t>35 – 36</a:t>
                       </a:r>
                     </a:p>
                   </a:txBody>
@@ -19122,7 +19123,7 @@
                           </a:solidFill>
                           <a:latin typeface="Calibri"/>
                         </a:rPr>
-                        <a:t>36</a:t>
+                        <a:t>37</a:t>
                       </a:r>
                     </a:p>
                   </a:txBody>
@@ -19193,7 +19194,7 @@
                           </a:solidFill>
                           <a:latin typeface="Calibri"/>
                         </a:rPr>
-                        <a:t>37 – 40</a:t>
+                        <a:t>38 – 41</a:t>
                       </a:r>
                     </a:p>
                   </a:txBody>
@@ -19302,7 +19303,7 @@
                 </a:solidFill>
                 <a:latin typeface="Calibri"/>
               </a:rPr>
-              <a:t>MODEL UPGRADE  ·  FINAL VALIDATION &amp; OPERATING POINT  ·  3 OF 3</a:t>
+              <a:t>MODEL UPGRADE  ·  FINAL VALIDATION &amp; OPERATING POINT  ·  3 OF 4</a:t>
             </a:r>
           </a:p>
         </p:txBody>
@@ -19415,7 +19416,7 @@
                 </a:solidFill>
                 <a:latin typeface="Calibri"/>
               </a:rPr>
-              <a:t>The loss tail is a half-hedged book, not a set of mistakes. Tightening the roll-time band cuts dispersion with no retraining and no breaches.</a:t>
+              <a:t>The loss tail is a half-hedged book, not a set of mistakes — now PROVEN (next slide): coverage ≈ 0.40 is utility-optimal, so the fence is a structural mandate, not a preference. Tightening the roll-time band cuts dispersion with no retraining and no breaches.</a:t>
             </a:r>
           </a:p>
         </p:txBody>
@@ -19485,7 +19486,7 @@
                 </a:solidFill>
                 <a:latin typeface="Calibri"/>
               </a:rPr>
-              <a:t>artifacts/walk_forward/corridor_band_frontier.csv (both worlds, bands 0.15–0.60) · garch48_corridor_rolls.csv. Loss-tail analysis: commit 5e61ae5. CVaR5 = mean of the worst 3 months; worst month = min realized $/oz.  Net of realistic cost: net_of_cost_frontier.csv · cost_model_realistic.json (commit 3073bf0).</a:t>
+              <a:t>artifacts/walk_forward/corridor_band_frontier.csv (both worlds, bands 0.15–0.60) · garch48_corridor_rolls.csv. Loss-tail analysis: commit 5e61ae5. CVaR5 = mean of the worst 3 months; worst month = min realized $/oz.  Net of realistic cost: net_of_cost_frontier.csv · cost_model_realistic.json (commits 3073bf0 · 8483956).  Under-hedge diagnosis: underhedge_probes.csv (commit c6c7706).</a:t>
             </a:r>
           </a:p>
         </p:txBody>
@@ -20545,7 +20546,7 @@
                 </a:solidFill>
                 <a:latin typeface="Calibri"/>
               </a:rPr>
-              <a:t>Mean / std roughly doubles (0.38 → 0.56), CVaR5 halves (−80 → −41), worst month −81 → −58 — with no retraining, 0 breaches and 48/48 causal-bound PASS at every band.</a:t>
+              <a:t>Mean / std roughly doubles (0.38 → 0.56), CVaR5 halves (−80 → −41), worst month −81 → −58 — with no retraining, 0 breaches and 48/48 causal-bound PASS at every band. The fence is the only lever that raises coverage (next slide) — a structural mandate, not variance-trimming.</a:t>
             </a:r>
           </a:p>
         </p:txBody>
@@ -20740,14 +20741,6 @@
 <file path=ppt/slides/slide31.xml><?xml version="1.0" encoding="utf-8"?>
 <p:sld xmlns:a="http://schemas.openxmlformats.org/drawingml/2006/main" xmlns:p="http://schemas.openxmlformats.org/presentationml/2006/main" xmlns:r="http://schemas.openxmlformats.org/officeDocument/2006/relationships">
   <p:cSld>
-    <p:bg>
-      <p:bgPr>
-        <a:solidFill>
-          <a:srgbClr val="FFFFFF"/>
-        </a:solidFill>
-        <a:effectLst/>
-      </p:bgPr>
-    </p:bg>
     <p:spTree>
       <p:nvGrpSpPr>
         <p:cNvPr id="1" name=""/>
@@ -20772,30 +20765,20 @@
           <a:noFill/>
         </p:spPr>
         <p:txBody>
-          <a:bodyPr wrap="square" anchor="t" lIns="25400" rIns="25400" tIns="12700" bIns="12700">
+          <a:bodyPr wrap="square" lIns="0" rIns="0" tIns="0" bIns="0">
             <a:spAutoFit/>
           </a:bodyPr>
           <a:lstStyle/>
           <a:p>
-            <a:pPr algn="l">
-              <a:lnSpc>
-                <a:spcPct val="100000"/>
-              </a:lnSpc>
-              <a:spcBef>
-                <a:spcPts val="0"/>
-              </a:spcBef>
-              <a:spcAft>
-                <a:spcPts val="400"/>
-              </a:spcAft>
-            </a:pPr>
-            <a:r>
-              <a:rPr sz="1250" b="1" i="0">
+            <a:pPr algn="l"/>
+            <a:r>
+              <a:rPr sz="1250" b="1">
                 <a:solidFill>
                   <a:srgbClr val="1F77B4"/>
                 </a:solidFill>
                 <a:latin typeface="Calibri"/>
               </a:rPr>
-              <a:t>INTEGRITY  ·  1 OF 3</a:t>
+              <a:t>MODEL UPGRADE  ·  FINAL VALIDATION &amp; OPERATING POINT  ·  4 OF 4</a:t>
             </a:r>
           </a:p>
         </p:txBody>
@@ -20817,30 +20800,20 @@
           <a:noFill/>
         </p:spPr>
         <p:txBody>
-          <a:bodyPr wrap="square" anchor="t" lIns="25400" rIns="25400" tIns="12700" bIns="12700">
+          <a:bodyPr wrap="square" lIns="0" rIns="0" tIns="0" bIns="0">
             <a:spAutoFit/>
           </a:bodyPr>
           <a:lstStyle/>
           <a:p>
-            <a:pPr algn="l">
-              <a:lnSpc>
-                <a:spcPct val="100000"/>
-              </a:lnSpc>
-              <a:spcBef>
-                <a:spcPts val="0"/>
-              </a:spcBef>
-              <a:spcAft>
-                <a:spcPts val="400"/>
-              </a:spcAft>
-            </a:pPr>
-            <a:r>
-              <a:rPr sz="2700" b="1" i="0">
+            <a:pPr algn="l"/>
+            <a:r>
+              <a:rPr sz="2700" b="1">
                 <a:solidFill>
                   <a:srgbClr val="22262A"/>
                 </a:solidFill>
                 <a:latin typeface="Calibri"/>
               </a:rPr>
-              <a:t>Integrity: how we caught our own too-good result</a:t>
+              <a:t>The under-coverage is optimal, not a bug</a:t>
             </a:r>
           </a:p>
         </p:txBody>
@@ -20854,7 +20827,7 @@
         <p:spPr>
           <a:xfrm>
             <a:off x="566928" y="1298448"/>
-            <a:ext cx="11055096" cy="27940"/>
+            <a:ext cx="11055096" cy="27432"/>
           </a:xfrm>
           <a:prstGeom prst="rect">
             <a:avLst/>
@@ -20865,7 +20838,6 @@
           <a:ln>
             <a:noFill/>
           </a:ln>
-          <a:effectLst/>
         </p:spPr>
         <p:style>
           <a:lnRef idx="1">
@@ -20897,6 +20869,41 @@
         </p:nvSpPr>
         <p:spPr>
           <a:xfrm>
+            <a:off x="566928" y="1444752"/>
+            <a:ext cx="11055096" cy="640080"/>
+          </a:xfrm>
+          <a:prstGeom prst="rect">
+            <a:avLst/>
+          </a:prstGeom>
+          <a:noFill/>
+        </p:spPr>
+        <p:txBody>
+          <a:bodyPr wrap="square" lIns="0" rIns="0" tIns="0" bIns="0">
+            <a:spAutoFit/>
+          </a:bodyPr>
+          <a:lstStyle/>
+          <a:p>
+            <a:pPr algn="l"/>
+            <a:r>
+              <a:rPr sz="1650" b="0">
+                <a:solidFill>
+                  <a:srgbClr val="2B3A42"/>
+                </a:solidFill>
+                <a:latin typeface="Calibri"/>
+              </a:rPr>
+              <a:t>Coverage ≈ 0.40 behind the loss tail is the utility-optimal policy of a terminal-wealth utility in a driftless martingale world — no objective, training, or cost lever raises it. The remaining fix space is structural.</a:t>
+            </a:r>
+          </a:p>
+        </p:txBody>
+      </p:sp>
+      <p:sp>
+        <p:nvSpPr>
+          <p:cNvPr id="6" name="TextBox 5"/>
+          <p:cNvSpPr txBox="1"/>
+          <p:nvPr/>
+        </p:nvSpPr>
+        <p:spPr>
+          <a:xfrm>
             <a:off x="11612880" y="6455664"/>
             <a:ext cx="457200" cy="274320"/>
           </a:xfrm>
@@ -20906,24 +20913,14 @@
           <a:noFill/>
         </p:spPr>
         <p:txBody>
-          <a:bodyPr wrap="square" anchor="t" lIns="25400" rIns="25400" tIns="12700" bIns="12700">
+          <a:bodyPr wrap="square" lIns="0" rIns="0" tIns="0" bIns="0">
             <a:spAutoFit/>
           </a:bodyPr>
           <a:lstStyle/>
           <a:p>
-            <a:pPr algn="r">
-              <a:lnSpc>
-                <a:spcPct val="100000"/>
-              </a:lnSpc>
-              <a:spcBef>
-                <a:spcPts val="0"/>
-              </a:spcBef>
-              <a:spcAft>
-                <a:spcPts val="400"/>
-              </a:spcAft>
-            </a:pPr>
-            <a:r>
-              <a:rPr sz="1000" b="0" i="0">
+            <a:pPr algn="r"/>
+            <a:r>
+              <a:rPr sz="1000" b="0">
                 <a:solidFill>
                   <a:srgbClr val="6B7278"/>
                 </a:solidFill>
@@ -20936,14 +20933,14 @@
       </p:sp>
       <p:sp>
         <p:nvSpPr>
-          <p:cNvPr id="6" name="TextBox 5"/>
+          <p:cNvPr id="8" name="TextBox 7"/>
           <p:cNvSpPr txBox="1"/>
           <p:nvPr/>
         </p:nvSpPr>
         <p:spPr>
           <a:xfrm>
-            <a:off x="566928" y="1444752"/>
-            <a:ext cx="11055096" cy="640080"/>
+            <a:off x="566928" y="6473952"/>
+            <a:ext cx="11055096" cy="274320"/>
           </a:xfrm>
           <a:prstGeom prst="rect">
             <a:avLst/>
@@ -20951,113 +20948,367 @@
           <a:noFill/>
         </p:spPr>
         <p:txBody>
-          <a:bodyPr wrap="square" anchor="t" lIns="25400" rIns="25400" tIns="12700" bIns="12700">
+          <a:bodyPr wrap="square" lIns="0" rIns="0" tIns="0" bIns="0">
             <a:spAutoFit/>
           </a:bodyPr>
           <a:lstStyle/>
           <a:p>
-            <a:pPr algn="l">
-              <a:lnSpc>
-                <a:spcPct val="105000"/>
-              </a:lnSpc>
-              <a:spcBef>
-                <a:spcPts val="0"/>
-              </a:spcBef>
-              <a:spcAft>
-                <a:spcPts val="400"/>
-              </a:spcAft>
-            </a:pPr>
-            <a:r>
-              <a:rPr sz="1650" b="0" i="0">
-                <a:solidFill>
-                  <a:srgbClr val="2B3A42"/>
-                </a:solidFill>
-                <a:latin typeface="Calibri"/>
-              </a:rPr>
-              <a:t>An earlier model version reported +$675/oz — implausible against an $8 margin. We did not ship it. We tried to break it.</a:t>
-            </a:r>
-          </a:p>
-        </p:txBody>
-      </p:sp>
-      <p:pic>
-        <p:nvPicPr>
-          <p:cNvPr id="7" name="Picture 6" descr="deck_integrity.png"/>
-          <p:cNvPicPr>
-            <a:picLocks noChangeAspect="1"/>
-          </p:cNvPicPr>
-          <p:nvPr/>
-        </p:nvPicPr>
-        <p:blipFill>
-          <a:blip r:embed="rId2"/>
-          <a:stretch>
-            <a:fillRect/>
-          </a:stretch>
-        </p:blipFill>
-        <p:spPr>
-          <a:xfrm>
-            <a:off x="791595" y="1920240"/>
-            <a:ext cx="7688825" cy="3657600"/>
+            <a:pPr algn="l"/>
+            <a:r>
+              <a:rPr sz="950" b="0">
+                <a:solidFill>
+                  <a:srgbClr val="6B7278"/>
+                </a:solidFill>
+                <a:latin typeface="Calibri"/>
+              </a:rPr>
+              <a:t>artifacts/walk_forward/underhedge_probes.csv (34 probes · commit c6c7706): pre-fixing coverage u ≈ 0.36 loser / 0.62 winner; every non-structural lever falsified. Driftless world E[dF] ≈ 0 in price space (commit 4f08450).</a:t>
+            </a:r>
+          </a:p>
+        </p:txBody>
+      </p:sp>
+      <p:sp>
+        <p:nvSpPr>
+          <p:cNvPr id="951" name="TextBox 950"/>
+          <p:cNvSpPr txBox="1"/>
+          <p:nvPr/>
+        </p:nvSpPr>
+        <p:spPr>
+          <a:xfrm>
+            <a:off x="566928" y="2148840"/>
+            <a:ext cx="11055096" cy="2377440"/>
           </a:xfrm>
           <a:prstGeom prst="rect">
             <a:avLst/>
           </a:prstGeom>
-        </p:spPr>
-      </p:pic>
-      <p:sp>
-        <p:nvSpPr>
-          <p:cNvPr id="8" name="TextBox 7"/>
-          <p:cNvSpPr txBox="1"/>
-          <p:nvPr/>
-        </p:nvSpPr>
-        <p:spPr>
-          <a:xfrm>
-            <a:off x="566928" y="5760720"/>
-            <a:ext cx="11055096" cy="822960"/>
-          </a:xfrm>
-          <a:prstGeom prst="rect">
-            <a:avLst/>
-          </a:prstGeom>
           <a:noFill/>
         </p:spPr>
         <p:txBody>
-          <a:bodyPr wrap="square" anchor="t" lIns="25400" rIns="25400" tIns="12700" bIns="12700">
+          <a:bodyPr wrap="square">
             <a:spAutoFit/>
           </a:bodyPr>
           <a:lstStyle/>
           <a:p>
-            <a:pPr algn="l">
-              <a:lnSpc>
-                <a:spcPct val="110000"/>
-              </a:lnSpc>
-              <a:spcBef>
-                <a:spcPts val="0"/>
-              </a:spcBef>
-              <a:spcAft>
-                <a:spcPts val="400"/>
-              </a:spcAft>
-            </a:pPr>
-            <a:r>
-              <a:rPr sz="1450" b="0" i="0">
+            <a:r>
+              <a:rPr sz="1350">
+                <a:solidFill>
+                  <a:srgbClr val="1F77B4"/>
+                </a:solidFill>
+                <a:latin typeface="Calibri"/>
+              </a:rPr>
+              <a:t>▪  </a:t>
+            </a:r>
+            <a:r>
+              <a:rPr sz="1350" b="1">
+                <a:solidFill>
+                  <a:srgbClr val="22262A"/>
+                </a:solidFill>
+                <a:latin typeface="Calibri"/>
+              </a:rPr>
+              <a:t>Objective aversion 6 → {2, 24, 100}:  </a:t>
+            </a:r>
+            <a:r>
+              <a:rPr sz="1350">
+                <a:solidFill>
+                  <a:srgbClr val="22262A"/>
+                </a:solidFill>
+                <a:latin typeface="Calibri"/>
+              </a:rPr>
+              <a:t>coverage moves ≤ +0.06 (max +0.0596).</a:t>
+            </a:r>
+          </a:p>
+          <a:p>
+            <a:r>
+              <a:rPr sz="1350">
+                <a:solidFill>
+                  <a:srgbClr val="1F77B4"/>
+                </a:solidFill>
+                <a:latin typeface="Calibri"/>
+              </a:rPr>
+              <a:t>▪  </a:t>
+            </a:r>
+            <a:r>
+              <a:rPr sz="1350" b="1">
+                <a:solidFill>
+                  <a:srgbClr val="22262A"/>
+                </a:solidFill>
+                <a:latin typeface="Calibri"/>
+              </a:rPr>
+              <a:t>Huber δ · training inner-batch · action-grid:  </a:t>
+            </a:r>
+            <a:r>
+              <a:rPr sz="1350">
+                <a:solidFill>
+                  <a:srgbClr val="22262A"/>
+                </a:solidFill>
+                <a:latin typeface="Calibri"/>
+              </a:rPr>
+              <a:t>nil (~0.00).</a:t>
+            </a:r>
+          </a:p>
+          <a:p>
+            <a:r>
+              <a:rPr sz="1350">
+                <a:solidFill>
+                  <a:srgbClr val="1F77B4"/>
+                </a:solidFill>
+                <a:latin typeface="Calibri"/>
+              </a:rPr>
+              <a:t>▪  </a:t>
+            </a:r>
+            <a:r>
+              <a:rPr sz="1350" b="1">
+                <a:solidFill>
+                  <a:srgbClr val="22262A"/>
+                </a:solidFill>
+                <a:latin typeface="Calibri"/>
+              </a:rPr>
+              <a:t>Roll utility-scale /10, /100:  </a:t>
+            </a:r>
+            <a:r>
+              <a:rPr sz="1350">
+                <a:solidFill>
+                  <a:srgbClr val="22262A"/>
+                </a:solidFill>
+                <a:latin typeface="Calibri"/>
+              </a:rPr>
+              <a:t>bit-identical (Δ = 0.0000).</a:t>
+            </a:r>
+          </a:p>
+          <a:p>
+            <a:r>
+              <a:rPr sz="1350">
+                <a:solidFill>
+                  <a:srgbClr val="1F77B4"/>
+                </a:solidFill>
+                <a:latin typeface="Calibri"/>
+              </a:rPr>
+              <a:t>▪  </a:t>
+            </a:r>
+            <a:r>
+              <a:rPr sz="1350" b="1">
+                <a:solidFill>
+                  <a:srgbClr val="22262A"/>
+                </a:solidFill>
+                <a:latin typeface="Calibri"/>
+              </a:rPr>
+              <a:t>Cost-aware · spread · roll-inner:  </a:t>
+            </a:r>
+            <a:r>
+              <a:rPr sz="1350">
+                <a:solidFill>
+                  <a:srgbClr val="22262A"/>
+                </a:solidFill>
+                <a:latin typeface="Calibri"/>
+              </a:rPr>
+              <a:t>move month dispersion, not the level — sign flips (loser up, winner down).</a:t>
+            </a:r>
+          </a:p>
+          <a:p>
+            <a:r>
+              <a:rPr sz="1350">
+                <a:solidFill>
+                  <a:srgbClr val="1F77B4"/>
+                </a:solidFill>
+                <a:latin typeface="Calibri"/>
+              </a:rPr>
+              <a:t>▪  </a:t>
+            </a:r>
+            <a:r>
+              <a:rPr sz="1350" b="1">
+                <a:solidFill>
+                  <a:srgbClr val="22262A"/>
+                </a:solidFill>
+                <a:latin typeface="Calibri"/>
+              </a:rPr>
+              <a:t>Dead objective key (Surplus_Reward):  </a:t>
+            </a:r>
+            <a:r>
+              <a:rPr sz="1350">
+                <a:solidFill>
+                  <a:srgbClr val="22262A"/>
+                </a:solidFill>
+                <a:latin typeface="Calibri"/>
+              </a:rPr>
+              <a:t>bit-identical — confirms it was inert.</a:t>
+            </a:r>
+          </a:p>
+          <a:p>
+            <a:r>
+              <a:rPr sz="1350">
+                <a:solidFill>
+                  <a:srgbClr val="1F77B4"/>
+                </a:solidFill>
+                <a:latin typeface="Calibri"/>
+              </a:rPr>
+              <a:t>▪  </a:t>
+            </a:r>
+            <a:r>
+              <a:rPr sz="1350" b="1">
+                <a:solidFill>
+                  <a:srgbClr val="22262A"/>
+                </a:solidFill>
+                <a:latin typeface="Calibri"/>
+              </a:rPr>
+              <a:t>All levers combined:  </a:t>
+            </a:r>
+            <a:r>
+              <a:rPr sz="1350">
+                <a:solidFill>
+                  <a:srgbClr val="22262A"/>
+                </a:solidFill>
+                <a:latin typeface="Calibri"/>
+              </a:rPr>
+              <a:t>coverage 0.43 / 0.40 — still ≈ 0.40.</a:t>
+            </a:r>
+          </a:p>
+        </p:txBody>
+      </p:sp>
+      <p:sp>
+        <p:nvSpPr>
+          <p:cNvPr id="952" name="Rounded Rectangle 951"/>
+          <p:cNvSpPr/>
+          <p:nvPr/>
+        </p:nvSpPr>
+        <p:spPr>
+          <a:xfrm>
+            <a:off x="566928" y="4690872"/>
+            <a:ext cx="5349240" cy="1335024"/>
+          </a:xfrm>
+          <a:prstGeom prst="roundRect">
+            <a:avLst/>
+          </a:prstGeom>
+          <a:solidFill>
+            <a:srgbClr val="F2F4F6"/>
+          </a:solidFill>
+          <a:ln w="9525">
+            <a:solidFill>
+              <a:srgbClr val="D6DBDF"/>
+            </a:solidFill>
+          </a:ln>
+          <a:effectLst/>
+        </p:spPr>
+        <p:style>
+          <a:lnRef idx="1">
+            <a:schemeClr val="accent1"/>
+          </a:lnRef>
+          <a:fillRef idx="3">
+            <a:schemeClr val="accent1"/>
+          </a:fillRef>
+          <a:effectRef idx="2">
+            <a:schemeClr val="accent1"/>
+          </a:effectRef>
+          <a:fontRef idx="minor">
+            <a:schemeClr val="lt1"/>
+          </a:fontRef>
+        </p:style>
+        <p:txBody>
+          <a:bodyPr rtlCol="0" anchor="t" wrap="square" lIns="137160" rIns="137160" tIns="91440" bIns="73152">
+            <a:normAutofit/>
+          </a:bodyPr>
+          <a:lstStyle/>
+          <a:p>
+            <a:pPr algn="ctr"/>
+            <a:r>
+              <a:rPr sz="1200" b="1">
+                <a:solidFill>
+                  <a:srgbClr val="1F77B4"/>
+                </a:solidFill>
+                <a:latin typeface="Calibri"/>
+              </a:rPr>
+              <a:t>OPTION A  ·  FENCE AS MANDATE</a:t>
+            </a:r>
+          </a:p>
+          <a:p>
+            <a:r>
+              <a:rPr sz="1150">
                 <a:solidFill>
                   <a:srgbClr val="2B3A42"/>
                 </a:solidFill>
                 <a:latin typeface="Calibri"/>
               </a:rPr>
-              <a:t>We had already built a hard causal bound (unhedged + perfect-foresight harvest on the traded strip). The +675 result VIOLATED it on multiple months. A number that beats what perfect foresight allows is not a profit — it is a bug. That triggered a forensic tear-down.</a:t>
-            </a:r>
-          </a:p>
-        </p:txBody>
-      </p:sp>
-      <p:sp>
-        <p:nvSpPr>
-          <p:cNvPr id="9" name="TextBox 8"/>
+              <a:t>Make roll-time band 0.15 an unconditional mandate — it supplies the coverage the utility will not choose on its own. No retrain; one checkpoint set. This is the deck's standing recommendation, now with a structural justification.</a:t>
+            </a:r>
+          </a:p>
+        </p:txBody>
+      </p:sp>
+      <p:sp>
+        <p:nvSpPr>
+          <p:cNvPr id="953" name="Rounded Rectangle 952"/>
+          <p:cNvSpPr/>
+          <p:nvPr/>
+        </p:nvSpPr>
+        <p:spPr>
+          <a:xfrm>
+            <a:off x="6272784" y="4690872"/>
+            <a:ext cx="5349240" cy="1335024"/>
+          </a:xfrm>
+          <a:prstGeom prst="roundRect">
+            <a:avLst/>
+          </a:prstGeom>
+          <a:solidFill>
+            <a:srgbClr val="F2F4F6"/>
+          </a:solidFill>
+          <a:ln w="9525">
+            <a:solidFill>
+              <a:srgbClr val="D6DBDF"/>
+            </a:solidFill>
+          </a:ln>
+          <a:effectLst/>
+        </p:spPr>
+        <p:style>
+          <a:lnRef idx="1">
+            <a:schemeClr val="accent1"/>
+          </a:lnRef>
+          <a:fillRef idx="3">
+            <a:schemeClr val="accent1"/>
+          </a:fillRef>
+          <a:effectRef idx="2">
+            <a:schemeClr val="accent1"/>
+          </a:effectRef>
+          <a:fontRef idx="minor">
+            <a:schemeClr val="lt1"/>
+          </a:fontRef>
+        </p:style>
+        <p:txBody>
+          <a:bodyPr rtlCol="0" anchor="t" wrap="square" lIns="137160" rIns="137160" tIns="91440" bIns="73152">
+            <a:normAutofit/>
+          </a:bodyPr>
+          <a:lstStyle/>
+          <a:p>
+            <a:pPr algn="ctr"/>
+            <a:r>
+              <a:rPr sz="1200" b="1">
+                <a:solidFill>
+                  <a:srgbClr val="1F77B4"/>
+                </a:solidFill>
+                <a:latin typeface="Calibri"/>
+              </a:rPr>
+              <a:t>OPTION B  ·  MIN-VARIANCE OBJECTIVE</a:t>
+            </a:r>
+          </a:p>
+          <a:p>
+            <a:r>
+              <a:rPr sz="1150">
+                <a:solidFill>
+                  <a:srgbClr val="2B3A42"/>
+                </a:solidFill>
+                <a:latin typeface="Calibri"/>
+              </a:rPr>
+              <a:t>Replace the terminal-wealth Huber with a min-variance / delta-tracking objective shape (Objective.Object). This changes what the solver optimises — a re-solve plus phase-3 validation.</a:t>
+            </a:r>
+          </a:p>
+        </p:txBody>
+      </p:sp>
+      <p:sp>
+        <p:nvSpPr>
+          <p:cNvPr id="954" name="TextBox 953"/>
           <p:cNvSpPr txBox="1"/>
           <p:nvPr/>
         </p:nvSpPr>
         <p:spPr>
           <a:xfrm>
-            <a:off x="566928" y="6473952"/>
-            <a:ext cx="11055096" cy="274320"/>
+            <a:off x="566928" y="6089904"/>
+            <a:ext cx="11055096" cy="365760"/>
           </a:xfrm>
           <a:prstGeom prst="rect">
             <a:avLst/>
@@ -21065,30 +21316,28 @@
           <a:noFill/>
         </p:spPr>
         <p:txBody>
-          <a:bodyPr wrap="square" anchor="t" lIns="25400" rIns="25400" tIns="12700" bIns="12700">
+          <a:bodyPr wrap="square">
             <a:spAutoFit/>
           </a:bodyPr>
           <a:lstStyle/>
           <a:p>
-            <a:pPr algn="l">
-              <a:lnSpc>
-                <a:spcPct val="100000"/>
-              </a:lnSpc>
-              <a:spcBef>
-                <a:spcPts val="0"/>
-              </a:spcBef>
-              <a:spcAft>
-                <a:spcPts val="400"/>
-              </a:spcAft>
-            </a:pPr>
-            <a:r>
-              <a:rPr sz="950" b="0" i="1">
-                <a:solidFill>
-                  <a:srgbClr val="6B7278"/>
-                </a:solidFill>
-                <a:latin typeface="Calibri"/>
-              </a:rPr>
-              <a:t>Mean causal ceiling ≈ 687 $/oz (mean of pf_bound, aversion6_24trade_final.csv). Old +675 figure is the pre-fix reported mean.</a:t>
+            <a:r>
+              <a:rPr sz="1150" b="1">
+                <a:solidFill>
+                  <a:srgbClr val="2B3A42"/>
+                </a:solidFill>
+                <a:latin typeface="Calibri"/>
+              </a:rPr>
+              <a:t>OPEN MANAGEMENT DECISION — not yet made:  </a:t>
+            </a:r>
+            <a:r>
+              <a:rPr sz="1150">
+                <a:solidFill>
+                  <a:srgbClr val="2B3A42"/>
+                </a:solidFill>
+                <a:latin typeface="Calibri"/>
+              </a:rPr>
+              <a:t>aversion within the current utility is exhausted (≤ +0.06), so only a structural change — Option A or B — closes the tail. The driftless-fix world is P&amp;L-neutral, so no walk-forward number restates.</a:t>
             </a:r>
           </a:p>
         </p:txBody>
@@ -21159,7 +21408,7 @@
                 </a:solidFill>
                 <a:latin typeface="Calibri"/>
               </a:rPr>
-              <a:t>INTEGRITY  ·  2 OF 3</a:t>
+              <a:t>INTEGRITY  ·  1 OF 3</a:t>
             </a:r>
           </a:p>
         </p:txBody>
@@ -21204,7 +21453,7 @@
                 </a:solidFill>
                 <a:latin typeface="Calibri"/>
               </a:rPr>
-              <a:t>The forensic exoneration</a:t>
+              <a:t>Integrity: how we caught our own too-good result</a:t>
             </a:r>
           </a:p>
         </p:txBody>
@@ -21338,320 +21587,35 @@
                 </a:solidFill>
                 <a:latin typeface="Calibri"/>
               </a:rPr>
-              <a:t>We localised the error by elimination — accounting and causality were cleared; the model was the culprit.</a:t>
-            </a:r>
-          </a:p>
-        </p:txBody>
-      </p:sp>
-      <p:graphicFrame>
-        <p:nvGraphicFramePr>
-          <p:cNvPr id="7" name="Table 6"/>
-          <p:cNvGraphicFramePr>
-            <a:graphicFrameLocks noGrp="1"/>
-          </p:cNvGraphicFramePr>
-          <p:nvPr/>
-        </p:nvGraphicFramePr>
-        <p:xfrm>
-          <a:off x="566928" y="2103120"/>
-          <a:ext cx="11055095" cy="2267712"/>
-        </p:xfrm>
-        <a:graphic>
-          <a:graphicData uri="http://schemas.openxmlformats.org/drawingml/2006/table">
-            <a:tbl>
-              <a:tblPr/>
-              <a:tblGrid>
-                <a:gridCol w="2432121"/>
-                <a:gridCol w="4864242"/>
-                <a:gridCol w="3758732"/>
-              </a:tblGrid>
-              <a:tr h="566928">
-                <a:tc>
-                  <a:txBody>
-                    <a:bodyPr wrap="square"/>
-                    <a:lstStyle/>
-                    <a:p>
-                      <a:pPr algn="l"/>
-                      <a:r>
-                        <a:rPr sz="1450" b="1">
-                          <a:solidFill>
-                            <a:srgbClr val="FFFFFF"/>
-                          </a:solidFill>
-                          <a:latin typeface="Calibri"/>
-                        </a:rPr>
-                        <a:t>Suspect</a:t>
-                      </a:r>
-                    </a:p>
-                  </a:txBody>
-                  <a:tcPr marL="88900" marR="88900" marT="38100" marB="38100" anchor="ctr">
-                    <a:solidFill>
-                      <a:srgbClr val="2B3A42"/>
-                    </a:solidFill>
-                  </a:tcPr>
-                </a:tc>
-                <a:tc>
-                  <a:txBody>
-                    <a:bodyPr wrap="square"/>
-                    <a:lstStyle/>
-                    <a:p>
-                      <a:pPr algn="l"/>
-                      <a:r>
-                        <a:rPr sz="1450" b="1">
-                          <a:solidFill>
-                            <a:srgbClr val="FFFFFF"/>
-                          </a:solidFill>
-                          <a:latin typeface="Calibri"/>
-                        </a:rPr>
-                        <a:t>Test</a:t>
-                      </a:r>
-                    </a:p>
-                  </a:txBody>
-                  <a:tcPr marL="88900" marR="88900" marT="38100" marB="38100" anchor="ctr">
-                    <a:solidFill>
-                      <a:srgbClr val="2B3A42"/>
-                    </a:solidFill>
-                  </a:tcPr>
-                </a:tc>
-                <a:tc>
-                  <a:txBody>
-                    <a:bodyPr wrap="square"/>
-                    <a:lstStyle/>
-                    <a:p>
-                      <a:pPr algn="l"/>
-                      <a:r>
-                        <a:rPr sz="1450" b="1">
-                          <a:solidFill>
-                            <a:srgbClr val="FFFFFF"/>
-                          </a:solidFill>
-                          <a:latin typeface="Calibri"/>
-                        </a:rPr>
-                        <a:t>Verdict</a:t>
-                      </a:r>
-                    </a:p>
-                  </a:txBody>
-                  <a:tcPr marL="88900" marR="88900" marT="38100" marB="38100" anchor="ctr">
-                    <a:solidFill>
-                      <a:srgbClr val="2B3A42"/>
-                    </a:solidFill>
-                  </a:tcPr>
-                </a:tc>
-              </a:tr>
-              <a:tr h="566928">
-                <a:tc>
-                  <a:txBody>
-                    <a:bodyPr wrap="square"/>
-                    <a:lstStyle/>
-                    <a:p>
-                      <a:pPr algn="l"/>
-                      <a:r>
-                        <a:rPr sz="1450" b="1">
-                          <a:solidFill>
-                            <a:srgbClr val="22262A"/>
-                          </a:solidFill>
-                          <a:latin typeface="Calibri"/>
-                        </a:rPr>
-                        <a:t>Stepper accounting</a:t>
-                      </a:r>
-                    </a:p>
-                  </a:txBody>
-                  <a:tcPr marL="88900" marR="88900" marT="38100" marB="38100" anchor="ctr">
-                    <a:solidFill>
-                      <a:srgbClr val="FFFFFF"/>
-                    </a:solidFill>
-                  </a:tcPr>
-                </a:tc>
-                <a:tc>
-                  <a:txBody>
-                    <a:bodyPr wrap="square"/>
-                    <a:lstStyle/>
-                    <a:p>
-                      <a:pPr algn="l"/>
-                      <a:r>
-                        <a:rPr sz="1450" b="0">
-                          <a:solidFill>
-                            <a:srgbClr val="22262A"/>
-                          </a:solidFill>
-                          <a:latin typeface="Calibri"/>
-                        </a:rPr>
-                        <a:t>static-short replay through the real stepper</a:t>
-                      </a:r>
-                    </a:p>
-                  </a:txBody>
-                  <a:tcPr marL="88900" marR="88900" marT="38100" marB="38100" anchor="ctr">
-                    <a:solidFill>
-                      <a:srgbClr val="FFFFFF"/>
-                    </a:solidFill>
-                  </a:tcPr>
-                </a:tc>
-                <a:tc>
-                  <a:txBody>
-                    <a:bodyPr wrap="square"/>
-                    <a:lstStyle/>
-                    <a:p>
-                      <a:pPr algn="l"/>
-                      <a:r>
-                        <a:rPr sz="1450" b="0">
-                          <a:solidFill>
-                            <a:srgbClr val="22262A"/>
-                          </a:solidFill>
-                          <a:latin typeface="Calibri"/>
-                        </a:rPr>
-                        <a:t>EXONERATED</a:t>
-                      </a:r>
-                    </a:p>
-                  </a:txBody>
-                  <a:tcPr marL="88900" marR="88900" marT="38100" marB="38100" anchor="ctr">
-                    <a:solidFill>
-                      <a:srgbClr val="FFFFFF"/>
-                    </a:solidFill>
-                  </a:tcPr>
-                </a:tc>
-              </a:tr>
-              <a:tr h="566928">
-                <a:tc>
-                  <a:txBody>
-                    <a:bodyPr wrap="square"/>
-                    <a:lstStyle/>
-                    <a:p>
-                      <a:pPr algn="l"/>
-                      <a:r>
-                        <a:rPr sz="1450" b="1">
-                          <a:solidFill>
-                            <a:srgbClr val="22262A"/>
-                          </a:solidFill>
-                          <a:latin typeface="Calibri"/>
-                        </a:rPr>
-                        <a:t>Look-ahead in decisions</a:t>
-                      </a:r>
-                    </a:p>
-                  </a:txBody>
-                  <a:tcPr marL="88900" marR="88900" marT="38100" marB="38100" anchor="ctr">
-                    <a:solidFill>
-                      <a:srgbClr val="F2F4F6"/>
-                    </a:solidFill>
-                  </a:tcPr>
-                </a:tc>
-                <a:tc>
-                  <a:txBody>
-                    <a:bodyPr wrap="square"/>
-                    <a:lstStyle/>
-                    <a:p>
-                      <a:pPr algn="l"/>
-                      <a:r>
-                        <a:rPr sz="1450" b="0">
-                          <a:solidFill>
-                            <a:srgbClr val="22262A"/>
-                          </a:solidFill>
-                          <a:latin typeface="Calibri"/>
-                        </a:rPr>
-                        <a:t>future-erasure: erase the future, re-decide</a:t>
-                      </a:r>
-                    </a:p>
-                  </a:txBody>
-                  <a:tcPr marL="88900" marR="88900" marT="38100" marB="38100" anchor="ctr">
-                    <a:solidFill>
-                      <a:srgbClr val="F2F4F6"/>
-                    </a:solidFill>
-                  </a:tcPr>
-                </a:tc>
-                <a:tc>
-                  <a:txBody>
-                    <a:bodyPr wrap="square"/>
-                    <a:lstStyle/>
-                    <a:p>
-                      <a:pPr algn="l"/>
-                      <a:r>
-                        <a:rPr sz="1450" b="0">
-                          <a:solidFill>
-                            <a:srgbClr val="22262A"/>
-                          </a:solidFill>
-                          <a:latin typeface="Calibri"/>
-                        </a:rPr>
-                        <a:t>EXONERATED (bit-identical)</a:t>
-                      </a:r>
-                    </a:p>
-                  </a:txBody>
-                  <a:tcPr marL="88900" marR="88900" marT="38100" marB="38100" anchor="ctr">
-                    <a:solidFill>
-                      <a:srgbClr val="F2F4F6"/>
-                    </a:solidFill>
-                  </a:tcPr>
-                </a:tc>
-              </a:tr>
-              <a:tr h="566928">
-                <a:tc>
-                  <a:txBody>
-                    <a:bodyPr wrap="square"/>
-                    <a:lstStyle/>
-                    <a:p>
-                      <a:pPr algn="l"/>
-                      <a:r>
-                        <a:rPr sz="1450" b="1">
-                          <a:solidFill>
-                            <a:srgbClr val="22262A"/>
-                          </a:solidFill>
-                          <a:latin typeface="Calibri"/>
-                        </a:rPr>
-                        <a:t>The model</a:t>
-                      </a:r>
-                    </a:p>
-                  </a:txBody>
-                  <a:tcPr marL="88900" marR="88900" marT="38100" marB="38100" anchor="ctr">
-                    <a:solidFill>
-                      <a:srgbClr val="FFFFFF"/>
-                    </a:solidFill>
-                  </a:tcPr>
-                </a:tc>
-                <a:tc>
-                  <a:txBody>
-                    <a:bodyPr wrap="square"/>
-                    <a:lstStyle/>
-                    <a:p>
-                      <a:pPr algn="l"/>
-                      <a:r>
-                        <a:rPr sz="1450" b="0">
-                          <a:solidFill>
-                            <a:srgbClr val="22262A"/>
-                          </a:solidFill>
-                          <a:latin typeface="Calibri"/>
-                        </a:rPr>
-                        <a:t>E[dF | b] on the tradeable futures leg</a:t>
-                      </a:r>
-                    </a:p>
-                  </a:txBody>
-                  <a:tcPr marL="88900" marR="88900" marT="38100" marB="38100" anchor="ctr">
-                    <a:solidFill>
-                      <a:srgbClr val="FFFFFF"/>
-                    </a:solidFill>
-                  </a:tcPr>
-                </a:tc>
-                <a:tc>
-                  <a:txBody>
-                    <a:bodyPr wrap="square"/>
-                    <a:lstStyle/>
-                    <a:p>
-                      <a:pPr algn="l"/>
-                      <a:r>
-                        <a:rPr sz="1450" b="0">
-                          <a:solidFill>
-                            <a:srgbClr val="22262A"/>
-                          </a:solidFill>
-                          <a:latin typeface="Calibri"/>
-                        </a:rPr>
-                        <a:t>GUILTY:  +0.65·b / day</a:t>
-                      </a:r>
-                    </a:p>
-                  </a:txBody>
-                  <a:tcPr marL="88900" marR="88900" marT="38100" marB="38100" anchor="ctr">
-                    <a:solidFill>
-                      <a:srgbClr val="FFFFFF"/>
-                    </a:solidFill>
-                  </a:tcPr>
-                </a:tc>
-              </a:tr>
-            </a:tbl>
-          </a:graphicData>
-        </a:graphic>
-      </p:graphicFrame>
+              <a:t>An earlier model version reported +$675/oz — implausible against an $8 margin. We did not ship it. We tried to break it.</a:t>
+            </a:r>
+          </a:p>
+        </p:txBody>
+      </p:sp>
+      <p:pic>
+        <p:nvPicPr>
+          <p:cNvPr id="7" name="Picture 6" descr="deck_integrity.png"/>
+          <p:cNvPicPr>
+            <a:picLocks noChangeAspect="1"/>
+          </p:cNvPicPr>
+          <p:nvPr/>
+        </p:nvPicPr>
+        <p:blipFill>
+          <a:blip r:embed="rId2"/>
+          <a:stretch>
+            <a:fillRect/>
+          </a:stretch>
+        </p:blipFill>
+        <p:spPr>
+          <a:xfrm>
+            <a:off x="791595" y="1920240"/>
+            <a:ext cx="7688825" cy="3657600"/>
+          </a:xfrm>
+          <a:prstGeom prst="rect">
+            <a:avLst/>
+          </a:prstGeom>
+        </p:spPr>
+      </p:pic>
       <p:sp>
         <p:nvSpPr>
           <p:cNvPr id="8" name="TextBox 7"/>
@@ -21660,8 +21624,8 @@
         </p:nvSpPr>
         <p:spPr>
           <a:xfrm>
-            <a:off x="566928" y="4709160"/>
-            <a:ext cx="11055096" cy="1188720"/>
+            <a:off x="566928" y="5760720"/>
+            <a:ext cx="11055096" cy="822960"/>
           </a:xfrm>
           <a:prstGeom prst="rect">
             <a:avLst/>
@@ -21686,13 +21650,13 @@
               </a:spcAft>
             </a:pPr>
             <a:r>
-              <a:rPr sz="1550" b="0" i="0">
-                <a:solidFill>
-                  <a:srgbClr val="B52A2A"/>
-                </a:solidFill>
-                <a:latin typeface="Calibri"/>
-              </a:rPr>
-              <a:t>Root cause:  the basis's mean-reversion was placed on the TRADEABLE futures leg. The solver — correctly — farmed a drift of +0.65·b per day. But raw CME is a martingale: that drift does not exist in reality, so it is unexecutable.</a:t>
+              <a:rPr sz="1450" b="0" i="0">
+                <a:solidFill>
+                  <a:srgbClr val="2B3A42"/>
+                </a:solidFill>
+                <a:latin typeface="Calibri"/>
+              </a:rPr>
+              <a:t>We had already built a hard causal bound (unhedged + perfect-foresight harvest on the traded strip). The +675 result VIOLATED it on multiple months. A number that beats what perfect foresight allows is not a profit — it is a bug. That triggered a forensic tear-down.</a:t>
             </a:r>
           </a:p>
         </p:txBody>
@@ -21737,7 +21701,7 @@
                 </a:solidFill>
                 <a:latin typeface="Calibri"/>
               </a:rPr>
-              <a:t>Root-cause slope E[dF|b] ≈ +0.65·b/day on the mis-specified leg; corrected model measures |t|=0.7 (nil).</a:t>
+              <a:t>Mean causal ceiling ≈ 687 $/oz (mean of pf_bound, aversion6_24trade_final.csv). Old +675 figure is the pre-fix reported mean.</a:t>
             </a:r>
           </a:p>
         </p:txBody>
@@ -21808,7 +21772,7 @@
                 </a:solidFill>
                 <a:latin typeface="Calibri"/>
               </a:rPr>
-              <a:t>INTEGRITY  ·  3 OF 3</a:t>
+              <a:t>INTEGRITY  ·  2 OF 3</a:t>
             </a:r>
           </a:p>
         </p:txBody>
@@ -21853,7 +21817,7 @@
                 </a:solidFill>
                 <a:latin typeface="Calibri"/>
               </a:rPr>
-              <a:t>The fix, and the guards now standing</a:t>
+              <a:t>The forensic exoneration</a:t>
             </a:r>
           </a:p>
         </p:txBody>
@@ -21987,194 +21951,320 @@
                 </a:solidFill>
                 <a:latin typeface="Calibri"/>
               </a:rPr>
-              <a:t>Fix the model; then make the same failure impossible to repeat silently.</a:t>
-            </a:r>
-          </a:p>
-        </p:txBody>
-      </p:sp>
-      <p:sp>
-        <p:nvSpPr>
-          <p:cNvPr id="7" name="TextBox 6"/>
-          <p:cNvSpPr txBox="1"/>
-          <p:nvPr/>
-        </p:nvSpPr>
-        <p:spPr>
-          <a:xfrm>
-            <a:off x="566928" y="2148840"/>
-            <a:ext cx="11055096" cy="3566160"/>
-          </a:xfrm>
-          <a:prstGeom prst="rect">
-            <a:avLst/>
-          </a:prstGeom>
-          <a:noFill/>
-        </p:spPr>
-        <p:txBody>
-          <a:bodyPr wrap="square">
-            <a:spAutoFit/>
-          </a:bodyPr>
-          <a:lstStyle/>
-          <a:p>
-            <a:pPr>
-              <a:lnSpc>
-                <a:spcPct val="102000"/>
-              </a:lnSpc>
-              <a:spcBef>
-                <a:spcPts val="0"/>
-              </a:spcBef>
-              <a:spcAft>
-                <a:spcPts val="1500"/>
-              </a:spcAft>
-            </a:pPr>
-            <a:r>
-              <a:rPr sz="1550">
-                <a:solidFill>
-                  <a:srgbClr val="1F77B4"/>
-                </a:solidFill>
-                <a:latin typeface="Calibri"/>
-              </a:rPr>
-              <a:t>▪  </a:t>
-            </a:r>
-            <a:r>
-              <a:rPr sz="1550" b="1">
-                <a:solidFill>
-                  <a:srgbClr val="22262A"/>
-                </a:solidFill>
-                <a:latin typeface="Calibri"/>
-              </a:rPr>
-              <a:t>Composed-spot inversion.  </a:t>
-            </a:r>
-            <a:r>
-              <a:rPr sz="1550">
-                <a:solidFill>
-                  <a:srgbClr val="22262A"/>
-                </a:solidFill>
-                <a:latin typeface="Calibri"/>
-              </a:rPr>
-              <a:t>CME is the martingale primary; the basis and its catch-up live on the fixing leg (the swap), not on the hedge.</a:t>
-            </a:r>
-          </a:p>
-          <a:p>
-            <a:pPr>
-              <a:lnSpc>
-                <a:spcPct val="102000"/>
-              </a:lnSpc>
-              <a:spcBef>
-                <a:spcPts val="0"/>
-              </a:spcBef>
-              <a:spcAft>
-                <a:spcPts val="1500"/>
-              </a:spcAft>
-            </a:pPr>
-            <a:r>
-              <a:rPr sz="1550">
-                <a:solidFill>
-                  <a:srgbClr val="1F77B4"/>
-                </a:solidFill>
-                <a:latin typeface="Calibri"/>
-              </a:rPr>
-              <a:t>▪  </a:t>
-            </a:r>
-            <a:r>
-              <a:rPr sz="1550" b="1">
-                <a:solidFill>
-                  <a:srgbClr val="22262A"/>
-                </a:solidFill>
-                <a:latin typeface="Calibri"/>
-              </a:rPr>
-              <a:t>Bound stamped on every row.  </a:t>
-            </a:r>
-            <a:r>
-              <a:rPr sz="1550">
-                <a:solidFill>
-                  <a:srgbClr val="22262A"/>
-                </a:solidFill>
-                <a:latin typeface="Calibri"/>
-              </a:rPr>
-              <a:t>Every backtest trade now records and asserts the causal-bound check.</a:t>
-            </a:r>
-          </a:p>
-          <a:p>
-            <a:pPr>
-              <a:lnSpc>
-                <a:spcPct val="102000"/>
-              </a:lnSpc>
-              <a:spcBef>
-                <a:spcPts val="0"/>
-              </a:spcBef>
-              <a:spcAft>
-                <a:spcPts val="1500"/>
-              </a:spcAft>
-            </a:pPr>
-            <a:r>
-              <a:rPr sz="1550">
-                <a:solidFill>
-                  <a:srgbClr val="1F77B4"/>
-                </a:solidFill>
-                <a:latin typeface="Calibri"/>
-              </a:rPr>
-              <a:t>▪  </a:t>
-            </a:r>
-            <a:r>
-              <a:rPr sz="1550" b="1">
-                <a:solidFill>
-                  <a:srgbClr val="22262A"/>
-                </a:solidFill>
-                <a:latin typeface="Calibri"/>
-              </a:rPr>
-              <a:t>Martingale guard at every calibration.  </a:t>
-            </a:r>
-            <a:r>
-              <a:rPr sz="1550">
-                <a:solidFill>
-                  <a:srgbClr val="22262A"/>
-                </a:solidFill>
-                <a:latin typeface="Calibri"/>
-              </a:rPr>
-              <a:t>E[dF|b] ≈ 0 is verified on the tradeables before any solve.</a:t>
-            </a:r>
-          </a:p>
-          <a:p>
-            <a:pPr>
-              <a:lnSpc>
-                <a:spcPct val="102000"/>
-              </a:lnSpc>
-              <a:spcBef>
-                <a:spcPts val="0"/>
-              </a:spcBef>
-              <a:spcAft>
-                <a:spcPts val="1500"/>
-              </a:spcAft>
-            </a:pPr>
-            <a:r>
-              <a:rPr sz="1550">
-                <a:solidFill>
-                  <a:srgbClr val="1F77B4"/>
-                </a:solidFill>
-                <a:latin typeface="Calibri"/>
-              </a:rPr>
-              <a:t>▪  </a:t>
-            </a:r>
-            <a:r>
-              <a:rPr sz="1550" b="1">
-                <a:solidFill>
-                  <a:srgbClr val="22262A"/>
-                </a:solidFill>
-                <a:latin typeface="Calibri"/>
-              </a:rPr>
-              <a:t>Production-trust audit — 7 silent-failure paths closed.  </a:t>
-            </a:r>
-            <a:r>
-              <a:rPr sz="1550">
-                <a:solidFill>
-                  <a:srgbClr val="22262A"/>
-                </a:solidFill>
-                <a:latin typeface="Calibri"/>
-              </a:rPr>
-              <a:t>Fabricated realized tails; silently-random replay on npz typos; NaN-blind flags; non-atomic writes — all now fail loud.</a:t>
-            </a:r>
-          </a:p>
-        </p:txBody>
-      </p:sp>
+              <a:t>We localised the error by elimination — accounting and causality were cleared; the model was the culprit.</a:t>
+            </a:r>
+          </a:p>
+        </p:txBody>
+      </p:sp>
+      <p:graphicFrame>
+        <p:nvGraphicFramePr>
+          <p:cNvPr id="7" name="Table 6"/>
+          <p:cNvGraphicFramePr>
+            <a:graphicFrameLocks noGrp="1"/>
+          </p:cNvGraphicFramePr>
+          <p:nvPr/>
+        </p:nvGraphicFramePr>
+        <p:xfrm>
+          <a:off x="566928" y="2103120"/>
+          <a:ext cx="11055095" cy="2267712"/>
+        </p:xfrm>
+        <a:graphic>
+          <a:graphicData uri="http://schemas.openxmlformats.org/drawingml/2006/table">
+            <a:tbl>
+              <a:tblPr/>
+              <a:tblGrid>
+                <a:gridCol w="2432121"/>
+                <a:gridCol w="4864242"/>
+                <a:gridCol w="3758732"/>
+              </a:tblGrid>
+              <a:tr h="566928">
+                <a:tc>
+                  <a:txBody>
+                    <a:bodyPr wrap="square"/>
+                    <a:lstStyle/>
+                    <a:p>
+                      <a:pPr algn="l"/>
+                      <a:r>
+                        <a:rPr sz="1450" b="1">
+                          <a:solidFill>
+                            <a:srgbClr val="FFFFFF"/>
+                          </a:solidFill>
+                          <a:latin typeface="Calibri"/>
+                        </a:rPr>
+                        <a:t>Suspect</a:t>
+                      </a:r>
+                    </a:p>
+                  </a:txBody>
+                  <a:tcPr marL="88900" marR="88900" marT="38100" marB="38100" anchor="ctr">
+                    <a:solidFill>
+                      <a:srgbClr val="2B3A42"/>
+                    </a:solidFill>
+                  </a:tcPr>
+                </a:tc>
+                <a:tc>
+                  <a:txBody>
+                    <a:bodyPr wrap="square"/>
+                    <a:lstStyle/>
+                    <a:p>
+                      <a:pPr algn="l"/>
+                      <a:r>
+                        <a:rPr sz="1450" b="1">
+                          <a:solidFill>
+                            <a:srgbClr val="FFFFFF"/>
+                          </a:solidFill>
+                          <a:latin typeface="Calibri"/>
+                        </a:rPr>
+                        <a:t>Test</a:t>
+                      </a:r>
+                    </a:p>
+                  </a:txBody>
+                  <a:tcPr marL="88900" marR="88900" marT="38100" marB="38100" anchor="ctr">
+                    <a:solidFill>
+                      <a:srgbClr val="2B3A42"/>
+                    </a:solidFill>
+                  </a:tcPr>
+                </a:tc>
+                <a:tc>
+                  <a:txBody>
+                    <a:bodyPr wrap="square"/>
+                    <a:lstStyle/>
+                    <a:p>
+                      <a:pPr algn="l"/>
+                      <a:r>
+                        <a:rPr sz="1450" b="1">
+                          <a:solidFill>
+                            <a:srgbClr val="FFFFFF"/>
+                          </a:solidFill>
+                          <a:latin typeface="Calibri"/>
+                        </a:rPr>
+                        <a:t>Verdict</a:t>
+                      </a:r>
+                    </a:p>
+                  </a:txBody>
+                  <a:tcPr marL="88900" marR="88900" marT="38100" marB="38100" anchor="ctr">
+                    <a:solidFill>
+                      <a:srgbClr val="2B3A42"/>
+                    </a:solidFill>
+                  </a:tcPr>
+                </a:tc>
+              </a:tr>
+              <a:tr h="566928">
+                <a:tc>
+                  <a:txBody>
+                    <a:bodyPr wrap="square"/>
+                    <a:lstStyle/>
+                    <a:p>
+                      <a:pPr algn="l"/>
+                      <a:r>
+                        <a:rPr sz="1450" b="1">
+                          <a:solidFill>
+                            <a:srgbClr val="22262A"/>
+                          </a:solidFill>
+                          <a:latin typeface="Calibri"/>
+                        </a:rPr>
+                        <a:t>Stepper accounting</a:t>
+                      </a:r>
+                    </a:p>
+                  </a:txBody>
+                  <a:tcPr marL="88900" marR="88900" marT="38100" marB="38100" anchor="ctr">
+                    <a:solidFill>
+                      <a:srgbClr val="FFFFFF"/>
+                    </a:solidFill>
+                  </a:tcPr>
+                </a:tc>
+                <a:tc>
+                  <a:txBody>
+                    <a:bodyPr wrap="square"/>
+                    <a:lstStyle/>
+                    <a:p>
+                      <a:pPr algn="l"/>
+                      <a:r>
+                        <a:rPr sz="1450" b="0">
+                          <a:solidFill>
+                            <a:srgbClr val="22262A"/>
+                          </a:solidFill>
+                          <a:latin typeface="Calibri"/>
+                        </a:rPr>
+                        <a:t>static-short replay through the real stepper</a:t>
+                      </a:r>
+                    </a:p>
+                  </a:txBody>
+                  <a:tcPr marL="88900" marR="88900" marT="38100" marB="38100" anchor="ctr">
+                    <a:solidFill>
+                      <a:srgbClr val="FFFFFF"/>
+                    </a:solidFill>
+                  </a:tcPr>
+                </a:tc>
+                <a:tc>
+                  <a:txBody>
+                    <a:bodyPr wrap="square"/>
+                    <a:lstStyle/>
+                    <a:p>
+                      <a:pPr algn="l"/>
+                      <a:r>
+                        <a:rPr sz="1450" b="0">
+                          <a:solidFill>
+                            <a:srgbClr val="22262A"/>
+                          </a:solidFill>
+                          <a:latin typeface="Calibri"/>
+                        </a:rPr>
+                        <a:t>EXONERATED</a:t>
+                      </a:r>
+                    </a:p>
+                  </a:txBody>
+                  <a:tcPr marL="88900" marR="88900" marT="38100" marB="38100" anchor="ctr">
+                    <a:solidFill>
+                      <a:srgbClr val="FFFFFF"/>
+                    </a:solidFill>
+                  </a:tcPr>
+                </a:tc>
+              </a:tr>
+              <a:tr h="566928">
+                <a:tc>
+                  <a:txBody>
+                    <a:bodyPr wrap="square"/>
+                    <a:lstStyle/>
+                    <a:p>
+                      <a:pPr algn="l"/>
+                      <a:r>
+                        <a:rPr sz="1450" b="1">
+                          <a:solidFill>
+                            <a:srgbClr val="22262A"/>
+                          </a:solidFill>
+                          <a:latin typeface="Calibri"/>
+                        </a:rPr>
+                        <a:t>Look-ahead in decisions</a:t>
+                      </a:r>
+                    </a:p>
+                  </a:txBody>
+                  <a:tcPr marL="88900" marR="88900" marT="38100" marB="38100" anchor="ctr">
+                    <a:solidFill>
+                      <a:srgbClr val="F2F4F6"/>
+                    </a:solidFill>
+                  </a:tcPr>
+                </a:tc>
+                <a:tc>
+                  <a:txBody>
+                    <a:bodyPr wrap="square"/>
+                    <a:lstStyle/>
+                    <a:p>
+                      <a:pPr algn="l"/>
+                      <a:r>
+                        <a:rPr sz="1450" b="0">
+                          <a:solidFill>
+                            <a:srgbClr val="22262A"/>
+                          </a:solidFill>
+                          <a:latin typeface="Calibri"/>
+                        </a:rPr>
+                        <a:t>future-erasure: erase the future, re-decide</a:t>
+                      </a:r>
+                    </a:p>
+                  </a:txBody>
+                  <a:tcPr marL="88900" marR="88900" marT="38100" marB="38100" anchor="ctr">
+                    <a:solidFill>
+                      <a:srgbClr val="F2F4F6"/>
+                    </a:solidFill>
+                  </a:tcPr>
+                </a:tc>
+                <a:tc>
+                  <a:txBody>
+                    <a:bodyPr wrap="square"/>
+                    <a:lstStyle/>
+                    <a:p>
+                      <a:pPr algn="l"/>
+                      <a:r>
+                        <a:rPr sz="1450" b="0">
+                          <a:solidFill>
+                            <a:srgbClr val="22262A"/>
+                          </a:solidFill>
+                          <a:latin typeface="Calibri"/>
+                        </a:rPr>
+                        <a:t>EXONERATED (bit-identical)</a:t>
+                      </a:r>
+                    </a:p>
+                  </a:txBody>
+                  <a:tcPr marL="88900" marR="88900" marT="38100" marB="38100" anchor="ctr">
+                    <a:solidFill>
+                      <a:srgbClr val="F2F4F6"/>
+                    </a:solidFill>
+                  </a:tcPr>
+                </a:tc>
+              </a:tr>
+              <a:tr h="566928">
+                <a:tc>
+                  <a:txBody>
+                    <a:bodyPr wrap="square"/>
+                    <a:lstStyle/>
+                    <a:p>
+                      <a:pPr algn="l"/>
+                      <a:r>
+                        <a:rPr sz="1450" b="1">
+                          <a:solidFill>
+                            <a:srgbClr val="22262A"/>
+                          </a:solidFill>
+                          <a:latin typeface="Calibri"/>
+                        </a:rPr>
+                        <a:t>The model</a:t>
+                      </a:r>
+                    </a:p>
+                  </a:txBody>
+                  <a:tcPr marL="88900" marR="88900" marT="38100" marB="38100" anchor="ctr">
+                    <a:solidFill>
+                      <a:srgbClr val="FFFFFF"/>
+                    </a:solidFill>
+                  </a:tcPr>
+                </a:tc>
+                <a:tc>
+                  <a:txBody>
+                    <a:bodyPr wrap="square"/>
+                    <a:lstStyle/>
+                    <a:p>
+                      <a:pPr algn="l"/>
+                      <a:r>
+                        <a:rPr sz="1450" b="0">
+                          <a:solidFill>
+                            <a:srgbClr val="22262A"/>
+                          </a:solidFill>
+                          <a:latin typeface="Calibri"/>
+                        </a:rPr>
+                        <a:t>E[dF | b] on the tradeable futures leg</a:t>
+                      </a:r>
+                    </a:p>
+                  </a:txBody>
+                  <a:tcPr marL="88900" marR="88900" marT="38100" marB="38100" anchor="ctr">
+                    <a:solidFill>
+                      <a:srgbClr val="FFFFFF"/>
+                    </a:solidFill>
+                  </a:tcPr>
+                </a:tc>
+                <a:tc>
+                  <a:txBody>
+                    <a:bodyPr wrap="square"/>
+                    <a:lstStyle/>
+                    <a:p>
+                      <a:pPr algn="l"/>
+                      <a:r>
+                        <a:rPr sz="1450" b="0">
+                          <a:solidFill>
+                            <a:srgbClr val="22262A"/>
+                          </a:solidFill>
+                          <a:latin typeface="Calibri"/>
+                        </a:rPr>
+                        <a:t>GUILTY:  +0.65·b / day</a:t>
+                      </a:r>
+                    </a:p>
+                  </a:txBody>
+                  <a:tcPr marL="88900" marR="88900" marT="38100" marB="38100" anchor="ctr">
+                    <a:solidFill>
+                      <a:srgbClr val="FFFFFF"/>
+                    </a:solidFill>
+                  </a:tcPr>
+                </a:tc>
+              </a:tr>
+            </a:tbl>
+          </a:graphicData>
+        </a:graphic>
+      </p:graphicFrame>
       <p:sp>
         <p:nvSpPr>
           <p:cNvPr id="8" name="TextBox 7"/>
@@ -22183,8 +22273,8 @@
         </p:nvSpPr>
         <p:spPr>
           <a:xfrm>
-            <a:off x="566928" y="5623560"/>
-            <a:ext cx="11055096" cy="731520"/>
+            <a:off x="566928" y="4709160"/>
+            <a:ext cx="11055096" cy="1188720"/>
           </a:xfrm>
           <a:prstGeom prst="rect">
             <a:avLst/>
@@ -22199,7 +22289,7 @@
           <a:p>
             <a:pPr algn="l">
               <a:lnSpc>
-                <a:spcPct val="105000"/>
+                <a:spcPct val="110000"/>
               </a:lnSpc>
               <a:spcBef>
                 <a:spcPts val="0"/>
@@ -22209,13 +22299,13 @@
               </a:spcAft>
             </a:pPr>
             <a:r>
-              <a:rPr sz="1500" b="1" i="0">
-                <a:solidFill>
-                  <a:srgbClr val="1F77B4"/>
-                </a:solidFill>
-                <a:latin typeface="Calibri"/>
-              </a:rPr>
-              <a:t>The strongest trust argument is not that the number is big — it is that we built the machinery to catch it when it was too big, and it worked.</a:t>
+              <a:rPr sz="1550" b="0" i="0">
+                <a:solidFill>
+                  <a:srgbClr val="B52A2A"/>
+                </a:solidFill>
+                <a:latin typeface="Calibri"/>
+              </a:rPr>
+              <a:t>Root cause:  the basis's mean-reversion was placed on the TRADEABLE futures leg. The solver — correctly — farmed a drift of +0.65·b per day. But raw CME is a martingale: that drift does not exist in reality, so it is unexecutable.</a:t>
             </a:r>
           </a:p>
         </p:txBody>
@@ -22260,7 +22350,7 @@
                 </a:solidFill>
                 <a:latin typeface="Calibri"/>
               </a:rPr>
-              <a:t>Production-trust audit: commit 0e2bd46. Composed-spot wiring: commit 3008d3c.</a:t>
+              <a:t>Root-cause slope E[dF|b] ≈ +0.65·b/day on the mis-specified leg; corrected model measures |t|=0.7 (nil).</a:t>
             </a:r>
           </a:p>
         </p:txBody>
@@ -22331,7 +22421,7 @@
                 </a:solidFill>
                 <a:latin typeface="Calibri"/>
               </a:rPr>
-              <a:t>CLOSING  ·  1 OF 2</a:t>
+              <a:t>INTEGRITY  ·  3 OF 3</a:t>
             </a:r>
           </a:p>
         </p:txBody>
@@ -22376,7 +22466,7 @@
                 </a:solidFill>
                 <a:latin typeface="Calibri"/>
               </a:rPr>
-              <a:t>Caveats — stated plainly</a:t>
+              <a:t>The fix, and the guards now standing</a:t>
             </a:r>
           </a:p>
         </p:txBody>
@@ -22510,326 +22600,242 @@
                 </a:solidFill>
                 <a:latin typeface="Calibri"/>
               </a:rPr>
-              <a:t>What this result is NOT. Said openly, because that is the trust argument.</a:t>
-            </a:r>
-          </a:p>
-        </p:txBody>
-      </p:sp>
-      <p:graphicFrame>
-        <p:nvGraphicFramePr>
-          <p:cNvPr id="7" name="Table 6"/>
-          <p:cNvGraphicFramePr>
-            <a:graphicFrameLocks noGrp="1"/>
-          </p:cNvGraphicFramePr>
-          <p:nvPr/>
-        </p:nvGraphicFramePr>
-        <p:xfrm>
-          <a:off x="566928" y="2103120"/>
-          <a:ext cx="11055095" cy="3621024"/>
-        </p:xfrm>
-        <a:graphic>
-          <a:graphicData uri="http://schemas.openxmlformats.org/drawingml/2006/table">
-            <a:tbl>
-              <a:tblPr/>
-              <a:tblGrid>
-                <a:gridCol w="3316528"/>
-                <a:gridCol w="7738567"/>
-              </a:tblGrid>
-              <a:tr h="603504">
-                <a:tc>
-                  <a:txBody>
-                    <a:bodyPr wrap="square"/>
-                    <a:lstStyle/>
-                    <a:p>
-                      <a:pPr algn="l"/>
-                      <a:r>
-                        <a:rPr sz="1500" b="1">
-                          <a:solidFill>
-                            <a:srgbClr val="FFFFFF"/>
-                          </a:solidFill>
-                          <a:latin typeface="Calibri"/>
-                        </a:rPr>
-                        <a:t>Caveat</a:t>
-                      </a:r>
-                    </a:p>
-                  </a:txBody>
-                  <a:tcPr marL="88900" marR="88900" marT="38100" marB="38100" anchor="ctr">
-                    <a:solidFill>
-                      <a:srgbClr val="2B3A42"/>
-                    </a:solidFill>
-                  </a:tcPr>
-                </a:tc>
-                <a:tc>
-                  <a:txBody>
-                    <a:bodyPr wrap="square"/>
-                    <a:lstStyle/>
-                    <a:p>
-                      <a:pPr algn="l"/>
-                      <a:r>
-                        <a:rPr sz="1500" b="1">
-                          <a:solidFill>
-                            <a:srgbClr val="FFFFFF"/>
-                          </a:solidFill>
-                          <a:latin typeface="Calibri"/>
-                        </a:rPr>
-                        <a:t>What it means</a:t>
-                      </a:r>
-                    </a:p>
-                  </a:txBody>
-                  <a:tcPr marL="88900" marR="88900" marT="38100" marB="38100" anchor="ctr">
-                    <a:solidFill>
-                      <a:srgbClr val="2B3A42"/>
-                    </a:solidFill>
-                  </a:tcPr>
-                </a:tc>
-              </a:tr>
-              <a:tr h="603504">
-                <a:tc>
-                  <a:txBody>
-                    <a:bodyPr wrap="square"/>
-                    <a:lstStyle/>
-                    <a:p>
-                      <a:pPr algn="l"/>
-                      <a:r>
-                        <a:rPr sz="1500" b="1">
-                          <a:solidFill>
-                            <a:srgbClr val="22262A"/>
-                          </a:solidFill>
-                          <a:latin typeface="Calibri"/>
-                        </a:rPr>
-                        <a:t>Seed / Monte-Carlo dispersion</a:t>
-                      </a:r>
-                    </a:p>
-                  </a:txBody>
-                  <a:tcPr marL="88900" marR="88900" marT="38100" marB="38100" anchor="ctr">
-                    <a:solidFill>
-                      <a:srgbClr val="FFFFFF"/>
-                    </a:solidFill>
-                  </a:tcPr>
-                </a:tc>
-                <a:tc>
-                  <a:txBody>
-                    <a:bodyPr wrap="square"/>
-                    <a:lstStyle/>
-                    <a:p>
-                      <a:pPr algn="l"/>
-                      <a:r>
-                        <a:rPr sz="1500" b="0">
-                          <a:solidFill>
-                            <a:srgbClr val="22262A"/>
-                          </a:solidFill>
-                          <a:latin typeface="Calibri"/>
-                        </a:rPr>
-                        <a:t>Ensemble (3 seeds) + roll-inner 512 collapse month dispersion; only the 48-trade mean is quoted.</a:t>
-                      </a:r>
-                    </a:p>
-                  </a:txBody>
-                  <a:tcPr marL="88900" marR="88900" marT="38100" marB="38100" anchor="ctr">
-                    <a:solidFill>
-                      <a:srgbClr val="FFFFFF"/>
-                    </a:solidFill>
-                  </a:tcPr>
-                </a:tc>
-              </a:tr>
-              <a:tr h="603504">
-                <a:tc>
-                  <a:txBody>
-                    <a:bodyPr wrap="square"/>
-                    <a:lstStyle/>
-                    <a:p>
-                      <a:pPr algn="l"/>
-                      <a:r>
-                        <a:rPr sz="1500" b="1">
-                          <a:solidFill>
-                            <a:srgbClr val="22262A"/>
-                          </a:solidFill>
-                          <a:latin typeface="Calibri"/>
-                        </a:rPr>
-                        <a:t>Out-of-sample window</a:t>
-                      </a:r>
-                    </a:p>
-                  </a:txBody>
-                  <a:tcPr marL="88900" marR="88900" marT="38100" marB="38100" anchor="ctr">
-                    <a:solidFill>
-                      <a:srgbClr val="F2F4F6"/>
-                    </a:solidFill>
-                  </a:tcPr>
-                </a:tc>
-                <a:tc>
-                  <a:txBody>
-                    <a:bodyPr wrap="square"/>
-                    <a:lstStyle/>
-                    <a:p>
-                      <a:pPr algn="l"/>
-                      <a:r>
-                        <a:rPr sz="1500" b="0">
-                          <a:solidFill>
-                            <a:srgbClr val="22262A"/>
-                          </a:solidFill>
-                          <a:latin typeface="Calibri"/>
-                        </a:rPr>
-                        <a:t>Now four years (2020–2023) incl. COVID — still not multiple full cycles.</a:t>
-                      </a:r>
-                    </a:p>
-                  </a:txBody>
-                  <a:tcPr marL="88900" marR="88900" marT="38100" marB="38100" anchor="ctr">
-                    <a:solidFill>
-                      <a:srgbClr val="F2F4F6"/>
-                    </a:solidFill>
-                  </a:tcPr>
-                </a:tc>
-              </a:tr>
-              <a:tr h="603504">
-                <a:tc>
-                  <a:txBody>
-                    <a:bodyPr wrap="square"/>
-                    <a:lstStyle/>
-                    <a:p>
-                      <a:pPr algn="l"/>
-                      <a:r>
-                        <a:rPr sz="1500" b="1">
-                          <a:solidFill>
-                            <a:srgbClr val="22262A"/>
-                          </a:solidFill>
-                          <a:latin typeface="Calibri"/>
-                        </a:rPr>
-                        <a:t>Flat half-spread costs</a:t>
-                      </a:r>
-                    </a:p>
-                  </a:txBody>
-                  <a:tcPr marL="88900" marR="88900" marT="38100" marB="38100" anchor="ctr">
-                    <a:solidFill>
-                      <a:srgbClr val="FFFFFF"/>
-                    </a:solidFill>
-                  </a:tcPr>
-                </a:tc>
-                <a:tc>
-                  <a:txBody>
-                    <a:bodyPr wrap="square"/>
-                    <a:lstStyle/>
-                    <a:p>
-                      <a:pPr algn="l"/>
-                      <a:r>
-                        <a:rPr sz="1500" b="0">
-                          <a:solidFill>
-                            <a:srgbClr val="22262A"/>
-                          </a:solidFill>
-                          <a:latin typeface="Calibri"/>
-                        </a:rPr>
-                        <a:t>Real CME microstructure friction is not calibrated (flat 10 bps half-spread).</a:t>
-                      </a:r>
-                    </a:p>
-                  </a:txBody>
-                  <a:tcPr marL="88900" marR="88900" marT="38100" marB="38100" anchor="ctr">
-                    <a:solidFill>
-                      <a:srgbClr val="FFFFFF"/>
-                    </a:solidFill>
-                  </a:tcPr>
-                </a:tc>
-              </a:tr>
-              <a:tr h="603504">
-                <a:tc>
-                  <a:txBody>
-                    <a:bodyPr wrap="square"/>
-                    <a:lstStyle/>
-                    <a:p>
-                      <a:pPr algn="l"/>
-                      <a:r>
-                        <a:rPr sz="1500" b="1">
-                          <a:solidFill>
-                            <a:srgbClr val="22262A"/>
-                          </a:solidFill>
-                          <a:latin typeface="Calibri"/>
-                        </a:rPr>
-                        <a:t>Utility-scale convention</a:t>
-                      </a:r>
-                    </a:p>
-                  </a:txBody>
-                  <a:tcPr marL="88900" marR="88900" marT="38100" marB="38100" anchor="ctr">
-                    <a:solidFill>
-                      <a:srgbClr val="F2F4F6"/>
-                    </a:solidFill>
-                  </a:tcPr>
-                </a:tc>
-                <a:tc>
-                  <a:txBody>
-                    <a:bodyPr wrap="square"/>
-                    <a:lstStyle/>
-                    <a:p>
-                      <a:pPr algn="l"/>
-                      <a:r>
-                        <a:rPr sz="1500" b="0">
-                          <a:solidFill>
-                            <a:srgbClr val="22262A"/>
-                          </a:solidFill>
-                          <a:latin typeface="Calibri"/>
-                        </a:rPr>
-                        <a:t>Recently moved to calibration-derived (flagged; explicit override available).</a:t>
-                      </a:r>
-                    </a:p>
-                  </a:txBody>
-                  <a:tcPr marL="88900" marR="88900" marT="38100" marB="38100" anchor="ctr">
-                    <a:solidFill>
-                      <a:srgbClr val="F2F4F6"/>
-                    </a:solidFill>
-                  </a:tcPr>
-                </a:tc>
-              </a:tr>
-              <a:tr h="603504">
-                <a:tc>
-                  <a:txBody>
-                    <a:bodyPr wrap="square"/>
-                    <a:lstStyle/>
-                    <a:p>
-                      <a:pPr algn="l"/>
-                      <a:r>
-                        <a:rPr sz="1500" b="1">
-                          <a:solidFill>
-                            <a:srgbClr val="22262A"/>
-                          </a:solidFill>
-                          <a:latin typeface="Calibri"/>
-                        </a:rPr>
-                        <a:t>Frictionless benchmarks</a:t>
-                      </a:r>
-                    </a:p>
-                  </a:txBody>
-                  <a:tcPr marL="88900" marR="88900" marT="38100" marB="38100" anchor="ctr">
-                    <a:solidFill>
-                      <a:srgbClr val="FFFFFF"/>
-                    </a:solidFill>
-                  </a:tcPr>
-                </a:tc>
-                <a:tc>
-                  <a:txBody>
-                    <a:bodyPr wrap="square"/>
-                    <a:lstStyle/>
-                    <a:p>
-                      <a:pPr algn="l"/>
-                      <a:r>
-                        <a:rPr sz="1500" b="0">
-                          <a:solidFill>
-                            <a:srgbClr val="22262A"/>
-                          </a:solidFill>
-                          <a:latin typeface="Calibri"/>
-                        </a:rPr>
-                        <a:t>By convention; net-of-cost is reported uniformly across tracks.</a:t>
-                      </a:r>
-                    </a:p>
-                  </a:txBody>
-                  <a:tcPr marL="88900" marR="88900" marT="38100" marB="38100" anchor="ctr">
-                    <a:solidFill>
-                      <a:srgbClr val="FFFFFF"/>
-                    </a:solidFill>
-                  </a:tcPr>
-                </a:tc>
-              </a:tr>
-            </a:tbl>
-          </a:graphicData>
-        </a:graphic>
-      </p:graphicFrame>
+              <a:t>Fix the model; then make the same failure impossible to repeat silently.</a:t>
+            </a:r>
+          </a:p>
+        </p:txBody>
+      </p:sp>
+      <p:sp>
+        <p:nvSpPr>
+          <p:cNvPr id="7" name="TextBox 6"/>
+          <p:cNvSpPr txBox="1"/>
+          <p:nvPr/>
+        </p:nvSpPr>
+        <p:spPr>
+          <a:xfrm>
+            <a:off x="566928" y="2148840"/>
+            <a:ext cx="11055096" cy="3566160"/>
+          </a:xfrm>
+          <a:prstGeom prst="rect">
+            <a:avLst/>
+          </a:prstGeom>
+          <a:noFill/>
+        </p:spPr>
+        <p:txBody>
+          <a:bodyPr wrap="square">
+            <a:spAutoFit/>
+          </a:bodyPr>
+          <a:lstStyle/>
+          <a:p>
+            <a:pPr>
+              <a:lnSpc>
+                <a:spcPct val="102000"/>
+              </a:lnSpc>
+              <a:spcBef>
+                <a:spcPts val="0"/>
+              </a:spcBef>
+              <a:spcAft>
+                <a:spcPts val="1500"/>
+              </a:spcAft>
+            </a:pPr>
+            <a:r>
+              <a:rPr sz="1550">
+                <a:solidFill>
+                  <a:srgbClr val="1F77B4"/>
+                </a:solidFill>
+                <a:latin typeface="Calibri"/>
+              </a:rPr>
+              <a:t>▪  </a:t>
+            </a:r>
+            <a:r>
+              <a:rPr sz="1550" b="1">
+                <a:solidFill>
+                  <a:srgbClr val="22262A"/>
+                </a:solidFill>
+                <a:latin typeface="Calibri"/>
+              </a:rPr>
+              <a:t>Composed-spot inversion.  </a:t>
+            </a:r>
+            <a:r>
+              <a:rPr sz="1550">
+                <a:solidFill>
+                  <a:srgbClr val="22262A"/>
+                </a:solidFill>
+                <a:latin typeface="Calibri"/>
+              </a:rPr>
+              <a:t>CME is the martingale primary; the basis and its catch-up live on the fixing leg (the swap), not on the hedge.</a:t>
+            </a:r>
+          </a:p>
+          <a:p>
+            <a:pPr>
+              <a:lnSpc>
+                <a:spcPct val="102000"/>
+              </a:lnSpc>
+              <a:spcBef>
+                <a:spcPts val="0"/>
+              </a:spcBef>
+              <a:spcAft>
+                <a:spcPts val="1500"/>
+              </a:spcAft>
+            </a:pPr>
+            <a:r>
+              <a:rPr sz="1550">
+                <a:solidFill>
+                  <a:srgbClr val="1F77B4"/>
+                </a:solidFill>
+                <a:latin typeface="Calibri"/>
+              </a:rPr>
+              <a:t>▪  </a:t>
+            </a:r>
+            <a:r>
+              <a:rPr sz="1550" b="1">
+                <a:solidFill>
+                  <a:srgbClr val="22262A"/>
+                </a:solidFill>
+                <a:latin typeface="Calibri"/>
+              </a:rPr>
+              <a:t>Bound stamped on every row.  </a:t>
+            </a:r>
+            <a:r>
+              <a:rPr sz="1550">
+                <a:solidFill>
+                  <a:srgbClr val="22262A"/>
+                </a:solidFill>
+                <a:latin typeface="Calibri"/>
+              </a:rPr>
+              <a:t>Every backtest trade now records and asserts the causal-bound check.</a:t>
+            </a:r>
+          </a:p>
+          <a:p>
+            <a:pPr>
+              <a:lnSpc>
+                <a:spcPct val="102000"/>
+              </a:lnSpc>
+              <a:spcBef>
+                <a:spcPts val="0"/>
+              </a:spcBef>
+              <a:spcAft>
+                <a:spcPts val="1500"/>
+              </a:spcAft>
+            </a:pPr>
+            <a:r>
+              <a:rPr sz="1550">
+                <a:solidFill>
+                  <a:srgbClr val="1F77B4"/>
+                </a:solidFill>
+                <a:latin typeface="Calibri"/>
+              </a:rPr>
+              <a:t>▪  </a:t>
+            </a:r>
+            <a:r>
+              <a:rPr sz="1550" b="1">
+                <a:solidFill>
+                  <a:srgbClr val="22262A"/>
+                </a:solidFill>
+                <a:latin typeface="Calibri"/>
+              </a:rPr>
+              <a:t>Martingale guard at every calibration.  </a:t>
+            </a:r>
+            <a:r>
+              <a:rPr sz="1550">
+                <a:solidFill>
+                  <a:srgbClr val="22262A"/>
+                </a:solidFill>
+                <a:latin typeface="Calibri"/>
+              </a:rPr>
+              <a:t>E[dF|b] ≈ 0 is verified on the tradeables — in both log and price space (the price-space Jensen check added post-review) — before any solve.</a:t>
+            </a:r>
+          </a:p>
+          <a:p>
+            <a:pPr>
+              <a:lnSpc>
+                <a:spcPct val="102000"/>
+              </a:lnSpc>
+              <a:spcBef>
+                <a:spcPts val="0"/>
+              </a:spcBef>
+              <a:spcAft>
+                <a:spcPts val="1500"/>
+              </a:spcAft>
+            </a:pPr>
+            <a:r>
+              <a:rPr sz="1550">
+                <a:solidFill>
+                  <a:srgbClr val="1F77B4"/>
+                </a:solidFill>
+                <a:latin typeface="Calibri"/>
+              </a:rPr>
+              <a:t>▪  </a:t>
+            </a:r>
+            <a:r>
+              <a:rPr sz="1550" b="1">
+                <a:solidFill>
+                  <a:srgbClr val="22262A"/>
+                </a:solidFill>
+                <a:latin typeface="Calibri"/>
+              </a:rPr>
+              <a:t>Production-trust audit — 7 silent-failure paths closed.  </a:t>
+            </a:r>
+            <a:r>
+              <a:rPr sz="1550">
+                <a:solidFill>
+                  <a:srgbClr val="22262A"/>
+                </a:solidFill>
+                <a:latin typeface="Calibri"/>
+              </a:rPr>
+              <a:t>Fabricated realized tails; silently-random replay on npz typos; NaN-blind flags; non-atomic writes — all now fail loud.</a:t>
+            </a:r>
+          </a:p>
+        </p:txBody>
+      </p:sp>
       <p:sp>
         <p:nvSpPr>
           <p:cNvPr id="8" name="TextBox 7"/>
+          <p:cNvSpPr txBox="1"/>
+          <p:nvPr/>
+        </p:nvSpPr>
+        <p:spPr>
+          <a:xfrm>
+            <a:off x="566928" y="5623560"/>
+            <a:ext cx="11055096" cy="731520"/>
+          </a:xfrm>
+          <a:prstGeom prst="rect">
+            <a:avLst/>
+          </a:prstGeom>
+          <a:noFill/>
+        </p:spPr>
+        <p:txBody>
+          <a:bodyPr wrap="square" anchor="t" lIns="25400" rIns="25400" tIns="12700" bIns="12700">
+            <a:spAutoFit/>
+          </a:bodyPr>
+          <a:lstStyle/>
+          <a:p>
+            <a:pPr algn="l">
+              <a:lnSpc>
+                <a:spcPct val="105000"/>
+              </a:lnSpc>
+              <a:spcBef>
+                <a:spcPts val="0"/>
+              </a:spcBef>
+              <a:spcAft>
+                <a:spcPts val="400"/>
+              </a:spcAft>
+            </a:pPr>
+            <a:r>
+              <a:rPr sz="1500" b="1" i="0">
+                <a:solidFill>
+                  <a:srgbClr val="1F77B4"/>
+                </a:solidFill>
+                <a:latin typeface="Calibri"/>
+              </a:rPr>
+              <a:t>The strongest trust argument is not that the number is big — it is that we built the machinery to catch it when it was too big, and it worked.</a:t>
+            </a:r>
+          </a:p>
+        </p:txBody>
+      </p:sp>
+      <p:sp>
+        <p:nvSpPr>
+          <p:cNvPr id="9" name="TextBox 8"/>
           <p:cNvSpPr txBox="1"/>
           <p:nvPr/>
         </p:nvSpPr>
@@ -22867,7 +22873,7 @@
                 </a:solidFill>
                 <a:latin typeface="Calibri"/>
               </a:rPr>
-              <a:t>None of these overturn the headline mean; each is a scoped item for the next phase.</a:t>
+              <a:t>Production-trust audit: commit 0e2bd46. Composed-spot wiring: commit 3008d3c.</a:t>
             </a:r>
           </a:p>
         </p:txBody>
@@ -22938,7 +22944,7 @@
                 </a:solidFill>
                 <a:latin typeface="Calibri"/>
               </a:rPr>
-              <a:t>CLOSING  ·  2 OF 2</a:t>
+              <a:t>CLOSING  ·  1 OF 2</a:t>
             </a:r>
           </a:p>
         </p:txBody>
@@ -22983,7 +22989,7 @@
                 </a:solidFill>
                 <a:latin typeface="Calibri"/>
               </a:rPr>
-              <a:t>Recommended next steps</a:t>
+              <a:t>Caveats — stated plainly</a:t>
             </a:r>
           </a:p>
         </p:txBody>
@@ -23117,7 +23123,7 @@
                 </a:solidFill>
                 <a:latin typeface="Calibri"/>
               </a:rPr>
-              <a:t>The near-term path to production sign-off; the broader roadmap follows in Future Work.</a:t>
+              <a:t>What this result is NOT. Said openly, because that is the trust argument.</a:t>
             </a:r>
           </a:p>
         </p:txBody>
@@ -23132,17 +23138,17 @@
         </p:nvGraphicFramePr>
         <p:xfrm>
           <a:off x="566928" y="2103120"/>
-          <a:ext cx="11055095" cy="3291840"/>
+          <a:ext cx="11055095" cy="3621024"/>
         </p:xfrm>
         <a:graphic>
           <a:graphicData uri="http://schemas.openxmlformats.org/drawingml/2006/table">
             <a:tbl>
               <a:tblPr/>
               <a:tblGrid>
-                <a:gridCol w="3979834"/>
-                <a:gridCol w="7075261"/>
+                <a:gridCol w="3316528"/>
+                <a:gridCol w="7738567"/>
               </a:tblGrid>
-              <a:tr h="658368">
+              <a:tr h="603504">
                 <a:tc>
                   <a:txBody>
                     <a:bodyPr wrap="square"/>
@@ -23150,13 +23156,13 @@
                     <a:p>
                       <a:pPr algn="l"/>
                       <a:r>
-                        <a:rPr sz="1550" b="1">
+                        <a:rPr sz="1500" b="1">
                           <a:solidFill>
                             <a:srgbClr val="FFFFFF"/>
                           </a:solidFill>
                           <a:latin typeface="Calibri"/>
                         </a:rPr>
-                        <a:t>Step</a:t>
+                        <a:t>Caveat</a:t>
                       </a:r>
                     </a:p>
                   </a:txBody>
@@ -23173,13 +23179,13 @@
                     <a:p>
                       <a:pPr algn="l"/>
                       <a:r>
-                        <a:rPr sz="1550" b="1">
+                        <a:rPr sz="1500" b="1">
                           <a:solidFill>
                             <a:srgbClr val="FFFFFF"/>
                           </a:solidFill>
                           <a:latin typeface="Calibri"/>
                         </a:rPr>
-                        <a:t>Why</a:t>
+                        <a:t>What it means</a:t>
                       </a:r>
                     </a:p>
                   </a:txBody>
@@ -23190,7 +23196,7 @@
                   </a:tcPr>
                 </a:tc>
               </a:tr>
-              <a:tr h="658368">
+              <a:tr h="603504">
                 <a:tc>
                   <a:txBody>
                     <a:bodyPr wrap="square"/>
@@ -23198,13 +23204,13 @@
                     <a:p>
                       <a:pPr algn="l"/>
                       <a:r>
-                        <a:rPr sz="1550" b="1">
-                          <a:solidFill>
-                            <a:srgbClr val="22262A"/>
-                          </a:solidFill>
-                          <a:latin typeface="Calibri"/>
-                        </a:rPr>
-                        <a:t>Ship band 0.60 (0.40 available)</a:t>
+                        <a:rPr sz="1500" b="1">
+                          <a:solidFill>
+                            <a:srgbClr val="22262A"/>
+                          </a:solidFill>
+                          <a:latin typeface="Calibri"/>
+                        </a:rPr>
+                        <a:t>Seed / Monte-Carlo dispersion</a:t>
                       </a:r>
                     </a:p>
                   </a:txBody>
@@ -23221,13 +23227,13 @@
                     <a:p>
                       <a:pPr algn="l"/>
                       <a:r>
-                        <a:rPr sz="1550" b="0">
-                          <a:solidFill>
-                            <a:srgbClr val="22262A"/>
-                          </a:solidFill>
-                          <a:latin typeface="Calibri"/>
-                        </a:rPr>
-                        <a:t>One checkpoint set serves any mandate band — no per-client retraining.</a:t>
+                        <a:rPr sz="1500" b="0">
+                          <a:solidFill>
+                            <a:srgbClr val="22262A"/>
+                          </a:solidFill>
+                          <a:latin typeface="Calibri"/>
+                        </a:rPr>
+                        <a:t>Ensemble (3 seeds) + roll-inner 512 collapse month dispersion; only the 48-trade mean is quoted.</a:t>
                       </a:r>
                     </a:p>
                   </a:txBody>
@@ -23238,7 +23244,7 @@
                   </a:tcPr>
                 </a:tc>
               </a:tr>
-              <a:tr h="658368">
+              <a:tr h="603504">
                 <a:tc>
                   <a:txBody>
                     <a:bodyPr wrap="square"/>
@@ -23246,13 +23252,13 @@
                     <a:p>
                       <a:pPr algn="l"/>
                       <a:r>
-                        <a:rPr sz="1550" b="1">
-                          <a:solidFill>
-                            <a:srgbClr val="22262A"/>
-                          </a:solidFill>
-                          <a:latin typeface="Calibri"/>
-                        </a:rPr>
-                        <a:t>Realistic friction calibration</a:t>
+                        <a:rPr sz="1500" b="1">
+                          <a:solidFill>
+                            <a:srgbClr val="22262A"/>
+                          </a:solidFill>
+                          <a:latin typeface="Calibri"/>
+                        </a:rPr>
+                        <a:t>Out-of-sample window</a:t>
                       </a:r>
                     </a:p>
                   </a:txBody>
@@ -23269,13 +23275,13 @@
                     <a:p>
                       <a:pPr algn="l"/>
                       <a:r>
-                        <a:rPr sz="1550" b="0">
-                          <a:solidFill>
-                            <a:srgbClr val="22262A"/>
-                          </a:solidFill>
-                          <a:latin typeface="Calibri"/>
-                        </a:rPr>
-                        <a:t>Replace the flat 10 bps half-spread with measured CME microstructure friction.</a:t>
+                        <a:rPr sz="1500" b="0">
+                          <a:solidFill>
+                            <a:srgbClr val="22262A"/>
+                          </a:solidFill>
+                          <a:latin typeface="Calibri"/>
+                        </a:rPr>
+                        <a:t>Now four years (2020–2023) incl. COVID — still not multiple full cycles.</a:t>
                       </a:r>
                     </a:p>
                   </a:txBody>
@@ -23286,7 +23292,7 @@
                   </a:tcPr>
                 </a:tc>
               </a:tr>
-              <a:tr h="658368">
+              <a:tr h="603504">
                 <a:tc>
                   <a:txBody>
                     <a:bodyPr wrap="square"/>
@@ -23294,13 +23300,13 @@
                     <a:p>
                       <a:pPr algn="l"/>
                       <a:r>
-                        <a:rPr sz="1550" b="1">
-                          <a:solidFill>
-                            <a:srgbClr val="22262A"/>
-                          </a:solidFill>
-                          <a:latin typeface="Calibri"/>
-                        </a:rPr>
-                        <a:t>Guard as a hard gate</a:t>
+                        <a:rPr sz="1500" b="1">
+                          <a:solidFill>
+                            <a:srgbClr val="22262A"/>
+                          </a:solidFill>
+                          <a:latin typeface="Calibri"/>
+                        </a:rPr>
+                        <a:t>Realistic cost — now calibrated</a:t>
                       </a:r>
                     </a:p>
                   </a:txBody>
@@ -23317,13 +23323,13 @@
                     <a:p>
                       <a:pPr algn="l"/>
                       <a:r>
-                        <a:rPr sz="1550" b="0">
-                          <a:solidFill>
-                            <a:srgbClr val="22262A"/>
-                          </a:solidFill>
-                          <a:latin typeface="Calibri"/>
-                        </a:rPr>
-                        <a:t>Make E[dF | b] ≈ 0 block a calibration, not merely warn.</a:t>
+                        <a:rPr sz="1500" b="0">
+                          <a:solidFill>
+                            <a:srgbClr val="22262A"/>
+                          </a:solidFill>
+                          <a:latin typeface="Calibri"/>
+                        </a:rPr>
+                        <a:t>Net-of-cost verified under an OI/vol-calibrated CME friction model (M1/M2/M3 = 6/11/34 bps); band 0.15 holds. Residual: 2 pm-synced intraday spread capture.</a:t>
                       </a:r>
                     </a:p>
                   </a:txBody>
@@ -23334,7 +23340,7 @@
                   </a:tcPr>
                 </a:tc>
               </a:tr>
-              <a:tr h="658368">
+              <a:tr h="603504">
                 <a:tc>
                   <a:txBody>
                     <a:bodyPr wrap="square"/>
@@ -23342,13 +23348,13 @@
                     <a:p>
                       <a:pPr algn="l"/>
                       <a:r>
-                        <a:rPr sz="1550" b="1">
-                          <a:solidFill>
-                            <a:srgbClr val="22262A"/>
-                          </a:solidFill>
-                          <a:latin typeface="Calibri"/>
-                        </a:rPr>
-                        <a:t>Book of APS + band adaptivity</a:t>
+                        <a:rPr sz="1500" b="1">
+                          <a:solidFill>
+                            <a:srgbClr val="22262A"/>
+                          </a:solidFill>
+                          <a:latin typeface="Calibri"/>
+                        </a:rPr>
+                        <a:t>Utility-scale convention</a:t>
                       </a:r>
                     </a:p>
                   </a:txBody>
@@ -23365,19 +23371,67 @@
                     <a:p>
                       <a:pPr algn="l"/>
                       <a:r>
-                        <a:rPr sz="1550" b="0">
-                          <a:solidFill>
-                            <a:srgbClr val="22262A"/>
-                          </a:solidFill>
-                          <a:latin typeface="Calibri"/>
-                        </a:rPr>
-                        <a:t>The two capability steps that follow — detailed in Future Work.</a:t>
+                        <a:rPr sz="1500" b="0">
+                          <a:solidFill>
+                            <a:srgbClr val="22262A"/>
+                          </a:solidFill>
+                          <a:latin typeface="Calibri"/>
+                        </a:rPr>
+                        <a:t>Recently moved to calibration-derived (flagged; explicit override available).</a:t>
                       </a:r>
                     </a:p>
                   </a:txBody>
                   <a:tcPr marL="88900" marR="88900" marT="38100" marB="38100" anchor="ctr">
                     <a:solidFill>
                       <a:srgbClr val="F2F4F6"/>
+                    </a:solidFill>
+                  </a:tcPr>
+                </a:tc>
+              </a:tr>
+              <a:tr h="603504">
+                <a:tc>
+                  <a:txBody>
+                    <a:bodyPr wrap="square"/>
+                    <a:lstStyle/>
+                    <a:p>
+                      <a:pPr algn="l"/>
+                      <a:r>
+                        <a:rPr sz="1500" b="1">
+                          <a:solidFill>
+                            <a:srgbClr val="22262A"/>
+                          </a:solidFill>
+                          <a:latin typeface="Calibri"/>
+                        </a:rPr>
+                        <a:t>Frictionless benchmarks</a:t>
+                      </a:r>
+                    </a:p>
+                  </a:txBody>
+                  <a:tcPr marL="88900" marR="88900" marT="38100" marB="38100" anchor="ctr">
+                    <a:solidFill>
+                      <a:srgbClr val="FFFFFF"/>
+                    </a:solidFill>
+                  </a:tcPr>
+                </a:tc>
+                <a:tc>
+                  <a:txBody>
+                    <a:bodyPr wrap="square"/>
+                    <a:lstStyle/>
+                    <a:p>
+                      <a:pPr algn="l"/>
+                      <a:r>
+                        <a:rPr sz="1500" b="0">
+                          <a:solidFill>
+                            <a:srgbClr val="22262A"/>
+                          </a:solidFill>
+                          <a:latin typeface="Calibri"/>
+                        </a:rPr>
+                        <a:t>By convention; net-of-cost is reported uniformly across tracks.</a:t>
+                      </a:r>
+                    </a:p>
+                  </a:txBody>
+                  <a:tcPr marL="88900" marR="88900" marT="38100" marB="38100" anchor="ctr">
+                    <a:solidFill>
+                      <a:srgbClr val="FFFFFF"/>
                     </a:solidFill>
                   </a:tcPr>
                 </a:tc>
@@ -23426,7 +23480,7 @@
                 </a:solidFill>
                 <a:latin typeface="Calibri"/>
               </a:rPr>
-              <a:t>The corridor ships as a risk control today; friction calibration and the hard guard are the remaining sign-off items.</a:t>
+              <a:t>None of these overturn the headline mean; each is a scoped item for the next phase.</a:t>
             </a:r>
           </a:p>
         </p:txBody>
@@ -23474,20 +23528,30 @@
           <a:noFill/>
         </p:spPr>
         <p:txBody>
-          <a:bodyPr wrap="square" lIns="0" rIns="0" tIns="0" bIns="0">
+          <a:bodyPr wrap="square" anchor="t" lIns="25400" rIns="25400" tIns="12700" bIns="12700">
             <a:spAutoFit/>
           </a:bodyPr>
           <a:lstStyle/>
           <a:p>
-            <a:pPr algn="l"/>
-            <a:r>
-              <a:rPr sz="1250" b="1">
+            <a:pPr algn="l">
+              <a:lnSpc>
+                <a:spcPct val="100000"/>
+              </a:lnSpc>
+              <a:spcBef>
+                <a:spcPts val="0"/>
+              </a:spcBef>
+              <a:spcAft>
+                <a:spcPts val="400"/>
+              </a:spcAft>
+            </a:pPr>
+            <a:r>
+              <a:rPr sz="1250" b="1" i="0">
                 <a:solidFill>
                   <a:srgbClr val="1F77B4"/>
                 </a:solidFill>
                 <a:latin typeface="Calibri"/>
               </a:rPr>
-              <a:t>FUTURE WORK</a:t>
+              <a:t>CLOSING  ·  2 OF 2</a:t>
             </a:r>
           </a:p>
         </p:txBody>
@@ -23509,20 +23573,30 @@
           <a:noFill/>
         </p:spPr>
         <p:txBody>
-          <a:bodyPr wrap="square" lIns="0" rIns="0" tIns="0" bIns="0">
+          <a:bodyPr wrap="square" anchor="t" lIns="25400" rIns="25400" tIns="12700" bIns="12700">
             <a:spAutoFit/>
           </a:bodyPr>
           <a:lstStyle/>
           <a:p>
-            <a:pPr algn="l"/>
-            <a:r>
-              <a:rPr sz="2700" b="1">
+            <a:pPr algn="l">
+              <a:lnSpc>
+                <a:spcPct val="100000"/>
+              </a:lnSpc>
+              <a:spcBef>
+                <a:spcPts val="0"/>
+              </a:spcBef>
+              <a:spcAft>
+                <a:spcPts val="400"/>
+              </a:spcAft>
+            </a:pPr>
+            <a:r>
+              <a:rPr sz="2700" b="1" i="0">
                 <a:solidFill>
                   <a:srgbClr val="22262A"/>
                 </a:solidFill>
                 <a:latin typeface="Calibri"/>
               </a:rPr>
-              <a:t>Future work</a:t>
+              <a:t>Recommended next steps</a:t>
             </a:r>
           </a:p>
         </p:txBody>
@@ -23536,7 +23610,7 @@
         <p:spPr>
           <a:xfrm>
             <a:off x="566928" y="1298448"/>
-            <a:ext cx="11055096" cy="27432"/>
+            <a:ext cx="11055096" cy="27940"/>
           </a:xfrm>
           <a:prstGeom prst="rect">
             <a:avLst/>
@@ -23547,6 +23621,7 @@
           <a:ln>
             <a:noFill/>
           </a:ln>
+          <a:effectLst/>
         </p:spPr>
         <p:style>
           <a:lnRef idx="1">
@@ -23578,6 +23653,51 @@
         </p:nvSpPr>
         <p:spPr>
           <a:xfrm>
+            <a:off x="11612880" y="6455664"/>
+            <a:ext cx="457200" cy="274320"/>
+          </a:xfrm>
+          <a:prstGeom prst="rect">
+            <a:avLst/>
+          </a:prstGeom>
+          <a:noFill/>
+        </p:spPr>
+        <p:txBody>
+          <a:bodyPr wrap="square" anchor="t" lIns="25400" rIns="25400" tIns="12700" bIns="12700">
+            <a:spAutoFit/>
+          </a:bodyPr>
+          <a:lstStyle/>
+          <a:p>
+            <a:pPr algn="r">
+              <a:lnSpc>
+                <a:spcPct val="100000"/>
+              </a:lnSpc>
+              <a:spcBef>
+                <a:spcPts val="0"/>
+              </a:spcBef>
+              <a:spcAft>
+                <a:spcPts val="400"/>
+              </a:spcAft>
+            </a:pPr>
+            <a:r>
+              <a:rPr sz="1000" b="0" i="0">
+                <a:solidFill>
+                  <a:srgbClr val="6B7278"/>
+                </a:solidFill>
+                <a:latin typeface="Calibri"/>
+              </a:rPr>
+              <a:t>36</a:t>
+            </a:r>
+          </a:p>
+        </p:txBody>
+      </p:sp>
+      <p:sp>
+        <p:nvSpPr>
+          <p:cNvPr id="6" name="TextBox 5"/>
+          <p:cNvSpPr txBox="1"/>
+          <p:nvPr/>
+        </p:nvSpPr>
+        <p:spPr>
+          <a:xfrm>
             <a:off x="566928" y="1444752"/>
             <a:ext cx="11055096" cy="640080"/>
           </a:xfrm>
@@ -23587,55 +23707,30 @@
           <a:noFill/>
         </p:spPr>
         <p:txBody>
-          <a:bodyPr wrap="square" lIns="0" rIns="0" tIns="0" bIns="0">
+          <a:bodyPr wrap="square" anchor="t" lIns="25400" rIns="25400" tIns="12700" bIns="12700">
             <a:spAutoFit/>
           </a:bodyPr>
           <a:lstStyle/>
           <a:p>
-            <a:pPr algn="l"/>
-            <a:r>
-              <a:rPr sz="1650" b="0">
+            <a:pPr algn="l">
+              <a:lnSpc>
+                <a:spcPct val="105000"/>
+              </a:lnSpc>
+              <a:spcBef>
+                <a:spcPts val="0"/>
+              </a:spcBef>
+              <a:spcAft>
+                <a:spcPts val="400"/>
+              </a:spcAft>
+            </a:pPr>
+            <a:r>
+              <a:rPr sz="1650" b="0" i="0">
                 <a:solidFill>
                   <a:srgbClr val="2B3A42"/>
                 </a:solidFill>
                 <a:latin typeface="Calibri"/>
               </a:rPr>
-              <a:t>Eight scoped items, ordered by leverage.</a:t>
-            </a:r>
-          </a:p>
-        </p:txBody>
-      </p:sp>
-      <p:sp>
-        <p:nvSpPr>
-          <p:cNvPr id="6" name="TextBox 5"/>
-          <p:cNvSpPr txBox="1"/>
-          <p:nvPr/>
-        </p:nvSpPr>
-        <p:spPr>
-          <a:xfrm>
-            <a:off x="11612880" y="6455664"/>
-            <a:ext cx="457200" cy="274320"/>
-          </a:xfrm>
-          <a:prstGeom prst="rect">
-            <a:avLst/>
-          </a:prstGeom>
-          <a:noFill/>
-        </p:spPr>
-        <p:txBody>
-          <a:bodyPr wrap="square" lIns="0" rIns="0" tIns="0" bIns="0">
-            <a:spAutoFit/>
-          </a:bodyPr>
-          <a:lstStyle/>
-          <a:p>
-            <a:pPr algn="r"/>
-            <a:r>
-              <a:rPr sz="1000" b="0">
-                <a:solidFill>
-                  <a:srgbClr val="6B7278"/>
-                </a:solidFill>
-                <a:latin typeface="Calibri"/>
-              </a:rPr>
-              <a:t>36</a:t>
+              <a:t>The near-term path to production sign-off; the broader roadmap follows in Future Work.</a:t>
             </a:r>
           </a:p>
         </p:txBody>
@@ -23649,32 +23744,32 @@
           <p:nvPr/>
         </p:nvGraphicFramePr>
         <p:xfrm>
-          <a:off x="566928" y="2148840"/>
-          <a:ext cx="11055095" cy="3977632"/>
+          <a:off x="566928" y="2103120"/>
+          <a:ext cx="11055095" cy="3291840"/>
         </p:xfrm>
         <a:graphic>
           <a:graphicData uri="http://schemas.openxmlformats.org/drawingml/2006/table">
             <a:tbl>
               <a:tblPr/>
               <a:tblGrid>
-                <a:gridCol w="3246120"/>
-                <a:gridCol w="7808975"/>
+                <a:gridCol w="3979834"/>
+                <a:gridCol w="7075261"/>
               </a:tblGrid>
-              <a:tr h="497204">
-                <a:tc>
-                  <a:txBody>
-                    <a:bodyPr/>
+              <a:tr h="658368">
+                <a:tc>
+                  <a:txBody>
+                    <a:bodyPr wrap="square"/>
                     <a:lstStyle/>
                     <a:p>
                       <a:pPr algn="l"/>
                       <a:r>
-                        <a:rPr sz="1350" b="1">
+                        <a:rPr sz="1550" b="1">
                           <a:solidFill>
                             <a:srgbClr val="FFFFFF"/>
                           </a:solidFill>
                           <a:latin typeface="Calibri"/>
                         </a:rPr>
-                        <a:t>Item</a:t>
+                        <a:t>Step</a:t>
                       </a:r>
                     </a:p>
                   </a:txBody>
@@ -23686,18 +23781,18 @@
                 </a:tc>
                 <a:tc>
                   <a:txBody>
-                    <a:bodyPr/>
+                    <a:bodyPr wrap="square"/>
                     <a:lstStyle/>
                     <a:p>
                       <a:pPr algn="l"/>
                       <a:r>
-                        <a:rPr sz="1350" b="1">
+                        <a:rPr sz="1550" b="1">
                           <a:solidFill>
                             <a:srgbClr val="FFFFFF"/>
                           </a:solidFill>
                           <a:latin typeface="Calibri"/>
                         </a:rPr>
-                        <a:t>Plan / value</a:t>
+                        <a:t>Why</a:t>
                       </a:r>
                     </a:p>
                   </a:txBody>
@@ -23708,21 +23803,21 @@
                   </a:tcPr>
                 </a:tc>
               </a:tr>
-              <a:tr h="497204">
-                <a:tc>
-                  <a:txBody>
-                    <a:bodyPr/>
+              <a:tr h="658368">
+                <a:tc>
+                  <a:txBody>
+                    <a:bodyPr wrap="square"/>
                     <a:lstStyle/>
                     <a:p>
                       <a:pPr algn="l"/>
                       <a:r>
-                        <a:rPr sz="1350" b="1">
-                          <a:solidFill>
-                            <a:srgbClr val="22262A"/>
-                          </a:solidFill>
-                          <a:latin typeface="Calibri"/>
-                        </a:rPr>
-                        <a:t>Book of APS — netted corridors</a:t>
+                        <a:rPr sz="1550" b="1">
+                          <a:solidFill>
+                            <a:srgbClr val="22262A"/>
+                          </a:solidFill>
+                          <a:latin typeface="Calibri"/>
+                        </a:rPr>
+                        <a:t>Adopt band 0.15 as the production point</a:t>
                       </a:r>
                     </a:p>
                   </a:txBody>
@@ -23734,18 +23829,18 @@
                 </a:tc>
                 <a:tc>
                   <a:txBody>
-                    <a:bodyPr/>
+                    <a:bodyPr wrap="square"/>
                     <a:lstStyle/>
                     <a:p>
                       <a:pPr algn="l"/>
                       <a:r>
-                        <a:rPr sz="1350" b="0">
-                          <a:solidFill>
-                            <a:srgbClr val="22262A"/>
-                          </a:solidFill>
-                          <a:latin typeface="Calibri"/>
-                        </a:rPr>
-                        <a:t>Net fence across deals (e.g. 2 long + 1 short, expiries ≤ 4 mo). Sign-crossing schedules already supported; needs a book-level driver + validation.</a:t>
+                        <a:rPr sz="1550" b="0">
+                          <a:solidFill>
+                            <a:srgbClr val="22262A"/>
+                          </a:solidFill>
+                          <a:latin typeface="Calibri"/>
+                        </a:rPr>
+                        <a:t>One checkpoint set serves any mandate band (0.60 shipped-interim, 0.40 available); the tail diagnosis (slide 31) makes 0.15 structural, not a preference.</a:t>
                       </a:r>
                     </a:p>
                   </a:txBody>
@@ -23756,21 +23851,21 @@
                   </a:tcPr>
                 </a:tc>
               </a:tr>
-              <a:tr h="497204">
-                <a:tc>
-                  <a:txBody>
-                    <a:bodyPr/>
+              <a:tr h="658368">
+                <a:tc>
+                  <a:txBody>
+                    <a:bodyPr wrap="square"/>
                     <a:lstStyle/>
                     <a:p>
                       <a:pPr algn="l"/>
                       <a:r>
-                        <a:rPr sz="1350" b="1">
-                          <a:solidFill>
-                            <a:srgbClr val="22262A"/>
-                          </a:solidFill>
-                          <a:latin typeface="Calibri"/>
-                        </a:rPr>
-                        <a:t>Band adaptivity from EXTERNAL signal</a:t>
+                        <a:rPr sz="1550" b="1">
+                          <a:solidFill>
+                            <a:srgbClr val="22262A"/>
+                          </a:solidFill>
+                          <a:latin typeface="Calibri"/>
+                        </a:rPr>
+                        <a:t>Intraday friction — final capture</a:t>
                       </a:r>
                     </a:p>
                   </a:txBody>
@@ -23782,18 +23877,18 @@
                 </a:tc>
                 <a:tc>
                   <a:txBody>
-                    <a:bodyPr/>
+                    <a:bodyPr wrap="square"/>
                     <a:lstStyle/>
                     <a:p>
                       <a:pPr algn="l"/>
                       <a:r>
-                        <a:rPr sz="1350" b="0">
-                          <a:solidFill>
-                            <a:srgbClr val="22262A"/>
-                          </a:solidFill>
-                          <a:latin typeface="Calibri"/>
-                        </a:rPr>
-                        <a:t>Condition the band on realized vol / regime state; leave-one-out validated on the 48 months. The only route to the ≈ +20/oz hindsight headroom.</a:t>
+                        <a:rPr sz="1550" b="0">
+                          <a:solidFill>
+                            <a:srgbClr val="22262A"/>
+                          </a:solidFill>
+                          <a:latin typeface="Calibri"/>
+                        </a:rPr>
+                        <a:t>Realistic OI/vol cost model is DONE (band 0.15 holds net of cost); the remainder is 2 pm-synced intraday spread capture.</a:t>
                       </a:r>
                     </a:p>
                   </a:txBody>
@@ -23804,21 +23899,21 @@
                   </a:tcPr>
                 </a:tc>
               </a:tr>
-              <a:tr h="497204">
-                <a:tc>
-                  <a:txBody>
-                    <a:bodyPr/>
+              <a:tr h="658368">
+                <a:tc>
+                  <a:txBody>
+                    <a:bodyPr wrap="square"/>
                     <a:lstStyle/>
                     <a:p>
                       <a:pPr algn="l"/>
                       <a:r>
-                        <a:rPr sz="1350" b="1">
-                          <a:solidFill>
-                            <a:srgbClr val="22262A"/>
-                          </a:solidFill>
-                          <a:latin typeface="Calibri"/>
-                        </a:rPr>
-                        <a:t>Intraday-calibrated CME friction</a:t>
+                        <a:rPr sz="1550" b="1">
+                          <a:solidFill>
+                            <a:srgbClr val="22262A"/>
+                          </a:solidFill>
+                          <a:latin typeface="Calibri"/>
+                        </a:rPr>
+                        <a:t>Guard as a hard gate</a:t>
                       </a:r>
                     </a:p>
                   </a:txBody>
@@ -23830,18 +23925,18 @@
                 </a:tc>
                 <a:tc>
                   <a:txBody>
-                    <a:bodyPr/>
+                    <a:bodyPr wrap="square"/>
                     <a:lstStyle/>
                     <a:p>
                       <a:pPr algn="l"/>
                       <a:r>
-                        <a:rPr sz="1350" b="0">
-                          <a:solidFill>
-                            <a:srgbClr val="22262A"/>
-                          </a:solidFill>
-                          <a:latin typeface="Calibri"/>
-                        </a:rPr>
-                        <a:t>DONE — net-of-cost band ranking re-verified under a realistic maturity/vol cost model (M1/M2/M3 = 6/11/34 bps, OI-calibrated); band 0.15 holds under base and stressed cost. Remaining: 2 pm-synced intraday spread capture, revisit as it accrues.</a:t>
+                        <a:rPr sz="1550" b="0">
+                          <a:solidFill>
+                            <a:srgbClr val="22262A"/>
+                          </a:solidFill>
+                          <a:latin typeface="Calibri"/>
+                        </a:rPr>
+                        <a:t>Make E[dF | b] ≈ 0 block a calibration, not merely warn.</a:t>
                       </a:r>
                     </a:p>
                   </a:txBody>
@@ -23852,21 +23947,21 @@
                   </a:tcPr>
                 </a:tc>
               </a:tr>
-              <a:tr h="497204">
-                <a:tc>
-                  <a:txBody>
-                    <a:bodyPr/>
+              <a:tr h="658368">
+                <a:tc>
+                  <a:txBody>
+                    <a:bodyPr wrap="square"/>
                     <a:lstStyle/>
                     <a:p>
                       <a:pPr algn="l"/>
                       <a:r>
-                        <a:rPr sz="1350" b="1">
-                          <a:solidFill>
-                            <a:srgbClr val="22262A"/>
-                          </a:solidFill>
-                          <a:latin typeface="Calibri"/>
-                        </a:rPr>
-                        <a:t>Re-validate cross-market dual-strip</a:t>
+                        <a:rPr sz="1550" b="1">
+                          <a:solidFill>
+                            <a:srgbClr val="22262A"/>
+                          </a:solidFill>
+                          <a:latin typeface="Calibri"/>
+                        </a:rPr>
+                        <a:t>Book of APS + band adaptivity</a:t>
                       </a:r>
                     </a:p>
                   </a:txBody>
@@ -23878,210 +23973,18 @@
                 </a:tc>
                 <a:tc>
                   <a:txBody>
-                    <a:bodyPr/>
+                    <a:bodyPr wrap="square"/>
                     <a:lstStyle/>
                     <a:p>
                       <a:pPr algn="l"/>
                       <a:r>
-                        <a:rPr sz="1350" b="0">
-                          <a:solidFill>
-                            <a:srgbClr val="22262A"/>
-                          </a:solidFill>
-                          <a:latin typeface="Calibri"/>
-                        </a:rPr>
-                        <a:t>Confirm the CME-strip / LME-liability edge holds in the corrected martingale world.</a:t>
-                      </a:r>
-                    </a:p>
-                  </a:txBody>
-                  <a:tcPr marL="88900" marR="88900" marT="38100" marB="38100" anchor="ctr">
-                    <a:solidFill>
-                      <a:srgbClr val="F2F4F6"/>
-                    </a:solidFill>
-                  </a:tcPr>
-                </a:tc>
-              </a:tr>
-              <a:tr h="497204">
-                <a:tc>
-                  <a:txBody>
-                    <a:bodyPr/>
-                    <a:lstStyle/>
-                    <a:p>
-                      <a:pPr algn="l"/>
-                      <a:r>
-                        <a:rPr sz="1350" b="1">
-                          <a:solidFill>
-                            <a:srgbClr val="22262A"/>
-                          </a:solidFill>
-                          <a:latin typeface="Calibri"/>
-                        </a:rPr>
-                        <a:t>Hard calibration gate</a:t>
-                      </a:r>
-                    </a:p>
-                  </a:txBody>
-                  <a:tcPr marL="88900" marR="88900" marT="38100" marB="38100" anchor="ctr">
-                    <a:solidFill>
-                      <a:srgbClr val="FFFFFF"/>
-                    </a:solidFill>
-                  </a:tcPr>
-                </a:tc>
-                <a:tc>
-                  <a:txBody>
-                    <a:bodyPr/>
-                    <a:lstStyle/>
-                    <a:p>
-                      <a:pPr algn="l"/>
-                      <a:r>
-                        <a:rPr sz="1350" b="0">
-                          <a:solidFill>
-                            <a:srgbClr val="22262A"/>
-                          </a:solidFill>
-                          <a:latin typeface="Calibri"/>
-                        </a:rPr>
-                        <a:t>Make E[dF] ≈ 0 on every tradeable a blocking check at every calibration — institutionalize the integrity lesson.</a:t>
-                      </a:r>
-                    </a:p>
-                  </a:txBody>
-                  <a:tcPr marL="88900" marR="88900" marT="38100" marB="38100" anchor="ctr">
-                    <a:solidFill>
-                      <a:srgbClr val="FFFFFF"/>
-                    </a:solidFill>
-                  </a:tcPr>
-                </a:tc>
-              </a:tr>
-              <a:tr h="497204">
-                <a:tc>
-                  <a:txBody>
-                    <a:bodyPr/>
-                    <a:lstStyle/>
-                    <a:p>
-                      <a:pPr algn="l"/>
-                      <a:r>
-                        <a:rPr sz="1350" b="1">
-                          <a:solidFill>
-                            <a:srgbClr val="22262A"/>
-                          </a:solidFill>
-                          <a:latin typeface="Calibri"/>
-                        </a:rPr>
-                        <a:t>Multi-GPU scale-out</a:t>
-                      </a:r>
-                    </a:p>
-                  </a:txBody>
-                  <a:tcPr marL="88900" marR="88900" marT="38100" marB="38100" anchor="ctr">
-                    <a:solidFill>
-                      <a:srgbClr val="F2F4F6"/>
-                    </a:solidFill>
-                  </a:tcPr>
-                </a:tc>
-                <a:tc>
-                  <a:txBody>
-                    <a:bodyPr/>
-                    <a:lstStyle/>
-                    <a:p>
-                      <a:pPr algn="l"/>
-                      <a:r>
-                        <a:rPr sz="1350" b="0">
-                          <a:solidFill>
-                            <a:srgbClr val="22262A"/>
-                          </a:solidFill>
-                          <a:latin typeface="Calibri"/>
-                        </a:rPr>
-                        <a:t>Recipe documented for 4×A100 servers (batch / inner parameters).</a:t>
-                      </a:r>
-                    </a:p>
-                  </a:txBody>
-                  <a:tcPr marL="88900" marR="88900" marT="38100" marB="38100" anchor="ctr">
-                    <a:solidFill>
-                      <a:srgbClr val="F2F4F6"/>
-                    </a:solidFill>
-                  </a:tcPr>
-                </a:tc>
-              </a:tr>
-              <a:tr h="497204">
-                <a:tc>
-                  <a:txBody>
-                    <a:bodyPr/>
-                    <a:lstStyle/>
-                    <a:p>
-                      <a:pPr algn="l"/>
-                      <a:r>
-                        <a:rPr sz="1350" b="1">
-                          <a:solidFill>
-                            <a:srgbClr val="22262A"/>
-                          </a:solidFill>
-                          <a:latin typeface="Calibri"/>
-                        </a:rPr>
-                        <a:t>Basis recalibration (GARCH world)</a:t>
-                      </a:r>
-                    </a:p>
-                  </a:txBody>
-                  <a:tcPr marL="88900" marR="88900" marT="38100" marB="38100" anchor="ctr">
-                    <a:solidFill>
-                      <a:srgbClr val="FFFFFF"/>
-                    </a:solidFill>
-                  </a:tcPr>
-                </a:tc>
-                <a:tc>
-                  <a:txBody>
-                    <a:bodyPr/>
-                    <a:lstStyle/>
-                    <a:p>
-                      <a:pPr algn="l"/>
-                      <a:r>
-                        <a:rPr sz="1350" b="0">
-                          <a:solidFill>
-                            <a:srgbClr val="22262A"/>
-                          </a:solidFill>
-                          <a:latin typeface="Calibri"/>
-                        </a:rPr>
-                        <a:t>In the GARCH world the basis model's regime linkage is temporarily FLATTENED (flat Σ, σ = 8.079 — the stationary regime mix); no regime-publishing primary to link to. Awaits the 2 pm-synced recalibration. Known interim.</a:t>
-                      </a:r>
-                    </a:p>
-                  </a:txBody>
-                  <a:tcPr marL="88900" marR="88900" marT="38100" marB="38100" anchor="ctr">
-                    <a:solidFill>
-                      <a:srgbClr val="FFFFFF"/>
-                    </a:solidFill>
-                  </a:tcPr>
-                </a:tc>
-              </a:tr>
-              <a:tr h="497204">
-                <a:tc>
-                  <a:txBody>
-                    <a:bodyPr/>
-                    <a:lstStyle/>
-                    <a:p>
-                      <a:pPr algn="l"/>
-                      <a:r>
-                        <a:rPr sz="1350" b="1">
-                          <a:solidFill>
-                            <a:srgbClr val="22262A"/>
-                          </a:solidFill>
-                          <a:latin typeface="Calibri"/>
-                        </a:rPr>
-                        <a:t>Hedge the LME basis floor</a:t>
-                      </a:r>
-                    </a:p>
-                  </a:txBody>
-                  <a:tcPr marL="88900" marR="88900" marT="38100" marB="38100" anchor="ctr">
-                    <a:solidFill>
-                      <a:srgbClr val="F2F4F6"/>
-                    </a:solidFill>
-                  </a:tcPr>
-                </a:tc>
-                <a:tc>
-                  <a:txBody>
-                    <a:bodyPr/>
-                    <a:lstStyle/>
-                    <a:p>
-                      <a:pPr algn="l"/>
-                      <a:r>
-                        <a:rPr sz="1350" b="0">
-                          <a:solidFill>
-                            <a:srgbClr val="22262A"/>
-                          </a:solidFill>
-                          <a:latin typeface="Calibri"/>
-                        </a:rPr>
-                        <a:t>At tight bands ≈79% of residual std is basis (ρ → +0.72 at 0.15); a CME-only strip cannot hedge it (≈25 $/oz wall). Add an LME-priced instrument to attack the residual variance.</a:t>
+                        <a:rPr sz="1550" b="0">
+                          <a:solidFill>
+                            <a:srgbClr val="22262A"/>
+                          </a:solidFill>
+                          <a:latin typeface="Calibri"/>
+                        </a:rPr>
+                        <a:t>The two capability steps that follow — detailed in Future Work.</a:t>
                       </a:r>
                     </a:p>
                   </a:txBody>
@@ -24113,20 +24016,30 @@
           <a:noFill/>
         </p:spPr>
         <p:txBody>
-          <a:bodyPr wrap="square" lIns="0" rIns="0" tIns="0" bIns="0">
+          <a:bodyPr wrap="square" anchor="t" lIns="25400" rIns="25400" tIns="12700" bIns="12700">
             <a:spAutoFit/>
           </a:bodyPr>
           <a:lstStyle/>
           <a:p>
-            <a:pPr algn="l"/>
-            <a:r>
-              <a:rPr sz="950" b="0">
+            <a:pPr algn="l">
+              <a:lnSpc>
+                <a:spcPct val="100000"/>
+              </a:lnSpc>
+              <a:spcBef>
+                <a:spcPts val="0"/>
+              </a:spcBef>
+              <a:spcAft>
+                <a:spcPts val="400"/>
+              </a:spcAft>
+            </a:pPr>
+            <a:r>
+              <a:rPr sz="950" b="0" i="1">
                 <a:solidFill>
                   <a:srgbClr val="6B7278"/>
                 </a:solidFill>
                 <a:latin typeface="Calibri"/>
               </a:rPr>
-              <a:t>STATUS_NOTE_corridor.md open items. Machinery: Total_Position_Schedule — per-step [Min_Total, Max_Total] knots on the signed total position.</a:t>
+              <a:t>The corridor ships as a risk control today; the hard guard remains a sign-off item. Fence-as-mandate (0.15) vs a min-variance objective (slide 31) is an open management decision.</a:t>
             </a:r>
           </a:p>
         </p:txBody>
@@ -24174,30 +24087,20 @@
           <a:noFill/>
         </p:spPr>
         <p:txBody>
-          <a:bodyPr wrap="square" anchor="t" lIns="25400" rIns="25400" tIns="12700" bIns="12700">
+          <a:bodyPr wrap="square" lIns="0" rIns="0" tIns="0" bIns="0">
             <a:spAutoFit/>
           </a:bodyPr>
           <a:lstStyle/>
           <a:p>
-            <a:pPr algn="l">
-              <a:lnSpc>
-                <a:spcPct val="100000"/>
-              </a:lnSpc>
-              <a:spcBef>
-                <a:spcPts val="0"/>
-              </a:spcBef>
-              <a:spcAft>
-                <a:spcPts val="400"/>
-              </a:spcAft>
-            </a:pPr>
-            <a:r>
-              <a:rPr sz="1250" b="1" i="0">
+            <a:pPr algn="l"/>
+            <a:r>
+              <a:rPr sz="1250" b="1">
                 <a:solidFill>
                   <a:srgbClr val="1F77B4"/>
                 </a:solidFill>
                 <a:latin typeface="Calibri"/>
               </a:rPr>
-              <a:t>QUANT APPENDIX  ·  1 OF 4</a:t>
+              <a:t>FUTURE WORK</a:t>
             </a:r>
           </a:p>
         </p:txBody>
@@ -24219,30 +24122,20 @@
           <a:noFill/>
         </p:spPr>
         <p:txBody>
-          <a:bodyPr wrap="square" anchor="t" lIns="25400" rIns="25400" tIns="12700" bIns="12700">
+          <a:bodyPr wrap="square" lIns="0" rIns="0" tIns="0" bIns="0">
             <a:spAutoFit/>
           </a:bodyPr>
           <a:lstStyle/>
           <a:p>
-            <a:pPr algn="l">
-              <a:lnSpc>
-                <a:spcPct val="100000"/>
-              </a:lnSpc>
-              <a:spcBef>
-                <a:spcPts val="0"/>
-              </a:spcBef>
-              <a:spcAft>
-                <a:spcPts val="400"/>
-              </a:spcAft>
-            </a:pPr>
-            <a:r>
-              <a:rPr sz="2700" b="1" i="0">
+            <a:pPr algn="l"/>
+            <a:r>
+              <a:rPr sz="2700" b="1">
                 <a:solidFill>
                   <a:srgbClr val="22262A"/>
                 </a:solidFill>
                 <a:latin typeface="Calibri"/>
               </a:rPr>
-              <a:t>Appendix — the identified joint law</a:t>
+              <a:t>Future work</a:t>
             </a:r>
           </a:p>
         </p:txBody>
@@ -24256,7 +24149,7 @@
         <p:spPr>
           <a:xfrm>
             <a:off x="566928" y="1298448"/>
-            <a:ext cx="11055096" cy="27940"/>
+            <a:ext cx="11055096" cy="27432"/>
           </a:xfrm>
           <a:prstGeom prst="rect">
             <a:avLst/>
@@ -24267,7 +24160,6 @@
           <a:ln>
             <a:noFill/>
           </a:ln>
-          <a:effectLst/>
         </p:spPr>
         <p:style>
           <a:lnRef idx="1">
@@ -24299,6 +24191,41 @@
         </p:nvSpPr>
         <p:spPr>
           <a:xfrm>
+            <a:off x="566928" y="1444752"/>
+            <a:ext cx="11055096" cy="640080"/>
+          </a:xfrm>
+          <a:prstGeom prst="rect">
+            <a:avLst/>
+          </a:prstGeom>
+          <a:noFill/>
+        </p:spPr>
+        <p:txBody>
+          <a:bodyPr wrap="square" lIns="0" rIns="0" tIns="0" bIns="0">
+            <a:spAutoFit/>
+          </a:bodyPr>
+          <a:lstStyle/>
+          <a:p>
+            <a:pPr algn="l"/>
+            <a:r>
+              <a:rPr sz="1650" b="0">
+                <a:solidFill>
+                  <a:srgbClr val="2B3A42"/>
+                </a:solidFill>
+                <a:latin typeface="Calibri"/>
+              </a:rPr>
+              <a:t>Eight scoped items, ordered by leverage. The open structural choice on the loss tail — fence-as-mandate vs a min-variance objective — is on slide 31.</a:t>
+            </a:r>
+          </a:p>
+        </p:txBody>
+      </p:sp>
+      <p:sp>
+        <p:nvSpPr>
+          <p:cNvPr id="6" name="TextBox 5"/>
+          <p:cNvSpPr txBox="1"/>
+          <p:nvPr/>
+        </p:nvSpPr>
+        <p:spPr>
+          <a:xfrm>
             <a:off x="11612880" y="6455664"/>
             <a:ext cx="457200" cy="274320"/>
           </a:xfrm>
@@ -24308,24 +24235,14 @@
           <a:noFill/>
         </p:spPr>
         <p:txBody>
-          <a:bodyPr wrap="square" anchor="t" lIns="25400" rIns="25400" tIns="12700" bIns="12700">
+          <a:bodyPr wrap="square" lIns="0" rIns="0" tIns="0" bIns="0">
             <a:spAutoFit/>
           </a:bodyPr>
           <a:lstStyle/>
           <a:p>
-            <a:pPr algn="r">
-              <a:lnSpc>
-                <a:spcPct val="100000"/>
-              </a:lnSpc>
-              <a:spcBef>
-                <a:spcPts val="0"/>
-              </a:spcBef>
-              <a:spcAft>
-                <a:spcPts val="400"/>
-              </a:spcAft>
-            </a:pPr>
-            <a:r>
-              <a:rPr sz="1000" b="0" i="0">
+            <a:pPr algn="r"/>
+            <a:r>
+              <a:rPr sz="1000" b="0">
                 <a:solidFill>
                   <a:srgbClr val="6B7278"/>
                 </a:solidFill>
@@ -24336,16 +24253,472 @@
           </a:p>
         </p:txBody>
       </p:sp>
-      <p:sp>
-        <p:nvSpPr>
-          <p:cNvPr id="6" name="TextBox 5"/>
+      <p:graphicFrame>
+        <p:nvGraphicFramePr>
+          <p:cNvPr id="7" name="Table 6"/>
+          <p:cNvGraphicFramePr>
+            <a:graphicFrameLocks noGrp="1"/>
+          </p:cNvGraphicFramePr>
+          <p:nvPr/>
+        </p:nvGraphicFramePr>
+        <p:xfrm>
+          <a:off x="566928" y="2148840"/>
+          <a:ext cx="11055095" cy="3977632"/>
+        </p:xfrm>
+        <a:graphic>
+          <a:graphicData uri="http://schemas.openxmlformats.org/drawingml/2006/table">
+            <a:tbl>
+              <a:tblPr/>
+              <a:tblGrid>
+                <a:gridCol w="3246120"/>
+                <a:gridCol w="7808975"/>
+              </a:tblGrid>
+              <a:tr h="497204">
+                <a:tc>
+                  <a:txBody>
+                    <a:bodyPr/>
+                    <a:lstStyle/>
+                    <a:p>
+                      <a:pPr algn="l"/>
+                      <a:r>
+                        <a:rPr sz="1350" b="1">
+                          <a:solidFill>
+                            <a:srgbClr val="FFFFFF"/>
+                          </a:solidFill>
+                          <a:latin typeface="Calibri"/>
+                        </a:rPr>
+                        <a:t>Item</a:t>
+                      </a:r>
+                    </a:p>
+                  </a:txBody>
+                  <a:tcPr marL="88900" marR="88900" marT="38100" marB="38100" anchor="ctr">
+                    <a:solidFill>
+                      <a:srgbClr val="2B3A42"/>
+                    </a:solidFill>
+                  </a:tcPr>
+                </a:tc>
+                <a:tc>
+                  <a:txBody>
+                    <a:bodyPr/>
+                    <a:lstStyle/>
+                    <a:p>
+                      <a:pPr algn="l"/>
+                      <a:r>
+                        <a:rPr sz="1350" b="1">
+                          <a:solidFill>
+                            <a:srgbClr val="FFFFFF"/>
+                          </a:solidFill>
+                          <a:latin typeface="Calibri"/>
+                        </a:rPr>
+                        <a:t>Plan / value</a:t>
+                      </a:r>
+                    </a:p>
+                  </a:txBody>
+                  <a:tcPr marL="88900" marR="88900" marT="38100" marB="38100" anchor="ctr">
+                    <a:solidFill>
+                      <a:srgbClr val="2B3A42"/>
+                    </a:solidFill>
+                  </a:tcPr>
+                </a:tc>
+              </a:tr>
+              <a:tr h="497204">
+                <a:tc>
+                  <a:txBody>
+                    <a:bodyPr/>
+                    <a:lstStyle/>
+                    <a:p>
+                      <a:pPr algn="l"/>
+                      <a:r>
+                        <a:rPr sz="1350" b="1">
+                          <a:solidFill>
+                            <a:srgbClr val="22262A"/>
+                          </a:solidFill>
+                          <a:latin typeface="Calibri"/>
+                        </a:rPr>
+                        <a:t>Book of APS — netted corridors</a:t>
+                      </a:r>
+                    </a:p>
+                  </a:txBody>
+                  <a:tcPr marL="88900" marR="88900" marT="38100" marB="38100" anchor="ctr">
+                    <a:solidFill>
+                      <a:srgbClr val="FFFFFF"/>
+                    </a:solidFill>
+                  </a:tcPr>
+                </a:tc>
+                <a:tc>
+                  <a:txBody>
+                    <a:bodyPr/>
+                    <a:lstStyle/>
+                    <a:p>
+                      <a:pPr algn="l"/>
+                      <a:r>
+                        <a:rPr sz="1350" b="0">
+                          <a:solidFill>
+                            <a:srgbClr val="22262A"/>
+                          </a:solidFill>
+                          <a:latin typeface="Calibri"/>
+                        </a:rPr>
+                        <a:t>Net fence across deals (e.g. 2 long + 1 short, expiries ≤ 4 mo). Sign-crossing schedules already supported; needs a book-level driver + validation.</a:t>
+                      </a:r>
+                    </a:p>
+                  </a:txBody>
+                  <a:tcPr marL="88900" marR="88900" marT="38100" marB="38100" anchor="ctr">
+                    <a:solidFill>
+                      <a:srgbClr val="FFFFFF"/>
+                    </a:solidFill>
+                  </a:tcPr>
+                </a:tc>
+              </a:tr>
+              <a:tr h="497204">
+                <a:tc>
+                  <a:txBody>
+                    <a:bodyPr/>
+                    <a:lstStyle/>
+                    <a:p>
+                      <a:pPr algn="l"/>
+                      <a:r>
+                        <a:rPr sz="1350" b="1">
+                          <a:solidFill>
+                            <a:srgbClr val="22262A"/>
+                          </a:solidFill>
+                          <a:latin typeface="Calibri"/>
+                        </a:rPr>
+                        <a:t>Band adaptivity from EXTERNAL signal</a:t>
+                      </a:r>
+                    </a:p>
+                  </a:txBody>
+                  <a:tcPr marL="88900" marR="88900" marT="38100" marB="38100" anchor="ctr">
+                    <a:solidFill>
+                      <a:srgbClr val="F2F4F6"/>
+                    </a:solidFill>
+                  </a:tcPr>
+                </a:tc>
+                <a:tc>
+                  <a:txBody>
+                    <a:bodyPr/>
+                    <a:lstStyle/>
+                    <a:p>
+                      <a:pPr algn="l"/>
+                      <a:r>
+                        <a:rPr sz="1350" b="0">
+                          <a:solidFill>
+                            <a:srgbClr val="22262A"/>
+                          </a:solidFill>
+                          <a:latin typeface="Calibri"/>
+                        </a:rPr>
+                        <a:t>Condition the band on realized vol / regime state; leave-one-out validated on the 48 months. The only route to the ≈ +20/oz hindsight headroom.</a:t>
+                      </a:r>
+                    </a:p>
+                  </a:txBody>
+                  <a:tcPr marL="88900" marR="88900" marT="38100" marB="38100" anchor="ctr">
+                    <a:solidFill>
+                      <a:srgbClr val="F2F4F6"/>
+                    </a:solidFill>
+                  </a:tcPr>
+                </a:tc>
+              </a:tr>
+              <a:tr h="497204">
+                <a:tc>
+                  <a:txBody>
+                    <a:bodyPr/>
+                    <a:lstStyle/>
+                    <a:p>
+                      <a:pPr algn="l"/>
+                      <a:r>
+                        <a:rPr sz="1350" b="1">
+                          <a:solidFill>
+                            <a:srgbClr val="22262A"/>
+                          </a:solidFill>
+                          <a:latin typeface="Calibri"/>
+                        </a:rPr>
+                        <a:t>Intraday-calibrated CME friction</a:t>
+                      </a:r>
+                    </a:p>
+                  </a:txBody>
+                  <a:tcPr marL="88900" marR="88900" marT="38100" marB="38100" anchor="ctr">
+                    <a:solidFill>
+                      <a:srgbClr val="FFFFFF"/>
+                    </a:solidFill>
+                  </a:tcPr>
+                </a:tc>
+                <a:tc>
+                  <a:txBody>
+                    <a:bodyPr/>
+                    <a:lstStyle/>
+                    <a:p>
+                      <a:pPr algn="l"/>
+                      <a:r>
+                        <a:rPr sz="1350" b="0">
+                          <a:solidFill>
+                            <a:srgbClr val="22262A"/>
+                          </a:solidFill>
+                          <a:latin typeface="Calibri"/>
+                        </a:rPr>
+                        <a:t>DONE — net-of-cost band ranking re-verified under a realistic maturity/vol cost model (M1/M2/M3 = 6/11/34 bps, OI-calibrated); band 0.15 holds under base and stressed cost. Remaining: 2 pm-synced intraday spread capture, revisit as it accrues.</a:t>
+                      </a:r>
+                    </a:p>
+                  </a:txBody>
+                  <a:tcPr marL="88900" marR="88900" marT="38100" marB="38100" anchor="ctr">
+                    <a:solidFill>
+                      <a:srgbClr val="FFFFFF"/>
+                    </a:solidFill>
+                  </a:tcPr>
+                </a:tc>
+              </a:tr>
+              <a:tr h="497204">
+                <a:tc>
+                  <a:txBody>
+                    <a:bodyPr/>
+                    <a:lstStyle/>
+                    <a:p>
+                      <a:pPr algn="l"/>
+                      <a:r>
+                        <a:rPr sz="1350" b="1">
+                          <a:solidFill>
+                            <a:srgbClr val="22262A"/>
+                          </a:solidFill>
+                          <a:latin typeface="Calibri"/>
+                        </a:rPr>
+                        <a:t>Re-validate cross-market dual-strip</a:t>
+                      </a:r>
+                    </a:p>
+                  </a:txBody>
+                  <a:tcPr marL="88900" marR="88900" marT="38100" marB="38100" anchor="ctr">
+                    <a:solidFill>
+                      <a:srgbClr val="F2F4F6"/>
+                    </a:solidFill>
+                  </a:tcPr>
+                </a:tc>
+                <a:tc>
+                  <a:txBody>
+                    <a:bodyPr/>
+                    <a:lstStyle/>
+                    <a:p>
+                      <a:pPr algn="l"/>
+                      <a:r>
+                        <a:rPr sz="1350" b="0">
+                          <a:solidFill>
+                            <a:srgbClr val="22262A"/>
+                          </a:solidFill>
+                          <a:latin typeface="Calibri"/>
+                        </a:rPr>
+                        <a:t>Confirm the CME-strip / LME-liability edge holds in the corrected martingale world.</a:t>
+                      </a:r>
+                    </a:p>
+                  </a:txBody>
+                  <a:tcPr marL="88900" marR="88900" marT="38100" marB="38100" anchor="ctr">
+                    <a:solidFill>
+                      <a:srgbClr val="F2F4F6"/>
+                    </a:solidFill>
+                  </a:tcPr>
+                </a:tc>
+              </a:tr>
+              <a:tr h="497204">
+                <a:tc>
+                  <a:txBody>
+                    <a:bodyPr/>
+                    <a:lstStyle/>
+                    <a:p>
+                      <a:pPr algn="l"/>
+                      <a:r>
+                        <a:rPr sz="1350" b="1">
+                          <a:solidFill>
+                            <a:srgbClr val="22262A"/>
+                          </a:solidFill>
+                          <a:latin typeface="Calibri"/>
+                        </a:rPr>
+                        <a:t>Hard calibration gate</a:t>
+                      </a:r>
+                    </a:p>
+                  </a:txBody>
+                  <a:tcPr marL="88900" marR="88900" marT="38100" marB="38100" anchor="ctr">
+                    <a:solidFill>
+                      <a:srgbClr val="FFFFFF"/>
+                    </a:solidFill>
+                  </a:tcPr>
+                </a:tc>
+                <a:tc>
+                  <a:txBody>
+                    <a:bodyPr/>
+                    <a:lstStyle/>
+                    <a:p>
+                      <a:pPr algn="l"/>
+                      <a:r>
+                        <a:rPr sz="1350" b="0">
+                          <a:solidFill>
+                            <a:srgbClr val="22262A"/>
+                          </a:solidFill>
+                          <a:latin typeface="Calibri"/>
+                        </a:rPr>
+                        <a:t>Make E[dF] ≈ 0 on every tradeable a blocking check at every calibration — institutionalize the integrity lesson.</a:t>
+                      </a:r>
+                    </a:p>
+                  </a:txBody>
+                  <a:tcPr marL="88900" marR="88900" marT="38100" marB="38100" anchor="ctr">
+                    <a:solidFill>
+                      <a:srgbClr val="FFFFFF"/>
+                    </a:solidFill>
+                  </a:tcPr>
+                </a:tc>
+              </a:tr>
+              <a:tr h="497204">
+                <a:tc>
+                  <a:txBody>
+                    <a:bodyPr/>
+                    <a:lstStyle/>
+                    <a:p>
+                      <a:pPr algn="l"/>
+                      <a:r>
+                        <a:rPr sz="1350" b="1">
+                          <a:solidFill>
+                            <a:srgbClr val="22262A"/>
+                          </a:solidFill>
+                          <a:latin typeface="Calibri"/>
+                        </a:rPr>
+                        <a:t>Multi-GPU scale-out</a:t>
+                      </a:r>
+                    </a:p>
+                  </a:txBody>
+                  <a:tcPr marL="88900" marR="88900" marT="38100" marB="38100" anchor="ctr">
+                    <a:solidFill>
+                      <a:srgbClr val="F2F4F6"/>
+                    </a:solidFill>
+                  </a:tcPr>
+                </a:tc>
+                <a:tc>
+                  <a:txBody>
+                    <a:bodyPr/>
+                    <a:lstStyle/>
+                    <a:p>
+                      <a:pPr algn="l"/>
+                      <a:r>
+                        <a:rPr sz="1350" b="0">
+                          <a:solidFill>
+                            <a:srgbClr val="22262A"/>
+                          </a:solidFill>
+                          <a:latin typeface="Calibri"/>
+                        </a:rPr>
+                        <a:t>Recipe documented for 4×A100 servers (batch / inner parameters).</a:t>
+                      </a:r>
+                    </a:p>
+                  </a:txBody>
+                  <a:tcPr marL="88900" marR="88900" marT="38100" marB="38100" anchor="ctr">
+                    <a:solidFill>
+                      <a:srgbClr val="F2F4F6"/>
+                    </a:solidFill>
+                  </a:tcPr>
+                </a:tc>
+              </a:tr>
+              <a:tr h="497204">
+                <a:tc>
+                  <a:txBody>
+                    <a:bodyPr/>
+                    <a:lstStyle/>
+                    <a:p>
+                      <a:pPr algn="l"/>
+                      <a:r>
+                        <a:rPr sz="1350" b="1">
+                          <a:solidFill>
+                            <a:srgbClr val="22262A"/>
+                          </a:solidFill>
+                          <a:latin typeface="Calibri"/>
+                        </a:rPr>
+                        <a:t>Basis recalibration (GARCH world)</a:t>
+                      </a:r>
+                    </a:p>
+                  </a:txBody>
+                  <a:tcPr marL="88900" marR="88900" marT="38100" marB="38100" anchor="ctr">
+                    <a:solidFill>
+                      <a:srgbClr val="FFFFFF"/>
+                    </a:solidFill>
+                  </a:tcPr>
+                </a:tc>
+                <a:tc>
+                  <a:txBody>
+                    <a:bodyPr/>
+                    <a:lstStyle/>
+                    <a:p>
+                      <a:pPr algn="l"/>
+                      <a:r>
+                        <a:rPr sz="1350" b="0">
+                          <a:solidFill>
+                            <a:srgbClr val="22262A"/>
+                          </a:solidFill>
+                          <a:latin typeface="Calibri"/>
+                        </a:rPr>
+                        <a:t>In the GARCH world the basis model's regime linkage is temporarily FLATTENED (flat Σ, σ = 8.079 — the stationary regime mix); no regime-publishing primary to link to. Awaits the 2 pm-synced recalibration. Known interim.</a:t>
+                      </a:r>
+                    </a:p>
+                  </a:txBody>
+                  <a:tcPr marL="88900" marR="88900" marT="38100" marB="38100" anchor="ctr">
+                    <a:solidFill>
+                      <a:srgbClr val="FFFFFF"/>
+                    </a:solidFill>
+                  </a:tcPr>
+                </a:tc>
+              </a:tr>
+              <a:tr h="497204">
+                <a:tc>
+                  <a:txBody>
+                    <a:bodyPr/>
+                    <a:lstStyle/>
+                    <a:p>
+                      <a:pPr algn="l"/>
+                      <a:r>
+                        <a:rPr sz="1350" b="1">
+                          <a:solidFill>
+                            <a:srgbClr val="22262A"/>
+                          </a:solidFill>
+                          <a:latin typeface="Calibri"/>
+                        </a:rPr>
+                        <a:t>Hedge the LME basis floor</a:t>
+                      </a:r>
+                    </a:p>
+                  </a:txBody>
+                  <a:tcPr marL="88900" marR="88900" marT="38100" marB="38100" anchor="ctr">
+                    <a:solidFill>
+                      <a:srgbClr val="F2F4F6"/>
+                    </a:solidFill>
+                  </a:tcPr>
+                </a:tc>
+                <a:tc>
+                  <a:txBody>
+                    <a:bodyPr/>
+                    <a:lstStyle/>
+                    <a:p>
+                      <a:pPr algn="l"/>
+                      <a:r>
+                        <a:rPr sz="1350" b="0">
+                          <a:solidFill>
+                            <a:srgbClr val="22262A"/>
+                          </a:solidFill>
+                          <a:latin typeface="Calibri"/>
+                        </a:rPr>
+                        <a:t>At tight bands ≈79% of residual std is basis (ρ → +0.72 at 0.15); a CME-only strip cannot hedge it (≈25 $/oz wall). Add an LME-priced instrument to attack the residual variance.</a:t>
+                      </a:r>
+                    </a:p>
+                  </a:txBody>
+                  <a:tcPr marL="88900" marR="88900" marT="38100" marB="38100" anchor="ctr">
+                    <a:solidFill>
+                      <a:srgbClr val="F2F4F6"/>
+                    </a:solidFill>
+                  </a:tcPr>
+                </a:tc>
+              </a:tr>
+            </a:tbl>
+          </a:graphicData>
+        </a:graphic>
+      </p:graphicFrame>
+      <p:sp>
+        <p:nvSpPr>
+          <p:cNvPr id="8" name="TextBox 7"/>
           <p:cNvSpPr txBox="1"/>
           <p:nvPr/>
         </p:nvSpPr>
         <p:spPr>
           <a:xfrm>
-            <a:off x="566928" y="1444752"/>
-            <a:ext cx="11055096" cy="640080"/>
+            <a:off x="566928" y="6473952"/>
+            <a:ext cx="11055096" cy="274320"/>
           </a:xfrm>
           <a:prstGeom prst="rect">
             <a:avLst/>
@@ -24353,317 +24726,20 @@
           <a:noFill/>
         </p:spPr>
         <p:txBody>
-          <a:bodyPr wrap="square" anchor="t" lIns="25400" rIns="25400" tIns="12700" bIns="12700">
+          <a:bodyPr wrap="square" lIns="0" rIns="0" tIns="0" bIns="0">
             <a:spAutoFit/>
           </a:bodyPr>
           <a:lstStyle/>
           <a:p>
-            <a:pPr algn="l">
-              <a:lnSpc>
-                <a:spcPct val="105000"/>
-              </a:lnSpc>
-              <a:spcBef>
-                <a:spcPts val="0"/>
-              </a:spcBef>
-              <a:spcAft>
-                <a:spcPts val="400"/>
-              </a:spcAft>
-            </a:pPr>
-            <a:r>
-              <a:rPr sz="1650" b="0" i="0">
-                <a:solidFill>
-                  <a:srgbClr val="2B3A42"/>
-                </a:solidFill>
-                <a:latin typeface="Calibri"/>
-              </a:rPr>
-              <a:t>Five equations and one inequality define the world the policy is solved in.</a:t>
-            </a:r>
-          </a:p>
-        </p:txBody>
-      </p:sp>
-      <p:sp>
-        <p:nvSpPr>
-          <p:cNvPr id="7" name="Rectangle 6"/>
-          <p:cNvSpPr/>
-          <p:nvPr/>
-        </p:nvSpPr>
-        <p:spPr>
-          <a:xfrm>
-            <a:off x="566928" y="2286000"/>
-            <a:ext cx="11055096" cy="2651760"/>
-          </a:xfrm>
-          <a:prstGeom prst="rect">
-            <a:avLst/>
-          </a:prstGeom>
-          <a:solidFill>
-            <a:srgbClr val="F6F7F9"/>
-          </a:solidFill>
-          <a:ln w="9525">
-            <a:solidFill>
-              <a:srgbClr val="D9DDE1"/>
-            </a:solidFill>
-          </a:ln>
-          <a:effectLst/>
-        </p:spPr>
-        <p:style>
-          <a:lnRef idx="1">
-            <a:schemeClr val="accent1"/>
-          </a:lnRef>
-          <a:fillRef idx="3">
-            <a:schemeClr val="accent1"/>
-          </a:fillRef>
-          <a:effectRef idx="2">
-            <a:schemeClr val="accent1"/>
-          </a:effectRef>
-          <a:fontRef idx="minor">
-            <a:schemeClr val="lt1"/>
-          </a:fontRef>
-        </p:style>
-        <p:txBody>
-          <a:bodyPr rtlCol="0" anchor="ctr" wrap="none" lIns="127000" rIns="76200" tIns="88900" bIns="76200"/>
-          <a:lstStyle/>
-          <a:p>
-            <a:pPr algn="ctr">
-              <a:lnSpc>
-                <a:spcPct val="100000"/>
-              </a:lnSpc>
-              <a:spcBef>
-                <a:spcPts val="0"/>
-              </a:spcBef>
-              <a:spcAft>
-                <a:spcPts val="0"/>
-              </a:spcAft>
-            </a:pPr>
-            <a:r>
-              <a:rPr sz="1300">
-                <a:solidFill>
-                  <a:srgbClr val="22262A"/>
-                </a:solidFill>
-                <a:latin typeface="Consolas"/>
-              </a:rPr>
-              <a:t>c₁₂(t)   =  ln(F2/F1) / (τ2 − τ1)  −  fwdSOFR                 # carry;  autocorr 0.97</a:t>
-            </a:r>
-          </a:p>
-          <a:p>
-            <a:pPr>
-              <a:lnSpc>
-                <a:spcPct val="100000"/>
-              </a:lnSpc>
-              <a:spcBef>
-                <a:spcPts val="0"/>
-              </a:spcBef>
-              <a:spcAft>
-                <a:spcPts val="0"/>
-              </a:spcAft>
-            </a:pPr>
-            <a:r>
-              <a:rPr sz="1300">
-                <a:solidFill>
-                  <a:srgbClr val="22262A"/>
-                </a:solidFill>
-                <a:latin typeface="Consolas"/>
-              </a:rPr>
-              <a:t>P(t)     =  F1 · exp(−(rf + c)·τ1)                           # CME continuous spot (martingale)</a:t>
-            </a:r>
-          </a:p>
-          <a:p>
-            <a:pPr>
-              <a:lnSpc>
-                <a:spcPct val="100000"/>
-              </a:lnSpc>
-              <a:spcBef>
-                <a:spcPts val="0"/>
-              </a:spcBef>
-              <a:spcAft>
-                <a:spcPts val="0"/>
-              </a:spcAft>
-            </a:pPr>
-            <a:r>
-              <a:rPr sz="1300">
-                <a:solidFill>
-                  <a:srgbClr val="22262A"/>
-                </a:solidFill>
-                <a:latin typeface="Consolas"/>
-              </a:rPr>
-              <a:t>b(t+1)   =  φ·b(t)  +  A·ΔLME  +  η ,     φ ≈ 0.34           # basis AR(1),  σ ≈ 16.5</a:t>
-            </a:r>
-          </a:p>
-          <a:p>
-            <a:pPr>
-              <a:lnSpc>
-                <a:spcPct val="100000"/>
-              </a:lnSpc>
-              <a:spcBef>
-                <a:spcPts val="0"/>
-              </a:spcBef>
-              <a:spcAft>
-                <a:spcPts val="0"/>
-              </a:spcAft>
-            </a:pPr>
-            <a:r>
-              <a:rPr sz="1300">
-                <a:solidFill>
-                  <a:srgbClr val="22262A"/>
-                </a:solidFill>
-                <a:latin typeface="Consolas"/>
-              </a:rPr>
-              <a:t>S(t)     =  P(t)  +  b(t)                                    # observable LBMA fix (composed)</a:t>
-            </a:r>
-          </a:p>
-          <a:p>
-            <a:pPr>
-              <a:lnSpc>
-                <a:spcPct val="100000"/>
-              </a:lnSpc>
-              <a:spcBef>
-                <a:spcPts val="0"/>
-              </a:spcBef>
-              <a:spcAft>
-                <a:spcPts val="0"/>
-              </a:spcAft>
-            </a:pPr>
-            <a:r>
-              <a:rPr sz="1300">
-                <a:solidFill>
-                  <a:srgbClr val="22262A"/>
-                </a:solidFill>
-                <a:latin typeface="Consolas"/>
-              </a:rPr>
-              <a:t>dS(t+1)  =  κ·( P(t) − S(t) )  +  … ,     κ = 0.647 ≈ 1 − φ  # fix catch-up = basis reversion</a:t>
-            </a:r>
-          </a:p>
-          <a:p>
-            <a:pPr>
-              <a:lnSpc>
-                <a:spcPct val="100000"/>
-              </a:lnSpc>
-              <a:spcBef>
-                <a:spcPts val="0"/>
-              </a:spcBef>
-              <a:spcAft>
-                <a:spcPts val="0"/>
-              </a:spcAft>
-            </a:pPr>
-            <a:r>
-              <a:rPr sz="1300">
-                <a:solidFill>
-                  <a:srgbClr val="22262A"/>
-                </a:solidFill>
-                <a:latin typeface="Consolas"/>
-              </a:rPr>
-              <a:t> </a:t>
-            </a:r>
-          </a:p>
-          <a:p>
-            <a:pPr>
-              <a:lnSpc>
-                <a:spcPct val="100000"/>
-              </a:lnSpc>
-              <a:spcBef>
-                <a:spcPts val="0"/>
-              </a:spcBef>
-              <a:spcAft>
-                <a:spcPts val="0"/>
-              </a:spcAft>
-            </a:pPr>
-            <a:r>
-              <a:rPr sz="1300">
-                <a:solidFill>
-                  <a:srgbClr val="22262A"/>
-                </a:solidFill>
-                <a:latin typeface="Consolas"/>
-              </a:rPr>
-              <a:t>E[ dF(t+1) | b(t) ]  ≈  0                                    # tradeable martingale guard (|t| 0.7)</a:t>
-            </a:r>
-          </a:p>
-        </p:txBody>
-      </p:sp>
-      <p:sp>
-        <p:nvSpPr>
-          <p:cNvPr id="8" name="TextBox 7"/>
-          <p:cNvSpPr txBox="1"/>
-          <p:nvPr/>
-        </p:nvSpPr>
-        <p:spPr>
-          <a:xfrm>
-            <a:off x="566928" y="5212080"/>
-            <a:ext cx="11055096" cy="822960"/>
-          </a:xfrm>
-          <a:prstGeom prst="rect">
-            <a:avLst/>
-          </a:prstGeom>
-          <a:noFill/>
-        </p:spPr>
-        <p:txBody>
-          <a:bodyPr wrap="square" anchor="t" lIns="25400" rIns="25400" tIns="12700" bIns="12700">
-            <a:spAutoFit/>
-          </a:bodyPr>
-          <a:lstStyle/>
-          <a:p>
-            <a:pPr algn="l">
-              <a:lnSpc>
-                <a:spcPct val="110000"/>
-              </a:lnSpc>
-              <a:spcBef>
-                <a:spcPts val="0"/>
-              </a:spcBef>
-              <a:spcAft>
-                <a:spcPts val="400"/>
-              </a:spcAft>
-            </a:pPr>
-            <a:r>
-              <a:rPr sz="1450" b="0" i="0">
-                <a:solidFill>
-                  <a:srgbClr val="2B3A42"/>
-                </a:solidFill>
-                <a:latin typeface="Calibri"/>
-              </a:rPr>
-              <a:t>The identity κ ≈ 1 − φ is the load-bearing fact: the same daily speed appears in the fix's catch-up and the basis's reversion, so the two-clock law is identified rather than assumed.</a:t>
-            </a:r>
-          </a:p>
-        </p:txBody>
-      </p:sp>
-      <p:sp>
-        <p:nvSpPr>
-          <p:cNvPr id="9" name="TextBox 8"/>
-          <p:cNvSpPr txBox="1"/>
-          <p:nvPr/>
-        </p:nvSpPr>
-        <p:spPr>
-          <a:xfrm>
-            <a:off x="566928" y="6473952"/>
-            <a:ext cx="11055096" cy="274320"/>
-          </a:xfrm>
-          <a:prstGeom prst="rect">
-            <a:avLst/>
-          </a:prstGeom>
-          <a:noFill/>
-        </p:spPr>
-        <p:txBody>
-          <a:bodyPr wrap="square" anchor="t" lIns="25400" rIns="25400" tIns="12700" bIns="12700">
-            <a:spAutoFit/>
-          </a:bodyPr>
-          <a:lstStyle/>
-          <a:p>
-            <a:pPr algn="l">
-              <a:lnSpc>
-                <a:spcPct val="100000"/>
-              </a:lnSpc>
-              <a:spcBef>
-                <a:spcPts val="0"/>
-              </a:spcBef>
-              <a:spcAft>
-                <a:spcPts val="400"/>
-              </a:spcAft>
-            </a:pPr>
-            <a:r>
-              <a:rPr sz="950" b="0" i="1">
+            <a:pPr algn="l"/>
+            <a:r>
+              <a:rPr sz="950" b="0">
                 <a:solidFill>
                   <a:srgbClr val="6B7278"/>
                 </a:solidFill>
                 <a:latin typeface="Calibri"/>
               </a:rPr>
-              <a:t>All coefficients recomputed on data/pl_exp.csv (3,856 daily rows).</a:t>
+              <a:t>STATUS_NOTE_corridor.md open items. Machinery: Total_Position_Schedule — per-step [Min_Total, Max_Total] knots on the signed total position.</a:t>
             </a:r>
           </a:p>
         </p:txBody>
@@ -24734,7 +24810,7 @@
                 </a:solidFill>
                 <a:latin typeface="Calibri"/>
               </a:rPr>
-              <a:t>QUANT APPENDIX  ·  2 OF 4</a:t>
+              <a:t>QUANT APPENDIX  ·  1 OF 4</a:t>
             </a:r>
           </a:p>
         </p:txBody>
@@ -24779,7 +24855,7 @@
                 </a:solidFill>
                 <a:latin typeface="Calibri"/>
               </a:rPr>
-              <a:t>Appendix — DiffSolverV2 pseudo-code</a:t>
+              <a:t>Appendix — the identified joint law</a:t>
             </a:r>
           </a:p>
         </p:txBody>
@@ -24875,14 +24951,59 @@
       </p:sp>
       <p:sp>
         <p:nvSpPr>
-          <p:cNvPr id="6" name="Rectangle 5"/>
+          <p:cNvPr id="6" name="TextBox 5"/>
+          <p:cNvSpPr txBox="1"/>
+          <p:nvPr/>
+        </p:nvSpPr>
+        <p:spPr>
+          <a:xfrm>
+            <a:off x="566928" y="1444752"/>
+            <a:ext cx="11055096" cy="640080"/>
+          </a:xfrm>
+          <a:prstGeom prst="rect">
+            <a:avLst/>
+          </a:prstGeom>
+          <a:noFill/>
+        </p:spPr>
+        <p:txBody>
+          <a:bodyPr wrap="square" anchor="t" lIns="25400" rIns="25400" tIns="12700" bIns="12700">
+            <a:spAutoFit/>
+          </a:bodyPr>
+          <a:lstStyle/>
+          <a:p>
+            <a:pPr algn="l">
+              <a:lnSpc>
+                <a:spcPct val="105000"/>
+              </a:lnSpc>
+              <a:spcBef>
+                <a:spcPts val="0"/>
+              </a:spcBef>
+              <a:spcAft>
+                <a:spcPts val="400"/>
+              </a:spcAft>
+            </a:pPr>
+            <a:r>
+              <a:rPr sz="1650" b="0" i="0">
+                <a:solidFill>
+                  <a:srgbClr val="2B3A42"/>
+                </a:solidFill>
+                <a:latin typeface="Calibri"/>
+              </a:rPr>
+              <a:t>Five equations and one inequality define the world the policy is solved in.</a:t>
+            </a:r>
+          </a:p>
+        </p:txBody>
+      </p:sp>
+      <p:sp>
+        <p:nvSpPr>
+          <p:cNvPr id="7" name="Rectangle 6"/>
           <p:cNvSpPr/>
           <p:nvPr/>
         </p:nvSpPr>
         <p:spPr>
           <a:xfrm>
-            <a:off x="566928" y="1554480"/>
-            <a:ext cx="11055096" cy="4663440"/>
+            <a:off x="566928" y="2286000"/>
+            <a:ext cx="11055096" cy="2651760"/>
           </a:xfrm>
           <a:prstGeom prst="rect">
             <a:avLst/>
@@ -24927,13 +25048,13 @@
               </a:spcAft>
             </a:pPr>
             <a:r>
-              <a:rPr sz="1100">
-                <a:solidFill>
-                  <a:srgbClr val="1F77B4"/>
+              <a:rPr sz="1300">
+                <a:solidFill>
+                  <a:srgbClr val="22262A"/>
                 </a:solidFill>
                 <a:latin typeface="Consolas"/>
               </a:rPr>
-              <a:t># bank: one small MLP per timestep for the position-free continuation</a:t>
+              <a:t>c₁₂(t)   =  ln(F2/F1) / (τ2 − τ1)  −  fwdSOFR                 # carry;  autocorr 0.97</a:t>
             </a:r>
           </a:p>
           <a:p>
@@ -24949,13 +25070,13 @@
               </a:spcAft>
             </a:pPr>
             <a:r>
-              <a:rPr sz="1100">
+              <a:rPr sz="1300">
                 <a:solidFill>
                   <a:srgbClr val="22262A"/>
                 </a:solidFill>
                 <a:latin typeface="Consolas"/>
               </a:rPr>
-              <a:t>nets = [MLP(in=market_dim+1, hidden=32, out=1) for t in range(T)]   # ~1.4k params each</a:t>
+              <a:t>P(t)     =  F1 · exp(−(rf + c)·τ1)                           # CME continuous spot (martingale)</a:t>
             </a:r>
           </a:p>
           <a:p>
@@ -24971,13 +25092,13 @@
               </a:spcAft>
             </a:pPr>
             <a:r>
-              <a:rPr sz="1100">
+              <a:rPr sz="1300">
                 <a:solidFill>
                   <a:srgbClr val="22262A"/>
                 </a:solidFill>
                 <a:latin typeface="Consolas"/>
               </a:rPr>
-              <a:t>c    = deal_scale                                                  # utility normaliser</a:t>
+              <a:t>b(t+1)   =  φ·b(t)  +  A·ΔLME  +  η ,     φ ≈ 0.34           # basis AR(1),  σ ≈ 16.5</a:t>
             </a:r>
           </a:p>
           <a:p>
@@ -24993,13 +25114,13 @@
               </a:spcAft>
             </a:pPr>
             <a:r>
-              <a:rPr sz="1100">
+              <a:rPr sz="1300">
                 <a:solidFill>
                   <a:srgbClr val="22262A"/>
                 </a:solidFill>
                 <a:latin typeface="Consolas"/>
               </a:rPr>
-              <a:t> </a:t>
+              <a:t>S(t)     =  P(t)  +  b(t)                                    # observable LBMA fix (composed)</a:t>
             </a:r>
           </a:p>
           <a:p>
@@ -25015,13 +25136,13 @@
               </a:spcAft>
             </a:pPr>
             <a:r>
-              <a:rPr sz="1100">
+              <a:rPr sz="1300">
                 <a:solidFill>
                   <a:srgbClr val="22262A"/>
                 </a:solidFill>
                 <a:latin typeface="Consolas"/>
               </a:rPr>
-              <a:t>def u(W):                              # asymmetric Huber (a=6, d=1), in c-units</a:t>
+              <a:t>dS(t+1)  =  κ·( P(t) − S(t) )  +  … ,     κ = 0.647 ≈ 1 − φ  # fix catch-up = basis reversion</a:t>
             </a:r>
           </a:p>
           <a:p>
@@ -25037,13 +25158,13 @@
               </a:spcAft>
             </a:pPr>
             <a:r>
-              <a:rPr sz="1100">
+              <a:rPr sz="1300">
                 <a:solidFill>
                   <a:srgbClr val="22262A"/>
                 </a:solidFill>
                 <a:latin typeface="Consolas"/>
               </a:rPr>
-              <a:t>    x = W / c;  loss = relu(-x)</a:t>
+              <a:t> </a:t>
             </a:r>
           </a:p>
           <a:p>
@@ -25059,350 +25180,65 @@
               </a:spcAft>
             </a:pPr>
             <a:r>
-              <a:rPr sz="1100">
+              <a:rPr sz="1300">
                 <a:solidFill>
                   <a:srgbClr val="22262A"/>
                 </a:solidFill>
                 <a:latin typeface="Consolas"/>
               </a:rPr>
-              <a:t>    pen = where(loss&lt;=d,  a*loss**2,  a*d**2 + 2*a*d*(loss-d))</a:t>
-            </a:r>
-          </a:p>
-          <a:p>
-            <a:pPr>
+              <a:t>E[ dF(t+1) | b(t) ]  ≈  0                                    # tradeable martingale guard (|t| 0.7)</a:t>
+            </a:r>
+          </a:p>
+        </p:txBody>
+      </p:sp>
+      <p:sp>
+        <p:nvSpPr>
+          <p:cNvPr id="8" name="TextBox 7"/>
+          <p:cNvSpPr txBox="1"/>
+          <p:nvPr/>
+        </p:nvSpPr>
+        <p:spPr>
+          <a:xfrm>
+            <a:off x="566928" y="5212080"/>
+            <a:ext cx="11055096" cy="822960"/>
+          </a:xfrm>
+          <a:prstGeom prst="rect">
+            <a:avLst/>
+          </a:prstGeom>
+          <a:noFill/>
+        </p:spPr>
+        <p:txBody>
+          <a:bodyPr wrap="square" anchor="t" lIns="25400" rIns="25400" tIns="12700" bIns="12700">
+            <a:spAutoFit/>
+          </a:bodyPr>
+          <a:lstStyle/>
+          <a:p>
+            <a:pPr algn="l">
               <a:lnSpc>
-                <a:spcPct val="100000"/>
+                <a:spcPct val="110000"/>
               </a:lnSpc>
               <a:spcBef>
                 <a:spcPts val="0"/>
               </a:spcBef>
               <a:spcAft>
-                <a:spcPts val="0"/>
+                <a:spcPts val="400"/>
               </a:spcAft>
             </a:pPr>
             <a:r>
-              <a:rPr sz="1100">
-                <a:solidFill>
-                  <a:srgbClr val="22262A"/>
-                </a:solidFill>
-                <a:latin typeface="Consolas"/>
-              </a:rPr>
-              <a:t>    return x - pen</a:t>
-            </a:r>
-          </a:p>
-          <a:p>
-            <a:pPr>
-              <a:lnSpc>
-                <a:spcPct val="100000"/>
-              </a:lnSpc>
-              <a:spcBef>
-                <a:spcPts val="0"/>
-              </a:spcBef>
-              <a:spcAft>
-                <a:spcPts val="0"/>
-              </a:spcAft>
-            </a:pPr>
-            <a:r>
-              <a:rPr sz="1100">
-                <a:solidFill>
-                  <a:srgbClr val="22262A"/>
-                </a:solidFill>
-                <a:latin typeface="Consolas"/>
-              </a:rPr>
-              <a:t> </a:t>
-            </a:r>
-          </a:p>
-          <a:p>
-            <a:pPr>
-              <a:lnSpc>
-                <a:spcPct val="100000"/>
-              </a:lnSpc>
-              <a:spcBef>
-                <a:spcPts val="0"/>
-              </a:spcBef>
-              <a:spcAft>
-                <a:spcPts val="0"/>
-              </a:spcAft>
-            </a:pPr>
-            <a:r>
-              <a:rPr sz="1100">
-                <a:solidFill>
-                  <a:srgbClr val="1F77B4"/>
-                </a:solidFill>
-                <a:latin typeface="Consolas"/>
-              </a:rPr>
-              <a:t># backward sweep: fit C_t = u(W) + A_t via the Huge-Savine twin loss</a:t>
-            </a:r>
-          </a:p>
-          <a:p>
-            <a:pPr>
-              <a:lnSpc>
-                <a:spcPct val="100000"/>
-              </a:lnSpc>
-              <a:spcBef>
-                <a:spcPts val="0"/>
-              </a:spcBef>
-              <a:spcAft>
-                <a:spcPts val="0"/>
-              </a:spcAft>
-            </a:pPr>
-            <a:r>
-              <a:rPr sz="1100">
-                <a:solidFill>
-                  <a:srgbClr val="22262A"/>
-                </a:solidFill>
-                <a:latin typeface="Consolas"/>
-              </a:rPr>
-              <a:t>for t in reversed(range(T)):</a:t>
-            </a:r>
-          </a:p>
-          <a:p>
-            <a:pPr>
-              <a:lnSpc>
-                <a:spcPct val="100000"/>
-              </a:lnSpc>
-              <a:spcBef>
-                <a:spcPts val="0"/>
-              </a:spcBef>
-              <a:spcAft>
-                <a:spcPts val="0"/>
-              </a:spcAft>
-            </a:pPr>
-            <a:r>
-              <a:rPr sz="1100">
-                <a:solidFill>
-                  <a:srgbClr val="22262A"/>
-                </a:solidFill>
-                <a:latin typeface="Consolas"/>
-              </a:rPr>
-              <a:t>    S, W, q_prev = sample_states(t)                        # outer draws</a:t>
-            </a:r>
-          </a:p>
-          <a:p>
-            <a:pPr>
-              <a:lnSpc>
-                <a:spcPct val="100000"/>
-              </a:lnSpc>
-              <a:spcBef>
-                <a:spcPts val="0"/>
-              </a:spcBef>
-              <a:spcAft>
-                <a:spcPts val="0"/>
-              </a:spcAft>
-            </a:pPr>
-            <a:r>
-              <a:rPr sz="1100">
-                <a:solidFill>
-                  <a:srgbClr val="22262A"/>
-                </a:solidFill>
-                <a:latin typeface="Consolas"/>
-              </a:rPr>
-              <a:t>    grid = action_grid(q_prev, cap=50, short_only=True)    # mask-aware, cap-pruned</a:t>
-            </a:r>
-          </a:p>
-          <a:p>
-            <a:pPr>
-              <a:lnSpc>
-                <a:spcPct val="100000"/>
-              </a:lnSpc>
-              <a:spcBef>
-                <a:spcPts val="0"/>
-              </a:spcBef>
-              <a:spcAft>
-                <a:spcPts val="0"/>
-              </a:spcAft>
-            </a:pPr>
-            <a:r>
-              <a:rPr sz="1100">
-                <a:solidFill>
-                  <a:srgbClr val="22262A"/>
-                </a:solidFill>
-                <a:latin typeface="Consolas"/>
-              </a:rPr>
-              <a:t>    q*   = argmax_a  E_inner[ C_{t+1}(f(S,eps), W + pnl(S,eps,a)) ]   # Bellman max OUTSIDE net</a:t>
-            </a:r>
-          </a:p>
-          <a:p>
-            <a:pPr>
-              <a:lnSpc>
-                <a:spcPct val="100000"/>
-              </a:lnSpc>
-              <a:spcBef>
-                <a:spcPts val="0"/>
-              </a:spcBef>
-              <a:spcAft>
-                <a:spcPts val="0"/>
-              </a:spcAft>
-            </a:pPr>
-            <a:r>
-              <a:rPr sz="1100">
-                <a:solidFill>
-                  <a:srgbClr val="1F77B4"/>
-                </a:solidFill>
-                <a:latin typeface="Consolas"/>
-              </a:rPr>
-              <a:t>    #      inner expectation via ONE-STEP antithetic MC forks (bootstrap label)</a:t>
-            </a:r>
-          </a:p>
-          <a:p>
-            <a:pPr>
-              <a:lnSpc>
-                <a:spcPct val="100000"/>
-              </a:lnSpc>
-              <a:spcBef>
-                <a:spcPts val="0"/>
-              </a:spcBef>
-              <a:spcAft>
-                <a:spcPts val="0"/>
-              </a:spcAft>
-            </a:pPr>
-            <a:r>
-              <a:rPr sz="1100">
-                <a:solidFill>
-                  <a:srgbClr val="22262A"/>
-                </a:solidFill>
-                <a:latin typeface="Consolas"/>
-              </a:rPr>
-              <a:t>    y, dy = bootstrap_value_and_pathwise_grad(t, S, W, q*)  # value + AAD Jacobian</a:t>
-            </a:r>
-          </a:p>
-          <a:p>
-            <a:pPr>
-              <a:lnSpc>
-                <a:spcPct val="100000"/>
-              </a:lnSpc>
-              <a:spcBef>
-                <a:spcPts val="0"/>
-              </a:spcBef>
-              <a:spcAft>
-                <a:spcPts val="0"/>
-              </a:spcAft>
-            </a:pPr>
-            <a:r>
-              <a:rPr sz="1100">
-                <a:solidFill>
-                  <a:srgbClr val="22262A"/>
-                </a:solidFill>
-                <a:latin typeface="Consolas"/>
-              </a:rPr>
-              <a:t>    A_t   = fit(nets[t], value=y - u(W), grad=dy)           # twin loss, per-column normalised</a:t>
-            </a:r>
-          </a:p>
-          <a:p>
-            <a:pPr>
-              <a:lnSpc>
-                <a:spcPct val="100000"/>
-              </a:lnSpc>
-              <a:spcBef>
-                <a:spcPts val="0"/>
-              </a:spcBef>
-              <a:spcAft>
-                <a:spcPts val="0"/>
-              </a:spcAft>
-            </a:pPr>
-            <a:r>
-              <a:rPr sz="1100">
-                <a:solidFill>
-                  <a:srgbClr val="22262A"/>
-                </a:solidFill>
-                <a:latin typeface="Consolas"/>
-              </a:rPr>
-              <a:t>    clamp A_t to trust region [a_lo, a_hi]                  # kill off-support extrapolation</a:t>
-            </a:r>
-          </a:p>
-          <a:p>
-            <a:pPr>
-              <a:lnSpc>
-                <a:spcPct val="100000"/>
-              </a:lnSpc>
-              <a:spcBef>
-                <a:spcPts val="0"/>
-              </a:spcBef>
-              <a:spcAft>
-                <a:spcPts val="0"/>
-              </a:spcAft>
-            </a:pPr>
-            <a:r>
-              <a:rPr sz="1100">
-                <a:solidFill>
-                  <a:srgbClr val="22262A"/>
-                </a:solidFill>
-                <a:latin typeface="Consolas"/>
-              </a:rPr>
-              <a:t> </a:t>
-            </a:r>
-          </a:p>
-          <a:p>
-            <a:pPr>
-              <a:lnSpc>
-                <a:spcPct val="100000"/>
-              </a:lnSpc>
-              <a:spcBef>
-                <a:spcPts val="0"/>
-              </a:spcBef>
-              <a:spcAft>
-                <a:spcPts val="0"/>
-              </a:spcAft>
-            </a:pPr>
-            <a:r>
-              <a:rPr sz="1100">
-                <a:solidFill>
-                  <a:srgbClr val="1F77B4"/>
-                </a:solidFill>
-                <a:latin typeface="Consolas"/>
-              </a:rPr>
-              <a:t># verdict on a held-out split, then hand back a deployable policy</a:t>
-            </a:r>
-          </a:p>
-          <a:p>
-            <a:pPr>
-              <a:lnSpc>
-                <a:spcPct val="100000"/>
-              </a:lnSpc>
-              <a:spcBef>
-                <a:spcPts val="0"/>
-              </a:spcBef>
-              <a:spcAft>
-                <a:spcPts val="0"/>
-              </a:spcAft>
-            </a:pPr>
-            <a:r>
-              <a:rPr sz="1100">
-                <a:solidFill>
-                  <a:srgbClr val="22262A"/>
-                </a:solidFill>
-                <a:latin typeface="Consolas"/>
-              </a:rPr>
-              <a:t>assert ladder(hindsight &gt;= greedy &gt;= textbook)</a:t>
-            </a:r>
-          </a:p>
-          <a:p>
-            <a:pPr>
-              <a:lnSpc>
-                <a:spcPct val="100000"/>
-              </a:lnSpc>
-              <a:spcBef>
-                <a:spcPts val="0"/>
-              </a:spcBef>
-              <a:spcAft>
-                <a:spcPts val="0"/>
-              </a:spcAft>
-            </a:pPr>
-            <a:r>
-              <a:rPr sz="1100">
-                <a:solidFill>
-                  <a:srgbClr val="22262A"/>
-                </a:solidFill>
-                <a:latin typeface="Consolas"/>
-              </a:rPr>
-              <a:t>return policy_artifact(nets, standardization_frames, utility_scale, config_hash)</a:t>
-            </a:r>
-          </a:p>
-        </p:txBody>
-      </p:sp>
-      <p:sp>
-        <p:nvSpPr>
-          <p:cNvPr id="7" name="TextBox 6"/>
+              <a:rPr sz="1450" b="0" i="0">
+                <a:solidFill>
+                  <a:srgbClr val="2B3A42"/>
+                </a:solidFill>
+                <a:latin typeface="Calibri"/>
+              </a:rPr>
+              <a:t>The identity κ ≈ 1 − φ is the load-bearing fact: the same daily speed appears in the fix's catch-up and the basis's reversion, so the two-clock law is identified rather than assumed.</a:t>
+            </a:r>
+          </a:p>
+        </p:txBody>
+      </p:sp>
+      <p:sp>
+        <p:nvSpPr>
+          <p:cNvPr id="9" name="TextBox 8"/>
           <p:cNvSpPr txBox="1"/>
           <p:nvPr/>
         </p:nvSpPr>
@@ -25440,7 +25276,7 @@
                 </a:solidFill>
                 <a:latin typeface="Calibri"/>
               </a:rPr>
-              <a:t>diffsolver_v2.py · hedge_solver.py · utility exactly hedge_bundle._utility_wrap_signed (a=Huber_Aversion, d=Huber_Delta).</a:t>
+              <a:t>All coefficients recomputed on data/pl_exp.csv (3,856 daily rows).</a:t>
             </a:r>
           </a:p>
         </p:txBody>
@@ -25511,7 +25347,7 @@
                 </a:solidFill>
                 <a:latin typeface="Calibri"/>
               </a:rPr>
-              <a:t>QUANT APPENDIX  ·  3 OF 4</a:t>
+              <a:t>QUANT APPENDIX  ·  2 OF 4</a:t>
             </a:r>
           </a:p>
         </p:txBody>
@@ -25556,7 +25392,7 @@
                 </a:solidFill>
                 <a:latin typeface="Calibri"/>
               </a:rPr>
-              <a:t>Appendix — calibration → backtest pipeline</a:t>
+              <a:t>Appendix — DiffSolverV2 pseudo-code</a:t>
             </a:r>
           </a:p>
         </p:txBody>
@@ -25658,8 +25494,8 @@
         </p:nvSpPr>
         <p:spPr>
           <a:xfrm>
-            <a:off x="566928" y="1737360"/>
-            <a:ext cx="11055096" cy="4023360"/>
+            <a:off x="566928" y="1554480"/>
+            <a:ext cx="11055096" cy="4663440"/>
           </a:xfrm>
           <a:prstGeom prst="rect">
             <a:avLst/>
@@ -25704,13 +25540,13 @@
               </a:spcAft>
             </a:pPr>
             <a:r>
-              <a:rPr sz="1150">
-                <a:solidFill>
-                  <a:srgbClr val="22262A"/>
+              <a:rPr sz="1100">
+                <a:solidFill>
+                  <a:srgbClr val="1F77B4"/>
                 </a:solidFill>
                 <a:latin typeface="Consolas"/>
               </a:rPr>
-              <a:t>for quarter q in walk_forward(2021-01 .. 2022-12):</a:t>
+              <a:t># bank: one small MLP per timestep for the position-free continuation</a:t>
             </a:r>
           </a:p>
           <a:p>
@@ -25726,13 +25562,13 @@
               </a:spcAft>
             </a:pPr>
             <a:r>
-              <a:rPr sz="1150">
+              <a:rPr sz="1100">
                 <a:solidFill>
                   <a:srgbClr val="22262A"/>
                 </a:solidFill>
                 <a:latin typeface="Consolas"/>
               </a:rPr>
-              <a:t>    hist   = archive[: q.calibration_date]            # strictly no lookahead</a:t>
+              <a:t>nets = [MLP(in=market_dim+1, hidden=32, out=1) for t in range(T)]   # ~1.4k params each</a:t>
             </a:r>
           </a:p>
           <a:p>
@@ -25748,13 +25584,13 @@
               </a:spcAft>
             </a:pPr>
             <a:r>
-              <a:rPr sz="1150">
+              <a:rPr sz="1100">
                 <a:solidFill>
                   <a:srgbClr val="22262A"/>
                 </a:solidFill>
                 <a:latin typeface="Consolas"/>
               </a:rPr>
-              <a:t>    world  = calibrate(hist)                          # HMM spot P + AR(1) basis b</a:t>
+              <a:t>c    = deal_scale                                                  # utility normaliser</a:t>
             </a:r>
           </a:p>
           <a:p>
@@ -25770,13 +25606,13 @@
               </a:spcAft>
             </a:pPr>
             <a:r>
-              <a:rPr sz="1150">
+              <a:rPr sz="1100">
                 <a:solidFill>
                   <a:srgbClr val="22262A"/>
                 </a:solidFill>
                 <a:latin typeface="Consolas"/>
               </a:rPr>
-              <a:t>    assert abs(E[dF | b]) small on every tradeable    # martingale guard, else REJECT</a:t>
+              <a:t> </a:t>
             </a:r>
           </a:p>
           <a:p>
@@ -25792,13 +25628,13 @@
               </a:spcAft>
             </a:pPr>
             <a:r>
-              <a:rPr sz="1150">
+              <a:rPr sz="1100">
                 <a:solidFill>
                   <a:srgbClr val="22262A"/>
                 </a:solidFill>
                 <a:latin typeface="Consolas"/>
               </a:rPr>
-              <a:t>    policy = DiffSolverV2.solve(world, aversion=6)     # train in the simulated world</a:t>
+              <a:t>def u(W):                              # asymmetric Huber (a=6, d=1), in c-units</a:t>
             </a:r>
           </a:p>
           <a:p>
@@ -25814,13 +25650,13 @@
               </a:spcAft>
             </a:pPr>
             <a:r>
-              <a:rPr sz="1150">
+              <a:rPr sz="1100">
                 <a:solidFill>
                   <a:srgbClr val="22262A"/>
                 </a:solidFill>
                 <a:latin typeface="Consolas"/>
               </a:rPr>
-              <a:t>    freeze(policy)</a:t>
+              <a:t>    x = W / c;  loss = relu(-x)</a:t>
             </a:r>
           </a:p>
           <a:p>
@@ -25836,13 +25672,13 @@
               </a:spcAft>
             </a:pPr>
             <a:r>
-              <a:rPr sz="1150">
+              <a:rPr sz="1100">
                 <a:solidFill>
                   <a:srgbClr val="22262A"/>
                 </a:solidFill>
                 <a:latin typeface="Consolas"/>
               </a:rPr>
-              <a:t> </a:t>
+              <a:t>    pen = where(loss&lt;=d,  a*loss**2,  a*d**2 + 2*a*d*(loss-d))</a:t>
             </a:r>
           </a:p>
           <a:p>
@@ -25858,13 +25694,13 @@
               </a:spcAft>
             </a:pPr>
             <a:r>
-              <a:rPr sz="1150">
+              <a:rPr sz="1100">
                 <a:solidFill>
                   <a:srgbClr val="22262A"/>
                 </a:solidFill>
                 <a:latin typeface="Consolas"/>
               </a:rPr>
-              <a:t>    for day in q.trading_days:                        # roll on the REALIZED path</a:t>
+              <a:t>    return x - pen</a:t>
             </a:r>
           </a:p>
           <a:p>
@@ -25880,13 +25716,13 @@
               </a:spcAft>
             </a:pPr>
             <a:r>
-              <a:rPr sz="1150">
+              <a:rPr sz="1100">
                 <a:solidFill>
                   <a:srgbClr val="22262A"/>
                 </a:solidFill>
                 <a:latin typeface="Consolas"/>
               </a:rPr>
-              <a:t>        m = realized_market[day]                      # strictly causal</a:t>
+              <a:t> </a:t>
             </a:r>
           </a:p>
           <a:p>
@@ -25902,13 +25738,13 @@
               </a:spcAft>
             </a:pPr>
             <a:r>
-              <a:rPr sz="1150">
-                <a:solidFill>
-                  <a:srgbClr val="22262A"/>
+              <a:rPr sz="1100">
+                <a:solidFill>
+                  <a:srgbClr val="1F77B4"/>
                 </a:solidFill>
                 <a:latin typeface="Consolas"/>
               </a:rPr>
-              <a:t>        a = policy.decide(m, stepper.wealth)          # off the stepper's OWN wealth</a:t>
+              <a:t># backward sweep: fit C_t = u(W) + A_t via the Huge-Savine twin loss</a:t>
             </a:r>
           </a:p>
           <a:p>
@@ -25924,13 +25760,13 @@
               </a:spcAft>
             </a:pPr>
             <a:r>
-              <a:rPr sz="1150">
+              <a:rPr sz="1100">
                 <a:solidFill>
                   <a:srgbClr val="22262A"/>
                 </a:solidFill>
                 <a:latin typeface="Consolas"/>
               </a:rPr>
-              <a:t>        stepper.step(a)                               # var margin, financing, expiry, forced-flat</a:t>
+              <a:t>for t in reversed(range(T)):</a:t>
             </a:r>
           </a:p>
           <a:p>
@@ -25946,13 +25782,13 @@
               </a:spcAft>
             </a:pPr>
             <a:r>
-              <a:rPr sz="1150">
+              <a:rPr sz="1100">
                 <a:solidFill>
                   <a:srgbClr val="22262A"/>
                 </a:solidFill>
                 <a:latin typeface="Consolas"/>
               </a:rPr>
-              <a:t> </a:t>
+              <a:t>    S, W, q_prev = sample_states(t)                        # outer draws</a:t>
             </a:r>
           </a:p>
           <a:p>
@@ -25968,13 +25804,13 @@
               </a:spcAft>
             </a:pPr>
             <a:r>
-              <a:rPr sz="1150">
+              <a:rPr sz="1100">
                 <a:solidFill>
                   <a:srgbClr val="22262A"/>
                 </a:solidFill>
                 <a:latin typeface="Consolas"/>
               </a:rPr>
-              <a:t>    row = record(greedy, nohedge, pf_bound, bound_pass)   # per-trade causal ceiling stamped</a:t>
+              <a:t>    grid = action_grid(q_prev, cap=50, short_only=True)    # mask-aware, cap-pruned</a:t>
             </a:r>
           </a:p>
           <a:p>
@@ -25990,13 +25826,189 @@
               </a:spcAft>
             </a:pPr>
             <a:r>
-              <a:rPr sz="1150">
+              <a:rPr sz="1100">
                 <a:solidFill>
                   <a:srgbClr val="22262A"/>
                 </a:solidFill>
                 <a:latin typeface="Consolas"/>
               </a:rPr>
-              <a:t>    assert row.greedy &lt;= row.pf_bound                     # falsification check on every trade</a:t>
+              <a:t>    q*   = argmax_a  E_inner[ C_{t+1}(f(S,eps), W + pnl(S,eps,a)) ]   # Bellman max OUTSIDE net</a:t>
+            </a:r>
+          </a:p>
+          <a:p>
+            <a:pPr>
+              <a:lnSpc>
+                <a:spcPct val="100000"/>
+              </a:lnSpc>
+              <a:spcBef>
+                <a:spcPts val="0"/>
+              </a:spcBef>
+              <a:spcAft>
+                <a:spcPts val="0"/>
+              </a:spcAft>
+            </a:pPr>
+            <a:r>
+              <a:rPr sz="1100">
+                <a:solidFill>
+                  <a:srgbClr val="1F77B4"/>
+                </a:solidFill>
+                <a:latin typeface="Consolas"/>
+              </a:rPr>
+              <a:t>    #      inner expectation via ONE-STEP antithetic MC forks (bootstrap label)</a:t>
+            </a:r>
+          </a:p>
+          <a:p>
+            <a:pPr>
+              <a:lnSpc>
+                <a:spcPct val="100000"/>
+              </a:lnSpc>
+              <a:spcBef>
+                <a:spcPts val="0"/>
+              </a:spcBef>
+              <a:spcAft>
+                <a:spcPts val="0"/>
+              </a:spcAft>
+            </a:pPr>
+            <a:r>
+              <a:rPr sz="1100">
+                <a:solidFill>
+                  <a:srgbClr val="22262A"/>
+                </a:solidFill>
+                <a:latin typeface="Consolas"/>
+              </a:rPr>
+              <a:t>    y, dy = bootstrap_value_and_pathwise_grad(t, S, W, q*)  # value + AAD Jacobian</a:t>
+            </a:r>
+          </a:p>
+          <a:p>
+            <a:pPr>
+              <a:lnSpc>
+                <a:spcPct val="100000"/>
+              </a:lnSpc>
+              <a:spcBef>
+                <a:spcPts val="0"/>
+              </a:spcBef>
+              <a:spcAft>
+                <a:spcPts val="0"/>
+              </a:spcAft>
+            </a:pPr>
+            <a:r>
+              <a:rPr sz="1100">
+                <a:solidFill>
+                  <a:srgbClr val="22262A"/>
+                </a:solidFill>
+                <a:latin typeface="Consolas"/>
+              </a:rPr>
+              <a:t>    A_t   = fit(nets[t], value=y - u(W), grad=dy)           # twin loss, per-column normalised</a:t>
+            </a:r>
+          </a:p>
+          <a:p>
+            <a:pPr>
+              <a:lnSpc>
+                <a:spcPct val="100000"/>
+              </a:lnSpc>
+              <a:spcBef>
+                <a:spcPts val="0"/>
+              </a:spcBef>
+              <a:spcAft>
+                <a:spcPts val="0"/>
+              </a:spcAft>
+            </a:pPr>
+            <a:r>
+              <a:rPr sz="1100">
+                <a:solidFill>
+                  <a:srgbClr val="22262A"/>
+                </a:solidFill>
+                <a:latin typeface="Consolas"/>
+              </a:rPr>
+              <a:t>    clamp A_t to trust region [a_lo, a_hi]                  # kill off-support extrapolation</a:t>
+            </a:r>
+          </a:p>
+          <a:p>
+            <a:pPr>
+              <a:lnSpc>
+                <a:spcPct val="100000"/>
+              </a:lnSpc>
+              <a:spcBef>
+                <a:spcPts val="0"/>
+              </a:spcBef>
+              <a:spcAft>
+                <a:spcPts val="0"/>
+              </a:spcAft>
+            </a:pPr>
+            <a:r>
+              <a:rPr sz="1100">
+                <a:solidFill>
+                  <a:srgbClr val="22262A"/>
+                </a:solidFill>
+                <a:latin typeface="Consolas"/>
+              </a:rPr>
+              <a:t> </a:t>
+            </a:r>
+          </a:p>
+          <a:p>
+            <a:pPr>
+              <a:lnSpc>
+                <a:spcPct val="100000"/>
+              </a:lnSpc>
+              <a:spcBef>
+                <a:spcPts val="0"/>
+              </a:spcBef>
+              <a:spcAft>
+                <a:spcPts val="0"/>
+              </a:spcAft>
+            </a:pPr>
+            <a:r>
+              <a:rPr sz="1100">
+                <a:solidFill>
+                  <a:srgbClr val="1F77B4"/>
+                </a:solidFill>
+                <a:latin typeface="Consolas"/>
+              </a:rPr>
+              <a:t># verdict on a held-out split, then hand back a deployable policy</a:t>
+            </a:r>
+          </a:p>
+          <a:p>
+            <a:pPr>
+              <a:lnSpc>
+                <a:spcPct val="100000"/>
+              </a:lnSpc>
+              <a:spcBef>
+                <a:spcPts val="0"/>
+              </a:spcBef>
+              <a:spcAft>
+                <a:spcPts val="0"/>
+              </a:spcAft>
+            </a:pPr>
+            <a:r>
+              <a:rPr sz="1100">
+                <a:solidFill>
+                  <a:srgbClr val="22262A"/>
+                </a:solidFill>
+                <a:latin typeface="Consolas"/>
+              </a:rPr>
+              <a:t>assert ladder(hindsight &gt;= greedy &gt;= textbook)</a:t>
+            </a:r>
+          </a:p>
+          <a:p>
+            <a:pPr>
+              <a:lnSpc>
+                <a:spcPct val="100000"/>
+              </a:lnSpc>
+              <a:spcBef>
+                <a:spcPts val="0"/>
+              </a:spcBef>
+              <a:spcAft>
+                <a:spcPts val="0"/>
+              </a:spcAft>
+            </a:pPr>
+            <a:r>
+              <a:rPr sz="1100">
+                <a:solidFill>
+                  <a:srgbClr val="22262A"/>
+                </a:solidFill>
+                <a:latin typeface="Consolas"/>
+              </a:rPr>
+              <a:t>return policy_artifact(nets, standardization_frames, utility_scale, config_hash)</a:t>
             </a:r>
           </a:p>
         </p:txBody>
@@ -26041,7 +26053,7 @@
                 </a:solidFill>
                 <a:latin typeface="Calibri"/>
               </a:rPr>
-              <a:t>production_walk_forward.py · calibrate_platinum.py. Seed 7, single seed per trade.</a:t>
+              <a:t>diffsolver_v2.py · hedge_solver.py · utility exactly hedge_bundle._utility_wrap_signed (a=Huber_Aversion, d=Huber_Delta).</a:t>
             </a:r>
           </a:p>
         </p:txBody>
@@ -26863,7 +26875,7 @@
                 </a:solidFill>
                 <a:latin typeface="Calibri"/>
               </a:rPr>
-              <a:t>QUANT APPENDIX  ·  4 OF 4</a:t>
+              <a:t>QUANT APPENDIX  ·  3 OF 4</a:t>
             </a:r>
           </a:p>
         </p:txBody>
@@ -26908,7 +26920,7 @@
                 </a:solidFill>
                 <a:latin typeface="Calibri"/>
               </a:rPr>
-              <a:t>Appendix — reproducibility manifest</a:t>
+              <a:t>Appendix — calibration → backtest pipeline</a:t>
             </a:r>
           </a:p>
         </p:txBody>
@@ -27004,6 +27016,607 @@
       </p:sp>
       <p:sp>
         <p:nvSpPr>
+          <p:cNvPr id="6" name="Rectangle 5"/>
+          <p:cNvSpPr/>
+          <p:nvPr/>
+        </p:nvSpPr>
+        <p:spPr>
+          <a:xfrm>
+            <a:off x="566928" y="1737360"/>
+            <a:ext cx="11055096" cy="4023360"/>
+          </a:xfrm>
+          <a:prstGeom prst="rect">
+            <a:avLst/>
+          </a:prstGeom>
+          <a:solidFill>
+            <a:srgbClr val="F6F7F9"/>
+          </a:solidFill>
+          <a:ln w="9525">
+            <a:solidFill>
+              <a:srgbClr val="D9DDE1"/>
+            </a:solidFill>
+          </a:ln>
+          <a:effectLst/>
+        </p:spPr>
+        <p:style>
+          <a:lnRef idx="1">
+            <a:schemeClr val="accent1"/>
+          </a:lnRef>
+          <a:fillRef idx="3">
+            <a:schemeClr val="accent1"/>
+          </a:fillRef>
+          <a:effectRef idx="2">
+            <a:schemeClr val="accent1"/>
+          </a:effectRef>
+          <a:fontRef idx="minor">
+            <a:schemeClr val="lt1"/>
+          </a:fontRef>
+        </p:style>
+        <p:txBody>
+          <a:bodyPr rtlCol="0" anchor="ctr" wrap="none" lIns="127000" rIns="76200" tIns="88900" bIns="76200"/>
+          <a:lstStyle/>
+          <a:p>
+            <a:pPr algn="ctr">
+              <a:lnSpc>
+                <a:spcPct val="100000"/>
+              </a:lnSpc>
+              <a:spcBef>
+                <a:spcPts val="0"/>
+              </a:spcBef>
+              <a:spcAft>
+                <a:spcPts val="0"/>
+              </a:spcAft>
+            </a:pPr>
+            <a:r>
+              <a:rPr sz="1150">
+                <a:solidFill>
+                  <a:srgbClr val="22262A"/>
+                </a:solidFill>
+                <a:latin typeface="Consolas"/>
+              </a:rPr>
+              <a:t>for quarter q in walk_forward(2021-01 .. 2022-12):</a:t>
+            </a:r>
+          </a:p>
+          <a:p>
+            <a:pPr>
+              <a:lnSpc>
+                <a:spcPct val="100000"/>
+              </a:lnSpc>
+              <a:spcBef>
+                <a:spcPts val="0"/>
+              </a:spcBef>
+              <a:spcAft>
+                <a:spcPts val="0"/>
+              </a:spcAft>
+            </a:pPr>
+            <a:r>
+              <a:rPr sz="1150">
+                <a:solidFill>
+                  <a:srgbClr val="22262A"/>
+                </a:solidFill>
+                <a:latin typeface="Consolas"/>
+              </a:rPr>
+              <a:t>    hist   = archive[: q.calibration_date]            # strictly no lookahead</a:t>
+            </a:r>
+          </a:p>
+          <a:p>
+            <a:pPr>
+              <a:lnSpc>
+                <a:spcPct val="100000"/>
+              </a:lnSpc>
+              <a:spcBef>
+                <a:spcPts val="0"/>
+              </a:spcBef>
+              <a:spcAft>
+                <a:spcPts val="0"/>
+              </a:spcAft>
+            </a:pPr>
+            <a:r>
+              <a:rPr sz="1150">
+                <a:solidFill>
+                  <a:srgbClr val="22262A"/>
+                </a:solidFill>
+                <a:latin typeface="Consolas"/>
+              </a:rPr>
+              <a:t>    world  = calibrate(hist)                          # HMM spot P + AR(1) basis b</a:t>
+            </a:r>
+          </a:p>
+          <a:p>
+            <a:pPr>
+              <a:lnSpc>
+                <a:spcPct val="100000"/>
+              </a:lnSpc>
+              <a:spcBef>
+                <a:spcPts val="0"/>
+              </a:spcBef>
+              <a:spcAft>
+                <a:spcPts val="0"/>
+              </a:spcAft>
+            </a:pPr>
+            <a:r>
+              <a:rPr sz="1150">
+                <a:solidFill>
+                  <a:srgbClr val="22262A"/>
+                </a:solidFill>
+                <a:latin typeface="Consolas"/>
+              </a:rPr>
+              <a:t>    assert abs(E[dF | b]) small on every tradeable    # martingale guard, else REJECT</a:t>
+            </a:r>
+          </a:p>
+          <a:p>
+            <a:pPr>
+              <a:lnSpc>
+                <a:spcPct val="100000"/>
+              </a:lnSpc>
+              <a:spcBef>
+                <a:spcPts val="0"/>
+              </a:spcBef>
+              <a:spcAft>
+                <a:spcPts val="0"/>
+              </a:spcAft>
+            </a:pPr>
+            <a:r>
+              <a:rPr sz="1150">
+                <a:solidFill>
+                  <a:srgbClr val="22262A"/>
+                </a:solidFill>
+                <a:latin typeface="Consolas"/>
+              </a:rPr>
+              <a:t>    policy = DiffSolverV2.solve(world, aversion=6)     # train in the simulated world</a:t>
+            </a:r>
+          </a:p>
+          <a:p>
+            <a:pPr>
+              <a:lnSpc>
+                <a:spcPct val="100000"/>
+              </a:lnSpc>
+              <a:spcBef>
+                <a:spcPts val="0"/>
+              </a:spcBef>
+              <a:spcAft>
+                <a:spcPts val="0"/>
+              </a:spcAft>
+            </a:pPr>
+            <a:r>
+              <a:rPr sz="1150">
+                <a:solidFill>
+                  <a:srgbClr val="22262A"/>
+                </a:solidFill>
+                <a:latin typeface="Consolas"/>
+              </a:rPr>
+              <a:t>    freeze(policy)</a:t>
+            </a:r>
+          </a:p>
+          <a:p>
+            <a:pPr>
+              <a:lnSpc>
+                <a:spcPct val="100000"/>
+              </a:lnSpc>
+              <a:spcBef>
+                <a:spcPts val="0"/>
+              </a:spcBef>
+              <a:spcAft>
+                <a:spcPts val="0"/>
+              </a:spcAft>
+            </a:pPr>
+            <a:r>
+              <a:rPr sz="1150">
+                <a:solidFill>
+                  <a:srgbClr val="22262A"/>
+                </a:solidFill>
+                <a:latin typeface="Consolas"/>
+              </a:rPr>
+              <a:t> </a:t>
+            </a:r>
+          </a:p>
+          <a:p>
+            <a:pPr>
+              <a:lnSpc>
+                <a:spcPct val="100000"/>
+              </a:lnSpc>
+              <a:spcBef>
+                <a:spcPts val="0"/>
+              </a:spcBef>
+              <a:spcAft>
+                <a:spcPts val="0"/>
+              </a:spcAft>
+            </a:pPr>
+            <a:r>
+              <a:rPr sz="1150">
+                <a:solidFill>
+                  <a:srgbClr val="22262A"/>
+                </a:solidFill>
+                <a:latin typeface="Consolas"/>
+              </a:rPr>
+              <a:t>    for day in q.trading_days:                        # roll on the REALIZED path</a:t>
+            </a:r>
+          </a:p>
+          <a:p>
+            <a:pPr>
+              <a:lnSpc>
+                <a:spcPct val="100000"/>
+              </a:lnSpc>
+              <a:spcBef>
+                <a:spcPts val="0"/>
+              </a:spcBef>
+              <a:spcAft>
+                <a:spcPts val="0"/>
+              </a:spcAft>
+            </a:pPr>
+            <a:r>
+              <a:rPr sz="1150">
+                <a:solidFill>
+                  <a:srgbClr val="22262A"/>
+                </a:solidFill>
+                <a:latin typeface="Consolas"/>
+              </a:rPr>
+              <a:t>        m = realized_market[day]                      # strictly causal</a:t>
+            </a:r>
+          </a:p>
+          <a:p>
+            <a:pPr>
+              <a:lnSpc>
+                <a:spcPct val="100000"/>
+              </a:lnSpc>
+              <a:spcBef>
+                <a:spcPts val="0"/>
+              </a:spcBef>
+              <a:spcAft>
+                <a:spcPts val="0"/>
+              </a:spcAft>
+            </a:pPr>
+            <a:r>
+              <a:rPr sz="1150">
+                <a:solidFill>
+                  <a:srgbClr val="22262A"/>
+                </a:solidFill>
+                <a:latin typeface="Consolas"/>
+              </a:rPr>
+              <a:t>        a = policy.decide(m, stepper.wealth)          # off the stepper's OWN wealth</a:t>
+            </a:r>
+          </a:p>
+          <a:p>
+            <a:pPr>
+              <a:lnSpc>
+                <a:spcPct val="100000"/>
+              </a:lnSpc>
+              <a:spcBef>
+                <a:spcPts val="0"/>
+              </a:spcBef>
+              <a:spcAft>
+                <a:spcPts val="0"/>
+              </a:spcAft>
+            </a:pPr>
+            <a:r>
+              <a:rPr sz="1150">
+                <a:solidFill>
+                  <a:srgbClr val="22262A"/>
+                </a:solidFill>
+                <a:latin typeface="Consolas"/>
+              </a:rPr>
+              <a:t>        stepper.step(a)                               # var margin, financing, expiry, forced-flat</a:t>
+            </a:r>
+          </a:p>
+          <a:p>
+            <a:pPr>
+              <a:lnSpc>
+                <a:spcPct val="100000"/>
+              </a:lnSpc>
+              <a:spcBef>
+                <a:spcPts val="0"/>
+              </a:spcBef>
+              <a:spcAft>
+                <a:spcPts val="0"/>
+              </a:spcAft>
+            </a:pPr>
+            <a:r>
+              <a:rPr sz="1150">
+                <a:solidFill>
+                  <a:srgbClr val="22262A"/>
+                </a:solidFill>
+                <a:latin typeface="Consolas"/>
+              </a:rPr>
+              <a:t> </a:t>
+            </a:r>
+          </a:p>
+          <a:p>
+            <a:pPr>
+              <a:lnSpc>
+                <a:spcPct val="100000"/>
+              </a:lnSpc>
+              <a:spcBef>
+                <a:spcPts val="0"/>
+              </a:spcBef>
+              <a:spcAft>
+                <a:spcPts val="0"/>
+              </a:spcAft>
+            </a:pPr>
+            <a:r>
+              <a:rPr sz="1150">
+                <a:solidFill>
+                  <a:srgbClr val="22262A"/>
+                </a:solidFill>
+                <a:latin typeface="Consolas"/>
+              </a:rPr>
+              <a:t>    row = record(greedy, nohedge, pf_bound, bound_pass)   # per-trade causal ceiling stamped</a:t>
+            </a:r>
+          </a:p>
+          <a:p>
+            <a:pPr>
+              <a:lnSpc>
+                <a:spcPct val="100000"/>
+              </a:lnSpc>
+              <a:spcBef>
+                <a:spcPts val="0"/>
+              </a:spcBef>
+              <a:spcAft>
+                <a:spcPts val="0"/>
+              </a:spcAft>
+            </a:pPr>
+            <a:r>
+              <a:rPr sz="1150">
+                <a:solidFill>
+                  <a:srgbClr val="22262A"/>
+                </a:solidFill>
+                <a:latin typeface="Consolas"/>
+              </a:rPr>
+              <a:t>    assert row.greedy &lt;= row.pf_bound                     # falsification check on every trade</a:t>
+            </a:r>
+          </a:p>
+        </p:txBody>
+      </p:sp>
+      <p:sp>
+        <p:nvSpPr>
+          <p:cNvPr id="7" name="TextBox 6"/>
+          <p:cNvSpPr txBox="1"/>
+          <p:nvPr/>
+        </p:nvSpPr>
+        <p:spPr>
+          <a:xfrm>
+            <a:off x="566928" y="6473952"/>
+            <a:ext cx="11055096" cy="274320"/>
+          </a:xfrm>
+          <a:prstGeom prst="rect">
+            <a:avLst/>
+          </a:prstGeom>
+          <a:noFill/>
+        </p:spPr>
+        <p:txBody>
+          <a:bodyPr wrap="square" anchor="t" lIns="25400" rIns="25400" tIns="12700" bIns="12700">
+            <a:spAutoFit/>
+          </a:bodyPr>
+          <a:lstStyle/>
+          <a:p>
+            <a:pPr algn="l">
+              <a:lnSpc>
+                <a:spcPct val="100000"/>
+              </a:lnSpc>
+              <a:spcBef>
+                <a:spcPts val="0"/>
+              </a:spcBef>
+              <a:spcAft>
+                <a:spcPts val="400"/>
+              </a:spcAft>
+            </a:pPr>
+            <a:r>
+              <a:rPr sz="950" b="0" i="1">
+                <a:solidFill>
+                  <a:srgbClr val="6B7278"/>
+                </a:solidFill>
+                <a:latin typeface="Calibri"/>
+              </a:rPr>
+              <a:t>production_walk_forward.py · calibrate_platinum.py. Seed 7, single seed per trade.</a:t>
+            </a:r>
+          </a:p>
+        </p:txBody>
+      </p:sp>
+    </p:spTree>
+  </p:cSld>
+  <p:clrMapOvr>
+    <a:masterClrMapping/>
+  </p:clrMapOvr>
+</p:sld>
+</file>
+
+<file path=ppt/slides/slide41.xml><?xml version="1.0" encoding="utf-8"?>
+<p:sld xmlns:a="http://schemas.openxmlformats.org/drawingml/2006/main" xmlns:p="http://schemas.openxmlformats.org/presentationml/2006/main" xmlns:r="http://schemas.openxmlformats.org/officeDocument/2006/relationships">
+  <p:cSld>
+    <p:bg>
+      <p:bgPr>
+        <a:solidFill>
+          <a:srgbClr val="FFFFFF"/>
+        </a:solidFill>
+        <a:effectLst/>
+      </p:bgPr>
+    </p:bg>
+    <p:spTree>
+      <p:nvGrpSpPr>
+        <p:cNvPr id="1" name=""/>
+        <p:cNvGrpSpPr/>
+        <p:nvPr/>
+      </p:nvGrpSpPr>
+      <p:grpSpPr/>
+      <p:sp>
+        <p:nvSpPr>
+          <p:cNvPr id="2" name="TextBox 1"/>
+          <p:cNvSpPr txBox="1"/>
+          <p:nvPr/>
+        </p:nvSpPr>
+        <p:spPr>
+          <a:xfrm>
+            <a:off x="566928" y="274320"/>
+            <a:ext cx="11055096" cy="274320"/>
+          </a:xfrm>
+          <a:prstGeom prst="rect">
+            <a:avLst/>
+          </a:prstGeom>
+          <a:noFill/>
+        </p:spPr>
+        <p:txBody>
+          <a:bodyPr wrap="square" anchor="t" lIns="25400" rIns="25400" tIns="12700" bIns="12700">
+            <a:spAutoFit/>
+          </a:bodyPr>
+          <a:lstStyle/>
+          <a:p>
+            <a:pPr algn="l">
+              <a:lnSpc>
+                <a:spcPct val="100000"/>
+              </a:lnSpc>
+              <a:spcBef>
+                <a:spcPts val="0"/>
+              </a:spcBef>
+              <a:spcAft>
+                <a:spcPts val="400"/>
+              </a:spcAft>
+            </a:pPr>
+            <a:r>
+              <a:rPr sz="1250" b="1" i="0">
+                <a:solidFill>
+                  <a:srgbClr val="1F77B4"/>
+                </a:solidFill>
+                <a:latin typeface="Calibri"/>
+              </a:rPr>
+              <a:t>QUANT APPENDIX  ·  4 OF 4</a:t>
+            </a:r>
+          </a:p>
+        </p:txBody>
+      </p:sp>
+      <p:sp>
+        <p:nvSpPr>
+          <p:cNvPr id="3" name="TextBox 2"/>
+          <p:cNvSpPr txBox="1"/>
+          <p:nvPr/>
+        </p:nvSpPr>
+        <p:spPr>
+          <a:xfrm>
+            <a:off x="566928" y="530352"/>
+            <a:ext cx="11055096" cy="822960"/>
+          </a:xfrm>
+          <a:prstGeom prst="rect">
+            <a:avLst/>
+          </a:prstGeom>
+          <a:noFill/>
+        </p:spPr>
+        <p:txBody>
+          <a:bodyPr wrap="square" anchor="t" lIns="25400" rIns="25400" tIns="12700" bIns="12700">
+            <a:spAutoFit/>
+          </a:bodyPr>
+          <a:lstStyle/>
+          <a:p>
+            <a:pPr algn="l">
+              <a:lnSpc>
+                <a:spcPct val="100000"/>
+              </a:lnSpc>
+              <a:spcBef>
+                <a:spcPts val="0"/>
+              </a:spcBef>
+              <a:spcAft>
+                <a:spcPts val="400"/>
+              </a:spcAft>
+            </a:pPr>
+            <a:r>
+              <a:rPr sz="2700" b="1" i="0">
+                <a:solidFill>
+                  <a:srgbClr val="22262A"/>
+                </a:solidFill>
+                <a:latin typeface="Calibri"/>
+              </a:rPr>
+              <a:t>Appendix — reproducibility manifest</a:t>
+            </a:r>
+          </a:p>
+        </p:txBody>
+      </p:sp>
+      <p:sp>
+        <p:nvSpPr>
+          <p:cNvPr id="4" name="Rectangle 3"/>
+          <p:cNvSpPr/>
+          <p:nvPr/>
+        </p:nvSpPr>
+        <p:spPr>
+          <a:xfrm>
+            <a:off x="566928" y="1298448"/>
+            <a:ext cx="11055096" cy="27940"/>
+          </a:xfrm>
+          <a:prstGeom prst="rect">
+            <a:avLst/>
+          </a:prstGeom>
+          <a:solidFill>
+            <a:srgbClr val="1F77B4"/>
+          </a:solidFill>
+          <a:ln>
+            <a:noFill/>
+          </a:ln>
+          <a:effectLst/>
+        </p:spPr>
+        <p:style>
+          <a:lnRef idx="1">
+            <a:schemeClr val="accent1"/>
+          </a:lnRef>
+          <a:fillRef idx="3">
+            <a:schemeClr val="accent1"/>
+          </a:fillRef>
+          <a:effectRef idx="2">
+            <a:schemeClr val="accent1"/>
+          </a:effectRef>
+          <a:fontRef idx="minor">
+            <a:schemeClr val="lt1"/>
+          </a:fontRef>
+        </p:style>
+        <p:txBody>
+          <a:bodyPr rtlCol="0" anchor="ctr"/>
+          <a:lstStyle/>
+          <a:p>
+            <a:pPr algn="ctr"/>
+          </a:p>
+        </p:txBody>
+      </p:sp>
+      <p:sp>
+        <p:nvSpPr>
+          <p:cNvPr id="5" name="TextBox 4"/>
+          <p:cNvSpPr txBox="1"/>
+          <p:nvPr/>
+        </p:nvSpPr>
+        <p:spPr>
+          <a:xfrm>
+            <a:off x="11612880" y="6455664"/>
+            <a:ext cx="457200" cy="274320"/>
+          </a:xfrm>
+          <a:prstGeom prst="rect">
+            <a:avLst/>
+          </a:prstGeom>
+          <a:noFill/>
+        </p:spPr>
+        <p:txBody>
+          <a:bodyPr wrap="square" anchor="t" lIns="25400" rIns="25400" tIns="12700" bIns="12700">
+            <a:spAutoFit/>
+          </a:bodyPr>
+          <a:lstStyle/>
+          <a:p>
+            <a:pPr algn="r">
+              <a:lnSpc>
+                <a:spcPct val="100000"/>
+              </a:lnSpc>
+              <a:spcBef>
+                <a:spcPts val="0"/>
+              </a:spcBef>
+              <a:spcAft>
+                <a:spcPts val="400"/>
+              </a:spcAft>
+            </a:pPr>
+            <a:r>
+              <a:rPr sz="1000" b="0" i="0">
+                <a:solidFill>
+                  <a:srgbClr val="6B7278"/>
+                </a:solidFill>
+                <a:latin typeface="Calibri"/>
+              </a:rPr>
+              <a:t>41</a:t>
+            </a:r>
+          </a:p>
+        </p:txBody>
+      </p:sp>
+      <p:sp>
+        <p:nvSpPr>
           <p:cNvPr id="6" name="TextBox 5"/>
           <p:cNvSpPr txBox="1"/>
           <p:nvPr/>
@@ -27087,7 +27700,7 @@
                 </a:solidFill>
                 <a:latin typeface="Calibri"/>
               </a:rPr>
-              <a:t>101 tests collected · commits verified in git log · all $/oz stats recomputed from the CSVs above.</a:t>
+              <a:t>349 tests collected · commits verified in git log · all $/oz stats recomputed from the CSVs above.</a:t>
             </a:r>
           </a:p>
         </p:txBody>
@@ -27389,7 +28002,7 @@
                           </a:solidFill>
                           <a:latin typeface="Calibri"/>
                         </a:rPr>
-                        <a:t>lf2_forensics.csv</a:t>
+                        <a:t>lf2_forensics.csv · underhedge_probes.csv (34-probe under-hedge diagnosis, c6c7706)</a:t>
                       </a:r>
                     </a:p>
                   </a:txBody>
@@ -27581,7 +28194,7 @@
                           </a:solidFill>
                           <a:latin typeface="Calibri"/>
                         </a:rPr>
-                        <a:t>101 tests  (bit-gates: fixture V_0, stepper floats, corridor L1 = 0, HMM↔GARCH interchange)</a:t>
+                        <a:t>349 tests  (bit-gates: fixture V_0, stepper floats, corridor L1 = 0, HMM↔GARCH interchange)</a:t>
                       </a:r>
                     </a:p>
                   </a:txBody>
@@ -27629,7 +28242,7 @@
                           </a:solidFill>
                           <a:latin typeface="Calibri"/>
                         </a:rPr>
-                        <a:t>c87284d · f8c067b · 5460692 · 74ef6de · c52411d · 11ef68d · 5e61ae5 · 3073bf0</a:t>
+                        <a:t>c87284d · f8c067b · 5460692 · 74ef6de · c52411d · 11ef68d · 5e61ae5 · 3073bf0 · post-review: 8483956 · c23d4aa · 5e4e041 · 4f08450 · 14c9374 · c6c7706 · d542ae9</a:t>
                       </a:r>
                     </a:p>
                   </a:txBody>
@@ -27821,7 +28434,7 @@
                           </a:solidFill>
                           <a:latin typeface="Calibri"/>
                         </a:rPr>
-                        <a:t>garch48_corridor_rolls.csv · corridor_band_frontier.csv · net_of_cost_frontier.csv · cost_model_realistic.json  (bands 0.15–0.60; base / high cost)</a:t>
+                        <a:t>garch48_corridor_rolls.csv · corridor_band_frontier.csv · net_of_cost_frontier.csv · cost_model_realistic.json  (bands 0.15–0.60; base / high cost) · driftless_subset_paired.csv (price-martingale verdict)</a:t>
                       </a:r>
                     </a:p>
                   </a:txBody>

--- a/artifacts/platinum_hedge_management_deck.pptx
+++ b/artifacts/platinum_hedge_management_deck.pptx
@@ -21328,16 +21328,7 @@
                 </a:solidFill>
                 <a:latin typeface="Calibri"/>
               </a:rPr>
-              <a:t>OPEN MANAGEMENT DECISION — not yet made:  </a:t>
-            </a:r>
-            <a:r>
-              <a:rPr sz="1150">
-                <a:solidFill>
-                  <a:srgbClr val="2B3A42"/>
-                </a:solidFill>
-                <a:latin typeface="Calibri"/>
-              </a:rPr>
-              <a:t>aversion within the current utility is exhausted (≤ +0.06), so only a structural change — Option A or B — closes the tail. The driftless-fix world is P&amp;L-neutral, so no walk-forward number restates.</a:t>
+              <a:t>DECISION — Option A ADOPTED: the roll-time band 0.15 becomes the mandate. Aversion within the current utility is exhausted (≤ +0.06), so only a structural change closes the tail; Option B (min-variance objective) stays a research track. Remaining data check before the operating point is locked: intraday marks near the 14:00 LBMA publishing window, to establish whether the basis drops at the fixing.</a:t>
             </a:r>
           </a:p>
         </p:txBody>
@@ -24039,7 +24030,7 @@
                 </a:solidFill>
                 <a:latin typeface="Calibri"/>
               </a:rPr>
-              <a:t>The corridor ships as a risk control today; the hard guard remains a sign-off item. Fence-as-mandate (0.15) vs a min-variance objective (slide 31) is an open management decision.</a:t>
+              <a:t>The corridor ships as a risk control today; the hard guard remains a sign-off item. DECIDED: fence-as-mandate at band 0.15 (slide 31); final lock pending the 14:00-LBMA intraday basis check.</a:t>
             </a:r>
           </a:p>
         </p:txBody>
